--- a/docs/sensAI_報告.pptx
+++ b/docs/sensAI_報告.pptx
@@ -16,6 +16,7 @@
     <p:sldId id="264" r:id="rId15"/>
     <p:sldId id="265" r:id="rId16"/>
     <p:sldId id="266" r:id="rId17"/>
+    <p:sldId id="267" r:id="rId18"/>
   </p:sldIdLst>
   <p:sldSz cx="12191695" cy="6858000" type="screen4x3"/>
   <p:notesSz cx="6858000" cy="9144000"/>
@@ -4899,7 +4900,7 @@
                 </a:solidFill>
                 <a:latin typeface="微軟正黑體"/>
               </a:rPr>
-              <a:t>NEXT</a:t>
+              <a:t>MEASUREMENT</a:t>
             </a:r>
           </a:p>
         </p:txBody>
@@ -4941,7 +4942,7 @@
                 </a:solidFill>
                 <a:latin typeface="微軟正黑體"/>
               </a:rPr>
-              <a:t>下一步與所需支援</a:t>
+              <a:t>如何驗證效益：量採納率，不量準確率</a:t>
             </a:r>
           </a:p>
         </p:txBody>
@@ -5070,6 +5071,1417 @@
                 <a:latin typeface="微軟正黑體"/>
               </a:rPr>
               <a:t>11</a:t>
+            </a:r>
+          </a:p>
+        </p:txBody>
+      </p:sp>
+      <p:sp>
+        <p:nvSpPr>
+          <p:cNvPr id="8" name="TextBox 7"/>
+          <p:cNvSpPr txBox="1"/>
+          <p:nvPr/>
+        </p:nvSpPr>
+        <p:spPr>
+          <a:xfrm>
+            <a:off x="566928" y="1572768"/>
+            <a:ext cx="11064240" cy="365760"/>
+          </a:xfrm>
+          <a:prstGeom prst="rect">
+            <a:avLst/>
+          </a:prstGeom>
+          <a:noFill/>
+        </p:spPr>
+        <p:txBody>
+          <a:bodyPr wrap="square" lIns="0" rIns="0" tIns="0" bIns="0" anchor="t">
+            <a:spAutoFit/>
+          </a:bodyPr>
+          <a:lstStyle/>
+          <a:p>
+            <a:pPr algn="l">
+              <a:lnSpc>
+                <a:spcPct val="125000"/>
+              </a:lnSpc>
+              <a:spcBef>
+                <a:spcPts val="0"/>
+              </a:spcBef>
+              <a:spcAft>
+                <a:spcPts val="0"/>
+              </a:spcAft>
+            </a:pPr>
+            <a:r>
+              <a:rPr sz="1400" b="0">
+                <a:solidFill>
+                  <a:srgbClr val="1B2633"/>
+                </a:solidFill>
+                <a:latin typeface="微軟正黑體"/>
+              </a:rPr>
+              <a:t>「準確率」需要知道程式碼裡到底有幾個 bug —— 那個答案永遠不存在，任何宣稱的準確率都是自己跟自己比。改量使用者用行動投票的結果。</a:t>
+            </a:r>
+          </a:p>
+        </p:txBody>
+      </p:sp>
+      <p:sp>
+        <p:nvSpPr>
+          <p:cNvPr id="9" name="Rectangle 8"/>
+          <p:cNvSpPr/>
+          <p:nvPr/>
+        </p:nvSpPr>
+        <p:spPr>
+          <a:xfrm>
+            <a:off x="566928" y="2103120"/>
+            <a:ext cx="5376672" cy="3310128"/>
+          </a:xfrm>
+          <a:prstGeom prst="rect">
+            <a:avLst/>
+          </a:prstGeom>
+          <a:solidFill>
+            <a:srgbClr val="F2F5F8"/>
+          </a:solidFill>
+          <a:ln>
+            <a:noFill/>
+          </a:ln>
+          <a:effectLst/>
+        </p:spPr>
+        <p:style>
+          <a:lnRef idx="1">
+            <a:schemeClr val="accent1"/>
+          </a:lnRef>
+          <a:fillRef idx="3">
+            <a:schemeClr val="accent1"/>
+          </a:fillRef>
+          <a:effectRef idx="2">
+            <a:schemeClr val="accent1"/>
+          </a:effectRef>
+          <a:fontRef idx="minor">
+            <a:schemeClr val="lt1"/>
+          </a:fontRef>
+        </p:style>
+        <p:txBody>
+          <a:bodyPr rtlCol="0" anchor="ctr"/>
+          <a:lstStyle/>
+          <a:p>
+            <a:pPr algn="ctr"/>
+          </a:p>
+        </p:txBody>
+      </p:sp>
+      <p:sp>
+        <p:nvSpPr>
+          <p:cNvPr id="10" name="TextBox 9"/>
+          <p:cNvSpPr txBox="1"/>
+          <p:nvPr/>
+        </p:nvSpPr>
+        <p:spPr>
+          <a:xfrm>
+            <a:off x="841248" y="2286000"/>
+            <a:ext cx="4846320" cy="320040"/>
+          </a:xfrm>
+          <a:prstGeom prst="rect">
+            <a:avLst/>
+          </a:prstGeom>
+          <a:noFill/>
+        </p:spPr>
+        <p:txBody>
+          <a:bodyPr wrap="square" lIns="0" rIns="0" tIns="0" bIns="0" anchor="t">
+            <a:spAutoFit/>
+          </a:bodyPr>
+          <a:lstStyle/>
+          <a:p>
+            <a:pPr algn="l">
+              <a:spcBef>
+                <a:spcPts val="0"/>
+              </a:spcBef>
+              <a:spcAft>
+                <a:spcPts val="0"/>
+              </a:spcAft>
+            </a:pPr>
+            <a:r>
+              <a:rPr sz="1300" b="1">
+                <a:solidFill>
+                  <a:srgbClr val="119DA4"/>
+                </a:solidFill>
+                <a:latin typeface="微軟正黑體"/>
+              </a:rPr>
+              <a:t>北極星指標</a:t>
+            </a:r>
+          </a:p>
+        </p:txBody>
+      </p:sp>
+      <p:sp>
+        <p:nvSpPr>
+          <p:cNvPr id="11" name="Rectangle 10"/>
+          <p:cNvSpPr/>
+          <p:nvPr/>
+        </p:nvSpPr>
+        <p:spPr>
+          <a:xfrm>
+            <a:off x="841248" y="2633472"/>
+            <a:ext cx="4828032" cy="658368"/>
+          </a:xfrm>
+          <a:prstGeom prst="rect">
+            <a:avLst/>
+          </a:prstGeom>
+          <a:solidFill>
+            <a:srgbClr val="FFFFFF"/>
+          </a:solidFill>
+          <a:ln w="12700">
+            <a:solidFill>
+              <a:srgbClr val="D8DFE6"/>
+            </a:solidFill>
+          </a:ln>
+          <a:effectLst/>
+        </p:spPr>
+        <p:style>
+          <a:lnRef idx="1">
+            <a:schemeClr val="accent1"/>
+          </a:lnRef>
+          <a:fillRef idx="3">
+            <a:schemeClr val="accent1"/>
+          </a:fillRef>
+          <a:effectRef idx="2">
+            <a:schemeClr val="accent1"/>
+          </a:effectRef>
+          <a:fontRef idx="minor">
+            <a:schemeClr val="lt1"/>
+          </a:fontRef>
+        </p:style>
+        <p:txBody>
+          <a:bodyPr rtlCol="0" anchor="ctr"/>
+          <a:lstStyle/>
+          <a:p>
+            <a:pPr algn="ctr"/>
+          </a:p>
+        </p:txBody>
+      </p:sp>
+      <p:sp>
+        <p:nvSpPr>
+          <p:cNvPr id="12" name="TextBox 11"/>
+          <p:cNvSpPr txBox="1"/>
+          <p:nvPr/>
+        </p:nvSpPr>
+        <p:spPr>
+          <a:xfrm>
+            <a:off x="960120" y="2798064"/>
+            <a:ext cx="4590288" cy="365760"/>
+          </a:xfrm>
+          <a:prstGeom prst="rect">
+            <a:avLst/>
+          </a:prstGeom>
+          <a:noFill/>
+        </p:spPr>
+        <p:txBody>
+          <a:bodyPr wrap="square" lIns="0" rIns="0" tIns="0" bIns="0" anchor="t">
+            <a:spAutoFit/>
+          </a:bodyPr>
+          <a:lstStyle/>
+          <a:p>
+            <a:pPr algn="ctr">
+              <a:spcBef>
+                <a:spcPts val="0"/>
+              </a:spcBef>
+              <a:spcAft>
+                <a:spcPts val="0"/>
+              </a:spcAft>
+            </a:pPr>
+            <a:r>
+              <a:rPr sz="1550" b="1">
+                <a:solidFill>
+                  <a:srgbClr val="102A43"/>
+                </a:solidFill>
+                <a:latin typeface="微軟正黑體"/>
+              </a:rPr>
+              <a:t>採納率　＝　被修掉的意見數　÷　提出的意見數</a:t>
+            </a:r>
+          </a:p>
+        </p:txBody>
+      </p:sp>
+      <p:sp>
+        <p:nvSpPr>
+          <p:cNvPr id="13" name="TextBox 12"/>
+          <p:cNvSpPr txBox="1"/>
+          <p:nvPr/>
+        </p:nvSpPr>
+        <p:spPr>
+          <a:xfrm>
+            <a:off x="841248" y="3493008"/>
+            <a:ext cx="4846320" cy="1737360"/>
+          </a:xfrm>
+          <a:prstGeom prst="rect">
+            <a:avLst/>
+          </a:prstGeom>
+          <a:noFill/>
+        </p:spPr>
+        <p:txBody>
+          <a:bodyPr wrap="square" lIns="0" rIns="0" tIns="0" bIns="0" anchor="t">
+            <a:spAutoFit/>
+          </a:bodyPr>
+          <a:lstStyle/>
+          <a:p>
+            <a:pPr algn="l">
+              <a:spcBef>
+                <a:spcPts val="0"/>
+              </a:spcBef>
+              <a:spcAft>
+                <a:spcPts val="300"/>
+              </a:spcAft>
+            </a:pPr>
+            <a:r>
+              <a:rPr sz="1250" b="1">
+                <a:solidFill>
+                  <a:srgbClr val="102A43"/>
+                </a:solidFill>
+                <a:latin typeface="微軟正黑體"/>
+              </a:rPr>
+              <a:t>為什麼可信</a:t>
+            </a:r>
+          </a:p>
+          <a:p>
+            <a:pPr>
+              <a:lnSpc>
+                <a:spcPct val="125000"/>
+              </a:lnSpc>
+              <a:spcBef>
+                <a:spcPts val="0"/>
+              </a:spcBef>
+              <a:spcAft>
+                <a:spcPts val="0"/>
+              </a:spcAft>
+            </a:pPr>
+            <a:r>
+              <a:rPr sz="1150" b="0">
+                <a:solidFill>
+                  <a:srgbClr val="5B6B7B"/>
+                </a:solidFill>
+                <a:latin typeface="微軟正黑體"/>
+              </a:rPr>
+              <a:t>工程師真的動手改了那行程式碼才算採納。沒有人會為了配合 KPI 去改自己的韌體。</a:t>
+            </a:r>
+          </a:p>
+          <a:p>
+            <a:pPr>
+              <a:spcBef>
+                <a:spcPts val="900"/>
+              </a:spcBef>
+              <a:spcAft>
+                <a:spcPts val="300"/>
+              </a:spcAft>
+            </a:pPr>
+            <a:r>
+              <a:rPr sz="1250" b="1">
+                <a:solidFill>
+                  <a:srgbClr val="102A43"/>
+                </a:solidFill>
+                <a:latin typeface="微軟正黑體"/>
+              </a:rPr>
+              <a:t>怎麼判定</a:t>
+            </a:r>
+          </a:p>
+          <a:p>
+            <a:pPr>
+              <a:lnSpc>
+                <a:spcPct val="125000"/>
+              </a:lnSpc>
+              <a:spcBef>
+                <a:spcPts val="0"/>
+              </a:spcBef>
+              <a:spcAft>
+                <a:spcPts val="0"/>
+              </a:spcAft>
+            </a:pPr>
+            <a:r>
+              <a:rPr sz="1150" b="0">
+                <a:solidFill>
+                  <a:srgbClr val="5B6B7B"/>
+                </a:solidFill>
+                <a:latin typeface="微軟正黑體"/>
+              </a:rPr>
+              <a:t>比對前後兩輪審查的意見識別碼：消失、且那行程式碼已變動即為已修正。全自動，使用者不必按任何按鈕。</a:t>
+            </a:r>
+          </a:p>
+          <a:p>
+            <a:pPr>
+              <a:spcBef>
+                <a:spcPts val="900"/>
+              </a:spcBef>
+              <a:spcAft>
+                <a:spcPts val="300"/>
+              </a:spcAft>
+            </a:pPr>
+            <a:r>
+              <a:rPr sz="1250" b="1">
+                <a:solidFill>
+                  <a:srgbClr val="102A43"/>
+                </a:solidFill>
+                <a:latin typeface="微軟正黑體"/>
+              </a:rPr>
+              <a:t>要補什麼</a:t>
+            </a:r>
+          </a:p>
+          <a:p>
+            <a:pPr>
+              <a:lnSpc>
+                <a:spcPct val="125000"/>
+              </a:lnSpc>
+              <a:spcBef>
+                <a:spcPts val="0"/>
+              </a:spcBef>
+              <a:spcAft>
+                <a:spcPts val="0"/>
+              </a:spcAft>
+            </a:pPr>
+            <a:r>
+              <a:rPr sz="1150" b="0">
+                <a:solidFill>
+                  <a:srgbClr val="5B6B7B"/>
+                </a:solidFill>
+                <a:latin typeface="微軟正黑體"/>
+              </a:rPr>
+              <a:t>現有稽核日誌記的是「請求」，不是「意見的下場」。需新增一份意見記錄檔與匯出指令。</a:t>
+            </a:r>
+          </a:p>
+        </p:txBody>
+      </p:sp>
+      <p:sp>
+        <p:nvSpPr>
+          <p:cNvPr id="14" name="Rectangle 13"/>
+          <p:cNvSpPr/>
+          <p:nvPr/>
+        </p:nvSpPr>
+        <p:spPr>
+          <a:xfrm>
+            <a:off x="6254496" y="2103120"/>
+            <a:ext cx="5376672" cy="3310128"/>
+          </a:xfrm>
+          <a:prstGeom prst="rect">
+            <a:avLst/>
+          </a:prstGeom>
+          <a:noFill/>
+          <a:ln w="12700">
+            <a:solidFill>
+              <a:srgbClr val="D8DFE6"/>
+            </a:solidFill>
+          </a:ln>
+          <a:effectLst/>
+        </p:spPr>
+        <p:style>
+          <a:lnRef idx="1">
+            <a:schemeClr val="accent1"/>
+          </a:lnRef>
+          <a:fillRef idx="3">
+            <a:schemeClr val="accent1"/>
+          </a:fillRef>
+          <a:effectRef idx="2">
+            <a:schemeClr val="accent1"/>
+          </a:effectRef>
+          <a:fontRef idx="minor">
+            <a:schemeClr val="lt1"/>
+          </a:fontRef>
+        </p:style>
+        <p:txBody>
+          <a:bodyPr rtlCol="0" anchor="ctr"/>
+          <a:lstStyle/>
+          <a:p>
+            <a:pPr algn="ctr"/>
+          </a:p>
+        </p:txBody>
+      </p:sp>
+      <p:sp>
+        <p:nvSpPr>
+          <p:cNvPr id="15" name="TextBox 14"/>
+          <p:cNvSpPr txBox="1"/>
+          <p:nvPr/>
+        </p:nvSpPr>
+        <p:spPr>
+          <a:xfrm>
+            <a:off x="6528816" y="2286000"/>
+            <a:ext cx="4846320" cy="320040"/>
+          </a:xfrm>
+          <a:prstGeom prst="rect">
+            <a:avLst/>
+          </a:prstGeom>
+          <a:noFill/>
+        </p:spPr>
+        <p:txBody>
+          <a:bodyPr wrap="square" lIns="0" rIns="0" tIns="0" bIns="0" anchor="t">
+            <a:spAutoFit/>
+          </a:bodyPr>
+          <a:lstStyle/>
+          <a:p>
+            <a:pPr algn="l">
+              <a:spcBef>
+                <a:spcPts val="0"/>
+              </a:spcBef>
+              <a:spcAft>
+                <a:spcPts val="0"/>
+              </a:spcAft>
+            </a:pPr>
+            <a:r>
+              <a:rPr sz="1300" b="1">
+                <a:solidFill>
+                  <a:srgbClr val="119DA4"/>
+                </a:solidFill>
+                <a:latin typeface="微軟正黑體"/>
+              </a:rPr>
+              <a:t>指標分層</a:t>
+            </a:r>
+          </a:p>
+        </p:txBody>
+      </p:sp>
+      <p:sp>
+        <p:nvSpPr>
+          <p:cNvPr id="16" name="Rectangle 15"/>
+          <p:cNvSpPr/>
+          <p:nvPr/>
+        </p:nvSpPr>
+        <p:spPr>
+          <a:xfrm>
+            <a:off x="6528816" y="2670048"/>
+            <a:ext cx="932688" cy="566928"/>
+          </a:xfrm>
+          <a:prstGeom prst="rect">
+            <a:avLst/>
+          </a:prstGeom>
+          <a:solidFill>
+            <a:srgbClr val="119DA4"/>
+          </a:solidFill>
+          <a:ln>
+            <a:noFill/>
+          </a:ln>
+          <a:effectLst/>
+        </p:spPr>
+        <p:style>
+          <a:lnRef idx="1">
+            <a:schemeClr val="accent1"/>
+          </a:lnRef>
+          <a:fillRef idx="3">
+            <a:schemeClr val="accent1"/>
+          </a:fillRef>
+          <a:effectRef idx="2">
+            <a:schemeClr val="accent1"/>
+          </a:effectRef>
+          <a:fontRef idx="minor">
+            <a:schemeClr val="lt1"/>
+          </a:fontRef>
+        </p:style>
+        <p:txBody>
+          <a:bodyPr rtlCol="0" anchor="ctr"/>
+          <a:lstStyle/>
+          <a:p>
+            <a:pPr algn="ctr"/>
+          </a:p>
+        </p:txBody>
+      </p:sp>
+      <p:sp>
+        <p:nvSpPr>
+          <p:cNvPr id="17" name="TextBox 16"/>
+          <p:cNvSpPr txBox="1"/>
+          <p:nvPr/>
+        </p:nvSpPr>
+        <p:spPr>
+          <a:xfrm>
+            <a:off x="6528816" y="2834640"/>
+            <a:ext cx="932688" cy="274320"/>
+          </a:xfrm>
+          <a:prstGeom prst="rect">
+            <a:avLst/>
+          </a:prstGeom>
+          <a:noFill/>
+        </p:spPr>
+        <p:txBody>
+          <a:bodyPr wrap="square" lIns="0" rIns="0" tIns="0" bIns="0" anchor="t">
+            <a:spAutoFit/>
+          </a:bodyPr>
+          <a:lstStyle/>
+          <a:p>
+            <a:pPr algn="ctr">
+              <a:spcBef>
+                <a:spcPts val="0"/>
+              </a:spcBef>
+              <a:spcAft>
+                <a:spcPts val="0"/>
+              </a:spcAft>
+            </a:pPr>
+            <a:r>
+              <a:rPr sz="1150" b="1">
+                <a:solidFill>
+                  <a:srgbClr val="FFFFFF"/>
+                </a:solidFill>
+                <a:latin typeface="微軟正黑體"/>
+              </a:rPr>
+              <a:t>北極星</a:t>
+            </a:r>
+          </a:p>
+        </p:txBody>
+      </p:sp>
+      <p:sp>
+        <p:nvSpPr>
+          <p:cNvPr id="18" name="TextBox 17"/>
+          <p:cNvSpPr txBox="1"/>
+          <p:nvPr/>
+        </p:nvSpPr>
+        <p:spPr>
+          <a:xfrm>
+            <a:off x="7607808" y="2706624"/>
+            <a:ext cx="3840480" cy="566928"/>
+          </a:xfrm>
+          <a:prstGeom prst="rect">
+            <a:avLst/>
+          </a:prstGeom>
+          <a:noFill/>
+        </p:spPr>
+        <p:txBody>
+          <a:bodyPr wrap="square" lIns="0" rIns="0" tIns="0" bIns="0" anchor="t">
+            <a:spAutoFit/>
+          </a:bodyPr>
+          <a:lstStyle/>
+          <a:p>
+            <a:pPr algn="l">
+              <a:spcBef>
+                <a:spcPts val="0"/>
+              </a:spcBef>
+              <a:spcAft>
+                <a:spcPts val="200"/>
+              </a:spcAft>
+            </a:pPr>
+            <a:r>
+              <a:rPr sz="1250" b="1">
+                <a:solidFill>
+                  <a:srgbClr val="102A43"/>
+                </a:solidFill>
+                <a:latin typeface="微軟正黑體"/>
+              </a:rPr>
+              <a:t>採納率</a:t>
+            </a:r>
+          </a:p>
+          <a:p>
+            <a:pPr>
+              <a:lnSpc>
+                <a:spcPct val="120000"/>
+              </a:lnSpc>
+              <a:spcBef>
+                <a:spcPts val="0"/>
+              </a:spcBef>
+              <a:spcAft>
+                <a:spcPts val="0"/>
+              </a:spcAft>
+            </a:pPr>
+            <a:r>
+              <a:rPr sz="1100" b="0">
+                <a:solidFill>
+                  <a:srgbClr val="5B6B7B"/>
+                </a:solidFill>
+                <a:latin typeface="微軟正黑體"/>
+              </a:rPr>
+              <a:t>唯一不需要 ground truth 的價值證明</a:t>
+            </a:r>
+          </a:p>
+        </p:txBody>
+      </p:sp>
+      <p:sp>
+        <p:nvSpPr>
+          <p:cNvPr id="19" name="Rectangle 18"/>
+          <p:cNvSpPr/>
+          <p:nvPr/>
+        </p:nvSpPr>
+        <p:spPr>
+          <a:xfrm>
+            <a:off x="6528816" y="3328416"/>
+            <a:ext cx="932688" cy="566928"/>
+          </a:xfrm>
+          <a:prstGeom prst="rect">
+            <a:avLst/>
+          </a:prstGeom>
+          <a:solidFill>
+            <a:srgbClr val="1C446B"/>
+          </a:solidFill>
+          <a:ln>
+            <a:noFill/>
+          </a:ln>
+          <a:effectLst/>
+        </p:spPr>
+        <p:style>
+          <a:lnRef idx="1">
+            <a:schemeClr val="accent1"/>
+          </a:lnRef>
+          <a:fillRef idx="3">
+            <a:schemeClr val="accent1"/>
+          </a:fillRef>
+          <a:effectRef idx="2">
+            <a:schemeClr val="accent1"/>
+          </a:effectRef>
+          <a:fontRef idx="minor">
+            <a:schemeClr val="lt1"/>
+          </a:fontRef>
+        </p:style>
+        <p:txBody>
+          <a:bodyPr rtlCol="0" anchor="ctr"/>
+          <a:lstStyle/>
+          <a:p>
+            <a:pPr algn="ctr"/>
+          </a:p>
+        </p:txBody>
+      </p:sp>
+      <p:sp>
+        <p:nvSpPr>
+          <p:cNvPr id="20" name="TextBox 19"/>
+          <p:cNvSpPr txBox="1"/>
+          <p:nvPr/>
+        </p:nvSpPr>
+        <p:spPr>
+          <a:xfrm>
+            <a:off x="6528816" y="3493008"/>
+            <a:ext cx="932688" cy="274320"/>
+          </a:xfrm>
+          <a:prstGeom prst="rect">
+            <a:avLst/>
+          </a:prstGeom>
+          <a:noFill/>
+        </p:spPr>
+        <p:txBody>
+          <a:bodyPr wrap="square" lIns="0" rIns="0" tIns="0" bIns="0" anchor="t">
+            <a:spAutoFit/>
+          </a:bodyPr>
+          <a:lstStyle/>
+          <a:p>
+            <a:pPr algn="ctr">
+              <a:spcBef>
+                <a:spcPts val="0"/>
+              </a:spcBef>
+              <a:spcAft>
+                <a:spcPts val="0"/>
+              </a:spcAft>
+            </a:pPr>
+            <a:r>
+              <a:rPr sz="1150" b="1">
+                <a:solidFill>
+                  <a:srgbClr val="FFFFFF"/>
+                </a:solidFill>
+                <a:latin typeface="微軟正黑體"/>
+              </a:rPr>
+              <a:t>領先</a:t>
+            </a:r>
+          </a:p>
+        </p:txBody>
+      </p:sp>
+      <p:sp>
+        <p:nvSpPr>
+          <p:cNvPr id="21" name="TextBox 20"/>
+          <p:cNvSpPr txBox="1"/>
+          <p:nvPr/>
+        </p:nvSpPr>
+        <p:spPr>
+          <a:xfrm>
+            <a:off x="7607808" y="3364992"/>
+            <a:ext cx="3840480" cy="566928"/>
+          </a:xfrm>
+          <a:prstGeom prst="rect">
+            <a:avLst/>
+          </a:prstGeom>
+          <a:noFill/>
+        </p:spPr>
+        <p:txBody>
+          <a:bodyPr wrap="square" lIns="0" rIns="0" tIns="0" bIns="0" anchor="t">
+            <a:spAutoFit/>
+          </a:bodyPr>
+          <a:lstStyle/>
+          <a:p>
+            <a:pPr algn="l">
+              <a:spcBef>
+                <a:spcPts val="0"/>
+              </a:spcBef>
+              <a:spcAft>
+                <a:spcPts val="200"/>
+              </a:spcAft>
+            </a:pPr>
+            <a:r>
+              <a:rPr sz="1250" b="1">
+                <a:solidFill>
+                  <a:srgbClr val="102A43"/>
+                </a:solidFill>
+                <a:latin typeface="微軟正黑體"/>
+              </a:rPr>
+              <a:t>每週活躍人數、每人每週採納數</a:t>
+            </a:r>
+          </a:p>
+          <a:p>
+            <a:pPr>
+              <a:lnSpc>
+                <a:spcPct val="120000"/>
+              </a:lnSpc>
+              <a:spcBef>
+                <a:spcPts val="0"/>
+              </a:spcBef>
+              <a:spcAft>
+                <a:spcPts val="0"/>
+              </a:spcAft>
+            </a:pPr>
+            <a:r>
+              <a:rPr sz="1100" b="0">
+                <a:solidFill>
+                  <a:srgbClr val="5B6B7B"/>
+                </a:solidFill>
+                <a:latin typeface="微軟正黑體"/>
+              </a:rPr>
+              <a:t>兩週就看得出趨勢，不必等三個月</a:t>
+            </a:r>
+          </a:p>
+        </p:txBody>
+      </p:sp>
+      <p:sp>
+        <p:nvSpPr>
+          <p:cNvPr id="22" name="Rectangle 21"/>
+          <p:cNvSpPr/>
+          <p:nvPr/>
+        </p:nvSpPr>
+        <p:spPr>
+          <a:xfrm>
+            <a:off x="6528816" y="3986784"/>
+            <a:ext cx="932688" cy="566928"/>
+          </a:xfrm>
+          <a:prstGeom prst="rect">
+            <a:avLst/>
+          </a:prstGeom>
+          <a:solidFill>
+            <a:srgbClr val="1C446B"/>
+          </a:solidFill>
+          <a:ln>
+            <a:noFill/>
+          </a:ln>
+          <a:effectLst/>
+        </p:spPr>
+        <p:style>
+          <a:lnRef idx="1">
+            <a:schemeClr val="accent1"/>
+          </a:lnRef>
+          <a:fillRef idx="3">
+            <a:schemeClr val="accent1"/>
+          </a:fillRef>
+          <a:effectRef idx="2">
+            <a:schemeClr val="accent1"/>
+          </a:effectRef>
+          <a:fontRef idx="minor">
+            <a:schemeClr val="lt1"/>
+          </a:fontRef>
+        </p:style>
+        <p:txBody>
+          <a:bodyPr rtlCol="0" anchor="ctr"/>
+          <a:lstStyle/>
+          <a:p>
+            <a:pPr algn="ctr"/>
+          </a:p>
+        </p:txBody>
+      </p:sp>
+      <p:sp>
+        <p:nvSpPr>
+          <p:cNvPr id="23" name="TextBox 22"/>
+          <p:cNvSpPr txBox="1"/>
+          <p:nvPr/>
+        </p:nvSpPr>
+        <p:spPr>
+          <a:xfrm>
+            <a:off x="6528816" y="4151376"/>
+            <a:ext cx="932688" cy="274320"/>
+          </a:xfrm>
+          <a:prstGeom prst="rect">
+            <a:avLst/>
+          </a:prstGeom>
+          <a:noFill/>
+        </p:spPr>
+        <p:txBody>
+          <a:bodyPr wrap="square" lIns="0" rIns="0" tIns="0" bIns="0" anchor="t">
+            <a:spAutoFit/>
+          </a:bodyPr>
+          <a:lstStyle/>
+          <a:p>
+            <a:pPr algn="ctr">
+              <a:spcBef>
+                <a:spcPts val="0"/>
+              </a:spcBef>
+              <a:spcAft>
+                <a:spcPts val="0"/>
+              </a:spcAft>
+            </a:pPr>
+            <a:r>
+              <a:rPr sz="1150" b="1">
+                <a:solidFill>
+                  <a:srgbClr val="FFFFFF"/>
+                </a:solidFill>
+                <a:latin typeface="微軟正黑體"/>
+              </a:rPr>
+              <a:t>落後</a:t>
+            </a:r>
+          </a:p>
+        </p:txBody>
+      </p:sp>
+      <p:sp>
+        <p:nvSpPr>
+          <p:cNvPr id="24" name="TextBox 23"/>
+          <p:cNvSpPr txBox="1"/>
+          <p:nvPr/>
+        </p:nvSpPr>
+        <p:spPr>
+          <a:xfrm>
+            <a:off x="7607808" y="4023360"/>
+            <a:ext cx="3840480" cy="566928"/>
+          </a:xfrm>
+          <a:prstGeom prst="rect">
+            <a:avLst/>
+          </a:prstGeom>
+          <a:noFill/>
+        </p:spPr>
+        <p:txBody>
+          <a:bodyPr wrap="square" lIns="0" rIns="0" tIns="0" bIns="0" anchor="t">
+            <a:spAutoFit/>
+          </a:bodyPr>
+          <a:lstStyle/>
+          <a:p>
+            <a:pPr algn="l">
+              <a:spcBef>
+                <a:spcPts val="0"/>
+              </a:spcBef>
+              <a:spcAft>
+                <a:spcPts val="200"/>
+              </a:spcAft>
+            </a:pPr>
+            <a:r>
+              <a:rPr sz="1250" b="1">
+                <a:solidFill>
+                  <a:srgbClr val="102A43"/>
+                </a:solidFill>
+                <a:latin typeface="微軟正黑體"/>
+              </a:rPr>
+              <a:t>規則命中分布、反覆被否決的規則</a:t>
+            </a:r>
+          </a:p>
+          <a:p>
+            <a:pPr>
+              <a:lnSpc>
+                <a:spcPct val="120000"/>
+              </a:lnSpc>
+              <a:spcBef>
+                <a:spcPts val="0"/>
+              </a:spcBef>
+              <a:spcAft>
+                <a:spcPts val="0"/>
+              </a:spcAft>
+            </a:pPr>
+            <a:r>
+              <a:rPr sz="1100" b="0">
+                <a:solidFill>
+                  <a:srgbClr val="5B6B7B"/>
+                </a:solidFill>
+                <a:latin typeface="微軟正黑體"/>
+              </a:rPr>
+              <a:t>指出該補哪一條 except</a:t>
+            </a:r>
+          </a:p>
+        </p:txBody>
+      </p:sp>
+      <p:sp>
+        <p:nvSpPr>
+          <p:cNvPr id="25" name="Rectangle 24"/>
+          <p:cNvSpPr/>
+          <p:nvPr/>
+        </p:nvSpPr>
+        <p:spPr>
+          <a:xfrm>
+            <a:off x="6528816" y="4645152"/>
+            <a:ext cx="932688" cy="566928"/>
+          </a:xfrm>
+          <a:prstGeom prst="rect">
+            <a:avLst/>
+          </a:prstGeom>
+          <a:solidFill>
+            <a:srgbClr val="D18616"/>
+          </a:solidFill>
+          <a:ln>
+            <a:noFill/>
+          </a:ln>
+          <a:effectLst/>
+        </p:spPr>
+        <p:style>
+          <a:lnRef idx="1">
+            <a:schemeClr val="accent1"/>
+          </a:lnRef>
+          <a:fillRef idx="3">
+            <a:schemeClr val="accent1"/>
+          </a:fillRef>
+          <a:effectRef idx="2">
+            <a:schemeClr val="accent1"/>
+          </a:effectRef>
+          <a:fontRef idx="minor">
+            <a:schemeClr val="lt1"/>
+          </a:fontRef>
+        </p:style>
+        <p:txBody>
+          <a:bodyPr rtlCol="0" anchor="ctr"/>
+          <a:lstStyle/>
+          <a:p>
+            <a:pPr algn="ctr"/>
+          </a:p>
+        </p:txBody>
+      </p:sp>
+      <p:sp>
+        <p:nvSpPr>
+          <p:cNvPr id="26" name="TextBox 25"/>
+          <p:cNvSpPr txBox="1"/>
+          <p:nvPr/>
+        </p:nvSpPr>
+        <p:spPr>
+          <a:xfrm>
+            <a:off x="6528816" y="4809744"/>
+            <a:ext cx="932688" cy="274320"/>
+          </a:xfrm>
+          <a:prstGeom prst="rect">
+            <a:avLst/>
+          </a:prstGeom>
+          <a:noFill/>
+        </p:spPr>
+        <p:txBody>
+          <a:bodyPr wrap="square" lIns="0" rIns="0" tIns="0" bIns="0" anchor="t">
+            <a:spAutoFit/>
+          </a:bodyPr>
+          <a:lstStyle/>
+          <a:p>
+            <a:pPr algn="ctr">
+              <a:spcBef>
+                <a:spcPts val="0"/>
+              </a:spcBef>
+              <a:spcAft>
+                <a:spcPts val="0"/>
+              </a:spcAft>
+            </a:pPr>
+            <a:r>
+              <a:rPr sz="1150" b="1">
+                <a:solidFill>
+                  <a:srgbClr val="FFFFFF"/>
+                </a:solidFill>
+                <a:latin typeface="微軟正黑體"/>
+              </a:rPr>
+              <a:t>護欄</a:t>
+            </a:r>
+          </a:p>
+        </p:txBody>
+      </p:sp>
+      <p:sp>
+        <p:nvSpPr>
+          <p:cNvPr id="27" name="TextBox 26"/>
+          <p:cNvSpPr txBox="1"/>
+          <p:nvPr/>
+        </p:nvSpPr>
+        <p:spPr>
+          <a:xfrm>
+            <a:off x="7607808" y="4681728"/>
+            <a:ext cx="3840480" cy="566928"/>
+          </a:xfrm>
+          <a:prstGeom prst="rect">
+            <a:avLst/>
+          </a:prstGeom>
+          <a:noFill/>
+        </p:spPr>
+        <p:txBody>
+          <a:bodyPr wrap="square" lIns="0" rIns="0" tIns="0" bIns="0" anchor="t">
+            <a:spAutoFit/>
+          </a:bodyPr>
+          <a:lstStyle/>
+          <a:p>
+            <a:pPr algn="l">
+              <a:spcBef>
+                <a:spcPts val="0"/>
+              </a:spcBef>
+              <a:spcAft>
+                <a:spcPts val="200"/>
+              </a:spcAft>
+            </a:pPr>
+            <a:r>
+              <a:rPr sz="1250" b="1">
+                <a:solidFill>
+                  <a:srgbClr val="102A43"/>
+                </a:solidFill>
+                <a:latin typeface="微軟正黑體"/>
+              </a:rPr>
+              <a:t>p95 延遲、每人每週誤報數</a:t>
+            </a:r>
+          </a:p>
+          <a:p>
+            <a:pPr>
+              <a:lnSpc>
+                <a:spcPct val="120000"/>
+              </a:lnSpc>
+              <a:spcBef>
+                <a:spcPts val="0"/>
+              </a:spcBef>
+              <a:spcAft>
+                <a:spcPts val="0"/>
+              </a:spcAft>
+            </a:pPr>
+            <a:r>
+              <a:rPr sz="1100" b="0">
+                <a:solidFill>
+                  <a:srgbClr val="5B6B7B"/>
+                </a:solidFill>
+                <a:latin typeface="微軟正黑體"/>
+              </a:rPr>
+              <a:t>不准跌破的底線，不是要衝高的目標</a:t>
+            </a:r>
+          </a:p>
+        </p:txBody>
+      </p:sp>
+      <p:sp>
+        <p:nvSpPr>
+          <p:cNvPr id="28" name="Rectangle 27"/>
+          <p:cNvSpPr/>
+          <p:nvPr/>
+        </p:nvSpPr>
+        <p:spPr>
+          <a:xfrm>
+            <a:off x="566928" y="5559552"/>
+            <a:ext cx="11064240" cy="621792"/>
+          </a:xfrm>
+          <a:prstGeom prst="rect">
+            <a:avLst/>
+          </a:prstGeom>
+          <a:solidFill>
+            <a:srgbClr val="102A43"/>
+          </a:solidFill>
+          <a:ln>
+            <a:noFill/>
+          </a:ln>
+          <a:effectLst/>
+        </p:spPr>
+        <p:style>
+          <a:lnRef idx="1">
+            <a:schemeClr val="accent1"/>
+          </a:lnRef>
+          <a:fillRef idx="3">
+            <a:schemeClr val="accent1"/>
+          </a:fillRef>
+          <a:effectRef idx="2">
+            <a:schemeClr val="accent1"/>
+          </a:effectRef>
+          <a:fontRef idx="minor">
+            <a:schemeClr val="lt1"/>
+          </a:fontRef>
+        </p:style>
+        <p:txBody>
+          <a:bodyPr rtlCol="0" anchor="ctr"/>
+          <a:lstStyle/>
+          <a:p>
+            <a:pPr algn="ctr"/>
+          </a:p>
+        </p:txBody>
+      </p:sp>
+      <p:sp>
+        <p:nvSpPr>
+          <p:cNvPr id="29" name="TextBox 28"/>
+          <p:cNvSpPr txBox="1"/>
+          <p:nvPr/>
+        </p:nvSpPr>
+        <p:spPr>
+          <a:xfrm>
+            <a:off x="868680" y="5669280"/>
+            <a:ext cx="10515600" cy="420624"/>
+          </a:xfrm>
+          <a:prstGeom prst="rect">
+            <a:avLst/>
+          </a:prstGeom>
+          <a:noFill/>
+        </p:spPr>
+        <p:txBody>
+          <a:bodyPr wrap="square" lIns="0" rIns="0" tIns="0" bIns="0" anchor="t">
+            <a:spAutoFit/>
+          </a:bodyPr>
+          <a:lstStyle/>
+          <a:p>
+            <a:pPr algn="l">
+              <a:spcBef>
+                <a:spcPts val="0"/>
+              </a:spcBef>
+              <a:spcAft>
+                <a:spcPts val="0"/>
+              </a:spcAft>
+            </a:pPr>
+            <a:r>
+              <a:rPr sz="1300" b="1">
+                <a:solidFill>
+                  <a:srgbClr val="FFFFFF"/>
+                </a:solidFill>
+                <a:latin typeface="微軟正黑體"/>
+              </a:rPr>
+              <a:t>試行 4 週的報告格式：「n 則意見被實際修掉，其中 m 則是已合併進主線的既有缺陷」—— 比率是佐證，案例才是論點。</a:t>
+            </a:r>
+          </a:p>
+        </p:txBody>
+      </p:sp>
+    </p:spTree>
+  </p:cSld>
+  <p:clrMapOvr>
+    <a:masterClrMapping/>
+  </p:clrMapOvr>
+</p:sld>
+</file>
+
+<file path=ppt/slides/slide12.xml><?xml version="1.0" encoding="utf-8"?>
+<p:sld xmlns:a="http://schemas.openxmlformats.org/drawingml/2006/main" xmlns:p="http://schemas.openxmlformats.org/presentationml/2006/main" xmlns:r="http://schemas.openxmlformats.org/officeDocument/2006/relationships">
+  <p:cSld>
+    <p:spTree>
+      <p:nvGrpSpPr>
+        <p:cNvPr id="1" name=""/>
+        <p:cNvGrpSpPr/>
+        <p:nvPr/>
+      </p:nvGrpSpPr>
+      <p:grpSpPr/>
+      <p:sp>
+        <p:nvSpPr>
+          <p:cNvPr id="2" name="Rectangle 1"/>
+          <p:cNvSpPr/>
+          <p:nvPr/>
+        </p:nvSpPr>
+        <p:spPr>
+          <a:xfrm>
+            <a:off x="0" y="0"/>
+            <a:ext cx="118872" cy="6858000"/>
+          </a:xfrm>
+          <a:prstGeom prst="rect">
+            <a:avLst/>
+          </a:prstGeom>
+          <a:solidFill>
+            <a:srgbClr val="102A43"/>
+          </a:solidFill>
+          <a:ln>
+            <a:noFill/>
+          </a:ln>
+          <a:effectLst/>
+        </p:spPr>
+        <p:style>
+          <a:lnRef idx="1">
+            <a:schemeClr val="accent1"/>
+          </a:lnRef>
+          <a:fillRef idx="3">
+            <a:schemeClr val="accent1"/>
+          </a:fillRef>
+          <a:effectRef idx="2">
+            <a:schemeClr val="accent1"/>
+          </a:effectRef>
+          <a:fontRef idx="minor">
+            <a:schemeClr val="lt1"/>
+          </a:fontRef>
+        </p:style>
+        <p:txBody>
+          <a:bodyPr rtlCol="0" anchor="ctr"/>
+          <a:lstStyle/>
+          <a:p>
+            <a:pPr algn="ctr"/>
+          </a:p>
+        </p:txBody>
+      </p:sp>
+      <p:sp>
+        <p:nvSpPr>
+          <p:cNvPr id="3" name="TextBox 2"/>
+          <p:cNvSpPr txBox="1"/>
+          <p:nvPr/>
+        </p:nvSpPr>
+        <p:spPr>
+          <a:xfrm>
+            <a:off x="566928" y="384048"/>
+            <a:ext cx="10881360" cy="274320"/>
+          </a:xfrm>
+          <a:prstGeom prst="rect">
+            <a:avLst/>
+          </a:prstGeom>
+          <a:noFill/>
+        </p:spPr>
+        <p:txBody>
+          <a:bodyPr wrap="square" lIns="0" rIns="0" tIns="0" bIns="0" anchor="t">
+            <a:spAutoFit/>
+          </a:bodyPr>
+          <a:lstStyle/>
+          <a:p>
+            <a:pPr algn="l">
+              <a:spcBef>
+                <a:spcPts val="0"/>
+              </a:spcBef>
+              <a:spcAft>
+                <a:spcPts val="0"/>
+              </a:spcAft>
+            </a:pPr>
+            <a:r>
+              <a:rPr sz="1200" b="1">
+                <a:solidFill>
+                  <a:srgbClr val="119DA4"/>
+                </a:solidFill>
+                <a:latin typeface="微軟正黑體"/>
+              </a:rPr>
+              <a:t>NEXT</a:t>
+            </a:r>
+          </a:p>
+        </p:txBody>
+      </p:sp>
+      <p:sp>
+        <p:nvSpPr>
+          <p:cNvPr id="4" name="TextBox 3"/>
+          <p:cNvSpPr txBox="1"/>
+          <p:nvPr/>
+        </p:nvSpPr>
+        <p:spPr>
+          <a:xfrm>
+            <a:off x="566928" y="658368"/>
+            <a:ext cx="10881360" cy="502920"/>
+          </a:xfrm>
+          <a:prstGeom prst="rect">
+            <a:avLst/>
+          </a:prstGeom>
+          <a:noFill/>
+        </p:spPr>
+        <p:txBody>
+          <a:bodyPr wrap="square" lIns="0" rIns="0" tIns="0" bIns="0" anchor="t">
+            <a:spAutoFit/>
+          </a:bodyPr>
+          <a:lstStyle/>
+          <a:p>
+            <a:pPr algn="l">
+              <a:spcBef>
+                <a:spcPts val="0"/>
+              </a:spcBef>
+              <a:spcAft>
+                <a:spcPts val="0"/>
+              </a:spcAft>
+            </a:pPr>
+            <a:r>
+              <a:rPr sz="2800" b="1">
+                <a:solidFill>
+                  <a:srgbClr val="102A43"/>
+                </a:solidFill>
+                <a:latin typeface="微軟正黑體"/>
+              </a:rPr>
+              <a:t>下一步與所需支援</a:t>
+            </a:r>
+          </a:p>
+        </p:txBody>
+      </p:sp>
+      <p:sp>
+        <p:nvSpPr>
+          <p:cNvPr id="5" name="Rectangle 4"/>
+          <p:cNvSpPr/>
+          <p:nvPr/>
+        </p:nvSpPr>
+        <p:spPr>
+          <a:xfrm>
+            <a:off x="566928" y="1298448"/>
+            <a:ext cx="11064240" cy="11430"/>
+          </a:xfrm>
+          <a:prstGeom prst="rect">
+            <a:avLst/>
+          </a:prstGeom>
+          <a:solidFill>
+            <a:srgbClr val="D8DFE6"/>
+          </a:solidFill>
+          <a:ln>
+            <a:noFill/>
+          </a:ln>
+          <a:effectLst/>
+        </p:spPr>
+        <p:style>
+          <a:lnRef idx="1">
+            <a:schemeClr val="accent1"/>
+          </a:lnRef>
+          <a:fillRef idx="3">
+            <a:schemeClr val="accent1"/>
+          </a:fillRef>
+          <a:effectRef idx="2">
+            <a:schemeClr val="accent1"/>
+          </a:effectRef>
+          <a:fontRef idx="minor">
+            <a:schemeClr val="lt1"/>
+          </a:fontRef>
+        </p:style>
+        <p:txBody>
+          <a:bodyPr rtlCol="0" anchor="ctr"/>
+          <a:lstStyle/>
+          <a:p>
+            <a:pPr algn="ctr"/>
+          </a:p>
+        </p:txBody>
+      </p:sp>
+      <p:sp>
+        <p:nvSpPr>
+          <p:cNvPr id="6" name="TextBox 5"/>
+          <p:cNvSpPr txBox="1"/>
+          <p:nvPr/>
+        </p:nvSpPr>
+        <p:spPr>
+          <a:xfrm>
+            <a:off x="566928" y="6355080"/>
+            <a:ext cx="5486400" cy="256032"/>
+          </a:xfrm>
+          <a:prstGeom prst="rect">
+            <a:avLst/>
+          </a:prstGeom>
+          <a:noFill/>
+        </p:spPr>
+        <p:txBody>
+          <a:bodyPr wrap="square" lIns="0" rIns="0" tIns="0" bIns="0" anchor="t">
+            <a:spAutoFit/>
+          </a:bodyPr>
+          <a:lstStyle/>
+          <a:p>
+            <a:pPr algn="l">
+              <a:spcBef>
+                <a:spcPts val="0"/>
+              </a:spcBef>
+              <a:spcAft>
+                <a:spcPts val="0"/>
+              </a:spcAft>
+            </a:pPr>
+            <a:r>
+              <a:rPr sz="1000" b="0">
+                <a:solidFill>
+                  <a:srgbClr val="5B6B7B"/>
+                </a:solidFill>
+                <a:latin typeface="微軟正黑體"/>
+              </a:rPr>
+              <a:t>sensAI ｜ 韌體 AI Code Review ｜ v0.5.1</a:t>
+            </a:r>
+          </a:p>
+        </p:txBody>
+      </p:sp>
+      <p:sp>
+        <p:nvSpPr>
+          <p:cNvPr id="7" name="TextBox 6"/>
+          <p:cNvSpPr txBox="1"/>
+          <p:nvPr/>
+        </p:nvSpPr>
+        <p:spPr>
+          <a:xfrm>
+            <a:off x="10607040" y="6355080"/>
+            <a:ext cx="1005840" cy="256032"/>
+          </a:xfrm>
+          <a:prstGeom prst="rect">
+            <a:avLst/>
+          </a:prstGeom>
+          <a:noFill/>
+        </p:spPr>
+        <p:txBody>
+          <a:bodyPr wrap="square" lIns="0" rIns="0" tIns="0" bIns="0" anchor="t">
+            <a:spAutoFit/>
+          </a:bodyPr>
+          <a:lstStyle/>
+          <a:p>
+            <a:pPr algn="r">
+              <a:spcBef>
+                <a:spcPts val="0"/>
+              </a:spcBef>
+              <a:spcAft>
+                <a:spcPts val="0"/>
+              </a:spcAft>
+            </a:pPr>
+            <a:r>
+              <a:rPr sz="1000" b="0">
+                <a:solidFill>
+                  <a:srgbClr val="5B6B7B"/>
+                </a:solidFill>
+                <a:latin typeface="微軟正黑體"/>
+              </a:rPr>
+              <a:t>12</a:t>
             </a:r>
           </a:p>
         </p:txBody>

--- a/docs/sensAI_報告.pptx
+++ b/docs/sensAI_報告.pptx
@@ -17,6 +17,7 @@
     <p:sldId id="265" r:id="rId16"/>
     <p:sldId id="266" r:id="rId17"/>
     <p:sldId id="267" r:id="rId18"/>
+    <p:sldId id="268" r:id="rId19"/>
   </p:sldIdLst>
   <p:sldSz cx="12191695" cy="6858000" type="screen4x3"/>
   <p:notesSz cx="6858000" cy="9144000"/>
@@ -4900,7 +4901,7 @@
                 </a:solidFill>
                 <a:latin typeface="微軟正黑體"/>
               </a:rPr>
-              <a:t>MEASUREMENT</a:t>
+              <a:t>DATA</a:t>
             </a:r>
           </a:p>
         </p:txBody>
@@ -4942,7 +4943,7 @@
                 </a:solidFill>
                 <a:latin typeface="微軟正黑體"/>
               </a:rPr>
-              <a:t>如何驗證效益：量採納率，不量準確率</a:t>
+              <a:t>目前已有的數據與出處</a:t>
             </a:r>
           </a:p>
         </p:txBody>
@@ -5115,7 +5116,7 @@
                 </a:solidFill>
                 <a:latin typeface="微軟正黑體"/>
               </a:rPr>
-              <a:t>「準確率」需要知道程式碼裡到底有幾個 bug —— 那個答案永遠不存在，任何宣稱的準確率都是自己跟自己比。改量使用者用行動投票的結果。</a:t>
+              <a:t>以下每個數字都可當場複查。現場使用數據（採納率、延遲分布、成本）要等導入後由稽核日誌自動累積 —— 今天還沒有。</a:t>
             </a:r>
           </a:p>
         </p:txBody>
@@ -5128,8 +5129,94 @@
         </p:nvSpPr>
         <p:spPr>
           <a:xfrm>
-            <a:off x="566928" y="2103120"/>
-            <a:ext cx="5376672" cy="3310128"/>
+            <a:off x="566928" y="2121408"/>
+            <a:ext cx="34290" cy="237744"/>
+          </a:xfrm>
+          <a:prstGeom prst="rect">
+            <a:avLst/>
+          </a:prstGeom>
+          <a:solidFill>
+            <a:srgbClr val="119DA4"/>
+          </a:solidFill>
+          <a:ln>
+            <a:noFill/>
+          </a:ln>
+          <a:effectLst/>
+        </p:spPr>
+        <p:style>
+          <a:lnRef idx="1">
+            <a:schemeClr val="accent1"/>
+          </a:lnRef>
+          <a:fillRef idx="3">
+            <a:schemeClr val="accent1"/>
+          </a:fillRef>
+          <a:effectRef idx="2">
+            <a:schemeClr val="accent1"/>
+          </a:effectRef>
+          <a:fontRef idx="minor">
+            <a:schemeClr val="lt1"/>
+          </a:fontRef>
+        </p:style>
+        <p:txBody>
+          <a:bodyPr rtlCol="0" anchor="ctr"/>
+          <a:lstStyle/>
+          <a:p>
+            <a:pPr algn="ctr"/>
+          </a:p>
+        </p:txBody>
+      </p:sp>
+      <p:sp>
+        <p:nvSpPr>
+          <p:cNvPr id="10" name="TextBox 9"/>
+          <p:cNvSpPr txBox="1"/>
+          <p:nvPr/>
+        </p:nvSpPr>
+        <p:spPr>
+          <a:xfrm>
+            <a:off x="694944" y="2139696"/>
+            <a:ext cx="5376672" cy="219456"/>
+          </a:xfrm>
+          <a:prstGeom prst="rect">
+            <a:avLst/>
+          </a:prstGeom>
+          <a:noFill/>
+        </p:spPr>
+        <p:txBody>
+          <a:bodyPr wrap="square" lIns="0" rIns="0" tIns="0" bIns="0" anchor="t">
+            <a:spAutoFit/>
+          </a:bodyPr>
+          <a:lstStyle/>
+          <a:p>
+            <a:pPr algn="l">
+              <a:spcBef>
+                <a:spcPts val="0"/>
+              </a:spcBef>
+              <a:spcAft>
+                <a:spcPts val="0"/>
+              </a:spcAft>
+            </a:pPr>
+            <a:r>
+              <a:rPr sz="1150" b="1">
+                <a:solidFill>
+                  <a:srgbClr val="119DA4"/>
+                </a:solidFill>
+                <a:latin typeface="微軟正黑體"/>
+              </a:rPr>
+              <a:t>產品規模與品質</a:t>
+            </a:r>
+          </a:p>
+        </p:txBody>
+      </p:sp>
+      <p:sp>
+        <p:nvSpPr>
+          <p:cNvPr id="11" name="Rectangle 10"/>
+          <p:cNvSpPr/>
+          <p:nvPr/>
+        </p:nvSpPr>
+        <p:spPr>
+          <a:xfrm>
+            <a:off x="566928" y="2432304"/>
+            <a:ext cx="5376672" cy="310896"/>
           </a:xfrm>
           <a:prstGeom prst="rect">
             <a:avLst/>
@@ -5166,14 +5253,14 @@
       </p:sp>
       <p:sp>
         <p:nvSpPr>
-          <p:cNvPr id="10" name="TextBox 9"/>
+          <p:cNvPr id="12" name="TextBox 11"/>
           <p:cNvSpPr txBox="1"/>
           <p:nvPr/>
         </p:nvSpPr>
         <p:spPr>
           <a:xfrm>
-            <a:off x="841248" y="2286000"/>
-            <a:ext cx="4846320" cy="320040"/>
+            <a:off x="694944" y="2496312"/>
+            <a:ext cx="1572768" cy="219456"/>
           </a:xfrm>
           <a:prstGeom prst="rect">
             <a:avLst/>
@@ -5195,38 +5282,246 @@
               </a:spcAft>
             </a:pPr>
             <a:r>
-              <a:rPr sz="1300" b="1">
-                <a:solidFill>
-                  <a:srgbClr val="119DA4"/>
-                </a:solidFill>
-                <a:latin typeface="微軟正黑體"/>
-              </a:rPr>
-              <a:t>北極星指標</a:t>
-            </a:r>
-          </a:p>
-        </p:txBody>
-      </p:sp>
-      <p:sp>
-        <p:nvSpPr>
-          <p:cNvPr id="11" name="Rectangle 10"/>
+              <a:rPr sz="1150" b="0">
+                <a:solidFill>
+                  <a:srgbClr val="1B2633"/>
+                </a:solidFill>
+                <a:latin typeface="微軟正黑體"/>
+              </a:rPr>
+              <a:t>程式碼規模</a:t>
+            </a:r>
+          </a:p>
+        </p:txBody>
+      </p:sp>
+      <p:sp>
+        <p:nvSpPr>
+          <p:cNvPr id="13" name="TextBox 12"/>
+          <p:cNvSpPr txBox="1"/>
+          <p:nvPr/>
+        </p:nvSpPr>
+        <p:spPr>
+          <a:xfrm>
+            <a:off x="2322576" y="2487168"/>
+            <a:ext cx="1901952" cy="219456"/>
+          </a:xfrm>
+          <a:prstGeom prst="rect">
+            <a:avLst/>
+          </a:prstGeom>
+          <a:noFill/>
+        </p:spPr>
+        <p:txBody>
+          <a:bodyPr wrap="square" lIns="0" rIns="0" tIns="0" bIns="0" anchor="t">
+            <a:spAutoFit/>
+          </a:bodyPr>
+          <a:lstStyle/>
+          <a:p>
+            <a:pPr algn="l">
+              <a:spcBef>
+                <a:spcPts val="0"/>
+              </a:spcBef>
+              <a:spcAft>
+                <a:spcPts val="0"/>
+              </a:spcAft>
+            </a:pPr>
+            <a:r>
+              <a:rPr sz="1200" b="1">
+                <a:solidFill>
+                  <a:srgbClr val="102A43"/>
+                </a:solidFill>
+                <a:latin typeface="微軟正黑體"/>
+              </a:rPr>
+              <a:t>3,603 行 ／ 19 個模組</a:t>
+            </a:r>
+          </a:p>
+        </p:txBody>
+      </p:sp>
+      <p:sp>
+        <p:nvSpPr>
+          <p:cNvPr id="14" name="TextBox 13"/>
+          <p:cNvSpPr txBox="1"/>
+          <p:nvPr/>
+        </p:nvSpPr>
+        <p:spPr>
+          <a:xfrm>
+            <a:off x="4279391" y="2505456"/>
+            <a:ext cx="1572768" cy="219456"/>
+          </a:xfrm>
+          <a:prstGeom prst="rect">
+            <a:avLst/>
+          </a:prstGeom>
+          <a:noFill/>
+        </p:spPr>
+        <p:txBody>
+          <a:bodyPr wrap="square" lIns="0" rIns="0" tIns="0" bIns="0" anchor="t">
+            <a:spAutoFit/>
+          </a:bodyPr>
+          <a:lstStyle/>
+          <a:p>
+            <a:pPr algn="l">
+              <a:spcBef>
+                <a:spcPts val="0"/>
+              </a:spcBef>
+              <a:spcAft>
+                <a:spcPts val="0"/>
+              </a:spcAft>
+            </a:pPr>
+            <a:r>
+              <a:rPr sz="1000" b="0">
+                <a:solidFill>
+                  <a:srgbClr val="5B6B7B"/>
+                </a:solidFill>
+                <a:latin typeface="Consolas"/>
+              </a:rPr>
+              <a:t>wc -l src/*.ts</a:t>
+            </a:r>
+          </a:p>
+        </p:txBody>
+      </p:sp>
+      <p:sp>
+        <p:nvSpPr>
+          <p:cNvPr id="15" name="TextBox 14"/>
+          <p:cNvSpPr txBox="1"/>
+          <p:nvPr/>
+        </p:nvSpPr>
+        <p:spPr>
+          <a:xfrm>
+            <a:off x="694944" y="2807208"/>
+            <a:ext cx="1572768" cy="219456"/>
+          </a:xfrm>
+          <a:prstGeom prst="rect">
+            <a:avLst/>
+          </a:prstGeom>
+          <a:noFill/>
+        </p:spPr>
+        <p:txBody>
+          <a:bodyPr wrap="square" lIns="0" rIns="0" tIns="0" bIns="0" anchor="t">
+            <a:spAutoFit/>
+          </a:bodyPr>
+          <a:lstStyle/>
+          <a:p>
+            <a:pPr algn="l">
+              <a:spcBef>
+                <a:spcPts val="0"/>
+              </a:spcBef>
+              <a:spcAft>
+                <a:spcPts val="0"/>
+              </a:spcAft>
+            </a:pPr>
+            <a:r>
+              <a:rPr sz="1150" b="0">
+                <a:solidFill>
+                  <a:srgbClr val="1B2633"/>
+                </a:solidFill>
+                <a:latin typeface="微軟正黑體"/>
+              </a:rPr>
+              <a:t>測試</a:t>
+            </a:r>
+          </a:p>
+        </p:txBody>
+      </p:sp>
+      <p:sp>
+        <p:nvSpPr>
+          <p:cNvPr id="16" name="TextBox 15"/>
+          <p:cNvSpPr txBox="1"/>
+          <p:nvPr/>
+        </p:nvSpPr>
+        <p:spPr>
+          <a:xfrm>
+            <a:off x="2322576" y="2798064"/>
+            <a:ext cx="1901952" cy="219456"/>
+          </a:xfrm>
+          <a:prstGeom prst="rect">
+            <a:avLst/>
+          </a:prstGeom>
+          <a:noFill/>
+        </p:spPr>
+        <p:txBody>
+          <a:bodyPr wrap="square" lIns="0" rIns="0" tIns="0" bIns="0" anchor="t">
+            <a:spAutoFit/>
+          </a:bodyPr>
+          <a:lstStyle/>
+          <a:p>
+            <a:pPr algn="l">
+              <a:spcBef>
+                <a:spcPts val="0"/>
+              </a:spcBef>
+              <a:spcAft>
+                <a:spcPts val="0"/>
+              </a:spcAft>
+            </a:pPr>
+            <a:r>
+              <a:rPr sz="1200" b="1">
+                <a:solidFill>
+                  <a:srgbClr val="102A43"/>
+                </a:solidFill>
+                <a:latin typeface="微軟正黑體"/>
+              </a:rPr>
+              <a:t>96 項，全數通過</a:t>
+            </a:r>
+          </a:p>
+        </p:txBody>
+      </p:sp>
+      <p:sp>
+        <p:nvSpPr>
+          <p:cNvPr id="17" name="TextBox 16"/>
+          <p:cNvSpPr txBox="1"/>
+          <p:nvPr/>
+        </p:nvSpPr>
+        <p:spPr>
+          <a:xfrm>
+            <a:off x="4279391" y="2816352"/>
+            <a:ext cx="1572768" cy="219456"/>
+          </a:xfrm>
+          <a:prstGeom prst="rect">
+            <a:avLst/>
+          </a:prstGeom>
+          <a:noFill/>
+        </p:spPr>
+        <p:txBody>
+          <a:bodyPr wrap="square" lIns="0" rIns="0" tIns="0" bIns="0" anchor="t">
+            <a:spAutoFit/>
+          </a:bodyPr>
+          <a:lstStyle/>
+          <a:p>
+            <a:pPr algn="l">
+              <a:spcBef>
+                <a:spcPts val="0"/>
+              </a:spcBef>
+              <a:spcAft>
+                <a:spcPts val="0"/>
+              </a:spcAft>
+            </a:pPr>
+            <a:r>
+              <a:rPr sz="1000" b="0">
+                <a:solidFill>
+                  <a:srgbClr val="5B6B7B"/>
+                </a:solidFill>
+                <a:latin typeface="Consolas"/>
+              </a:rPr>
+              <a:t>npm test</a:t>
+            </a:r>
+          </a:p>
+        </p:txBody>
+      </p:sp>
+      <p:sp>
+        <p:nvSpPr>
+          <p:cNvPr id="18" name="Rectangle 17"/>
           <p:cNvSpPr/>
           <p:nvPr/>
         </p:nvSpPr>
         <p:spPr>
           <a:xfrm>
-            <a:off x="841248" y="2633472"/>
-            <a:ext cx="4828032" cy="658368"/>
+            <a:off x="566928" y="3054096"/>
+            <a:ext cx="5376672" cy="310896"/>
           </a:xfrm>
           <a:prstGeom prst="rect">
             <a:avLst/>
           </a:prstGeom>
           <a:solidFill>
-            <a:srgbClr val="FFFFFF"/>
+            <a:srgbClr val="F2F5F8"/>
           </a:solidFill>
-          <a:ln w="12700">
-            <a:solidFill>
-              <a:srgbClr val="D8DFE6"/>
-            </a:solidFill>
+          <a:ln>
+            <a:noFill/>
           </a:ln>
           <a:effectLst/>
         </p:spPr>
@@ -5254,14 +5549,14 @@
       </p:sp>
       <p:sp>
         <p:nvSpPr>
-          <p:cNvPr id="12" name="TextBox 11"/>
+          <p:cNvPr id="19" name="TextBox 18"/>
           <p:cNvSpPr txBox="1"/>
           <p:nvPr/>
         </p:nvSpPr>
         <p:spPr>
           <a:xfrm>
-            <a:off x="960120" y="2798064"/>
-            <a:ext cx="4590288" cy="365760"/>
+            <a:off x="694944" y="3118104"/>
+            <a:ext cx="1572768" cy="219456"/>
           </a:xfrm>
           <a:prstGeom prst="rect">
             <a:avLst/>
@@ -5274,36 +5569,36 @@
           </a:bodyPr>
           <a:lstStyle/>
           <a:p>
-            <a:pPr algn="ctr">
-              <a:spcBef>
-                <a:spcPts val="0"/>
-              </a:spcBef>
-              <a:spcAft>
-                <a:spcPts val="0"/>
-              </a:spcAft>
-            </a:pPr>
-            <a:r>
-              <a:rPr sz="1550" b="1">
-                <a:solidFill>
-                  <a:srgbClr val="102A43"/>
-                </a:solidFill>
-                <a:latin typeface="微軟正黑體"/>
-              </a:rPr>
-              <a:t>採納率　＝　被修掉的意見數　÷　提出的意見數</a:t>
-            </a:r>
-          </a:p>
-        </p:txBody>
-      </p:sp>
-      <p:sp>
-        <p:nvSpPr>
-          <p:cNvPr id="13" name="TextBox 12"/>
+            <a:pPr algn="l">
+              <a:spcBef>
+                <a:spcPts val="0"/>
+              </a:spcBef>
+              <a:spcAft>
+                <a:spcPts val="0"/>
+              </a:spcAft>
+            </a:pPr>
+            <a:r>
+              <a:rPr sz="1150" b="0">
+                <a:solidFill>
+                  <a:srgbClr val="1B2633"/>
+                </a:solidFill>
+                <a:latin typeface="微軟正黑體"/>
+              </a:rPr>
+              <a:t>開發期間</a:t>
+            </a:r>
+          </a:p>
+        </p:txBody>
+      </p:sp>
+      <p:sp>
+        <p:nvSpPr>
+          <p:cNvPr id="20" name="TextBox 19"/>
           <p:cNvSpPr txBox="1"/>
           <p:nvPr/>
         </p:nvSpPr>
         <p:spPr>
           <a:xfrm>
-            <a:off x="841248" y="3493008"/>
-            <a:ext cx="4846320" cy="1737360"/>
+            <a:off x="2322576" y="3108960"/>
+            <a:ext cx="1901952" cy="219456"/>
           </a:xfrm>
           <a:prstGeom prst="rect">
             <a:avLst/>
@@ -5321,179 +5616,31 @@
                 <a:spcPts val="0"/>
               </a:spcBef>
               <a:spcAft>
-                <a:spcPts val="300"/>
-              </a:spcAft>
-            </a:pPr>
-            <a:r>
-              <a:rPr sz="1250" b="1">
+                <a:spcPts val="0"/>
+              </a:spcAft>
+            </a:pPr>
+            <a:r>
+              <a:rPr sz="1200" b="1">
                 <a:solidFill>
                   <a:srgbClr val="102A43"/>
                 </a:solidFill>
                 <a:latin typeface="微軟正黑體"/>
               </a:rPr>
-              <a:t>為什麼可信</a:t>
-            </a:r>
-          </a:p>
-          <a:p>
-            <a:pPr>
-              <a:lnSpc>
-                <a:spcPct val="125000"/>
-              </a:lnSpc>
-              <a:spcBef>
-                <a:spcPts val="0"/>
-              </a:spcBef>
-              <a:spcAft>
-                <a:spcPts val="0"/>
-              </a:spcAft>
-            </a:pPr>
-            <a:r>
-              <a:rPr sz="1150" b="0">
-                <a:solidFill>
-                  <a:srgbClr val="5B6B7B"/>
-                </a:solidFill>
-                <a:latin typeface="微軟正黑體"/>
-              </a:rPr>
-              <a:t>工程師真的動手改了那行程式碼才算採納。沒有人會為了配合 KPI 去改自己的韌體。</a:t>
-            </a:r>
-          </a:p>
-          <a:p>
-            <a:pPr>
-              <a:spcBef>
-                <a:spcPts val="900"/>
-              </a:spcBef>
-              <a:spcAft>
-                <a:spcPts val="300"/>
-              </a:spcAft>
-            </a:pPr>
-            <a:r>
-              <a:rPr sz="1250" b="1">
-                <a:solidFill>
-                  <a:srgbClr val="102A43"/>
-                </a:solidFill>
-                <a:latin typeface="微軟正黑體"/>
-              </a:rPr>
-              <a:t>怎麼判定</a:t>
-            </a:r>
-          </a:p>
-          <a:p>
-            <a:pPr>
-              <a:lnSpc>
-                <a:spcPct val="125000"/>
-              </a:lnSpc>
-              <a:spcBef>
-                <a:spcPts val="0"/>
-              </a:spcBef>
-              <a:spcAft>
-                <a:spcPts val="0"/>
-              </a:spcAft>
-            </a:pPr>
-            <a:r>
-              <a:rPr sz="1150" b="0">
-                <a:solidFill>
-                  <a:srgbClr val="5B6B7B"/>
-                </a:solidFill>
-                <a:latin typeface="微軟正黑體"/>
-              </a:rPr>
-              <a:t>比對前後兩輪審查的意見識別碼：消失、且那行程式碼已變動即為已修正。全自動，使用者不必按任何按鈕。</a:t>
-            </a:r>
-          </a:p>
-          <a:p>
-            <a:pPr>
-              <a:spcBef>
-                <a:spcPts val="900"/>
-              </a:spcBef>
-              <a:spcAft>
-                <a:spcPts val="300"/>
-              </a:spcAft>
-            </a:pPr>
-            <a:r>
-              <a:rPr sz="1250" b="1">
-                <a:solidFill>
-                  <a:srgbClr val="102A43"/>
-                </a:solidFill>
-                <a:latin typeface="微軟正黑體"/>
-              </a:rPr>
-              <a:t>要補什麼</a:t>
-            </a:r>
-          </a:p>
-          <a:p>
-            <a:pPr>
-              <a:lnSpc>
-                <a:spcPct val="125000"/>
-              </a:lnSpc>
-              <a:spcBef>
-                <a:spcPts val="0"/>
-              </a:spcBef>
-              <a:spcAft>
-                <a:spcPts val="0"/>
-              </a:spcAft>
-            </a:pPr>
-            <a:r>
-              <a:rPr sz="1150" b="0">
-                <a:solidFill>
-                  <a:srgbClr val="5B6B7B"/>
-                </a:solidFill>
-                <a:latin typeface="微軟正黑體"/>
-              </a:rPr>
-              <a:t>現有稽核日誌記的是「請求」，不是「意見的下場」。需新增一份意見記錄檔與匯出指令。</a:t>
-            </a:r>
-          </a:p>
-        </p:txBody>
-      </p:sp>
-      <p:sp>
-        <p:nvSpPr>
-          <p:cNvPr id="14" name="Rectangle 13"/>
-          <p:cNvSpPr/>
-          <p:nvPr/>
-        </p:nvSpPr>
-        <p:spPr>
-          <a:xfrm>
-            <a:off x="6254496" y="2103120"/>
-            <a:ext cx="5376672" cy="3310128"/>
-          </a:xfrm>
-          <a:prstGeom prst="rect">
-            <a:avLst/>
-          </a:prstGeom>
-          <a:noFill/>
-          <a:ln w="12700">
-            <a:solidFill>
-              <a:srgbClr val="D8DFE6"/>
-            </a:solidFill>
-          </a:ln>
-          <a:effectLst/>
-        </p:spPr>
-        <p:style>
-          <a:lnRef idx="1">
-            <a:schemeClr val="accent1"/>
-          </a:lnRef>
-          <a:fillRef idx="3">
-            <a:schemeClr val="accent1"/>
-          </a:fillRef>
-          <a:effectRef idx="2">
-            <a:schemeClr val="accent1"/>
-          </a:effectRef>
-          <a:fontRef idx="minor">
-            <a:schemeClr val="lt1"/>
-          </a:fontRef>
-        </p:style>
-        <p:txBody>
-          <a:bodyPr rtlCol="0" anchor="ctr"/>
-          <a:lstStyle/>
-          <a:p>
-            <a:pPr algn="ctr"/>
-          </a:p>
-        </p:txBody>
-      </p:sp>
-      <p:sp>
-        <p:nvSpPr>
-          <p:cNvPr id="15" name="TextBox 14"/>
+              <a:t>14 天 ／ 45 次提交</a:t>
+            </a:r>
+          </a:p>
+        </p:txBody>
+      </p:sp>
+      <p:sp>
+        <p:nvSpPr>
+          <p:cNvPr id="21" name="TextBox 20"/>
           <p:cNvSpPr txBox="1"/>
           <p:nvPr/>
         </p:nvSpPr>
         <p:spPr>
           <a:xfrm>
-            <a:off x="6528816" y="2286000"/>
-            <a:ext cx="4846320" cy="320040"/>
+            <a:off x="4279391" y="3127248"/>
+            <a:ext cx="1572768" cy="219456"/>
           </a:xfrm>
           <a:prstGeom prst="rect">
             <a:avLst/>
@@ -5515,27 +5662,153 @@
               </a:spcAft>
             </a:pPr>
             <a:r>
-              <a:rPr sz="1300" b="1">
-                <a:solidFill>
-                  <a:srgbClr val="119DA4"/>
-                </a:solidFill>
-                <a:latin typeface="微軟正黑體"/>
-              </a:rPr>
-              <a:t>指標分層</a:t>
-            </a:r>
-          </a:p>
-        </p:txBody>
-      </p:sp>
-      <p:sp>
-        <p:nvSpPr>
-          <p:cNvPr id="16" name="Rectangle 15"/>
+              <a:rPr sz="1000" b="0">
+                <a:solidFill>
+                  <a:srgbClr val="5B6B7B"/>
+                </a:solidFill>
+                <a:latin typeface="Consolas"/>
+              </a:rPr>
+              <a:t>git log</a:t>
+            </a:r>
+          </a:p>
+        </p:txBody>
+      </p:sp>
+      <p:sp>
+        <p:nvSpPr>
+          <p:cNvPr id="22" name="TextBox 21"/>
+          <p:cNvSpPr txBox="1"/>
+          <p:nvPr/>
+        </p:nvSpPr>
+        <p:spPr>
+          <a:xfrm>
+            <a:off x="694944" y="3429000"/>
+            <a:ext cx="1572768" cy="219456"/>
+          </a:xfrm>
+          <a:prstGeom prst="rect">
+            <a:avLst/>
+          </a:prstGeom>
+          <a:noFill/>
+        </p:spPr>
+        <p:txBody>
+          <a:bodyPr wrap="square" lIns="0" rIns="0" tIns="0" bIns="0" anchor="t">
+            <a:spAutoFit/>
+          </a:bodyPr>
+          <a:lstStyle/>
+          <a:p>
+            <a:pPr algn="l">
+              <a:spcBef>
+                <a:spcPts val="0"/>
+              </a:spcBef>
+              <a:spcAft>
+                <a:spcPts val="0"/>
+              </a:spcAft>
+            </a:pPr>
+            <a:r>
+              <a:rPr sz="1150" b="0">
+                <a:solidFill>
+                  <a:srgbClr val="1B2633"/>
+                </a:solidFill>
+                <a:latin typeface="微軟正黑體"/>
+              </a:rPr>
+              <a:t>目前版本</a:t>
+            </a:r>
+          </a:p>
+        </p:txBody>
+      </p:sp>
+      <p:sp>
+        <p:nvSpPr>
+          <p:cNvPr id="23" name="TextBox 22"/>
+          <p:cNvSpPr txBox="1"/>
+          <p:nvPr/>
+        </p:nvSpPr>
+        <p:spPr>
+          <a:xfrm>
+            <a:off x="2322576" y="3419856"/>
+            <a:ext cx="1901952" cy="219456"/>
+          </a:xfrm>
+          <a:prstGeom prst="rect">
+            <a:avLst/>
+          </a:prstGeom>
+          <a:noFill/>
+        </p:spPr>
+        <p:txBody>
+          <a:bodyPr wrap="square" lIns="0" rIns="0" tIns="0" bIns="0" anchor="t">
+            <a:spAutoFit/>
+          </a:bodyPr>
+          <a:lstStyle/>
+          <a:p>
+            <a:pPr algn="l">
+              <a:spcBef>
+                <a:spcPts val="0"/>
+              </a:spcBef>
+              <a:spcAft>
+                <a:spcPts val="0"/>
+              </a:spcAft>
+            </a:pPr>
+            <a:r>
+              <a:rPr sz="1200" b="1">
+                <a:solidFill>
+                  <a:srgbClr val="102A43"/>
+                </a:solidFill>
+                <a:latin typeface="微軟正黑體"/>
+              </a:rPr>
+              <a:t>v0.5.1</a:t>
+            </a:r>
+          </a:p>
+        </p:txBody>
+      </p:sp>
+      <p:sp>
+        <p:nvSpPr>
+          <p:cNvPr id="24" name="TextBox 23"/>
+          <p:cNvSpPr txBox="1"/>
+          <p:nvPr/>
+        </p:nvSpPr>
+        <p:spPr>
+          <a:xfrm>
+            <a:off x="4279391" y="3438144"/>
+            <a:ext cx="1572768" cy="219456"/>
+          </a:xfrm>
+          <a:prstGeom prst="rect">
+            <a:avLst/>
+          </a:prstGeom>
+          <a:noFill/>
+        </p:spPr>
+        <p:txBody>
+          <a:bodyPr wrap="square" lIns="0" rIns="0" tIns="0" bIns="0" anchor="t">
+            <a:spAutoFit/>
+          </a:bodyPr>
+          <a:lstStyle/>
+          <a:p>
+            <a:pPr algn="l">
+              <a:spcBef>
+                <a:spcPts val="0"/>
+              </a:spcBef>
+              <a:spcAft>
+                <a:spcPts val="0"/>
+              </a:spcAft>
+            </a:pPr>
+            <a:r>
+              <a:rPr sz="1000" b="0">
+                <a:solidFill>
+                  <a:srgbClr val="5B6B7B"/>
+                </a:solidFill>
+                <a:latin typeface="Consolas"/>
+              </a:rPr>
+              <a:t>package.json</a:t>
+            </a:r>
+          </a:p>
+        </p:txBody>
+      </p:sp>
+      <p:sp>
+        <p:nvSpPr>
+          <p:cNvPr id="25" name="Rectangle 24"/>
           <p:cNvSpPr/>
           <p:nvPr/>
         </p:nvSpPr>
         <p:spPr>
           <a:xfrm>
-            <a:off x="6528816" y="2670048"/>
-            <a:ext cx="932688" cy="566928"/>
+            <a:off x="566928" y="3803904"/>
+            <a:ext cx="34290" cy="237744"/>
           </a:xfrm>
           <a:prstGeom prst="rect">
             <a:avLst/>
@@ -5572,14 +5845,14 @@
       </p:sp>
       <p:sp>
         <p:nvSpPr>
-          <p:cNvPr id="17" name="TextBox 16"/>
+          <p:cNvPr id="26" name="TextBox 25"/>
           <p:cNvSpPr txBox="1"/>
           <p:nvPr/>
         </p:nvSpPr>
         <p:spPr>
           <a:xfrm>
-            <a:off x="6528816" y="2834640"/>
-            <a:ext cx="932688" cy="274320"/>
+            <a:off x="694944" y="3822192"/>
+            <a:ext cx="5376672" cy="219456"/>
           </a:xfrm>
           <a:prstGeom prst="rect">
             <a:avLst/>
@@ -5592,7 +5865,7 @@
           </a:bodyPr>
           <a:lstStyle/>
           <a:p>
-            <a:pPr algn="ctr">
+            <a:pPr algn="l">
               <a:spcBef>
                 <a:spcPts val="0"/>
               </a:spcBef>
@@ -5603,95 +5876,31 @@
             <a:r>
               <a:rPr sz="1150" b="1">
                 <a:solidFill>
-                  <a:srgbClr val="FFFFFF"/>
-                </a:solidFill>
-                <a:latin typeface="微軟正黑體"/>
-              </a:rPr>
-              <a:t>北極星</a:t>
-            </a:r>
-          </a:p>
-        </p:txBody>
-      </p:sp>
-      <p:sp>
-        <p:nvSpPr>
-          <p:cNvPr id="18" name="TextBox 17"/>
-          <p:cNvSpPr txBox="1"/>
-          <p:nvPr/>
-        </p:nvSpPr>
-        <p:spPr>
-          <a:xfrm>
-            <a:off x="7607808" y="2706624"/>
-            <a:ext cx="3840480" cy="566928"/>
-          </a:xfrm>
-          <a:prstGeom prst="rect">
-            <a:avLst/>
-          </a:prstGeom>
-          <a:noFill/>
-        </p:spPr>
-        <p:txBody>
-          <a:bodyPr wrap="square" lIns="0" rIns="0" tIns="0" bIns="0" anchor="t">
-            <a:spAutoFit/>
-          </a:bodyPr>
-          <a:lstStyle/>
-          <a:p>
-            <a:pPr algn="l">
-              <a:spcBef>
-                <a:spcPts val="0"/>
-              </a:spcBef>
-              <a:spcAft>
-                <a:spcPts val="200"/>
-              </a:spcAft>
-            </a:pPr>
-            <a:r>
-              <a:rPr sz="1250" b="1">
-                <a:solidFill>
-                  <a:srgbClr val="102A43"/>
-                </a:solidFill>
-                <a:latin typeface="微軟正黑體"/>
-              </a:rPr>
-              <a:t>採納率</a:t>
-            </a:r>
-          </a:p>
-          <a:p>
-            <a:pPr>
-              <a:lnSpc>
-                <a:spcPct val="120000"/>
-              </a:lnSpc>
-              <a:spcBef>
-                <a:spcPts val="0"/>
-              </a:spcBef>
-              <a:spcAft>
-                <a:spcPts val="0"/>
-              </a:spcAft>
-            </a:pPr>
-            <a:r>
-              <a:rPr sz="1100" b="0">
-                <a:solidFill>
-                  <a:srgbClr val="5B6B7B"/>
-                </a:solidFill>
-                <a:latin typeface="微軟正黑體"/>
-              </a:rPr>
-              <a:t>唯一不需要 ground truth 的價值證明</a:t>
-            </a:r>
-          </a:p>
-        </p:txBody>
-      </p:sp>
-      <p:sp>
-        <p:nvSpPr>
-          <p:cNvPr id="19" name="Rectangle 18"/>
+                  <a:srgbClr val="119DA4"/>
+                </a:solidFill>
+                <a:latin typeface="微軟正黑體"/>
+              </a:rPr>
+              <a:t>規則與知識庫</a:t>
+            </a:r>
+          </a:p>
+        </p:txBody>
+      </p:sp>
+      <p:sp>
+        <p:nvSpPr>
+          <p:cNvPr id="27" name="Rectangle 26"/>
           <p:cNvSpPr/>
           <p:nvPr/>
         </p:nvSpPr>
         <p:spPr>
           <a:xfrm>
-            <a:off x="6528816" y="3328416"/>
-            <a:ext cx="932688" cy="566928"/>
+            <a:off x="566928" y="4114800"/>
+            <a:ext cx="5376672" cy="310896"/>
           </a:xfrm>
           <a:prstGeom prst="rect">
             <a:avLst/>
           </a:prstGeom>
           <a:solidFill>
-            <a:srgbClr val="1C446B"/>
+            <a:srgbClr val="F2F5F8"/>
           </a:solidFill>
           <a:ln>
             <a:noFill/>
@@ -5722,14 +5931,14 @@
       </p:sp>
       <p:sp>
         <p:nvSpPr>
-          <p:cNvPr id="20" name="TextBox 19"/>
+          <p:cNvPr id="28" name="TextBox 27"/>
           <p:cNvSpPr txBox="1"/>
           <p:nvPr/>
         </p:nvSpPr>
         <p:spPr>
           <a:xfrm>
-            <a:off x="6528816" y="3493008"/>
-            <a:ext cx="932688" cy="274320"/>
+            <a:off x="694944" y="4178808"/>
+            <a:ext cx="1572768" cy="219456"/>
           </a:xfrm>
           <a:prstGeom prst="rect">
             <a:avLst/>
@@ -5742,36 +5951,36 @@
           </a:bodyPr>
           <a:lstStyle/>
           <a:p>
-            <a:pPr algn="ctr">
-              <a:spcBef>
-                <a:spcPts val="0"/>
-              </a:spcBef>
-              <a:spcAft>
-                <a:spcPts val="0"/>
-              </a:spcAft>
-            </a:pPr>
-            <a:r>
-              <a:rPr sz="1150" b="1">
-                <a:solidFill>
-                  <a:srgbClr val="FFFFFF"/>
-                </a:solidFill>
-                <a:latin typeface="微軟正黑體"/>
-              </a:rPr>
-              <a:t>領先</a:t>
-            </a:r>
-          </a:p>
-        </p:txBody>
-      </p:sp>
-      <p:sp>
-        <p:nvSpPr>
-          <p:cNvPr id="21" name="TextBox 20"/>
+            <a:pPr algn="l">
+              <a:spcBef>
+                <a:spcPts val="0"/>
+              </a:spcBef>
+              <a:spcAft>
+                <a:spcPts val="0"/>
+              </a:spcAft>
+            </a:pPr>
+            <a:r>
+              <a:rPr sz="1150" b="0">
+                <a:solidFill>
+                  <a:srgbClr val="1B2633"/>
+                </a:solidFill>
+                <a:latin typeface="微軟正黑體"/>
+              </a:rPr>
+              <a:t>團隊規則</a:t>
+            </a:r>
+          </a:p>
+        </p:txBody>
+      </p:sp>
+      <p:sp>
+        <p:nvSpPr>
+          <p:cNvPr id="29" name="TextBox 28"/>
           <p:cNvSpPr txBox="1"/>
           <p:nvPr/>
         </p:nvSpPr>
         <p:spPr>
           <a:xfrm>
-            <a:off x="7607808" y="3364992"/>
-            <a:ext cx="3840480" cy="566928"/>
+            <a:off x="2322576" y="4169664"/>
+            <a:ext cx="1901952" cy="219456"/>
           </a:xfrm>
           <a:prstGeom prst="rect">
             <a:avLst/>
@@ -5789,59 +5998,205 @@
                 <a:spcPts val="0"/>
               </a:spcBef>
               <a:spcAft>
-                <a:spcPts val="200"/>
-              </a:spcAft>
-            </a:pPr>
-            <a:r>
-              <a:rPr sz="1250" b="1">
+                <a:spcPts val="0"/>
+              </a:spcAft>
+            </a:pPr>
+            <a:r>
+              <a:rPr sz="1200" b="1">
                 <a:solidFill>
                   <a:srgbClr val="102A43"/>
                 </a:solidFill>
                 <a:latin typeface="微軟正黑體"/>
               </a:rPr>
-              <a:t>每週活躍人數、每人每週採納數</a:t>
-            </a:r>
-          </a:p>
-          <a:p>
-            <a:pPr>
-              <a:lnSpc>
-                <a:spcPct val="120000"/>
-              </a:lnSpc>
-              <a:spcBef>
-                <a:spcPts val="0"/>
-              </a:spcBef>
-              <a:spcAft>
-                <a:spcPts val="0"/>
-              </a:spcAft>
-            </a:pPr>
-            <a:r>
-              <a:rPr sz="1100" b="0">
+              <a:t>10 條（error 8／warning 2）</a:t>
+            </a:r>
+          </a:p>
+        </p:txBody>
+      </p:sp>
+      <p:sp>
+        <p:nvSpPr>
+          <p:cNvPr id="30" name="TextBox 29"/>
+          <p:cNvSpPr txBox="1"/>
+          <p:nvPr/>
+        </p:nvSpPr>
+        <p:spPr>
+          <a:xfrm>
+            <a:off x="4279391" y="4187952"/>
+            <a:ext cx="1572768" cy="219456"/>
+          </a:xfrm>
+          <a:prstGeom prst="rect">
+            <a:avLst/>
+          </a:prstGeom>
+          <a:noFill/>
+        </p:spPr>
+        <p:txBody>
+          <a:bodyPr wrap="square" lIns="0" rIns="0" tIns="0" bIns="0" anchor="t">
+            <a:spAutoFit/>
+          </a:bodyPr>
+          <a:lstStyle/>
+          <a:p>
+            <a:pPr algn="l">
+              <a:spcBef>
+                <a:spcPts val="0"/>
+              </a:spcBef>
+              <a:spcAft>
+                <a:spcPts val="0"/>
+              </a:spcAft>
+            </a:pPr>
+            <a:r>
+              <a:rPr sz="1000" b="0">
                 <a:solidFill>
                   <a:srgbClr val="5B6B7B"/>
                 </a:solidFill>
-                <a:latin typeface="微軟正黑體"/>
-              </a:rPr>
-              <a:t>兩週就看得出趨勢，不必等三個月</a:t>
-            </a:r>
-          </a:p>
-        </p:txBody>
-      </p:sp>
-      <p:sp>
-        <p:nvSpPr>
-          <p:cNvPr id="22" name="Rectangle 21"/>
+                <a:latin typeface="Consolas"/>
+              </a:rPr>
+              <a:t>.sensai/rules.yaml</a:t>
+            </a:r>
+          </a:p>
+        </p:txBody>
+      </p:sp>
+      <p:sp>
+        <p:nvSpPr>
+          <p:cNvPr id="31" name="TextBox 30"/>
+          <p:cNvSpPr txBox="1"/>
+          <p:nvPr/>
+        </p:nvSpPr>
+        <p:spPr>
+          <a:xfrm>
+            <a:off x="694944" y="4489704"/>
+            <a:ext cx="1572768" cy="219456"/>
+          </a:xfrm>
+          <a:prstGeom prst="rect">
+            <a:avLst/>
+          </a:prstGeom>
+          <a:noFill/>
+        </p:spPr>
+        <p:txBody>
+          <a:bodyPr wrap="square" lIns="0" rIns="0" tIns="0" bIns="0" anchor="t">
+            <a:spAutoFit/>
+          </a:bodyPr>
+          <a:lstStyle/>
+          <a:p>
+            <a:pPr algn="l">
+              <a:spcBef>
+                <a:spcPts val="0"/>
+              </a:spcBef>
+              <a:spcAft>
+                <a:spcPts val="0"/>
+              </a:spcAft>
+            </a:pPr>
+            <a:r>
+              <a:rPr sz="1150" b="0">
+                <a:solidFill>
+                  <a:srgbClr val="1B2633"/>
+                </a:solidFill>
+                <a:latin typeface="微軟正黑體"/>
+              </a:rPr>
+              <a:t>架構 ABI 事實</a:t>
+            </a:r>
+          </a:p>
+        </p:txBody>
+      </p:sp>
+      <p:sp>
+        <p:nvSpPr>
+          <p:cNvPr id="32" name="TextBox 31"/>
+          <p:cNvSpPr txBox="1"/>
+          <p:nvPr/>
+        </p:nvSpPr>
+        <p:spPr>
+          <a:xfrm>
+            <a:off x="2322576" y="4480560"/>
+            <a:ext cx="1901952" cy="219456"/>
+          </a:xfrm>
+          <a:prstGeom prst="rect">
+            <a:avLst/>
+          </a:prstGeom>
+          <a:noFill/>
+        </p:spPr>
+        <p:txBody>
+          <a:bodyPr wrap="square" lIns="0" rIns="0" tIns="0" bIns="0" anchor="t">
+            <a:spAutoFit/>
+          </a:bodyPr>
+          <a:lstStyle/>
+          <a:p>
+            <a:pPr algn="l">
+              <a:spcBef>
+                <a:spcPts val="0"/>
+              </a:spcBef>
+              <a:spcAft>
+                <a:spcPts val="0"/>
+              </a:spcAft>
+            </a:pPr>
+            <a:r>
+              <a:rPr sz="1200" b="1">
+                <a:solidFill>
+                  <a:srgbClr val="102A43"/>
+                </a:solidFill>
+                <a:latin typeface="微軟正黑體"/>
+              </a:rPr>
+              <a:t>2 組（Andes V5／ARMv7E-M）</a:t>
+            </a:r>
+          </a:p>
+        </p:txBody>
+      </p:sp>
+      <p:sp>
+        <p:nvSpPr>
+          <p:cNvPr id="33" name="TextBox 32"/>
+          <p:cNvSpPr txBox="1"/>
+          <p:nvPr/>
+        </p:nvSpPr>
+        <p:spPr>
+          <a:xfrm>
+            <a:off x="4279391" y="4498848"/>
+            <a:ext cx="1572768" cy="219456"/>
+          </a:xfrm>
+          <a:prstGeom prst="rect">
+            <a:avLst/>
+          </a:prstGeom>
+          <a:noFill/>
+        </p:spPr>
+        <p:txBody>
+          <a:bodyPr wrap="square" lIns="0" rIns="0" tIns="0" bIns="0" anchor="t">
+            <a:spAutoFit/>
+          </a:bodyPr>
+          <a:lstStyle/>
+          <a:p>
+            <a:pPr algn="l">
+              <a:spcBef>
+                <a:spcPts val="0"/>
+              </a:spcBef>
+              <a:spcAft>
+                <a:spcPts val="0"/>
+              </a:spcAft>
+            </a:pPr>
+            <a:r>
+              <a:rPr sz="1000" b="0">
+                <a:solidFill>
+                  <a:srgbClr val="5B6B7B"/>
+                </a:solidFill>
+                <a:latin typeface="Consolas"/>
+              </a:rPr>
+              <a:t>src/abi.ts</a:t>
+            </a:r>
+          </a:p>
+        </p:txBody>
+      </p:sp>
+      <p:sp>
+        <p:nvSpPr>
+          <p:cNvPr id="34" name="Rectangle 33"/>
           <p:cNvSpPr/>
           <p:nvPr/>
         </p:nvSpPr>
         <p:spPr>
           <a:xfrm>
-            <a:off x="6528816" y="3986784"/>
-            <a:ext cx="932688" cy="566928"/>
+            <a:off x="566928" y="4864608"/>
+            <a:ext cx="34290" cy="237744"/>
           </a:xfrm>
           <a:prstGeom prst="rect">
             <a:avLst/>
           </a:prstGeom>
           <a:solidFill>
-            <a:srgbClr val="1C446B"/>
+            <a:srgbClr val="119DA4"/>
           </a:solidFill>
           <a:ln>
             <a:noFill/>
@@ -5872,14 +6227,14 @@
       </p:sp>
       <p:sp>
         <p:nvSpPr>
-          <p:cNvPr id="23" name="TextBox 22"/>
+          <p:cNvPr id="35" name="TextBox 34"/>
           <p:cNvSpPr txBox="1"/>
           <p:nvPr/>
         </p:nvSpPr>
         <p:spPr>
           <a:xfrm>
-            <a:off x="6528816" y="4151376"/>
-            <a:ext cx="932688" cy="274320"/>
+            <a:off x="694944" y="4882896"/>
+            <a:ext cx="5376672" cy="219456"/>
           </a:xfrm>
           <a:prstGeom prst="rect">
             <a:avLst/>
@@ -5892,7 +6247,7 @@
           </a:bodyPr>
           <a:lstStyle/>
           <a:p>
-            <a:pPr algn="ctr">
+            <a:pPr algn="l">
               <a:spcBef>
                 <a:spcPts val="0"/>
               </a:spcBef>
@@ -5903,25 +6258,69 @@
             <a:r>
               <a:rPr sz="1150" b="1">
                 <a:solidFill>
-                  <a:srgbClr val="FFFFFF"/>
-                </a:solidFill>
-                <a:latin typeface="微軟正黑體"/>
-              </a:rPr>
-              <a:t>落後</a:t>
-            </a:r>
-          </a:p>
-        </p:txBody>
-      </p:sp>
-      <p:sp>
-        <p:nvSpPr>
-          <p:cNvPr id="24" name="TextBox 23"/>
+                  <a:srgbClr val="119DA4"/>
+                </a:solidFill>
+                <a:latin typeface="微軟正黑體"/>
+              </a:rPr>
+              <a:t>運作參數（預設值）</a:t>
+            </a:r>
+          </a:p>
+        </p:txBody>
+      </p:sp>
+      <p:sp>
+        <p:nvSpPr>
+          <p:cNvPr id="36" name="Rectangle 35"/>
+          <p:cNvSpPr/>
+          <p:nvPr/>
+        </p:nvSpPr>
+        <p:spPr>
+          <a:xfrm>
+            <a:off x="566928" y="5175504"/>
+            <a:ext cx="5376672" cy="310896"/>
+          </a:xfrm>
+          <a:prstGeom prst="rect">
+            <a:avLst/>
+          </a:prstGeom>
+          <a:solidFill>
+            <a:srgbClr val="F2F5F8"/>
+          </a:solidFill>
+          <a:ln>
+            <a:noFill/>
+          </a:ln>
+          <a:effectLst/>
+        </p:spPr>
+        <p:style>
+          <a:lnRef idx="1">
+            <a:schemeClr val="accent1"/>
+          </a:lnRef>
+          <a:fillRef idx="3">
+            <a:schemeClr val="accent1"/>
+          </a:fillRef>
+          <a:effectRef idx="2">
+            <a:schemeClr val="accent1"/>
+          </a:effectRef>
+          <a:fontRef idx="minor">
+            <a:schemeClr val="lt1"/>
+          </a:fontRef>
+        </p:style>
+        <p:txBody>
+          <a:bodyPr rtlCol="0" anchor="ctr"/>
+          <a:lstStyle/>
+          <a:p>
+            <a:pPr algn="ctr"/>
+          </a:p>
+        </p:txBody>
+      </p:sp>
+      <p:sp>
+        <p:nvSpPr>
+          <p:cNvPr id="37" name="TextBox 36"/>
           <p:cNvSpPr txBox="1"/>
           <p:nvPr/>
         </p:nvSpPr>
         <p:spPr>
           <a:xfrm>
-            <a:off x="7607808" y="4023360"/>
-            <a:ext cx="3840480" cy="566928"/>
+            <a:off x="694944" y="5239512"/>
+            <a:ext cx="1572768" cy="219456"/>
           </a:xfrm>
           <a:prstGeom prst="rect">
             <a:avLst/>
@@ -5939,53 +6338,241 @@
                 <a:spcPts val="0"/>
               </a:spcBef>
               <a:spcAft>
-                <a:spcPts val="200"/>
-              </a:spcAft>
-            </a:pPr>
-            <a:r>
-              <a:rPr sz="1250" b="1">
+                <a:spcPts val="0"/>
+              </a:spcAft>
+            </a:pPr>
+            <a:r>
+              <a:rPr sz="1150" b="0">
+                <a:solidFill>
+                  <a:srgbClr val="1B2633"/>
+                </a:solidFill>
+                <a:latin typeface="微軟正黑體"/>
+              </a:rPr>
+              <a:t>存檔去抖動</a:t>
+            </a:r>
+          </a:p>
+        </p:txBody>
+      </p:sp>
+      <p:sp>
+        <p:nvSpPr>
+          <p:cNvPr id="38" name="TextBox 37"/>
+          <p:cNvSpPr txBox="1"/>
+          <p:nvPr/>
+        </p:nvSpPr>
+        <p:spPr>
+          <a:xfrm>
+            <a:off x="2322576" y="5230368"/>
+            <a:ext cx="1901952" cy="219456"/>
+          </a:xfrm>
+          <a:prstGeom prst="rect">
+            <a:avLst/>
+          </a:prstGeom>
+          <a:noFill/>
+        </p:spPr>
+        <p:txBody>
+          <a:bodyPr wrap="square" lIns="0" rIns="0" tIns="0" bIns="0" anchor="t">
+            <a:spAutoFit/>
+          </a:bodyPr>
+          <a:lstStyle/>
+          <a:p>
+            <a:pPr algn="l">
+              <a:spcBef>
+                <a:spcPts val="0"/>
+              </a:spcBef>
+              <a:spcAft>
+                <a:spcPts val="0"/>
+              </a:spcAft>
+            </a:pPr>
+            <a:r>
+              <a:rPr sz="1200" b="1">
                 <a:solidFill>
                   <a:srgbClr val="102A43"/>
                 </a:solidFill>
                 <a:latin typeface="微軟正黑體"/>
               </a:rPr>
-              <a:t>規則命中分布、反覆被否決的規則</a:t>
-            </a:r>
-          </a:p>
-          <a:p>
-            <a:pPr>
-              <a:lnSpc>
-                <a:spcPct val="120000"/>
-              </a:lnSpc>
-              <a:spcBef>
-                <a:spcPts val="0"/>
-              </a:spcBef>
-              <a:spcAft>
-                <a:spcPts val="0"/>
-              </a:spcAft>
-            </a:pPr>
-            <a:r>
-              <a:rPr sz="1100" b="0">
+              <a:t>1,000 ms</a:t>
+            </a:r>
+          </a:p>
+        </p:txBody>
+      </p:sp>
+      <p:sp>
+        <p:nvSpPr>
+          <p:cNvPr id="39" name="TextBox 38"/>
+          <p:cNvSpPr txBox="1"/>
+          <p:nvPr/>
+        </p:nvSpPr>
+        <p:spPr>
+          <a:xfrm>
+            <a:off x="4279391" y="5248656"/>
+            <a:ext cx="1572768" cy="219456"/>
+          </a:xfrm>
+          <a:prstGeom prst="rect">
+            <a:avLst/>
+          </a:prstGeom>
+          <a:noFill/>
+        </p:spPr>
+        <p:txBody>
+          <a:bodyPr wrap="square" lIns="0" rIns="0" tIns="0" bIns="0" anchor="t">
+            <a:spAutoFit/>
+          </a:bodyPr>
+          <a:lstStyle/>
+          <a:p>
+            <a:pPr algn="l">
+              <a:spcBef>
+                <a:spcPts val="0"/>
+              </a:spcBef>
+              <a:spcAft>
+                <a:spcPts val="0"/>
+              </a:spcAft>
+            </a:pPr>
+            <a:r>
+              <a:rPr sz="1000" b="0">
                 <a:solidFill>
                   <a:srgbClr val="5B6B7B"/>
                 </a:solidFill>
-                <a:latin typeface="微軟正黑體"/>
-              </a:rPr>
-              <a:t>指出該補哪一條 except</a:t>
-            </a:r>
-          </a:p>
-        </p:txBody>
-      </p:sp>
-      <p:sp>
-        <p:nvSpPr>
-          <p:cNvPr id="25" name="Rectangle 24"/>
+                <a:latin typeface="Consolas"/>
+              </a:rPr>
+              <a:t>sensai.debounceMs</a:t>
+            </a:r>
+          </a:p>
+        </p:txBody>
+      </p:sp>
+      <p:sp>
+        <p:nvSpPr>
+          <p:cNvPr id="40" name="TextBox 39"/>
+          <p:cNvSpPr txBox="1"/>
+          <p:nvPr/>
+        </p:nvSpPr>
+        <p:spPr>
+          <a:xfrm>
+            <a:off x="694944" y="5550408"/>
+            <a:ext cx="1572768" cy="219456"/>
+          </a:xfrm>
+          <a:prstGeom prst="rect">
+            <a:avLst/>
+          </a:prstGeom>
+          <a:noFill/>
+        </p:spPr>
+        <p:txBody>
+          <a:bodyPr wrap="square" lIns="0" rIns="0" tIns="0" bIns="0" anchor="t">
+            <a:spAutoFit/>
+          </a:bodyPr>
+          <a:lstStyle/>
+          <a:p>
+            <a:pPr algn="l">
+              <a:spcBef>
+                <a:spcPts val="0"/>
+              </a:spcBef>
+              <a:spcAft>
+                <a:spcPts val="0"/>
+              </a:spcAft>
+            </a:pPr>
+            <a:r>
+              <a:rPr sz="1150" b="0">
+                <a:solidFill>
+                  <a:srgbClr val="1B2633"/>
+                </a:solidFill>
+                <a:latin typeface="微軟正黑體"/>
+              </a:rPr>
+              <a:t>上下文上限</a:t>
+            </a:r>
+          </a:p>
+        </p:txBody>
+      </p:sp>
+      <p:sp>
+        <p:nvSpPr>
+          <p:cNvPr id="41" name="TextBox 40"/>
+          <p:cNvSpPr txBox="1"/>
+          <p:nvPr/>
+        </p:nvSpPr>
+        <p:spPr>
+          <a:xfrm>
+            <a:off x="2322576" y="5541264"/>
+            <a:ext cx="1901952" cy="219456"/>
+          </a:xfrm>
+          <a:prstGeom prst="rect">
+            <a:avLst/>
+          </a:prstGeom>
+          <a:noFill/>
+        </p:spPr>
+        <p:txBody>
+          <a:bodyPr wrap="square" lIns="0" rIns="0" tIns="0" bIns="0" anchor="t">
+            <a:spAutoFit/>
+          </a:bodyPr>
+          <a:lstStyle/>
+          <a:p>
+            <a:pPr algn="l">
+              <a:spcBef>
+                <a:spcPts val="0"/>
+              </a:spcBef>
+              <a:spcAft>
+                <a:spcPts val="0"/>
+              </a:spcAft>
+            </a:pPr>
+            <a:r>
+              <a:rPr sz="1200" b="1">
+                <a:solidFill>
+                  <a:srgbClr val="102A43"/>
+                </a:solidFill>
+                <a:latin typeface="微軟正黑體"/>
+              </a:rPr>
+              <a:t>120 KB ／ include 深度 2</a:t>
+            </a:r>
+          </a:p>
+        </p:txBody>
+      </p:sp>
+      <p:sp>
+        <p:nvSpPr>
+          <p:cNvPr id="42" name="TextBox 41"/>
+          <p:cNvSpPr txBox="1"/>
+          <p:nvPr/>
+        </p:nvSpPr>
+        <p:spPr>
+          <a:xfrm>
+            <a:off x="4279391" y="5559552"/>
+            <a:ext cx="1572768" cy="219456"/>
+          </a:xfrm>
+          <a:prstGeom prst="rect">
+            <a:avLst/>
+          </a:prstGeom>
+          <a:noFill/>
+        </p:spPr>
+        <p:txBody>
+          <a:bodyPr wrap="square" lIns="0" rIns="0" tIns="0" bIns="0" anchor="t">
+            <a:spAutoFit/>
+          </a:bodyPr>
+          <a:lstStyle/>
+          <a:p>
+            <a:pPr algn="l">
+              <a:spcBef>
+                <a:spcPts val="0"/>
+              </a:spcBef>
+              <a:spcAft>
+                <a:spcPts val="0"/>
+              </a:spcAft>
+            </a:pPr>
+            <a:r>
+              <a:rPr sz="1000" b="0">
+                <a:solidFill>
+                  <a:srgbClr val="5B6B7B"/>
+                </a:solidFill>
+                <a:latin typeface="Consolas"/>
+              </a:rPr>
+              <a:t>sensai.includeDepth</a:t>
+            </a:r>
+          </a:p>
+        </p:txBody>
+      </p:sp>
+      <p:sp>
+        <p:nvSpPr>
+          <p:cNvPr id="43" name="Rectangle 42"/>
           <p:cNvSpPr/>
           <p:nvPr/>
         </p:nvSpPr>
         <p:spPr>
           <a:xfrm>
-            <a:off x="6528816" y="4645152"/>
-            <a:ext cx="932688" cy="566928"/>
+            <a:off x="6254496" y="2121408"/>
+            <a:ext cx="34290" cy="237744"/>
           </a:xfrm>
           <a:prstGeom prst="rect">
             <a:avLst/>
@@ -6022,14 +6609,14 @@
       </p:sp>
       <p:sp>
         <p:nvSpPr>
-          <p:cNvPr id="26" name="TextBox 25"/>
+          <p:cNvPr id="44" name="TextBox 43"/>
           <p:cNvSpPr txBox="1"/>
           <p:nvPr/>
         </p:nvSpPr>
         <p:spPr>
           <a:xfrm>
-            <a:off x="6528816" y="4809744"/>
-            <a:ext cx="932688" cy="274320"/>
+            <a:off x="6382512" y="2139696"/>
+            <a:ext cx="5376672" cy="219456"/>
           </a:xfrm>
           <a:prstGeom prst="rect">
             <a:avLst/>
@@ -6042,7 +6629,7 @@
           </a:bodyPr>
           <a:lstStyle/>
           <a:p>
-            <a:pPr algn="ctr">
+            <a:pPr algn="l">
               <a:spcBef>
                 <a:spcPts val="0"/>
               </a:spcBef>
@@ -6053,95 +6640,31 @@
             <a:r>
               <a:rPr sz="1150" b="1">
                 <a:solidFill>
-                  <a:srgbClr val="FFFFFF"/>
-                </a:solidFill>
-                <a:latin typeface="微軟正黑體"/>
-              </a:rPr>
-              <a:t>護欄</a:t>
-            </a:r>
-          </a:p>
-        </p:txBody>
-      </p:sp>
-      <p:sp>
-        <p:nvSpPr>
-          <p:cNvPr id="27" name="TextBox 26"/>
-          <p:cNvSpPr txBox="1"/>
-          <p:nvPr/>
-        </p:nvSpPr>
-        <p:spPr>
-          <a:xfrm>
-            <a:off x="7607808" y="4681728"/>
-            <a:ext cx="3840480" cy="566928"/>
-          </a:xfrm>
-          <a:prstGeom prst="rect">
-            <a:avLst/>
-          </a:prstGeom>
-          <a:noFill/>
-        </p:spPr>
-        <p:txBody>
-          <a:bodyPr wrap="square" lIns="0" rIns="0" tIns="0" bIns="0" anchor="t">
-            <a:spAutoFit/>
-          </a:bodyPr>
-          <a:lstStyle/>
-          <a:p>
-            <a:pPr algn="l">
-              <a:spcBef>
-                <a:spcPts val="0"/>
-              </a:spcBef>
-              <a:spcAft>
-                <a:spcPts val="200"/>
-              </a:spcAft>
-            </a:pPr>
-            <a:r>
-              <a:rPr sz="1250" b="1">
-                <a:solidFill>
-                  <a:srgbClr val="102A43"/>
-                </a:solidFill>
-                <a:latin typeface="微軟正黑體"/>
-              </a:rPr>
-              <a:t>p95 延遲、每人每週誤報數</a:t>
-            </a:r>
-          </a:p>
-          <a:p>
-            <a:pPr>
-              <a:lnSpc>
-                <a:spcPct val="120000"/>
-              </a:lnSpc>
-              <a:spcBef>
-                <a:spcPts val="0"/>
-              </a:spcBef>
-              <a:spcAft>
-                <a:spcPts val="0"/>
-              </a:spcAft>
-            </a:pPr>
-            <a:r>
-              <a:rPr sz="1100" b="0">
-                <a:solidFill>
-                  <a:srgbClr val="5B6B7B"/>
-                </a:solidFill>
-                <a:latin typeface="微軟正黑體"/>
-              </a:rPr>
-              <a:t>不准跌破的底線，不是要衝高的目標</a:t>
-            </a:r>
-          </a:p>
-        </p:txBody>
-      </p:sp>
-      <p:sp>
-        <p:nvSpPr>
-          <p:cNvPr id="28" name="Rectangle 27"/>
+                  <a:srgbClr val="D18616"/>
+                </a:solidFill>
+                <a:latin typeface="微軟正黑體"/>
+              </a:rPr>
+              <a:t>實際執行觀測（樣本數 n＝1）</a:t>
+            </a:r>
+          </a:p>
+        </p:txBody>
+      </p:sp>
+      <p:sp>
+        <p:nvSpPr>
+          <p:cNvPr id="45" name="Rectangle 44"/>
           <p:cNvSpPr/>
           <p:nvPr/>
         </p:nvSpPr>
         <p:spPr>
           <a:xfrm>
-            <a:off x="566928" y="5559552"/>
-            <a:ext cx="11064240" cy="621792"/>
+            <a:off x="6254496" y="2432304"/>
+            <a:ext cx="5376672" cy="310896"/>
           </a:xfrm>
           <a:prstGeom prst="rect">
             <a:avLst/>
           </a:prstGeom>
           <a:solidFill>
-            <a:srgbClr val="102A43"/>
+            <a:srgbClr val="F2F5F8"/>
           </a:solidFill>
           <a:ln>
             <a:noFill/>
@@ -6172,14 +6695,14 @@
       </p:sp>
       <p:sp>
         <p:nvSpPr>
-          <p:cNvPr id="29" name="TextBox 28"/>
+          <p:cNvPr id="46" name="TextBox 45"/>
           <p:cNvSpPr txBox="1"/>
           <p:nvPr/>
         </p:nvSpPr>
         <p:spPr>
           <a:xfrm>
-            <a:off x="868680" y="5669280"/>
-            <a:ext cx="10515600" cy="420624"/>
+            <a:off x="6382512" y="2496312"/>
+            <a:ext cx="1572768" cy="219456"/>
           </a:xfrm>
           <a:prstGeom prst="rect">
             <a:avLst/>
@@ -6201,13 +6724,691 @@
               </a:spcAft>
             </a:pPr>
             <a:r>
+              <a:rPr sz="1150" b="0">
+                <a:solidFill>
+                  <a:srgbClr val="1B2633"/>
+                </a:solidFill>
+                <a:latin typeface="微軟正黑體"/>
+              </a:rPr>
+              <a:t>單檔審查耗時</a:t>
+            </a:r>
+          </a:p>
+        </p:txBody>
+      </p:sp>
+      <p:sp>
+        <p:nvSpPr>
+          <p:cNvPr id="47" name="TextBox 46"/>
+          <p:cNvSpPr txBox="1"/>
+          <p:nvPr/>
+        </p:nvSpPr>
+        <p:spPr>
+          <a:xfrm>
+            <a:off x="8010144" y="2487168"/>
+            <a:ext cx="1901952" cy="219456"/>
+          </a:xfrm>
+          <a:prstGeom prst="rect">
+            <a:avLst/>
+          </a:prstGeom>
+          <a:noFill/>
+        </p:spPr>
+        <p:txBody>
+          <a:bodyPr wrap="square" lIns="0" rIns="0" tIns="0" bIns="0" anchor="t">
+            <a:spAutoFit/>
+          </a:bodyPr>
+          <a:lstStyle/>
+          <a:p>
+            <a:pPr algn="l">
+              <a:spcBef>
+                <a:spcPts val="0"/>
+              </a:spcBef>
+              <a:spcAft>
+                <a:spcPts val="0"/>
+              </a:spcAft>
+            </a:pPr>
+            <a:r>
+              <a:rPr sz="1200" b="1">
+                <a:solidFill>
+                  <a:srgbClr val="102A43"/>
+                </a:solidFill>
+                <a:latin typeface="微軟正黑體"/>
+              </a:rPr>
+              <a:t>65.9 秒</a:t>
+            </a:r>
+          </a:p>
+        </p:txBody>
+      </p:sp>
+      <p:sp>
+        <p:nvSpPr>
+          <p:cNvPr id="48" name="TextBox 47"/>
+          <p:cNvSpPr txBox="1"/>
+          <p:nvPr/>
+        </p:nvSpPr>
+        <p:spPr>
+          <a:xfrm>
+            <a:off x="9966959" y="2505456"/>
+            <a:ext cx="1572768" cy="219456"/>
+          </a:xfrm>
+          <a:prstGeom prst="rect">
+            <a:avLst/>
+          </a:prstGeom>
+          <a:noFill/>
+        </p:spPr>
+        <p:txBody>
+          <a:bodyPr wrap="square" lIns="0" rIns="0" tIns="0" bIns="0" anchor="t">
+            <a:spAutoFit/>
+          </a:bodyPr>
+          <a:lstStyle/>
+          <a:p>
+            <a:pPr algn="l">
+              <a:spcBef>
+                <a:spcPts val="0"/>
+              </a:spcBef>
+              <a:spcAft>
+                <a:spcPts val="0"/>
+              </a:spcAft>
+            </a:pPr>
+            <a:r>
+              <a:rPr sz="1000" b="0">
+                <a:solidFill>
+                  <a:srgbClr val="5B6B7B"/>
+                </a:solidFill>
+                <a:latin typeface="Consolas"/>
+              </a:rPr>
+              <a:t>phal_sys.c 實機</a:t>
+            </a:r>
+          </a:p>
+        </p:txBody>
+      </p:sp>
+      <p:sp>
+        <p:nvSpPr>
+          <p:cNvPr id="49" name="TextBox 48"/>
+          <p:cNvSpPr txBox="1"/>
+          <p:nvPr/>
+        </p:nvSpPr>
+        <p:spPr>
+          <a:xfrm>
+            <a:off x="6382512" y="2807208"/>
+            <a:ext cx="1572768" cy="219456"/>
+          </a:xfrm>
+          <a:prstGeom prst="rect">
+            <a:avLst/>
+          </a:prstGeom>
+          <a:noFill/>
+        </p:spPr>
+        <p:txBody>
+          <a:bodyPr wrap="square" lIns="0" rIns="0" tIns="0" bIns="0" anchor="t">
+            <a:spAutoFit/>
+          </a:bodyPr>
+          <a:lstStyle/>
+          <a:p>
+            <a:pPr algn="l">
+              <a:spcBef>
+                <a:spcPts val="0"/>
+              </a:spcBef>
+              <a:spcAft>
+                <a:spcPts val="0"/>
+              </a:spcAft>
+            </a:pPr>
+            <a:r>
+              <a:rPr sz="1150" b="0">
+                <a:solidFill>
+                  <a:srgbClr val="1B2633"/>
+                </a:solidFill>
+                <a:latin typeface="微軟正黑體"/>
+              </a:rPr>
+              <a:t>附帶 header</a:t>
+            </a:r>
+          </a:p>
+        </p:txBody>
+      </p:sp>
+      <p:sp>
+        <p:nvSpPr>
+          <p:cNvPr id="50" name="TextBox 49"/>
+          <p:cNvSpPr txBox="1"/>
+          <p:nvPr/>
+        </p:nvSpPr>
+        <p:spPr>
+          <a:xfrm>
+            <a:off x="8010144" y="2798064"/>
+            <a:ext cx="1901952" cy="219456"/>
+          </a:xfrm>
+          <a:prstGeom prst="rect">
+            <a:avLst/>
+          </a:prstGeom>
+          <a:noFill/>
+        </p:spPr>
+        <p:txBody>
+          <a:bodyPr wrap="square" lIns="0" rIns="0" tIns="0" bIns="0" anchor="t">
+            <a:spAutoFit/>
+          </a:bodyPr>
+          <a:lstStyle/>
+          <a:p>
+            <a:pPr algn="l">
+              <a:spcBef>
+                <a:spcPts val="0"/>
+              </a:spcBef>
+              <a:spcAft>
+                <a:spcPts val="0"/>
+              </a:spcAft>
+            </a:pPr>
+            <a:r>
+              <a:rPr sz="1200" b="1">
+                <a:solidFill>
+                  <a:srgbClr val="102A43"/>
+                </a:solidFill>
+                <a:latin typeface="微軟正黑體"/>
+              </a:rPr>
+              <a:t>18 個（上下文已截斷）</a:t>
+            </a:r>
+          </a:p>
+        </p:txBody>
+      </p:sp>
+      <p:sp>
+        <p:nvSpPr>
+          <p:cNvPr id="51" name="TextBox 50"/>
+          <p:cNvSpPr txBox="1"/>
+          <p:nvPr/>
+        </p:nvSpPr>
+        <p:spPr>
+          <a:xfrm>
+            <a:off x="9966959" y="2816352"/>
+            <a:ext cx="1572768" cy="219456"/>
+          </a:xfrm>
+          <a:prstGeom prst="rect">
+            <a:avLst/>
+          </a:prstGeom>
+          <a:noFill/>
+        </p:spPr>
+        <p:txBody>
+          <a:bodyPr wrap="square" lIns="0" rIns="0" tIns="0" bIns="0" anchor="t">
+            <a:spAutoFit/>
+          </a:bodyPr>
+          <a:lstStyle/>
+          <a:p>
+            <a:pPr algn="l">
+              <a:spcBef>
+                <a:spcPts val="0"/>
+              </a:spcBef>
+              <a:spcAft>
+                <a:spcPts val="0"/>
+              </a:spcAft>
+            </a:pPr>
+            <a:r>
+              <a:rPr sz="1000" b="0">
+                <a:solidFill>
+                  <a:srgbClr val="5B6B7B"/>
+                </a:solidFill>
+                <a:latin typeface="Consolas"/>
+              </a:rPr>
+              <a:t>同上</a:t>
+            </a:r>
+          </a:p>
+        </p:txBody>
+      </p:sp>
+      <p:sp>
+        <p:nvSpPr>
+          <p:cNvPr id="52" name="Rectangle 51"/>
+          <p:cNvSpPr/>
+          <p:nvPr/>
+        </p:nvSpPr>
+        <p:spPr>
+          <a:xfrm>
+            <a:off x="6254496" y="3054096"/>
+            <a:ext cx="5376672" cy="310896"/>
+          </a:xfrm>
+          <a:prstGeom prst="rect">
+            <a:avLst/>
+          </a:prstGeom>
+          <a:solidFill>
+            <a:srgbClr val="F2F5F8"/>
+          </a:solidFill>
+          <a:ln>
+            <a:noFill/>
+          </a:ln>
+          <a:effectLst/>
+        </p:spPr>
+        <p:style>
+          <a:lnRef idx="1">
+            <a:schemeClr val="accent1"/>
+          </a:lnRef>
+          <a:fillRef idx="3">
+            <a:schemeClr val="accent1"/>
+          </a:fillRef>
+          <a:effectRef idx="2">
+            <a:schemeClr val="accent1"/>
+          </a:effectRef>
+          <a:fontRef idx="minor">
+            <a:schemeClr val="lt1"/>
+          </a:fontRef>
+        </p:style>
+        <p:txBody>
+          <a:bodyPr rtlCol="0" anchor="ctr"/>
+          <a:lstStyle/>
+          <a:p>
+            <a:pPr algn="ctr"/>
+          </a:p>
+        </p:txBody>
+      </p:sp>
+      <p:sp>
+        <p:nvSpPr>
+          <p:cNvPr id="53" name="TextBox 52"/>
+          <p:cNvSpPr txBox="1"/>
+          <p:nvPr/>
+        </p:nvSpPr>
+        <p:spPr>
+          <a:xfrm>
+            <a:off x="6382512" y="3118104"/>
+            <a:ext cx="1572768" cy="219456"/>
+          </a:xfrm>
+          <a:prstGeom prst="rect">
+            <a:avLst/>
+          </a:prstGeom>
+          <a:noFill/>
+        </p:spPr>
+        <p:txBody>
+          <a:bodyPr wrap="square" lIns="0" rIns="0" tIns="0" bIns="0" anchor="t">
+            <a:spAutoFit/>
+          </a:bodyPr>
+          <a:lstStyle/>
+          <a:p>
+            <a:pPr algn="l">
+              <a:spcBef>
+                <a:spcPts val="0"/>
+              </a:spcBef>
+              <a:spcAft>
+                <a:spcPts val="0"/>
+              </a:spcAft>
+            </a:pPr>
+            <a:r>
+              <a:rPr sz="1150" b="0">
+                <a:solidFill>
+                  <a:srgbClr val="1B2633"/>
+                </a:solidFill>
+                <a:latin typeface="微軟正黑體"/>
+              </a:rPr>
+              <a:t>產生意見</a:t>
+            </a:r>
+          </a:p>
+        </p:txBody>
+      </p:sp>
+      <p:sp>
+        <p:nvSpPr>
+          <p:cNvPr id="54" name="TextBox 53"/>
+          <p:cNvSpPr txBox="1"/>
+          <p:nvPr/>
+        </p:nvSpPr>
+        <p:spPr>
+          <a:xfrm>
+            <a:off x="8010144" y="3108960"/>
+            <a:ext cx="1901952" cy="219456"/>
+          </a:xfrm>
+          <a:prstGeom prst="rect">
+            <a:avLst/>
+          </a:prstGeom>
+          <a:noFill/>
+        </p:spPr>
+        <p:txBody>
+          <a:bodyPr wrap="square" lIns="0" rIns="0" tIns="0" bIns="0" anchor="t">
+            <a:spAutoFit/>
+          </a:bodyPr>
+          <a:lstStyle/>
+          <a:p>
+            <a:pPr algn="l">
+              <a:spcBef>
+                <a:spcPts val="0"/>
+              </a:spcBef>
+              <a:spcAft>
+                <a:spcPts val="0"/>
+              </a:spcAft>
+            </a:pPr>
+            <a:r>
+              <a:rPr sz="1200" b="1">
+                <a:solidFill>
+                  <a:srgbClr val="102A43"/>
+                </a:solidFill>
+                <a:latin typeface="微軟正黑體"/>
+              </a:rPr>
+              <a:t>1 則 error，無誤報</a:t>
+            </a:r>
+          </a:p>
+        </p:txBody>
+      </p:sp>
+      <p:sp>
+        <p:nvSpPr>
+          <p:cNvPr id="55" name="TextBox 54"/>
+          <p:cNvSpPr txBox="1"/>
+          <p:nvPr/>
+        </p:nvSpPr>
+        <p:spPr>
+          <a:xfrm>
+            <a:off x="9966959" y="3127248"/>
+            <a:ext cx="1572768" cy="219456"/>
+          </a:xfrm>
+          <a:prstGeom prst="rect">
+            <a:avLst/>
+          </a:prstGeom>
+          <a:noFill/>
+        </p:spPr>
+        <p:txBody>
+          <a:bodyPr wrap="square" lIns="0" rIns="0" tIns="0" bIns="0" anchor="t">
+            <a:spAutoFit/>
+          </a:bodyPr>
+          <a:lstStyle/>
+          <a:p>
+            <a:pPr algn="l">
+              <a:spcBef>
+                <a:spcPts val="0"/>
+              </a:spcBef>
+              <a:spcAft>
+                <a:spcPts val="0"/>
+              </a:spcAft>
+            </a:pPr>
+            <a:r>
+              <a:rPr sz="1000" b="0">
+                <a:solidFill>
+                  <a:srgbClr val="5B6B7B"/>
+                </a:solidFill>
+                <a:latin typeface="Consolas"/>
+              </a:rPr>
+              <a:t>同上</a:t>
+            </a:r>
+          </a:p>
+        </p:txBody>
+      </p:sp>
+      <p:sp>
+        <p:nvSpPr>
+          <p:cNvPr id="56" name="TextBox 55"/>
+          <p:cNvSpPr txBox="1"/>
+          <p:nvPr/>
+        </p:nvSpPr>
+        <p:spPr>
+          <a:xfrm>
+            <a:off x="6382512" y="3429000"/>
+            <a:ext cx="1572768" cy="219456"/>
+          </a:xfrm>
+          <a:prstGeom prst="rect">
+            <a:avLst/>
+          </a:prstGeom>
+          <a:noFill/>
+        </p:spPr>
+        <p:txBody>
+          <a:bodyPr wrap="square" lIns="0" rIns="0" tIns="0" bIns="0" anchor="t">
+            <a:spAutoFit/>
+          </a:bodyPr>
+          <a:lstStyle/>
+          <a:p>
+            <a:pPr algn="l">
+              <a:spcBef>
+                <a:spcPts val="0"/>
+              </a:spcBef>
+              <a:spcAft>
+                <a:spcPts val="0"/>
+              </a:spcAft>
+            </a:pPr>
+            <a:r>
+              <a:rPr sz="1150" b="0">
+                <a:solidFill>
+                  <a:srgbClr val="1B2633"/>
+                </a:solidFill>
+                <a:latin typeface="微軟正黑體"/>
+              </a:rPr>
+              <a:t>命中缺陷潛伏</a:t>
+            </a:r>
+          </a:p>
+        </p:txBody>
+      </p:sp>
+      <p:sp>
+        <p:nvSpPr>
+          <p:cNvPr id="57" name="TextBox 56"/>
+          <p:cNvSpPr txBox="1"/>
+          <p:nvPr/>
+        </p:nvSpPr>
+        <p:spPr>
+          <a:xfrm>
+            <a:off x="8010144" y="3419856"/>
+            <a:ext cx="1901952" cy="219456"/>
+          </a:xfrm>
+          <a:prstGeom prst="rect">
+            <a:avLst/>
+          </a:prstGeom>
+          <a:noFill/>
+        </p:spPr>
+        <p:txBody>
+          <a:bodyPr wrap="square" lIns="0" rIns="0" tIns="0" bIns="0" anchor="t">
+            <a:spAutoFit/>
+          </a:bodyPr>
+          <a:lstStyle/>
+          <a:p>
+            <a:pPr algn="l">
+              <a:spcBef>
+                <a:spcPts val="0"/>
+              </a:spcBef>
+              <a:spcAft>
+                <a:spcPts val="0"/>
+              </a:spcAft>
+            </a:pPr>
+            <a:r>
+              <a:rPr sz="1200" b="1">
+                <a:solidFill>
+                  <a:srgbClr val="102A43"/>
+                </a:solidFill>
+                <a:latin typeface="微軟正黑體"/>
+              </a:rPr>
+              <a:t>7 個月</a:t>
+            </a:r>
+          </a:p>
+        </p:txBody>
+      </p:sp>
+      <p:sp>
+        <p:nvSpPr>
+          <p:cNvPr id="58" name="TextBox 57"/>
+          <p:cNvSpPr txBox="1"/>
+          <p:nvPr/>
+        </p:nvSpPr>
+        <p:spPr>
+          <a:xfrm>
+            <a:off x="9966959" y="3438144"/>
+            <a:ext cx="1572768" cy="219456"/>
+          </a:xfrm>
+          <a:prstGeom prst="rect">
+            <a:avLst/>
+          </a:prstGeom>
+          <a:noFill/>
+        </p:spPr>
+        <p:txBody>
+          <a:bodyPr wrap="square" lIns="0" rIns="0" tIns="0" bIns="0" anchor="t">
+            <a:spAutoFit/>
+          </a:bodyPr>
+          <a:lstStyle/>
+          <a:p>
+            <a:pPr algn="l">
+              <a:spcBef>
+                <a:spcPts val="0"/>
+              </a:spcBef>
+              <a:spcAft>
+                <a:spcPts val="0"/>
+              </a:spcAft>
+            </a:pPr>
+            <a:r>
+              <a:rPr sz="1000" b="0">
+                <a:solidFill>
+                  <a:srgbClr val="5B6B7B"/>
+                </a:solidFill>
+                <a:latin typeface="Consolas"/>
+              </a:rPr>
+              <a:t>git blame</a:t>
+            </a:r>
+          </a:p>
+        </p:txBody>
+      </p:sp>
+      <p:sp>
+        <p:nvSpPr>
+          <p:cNvPr id="59" name="Rectangle 58"/>
+          <p:cNvSpPr/>
+          <p:nvPr/>
+        </p:nvSpPr>
+        <p:spPr>
+          <a:xfrm>
+            <a:off x="6254496" y="3858768"/>
+            <a:ext cx="5376672" cy="1828800"/>
+          </a:xfrm>
+          <a:prstGeom prst="rect">
+            <a:avLst/>
+          </a:prstGeom>
+          <a:solidFill>
+            <a:srgbClr val="F2F5F8"/>
+          </a:solidFill>
+          <a:ln>
+            <a:noFill/>
+          </a:ln>
+          <a:effectLst/>
+        </p:spPr>
+        <p:style>
+          <a:lnRef idx="1">
+            <a:schemeClr val="accent1"/>
+          </a:lnRef>
+          <a:fillRef idx="3">
+            <a:schemeClr val="accent1"/>
+          </a:fillRef>
+          <a:effectRef idx="2">
+            <a:schemeClr val="accent1"/>
+          </a:effectRef>
+          <a:fontRef idx="minor">
+            <a:schemeClr val="lt1"/>
+          </a:fontRef>
+        </p:style>
+        <p:txBody>
+          <a:bodyPr rtlCol="0" anchor="ctr"/>
+          <a:lstStyle/>
+          <a:p>
+            <a:pPr algn="ctr"/>
+          </a:p>
+        </p:txBody>
+      </p:sp>
+      <p:sp>
+        <p:nvSpPr>
+          <p:cNvPr id="60" name="TextBox 59"/>
+          <p:cNvSpPr txBox="1"/>
+          <p:nvPr/>
+        </p:nvSpPr>
+        <p:spPr>
+          <a:xfrm>
+            <a:off x="6528816" y="4041648"/>
+            <a:ext cx="4828032" cy="1554480"/>
+          </a:xfrm>
+          <a:prstGeom prst="rect">
+            <a:avLst/>
+          </a:prstGeom>
+          <a:noFill/>
+        </p:spPr>
+        <p:txBody>
+          <a:bodyPr wrap="square" lIns="0" rIns="0" tIns="0" bIns="0" anchor="t">
+            <a:spAutoFit/>
+          </a:bodyPr>
+          <a:lstStyle/>
+          <a:p>
+            <a:pPr algn="l">
+              <a:spcBef>
+                <a:spcPts val="0"/>
+              </a:spcBef>
+              <a:spcAft>
+                <a:spcPts val="700"/>
+              </a:spcAft>
+            </a:pPr>
+            <a:r>
               <a:rPr sz="1300" b="1">
                 <a:solidFill>
-                  <a:srgbClr val="FFFFFF"/>
-                </a:solidFill>
-                <a:latin typeface="微軟正黑體"/>
-              </a:rPr>
-              <a:t>試行 4 週的報告格式：「n 則意見被實際修掉，其中 m 則是已合併進主線的既有缺陷」—— 比率是佐證，案例才是論點。</a:t>
+                  <a:srgbClr val="102A43"/>
+                </a:solidFill>
+                <a:latin typeface="微軟正黑體"/>
+              </a:rPr>
+              <a:t>為什麼右欄只有一筆</a:t>
+            </a:r>
+          </a:p>
+          <a:p>
+            <a:pPr>
+              <a:lnSpc>
+                <a:spcPct val="125000"/>
+              </a:lnSpc>
+              <a:spcBef>
+                <a:spcPts val="0"/>
+              </a:spcBef>
+              <a:spcAft>
+                <a:spcPts val="800"/>
+              </a:spcAft>
+            </a:pPr>
+            <a:r>
+              <a:rPr sz="1150" b="0">
+                <a:solidFill>
+                  <a:srgbClr val="1B2633"/>
+                </a:solidFill>
+                <a:latin typeface="微軟正黑體"/>
+              </a:rPr>
+              <a:t>稽核日誌（.sensai/sent.log）只在擴充於 VS Code 實際執行時才寫入，命令列工具不寫。目前僅有一次實機審查的觀測記錄。</a:t>
+            </a:r>
+          </a:p>
+          <a:p>
+            <a:pPr>
+              <a:lnSpc>
+                <a:spcPct val="125000"/>
+              </a:lnSpc>
+              <a:spcBef>
+                <a:spcPts val="0"/>
+              </a:spcBef>
+              <a:spcAft>
+                <a:spcPts val="0"/>
+              </a:spcAft>
+            </a:pPr>
+            <a:r>
+              <a:rPr sz="1150" b="0">
+                <a:solidFill>
+                  <a:srgbClr val="5B6B7B"/>
+                </a:solidFill>
+                <a:latin typeface="微軟正黑體"/>
+              </a:rPr>
+              <a:t>導入後每次請求會自動記一筆，含 ts、file、outcome、headers、bytes、findings、dropped、durationMs —— 屆時右欄可由單點改為分布，覆蓋率、意見密度、過濾效果與成本也一併算得出來。</a:t>
+            </a:r>
+          </a:p>
+        </p:txBody>
+      </p:sp>
+      <p:sp>
+        <p:nvSpPr>
+          <p:cNvPr id="61" name="TextBox 60"/>
+          <p:cNvSpPr txBox="1"/>
+          <p:nvPr/>
+        </p:nvSpPr>
+        <p:spPr>
+          <a:xfrm>
+            <a:off x="566928" y="5943600"/>
+            <a:ext cx="11064240" cy="274320"/>
+          </a:xfrm>
+          <a:prstGeom prst="rect">
+            <a:avLst/>
+          </a:prstGeom>
+          <a:noFill/>
+        </p:spPr>
+        <p:txBody>
+          <a:bodyPr wrap="square" lIns="0" rIns="0" tIns="0" bIns="0" anchor="t">
+            <a:spAutoFit/>
+          </a:bodyPr>
+          <a:lstStyle/>
+          <a:p>
+            <a:pPr algn="l">
+              <a:spcBef>
+                <a:spcPts val="0"/>
+              </a:spcBef>
+              <a:spcAft>
+                <a:spcPts val="0"/>
+              </a:spcAft>
+            </a:pPr>
+            <a:r>
+              <a:rPr sz="1100" b="0">
+                <a:solidFill>
+                  <a:srgbClr val="5B6B7B"/>
+                </a:solidFill>
+                <a:latin typeface="微軟正黑體"/>
+              </a:rPr>
+              <a:t>※ n＝1 的觀測不能拿來推論平均值。本頁左欄是可驗證的計數，右欄是單次觀測 —— 兩者的證據強度不同，報告時分開看。</a:t>
             </a:r>
           </a:p>
         </p:txBody>
@@ -6311,7 +7512,7 @@
                 </a:solidFill>
                 <a:latin typeface="微軟正黑體"/>
               </a:rPr>
-              <a:t>NEXT</a:t>
+              <a:t>MEASUREMENT</a:t>
             </a:r>
           </a:p>
         </p:txBody>
@@ -6353,7 +7554,7 @@
                 </a:solidFill>
                 <a:latin typeface="微軟正黑體"/>
               </a:rPr>
-              <a:t>下一步與所需支援</a:t>
+              <a:t>如何驗證效益：量採納率，不量準確率</a:t>
             </a:r>
           </a:p>
         </p:txBody>
@@ -6482,6 +7683,1417 @@
                 <a:latin typeface="微軟正黑體"/>
               </a:rPr>
               <a:t>12</a:t>
+            </a:r>
+          </a:p>
+        </p:txBody>
+      </p:sp>
+      <p:sp>
+        <p:nvSpPr>
+          <p:cNvPr id="8" name="TextBox 7"/>
+          <p:cNvSpPr txBox="1"/>
+          <p:nvPr/>
+        </p:nvSpPr>
+        <p:spPr>
+          <a:xfrm>
+            <a:off x="566928" y="1572768"/>
+            <a:ext cx="11064240" cy="365760"/>
+          </a:xfrm>
+          <a:prstGeom prst="rect">
+            <a:avLst/>
+          </a:prstGeom>
+          <a:noFill/>
+        </p:spPr>
+        <p:txBody>
+          <a:bodyPr wrap="square" lIns="0" rIns="0" tIns="0" bIns="0" anchor="t">
+            <a:spAutoFit/>
+          </a:bodyPr>
+          <a:lstStyle/>
+          <a:p>
+            <a:pPr algn="l">
+              <a:lnSpc>
+                <a:spcPct val="125000"/>
+              </a:lnSpc>
+              <a:spcBef>
+                <a:spcPts val="0"/>
+              </a:spcBef>
+              <a:spcAft>
+                <a:spcPts val="0"/>
+              </a:spcAft>
+            </a:pPr>
+            <a:r>
+              <a:rPr sz="1400" b="0">
+                <a:solidFill>
+                  <a:srgbClr val="1B2633"/>
+                </a:solidFill>
+                <a:latin typeface="微軟正黑體"/>
+              </a:rPr>
+              <a:t>「準確率」需要知道程式碼裡到底有幾個 bug —— 那個答案永遠不存在，任何宣稱的準確率都是自己跟自己比。改量使用者用行動投票的結果。</a:t>
+            </a:r>
+          </a:p>
+        </p:txBody>
+      </p:sp>
+      <p:sp>
+        <p:nvSpPr>
+          <p:cNvPr id="9" name="Rectangle 8"/>
+          <p:cNvSpPr/>
+          <p:nvPr/>
+        </p:nvSpPr>
+        <p:spPr>
+          <a:xfrm>
+            <a:off x="566928" y="2103120"/>
+            <a:ext cx="5376672" cy="3310128"/>
+          </a:xfrm>
+          <a:prstGeom prst="rect">
+            <a:avLst/>
+          </a:prstGeom>
+          <a:solidFill>
+            <a:srgbClr val="F2F5F8"/>
+          </a:solidFill>
+          <a:ln>
+            <a:noFill/>
+          </a:ln>
+          <a:effectLst/>
+        </p:spPr>
+        <p:style>
+          <a:lnRef idx="1">
+            <a:schemeClr val="accent1"/>
+          </a:lnRef>
+          <a:fillRef idx="3">
+            <a:schemeClr val="accent1"/>
+          </a:fillRef>
+          <a:effectRef idx="2">
+            <a:schemeClr val="accent1"/>
+          </a:effectRef>
+          <a:fontRef idx="minor">
+            <a:schemeClr val="lt1"/>
+          </a:fontRef>
+        </p:style>
+        <p:txBody>
+          <a:bodyPr rtlCol="0" anchor="ctr"/>
+          <a:lstStyle/>
+          <a:p>
+            <a:pPr algn="ctr"/>
+          </a:p>
+        </p:txBody>
+      </p:sp>
+      <p:sp>
+        <p:nvSpPr>
+          <p:cNvPr id="10" name="TextBox 9"/>
+          <p:cNvSpPr txBox="1"/>
+          <p:nvPr/>
+        </p:nvSpPr>
+        <p:spPr>
+          <a:xfrm>
+            <a:off x="841248" y="2286000"/>
+            <a:ext cx="4846320" cy="320040"/>
+          </a:xfrm>
+          <a:prstGeom prst="rect">
+            <a:avLst/>
+          </a:prstGeom>
+          <a:noFill/>
+        </p:spPr>
+        <p:txBody>
+          <a:bodyPr wrap="square" lIns="0" rIns="0" tIns="0" bIns="0" anchor="t">
+            <a:spAutoFit/>
+          </a:bodyPr>
+          <a:lstStyle/>
+          <a:p>
+            <a:pPr algn="l">
+              <a:spcBef>
+                <a:spcPts val="0"/>
+              </a:spcBef>
+              <a:spcAft>
+                <a:spcPts val="0"/>
+              </a:spcAft>
+            </a:pPr>
+            <a:r>
+              <a:rPr sz="1300" b="1">
+                <a:solidFill>
+                  <a:srgbClr val="119DA4"/>
+                </a:solidFill>
+                <a:latin typeface="微軟正黑體"/>
+              </a:rPr>
+              <a:t>北極星指標</a:t>
+            </a:r>
+          </a:p>
+        </p:txBody>
+      </p:sp>
+      <p:sp>
+        <p:nvSpPr>
+          <p:cNvPr id="11" name="Rectangle 10"/>
+          <p:cNvSpPr/>
+          <p:nvPr/>
+        </p:nvSpPr>
+        <p:spPr>
+          <a:xfrm>
+            <a:off x="841248" y="2633472"/>
+            <a:ext cx="4828032" cy="658368"/>
+          </a:xfrm>
+          <a:prstGeom prst="rect">
+            <a:avLst/>
+          </a:prstGeom>
+          <a:solidFill>
+            <a:srgbClr val="FFFFFF"/>
+          </a:solidFill>
+          <a:ln w="12700">
+            <a:solidFill>
+              <a:srgbClr val="D8DFE6"/>
+            </a:solidFill>
+          </a:ln>
+          <a:effectLst/>
+        </p:spPr>
+        <p:style>
+          <a:lnRef idx="1">
+            <a:schemeClr val="accent1"/>
+          </a:lnRef>
+          <a:fillRef idx="3">
+            <a:schemeClr val="accent1"/>
+          </a:fillRef>
+          <a:effectRef idx="2">
+            <a:schemeClr val="accent1"/>
+          </a:effectRef>
+          <a:fontRef idx="minor">
+            <a:schemeClr val="lt1"/>
+          </a:fontRef>
+        </p:style>
+        <p:txBody>
+          <a:bodyPr rtlCol="0" anchor="ctr"/>
+          <a:lstStyle/>
+          <a:p>
+            <a:pPr algn="ctr"/>
+          </a:p>
+        </p:txBody>
+      </p:sp>
+      <p:sp>
+        <p:nvSpPr>
+          <p:cNvPr id="12" name="TextBox 11"/>
+          <p:cNvSpPr txBox="1"/>
+          <p:nvPr/>
+        </p:nvSpPr>
+        <p:spPr>
+          <a:xfrm>
+            <a:off x="960120" y="2798064"/>
+            <a:ext cx="4590288" cy="365760"/>
+          </a:xfrm>
+          <a:prstGeom prst="rect">
+            <a:avLst/>
+          </a:prstGeom>
+          <a:noFill/>
+        </p:spPr>
+        <p:txBody>
+          <a:bodyPr wrap="square" lIns="0" rIns="0" tIns="0" bIns="0" anchor="t">
+            <a:spAutoFit/>
+          </a:bodyPr>
+          <a:lstStyle/>
+          <a:p>
+            <a:pPr algn="ctr">
+              <a:spcBef>
+                <a:spcPts val="0"/>
+              </a:spcBef>
+              <a:spcAft>
+                <a:spcPts val="0"/>
+              </a:spcAft>
+            </a:pPr>
+            <a:r>
+              <a:rPr sz="1550" b="1">
+                <a:solidFill>
+                  <a:srgbClr val="102A43"/>
+                </a:solidFill>
+                <a:latin typeface="微軟正黑體"/>
+              </a:rPr>
+              <a:t>採納率　＝　被修掉的意見數　÷　提出的意見數</a:t>
+            </a:r>
+          </a:p>
+        </p:txBody>
+      </p:sp>
+      <p:sp>
+        <p:nvSpPr>
+          <p:cNvPr id="13" name="TextBox 12"/>
+          <p:cNvSpPr txBox="1"/>
+          <p:nvPr/>
+        </p:nvSpPr>
+        <p:spPr>
+          <a:xfrm>
+            <a:off x="841248" y="3493008"/>
+            <a:ext cx="4846320" cy="1737360"/>
+          </a:xfrm>
+          <a:prstGeom prst="rect">
+            <a:avLst/>
+          </a:prstGeom>
+          <a:noFill/>
+        </p:spPr>
+        <p:txBody>
+          <a:bodyPr wrap="square" lIns="0" rIns="0" tIns="0" bIns="0" anchor="t">
+            <a:spAutoFit/>
+          </a:bodyPr>
+          <a:lstStyle/>
+          <a:p>
+            <a:pPr algn="l">
+              <a:spcBef>
+                <a:spcPts val="0"/>
+              </a:spcBef>
+              <a:spcAft>
+                <a:spcPts val="300"/>
+              </a:spcAft>
+            </a:pPr>
+            <a:r>
+              <a:rPr sz="1250" b="1">
+                <a:solidFill>
+                  <a:srgbClr val="102A43"/>
+                </a:solidFill>
+                <a:latin typeface="微軟正黑體"/>
+              </a:rPr>
+              <a:t>為什麼可信</a:t>
+            </a:r>
+          </a:p>
+          <a:p>
+            <a:pPr>
+              <a:lnSpc>
+                <a:spcPct val="125000"/>
+              </a:lnSpc>
+              <a:spcBef>
+                <a:spcPts val="0"/>
+              </a:spcBef>
+              <a:spcAft>
+                <a:spcPts val="0"/>
+              </a:spcAft>
+            </a:pPr>
+            <a:r>
+              <a:rPr sz="1150" b="0">
+                <a:solidFill>
+                  <a:srgbClr val="5B6B7B"/>
+                </a:solidFill>
+                <a:latin typeface="微軟正黑體"/>
+              </a:rPr>
+              <a:t>工程師真的動手改了那行程式碼才算採納。沒有人會為了配合 KPI 去改自己的韌體。</a:t>
+            </a:r>
+          </a:p>
+          <a:p>
+            <a:pPr>
+              <a:spcBef>
+                <a:spcPts val="900"/>
+              </a:spcBef>
+              <a:spcAft>
+                <a:spcPts val="300"/>
+              </a:spcAft>
+            </a:pPr>
+            <a:r>
+              <a:rPr sz="1250" b="1">
+                <a:solidFill>
+                  <a:srgbClr val="102A43"/>
+                </a:solidFill>
+                <a:latin typeface="微軟正黑體"/>
+              </a:rPr>
+              <a:t>怎麼判定</a:t>
+            </a:r>
+          </a:p>
+          <a:p>
+            <a:pPr>
+              <a:lnSpc>
+                <a:spcPct val="125000"/>
+              </a:lnSpc>
+              <a:spcBef>
+                <a:spcPts val="0"/>
+              </a:spcBef>
+              <a:spcAft>
+                <a:spcPts val="0"/>
+              </a:spcAft>
+            </a:pPr>
+            <a:r>
+              <a:rPr sz="1150" b="0">
+                <a:solidFill>
+                  <a:srgbClr val="5B6B7B"/>
+                </a:solidFill>
+                <a:latin typeface="微軟正黑體"/>
+              </a:rPr>
+              <a:t>比對前後兩輪審查的意見識別碼：消失、且那行程式碼已變動即為已修正。全自動，使用者不必按任何按鈕。</a:t>
+            </a:r>
+          </a:p>
+          <a:p>
+            <a:pPr>
+              <a:spcBef>
+                <a:spcPts val="900"/>
+              </a:spcBef>
+              <a:spcAft>
+                <a:spcPts val="300"/>
+              </a:spcAft>
+            </a:pPr>
+            <a:r>
+              <a:rPr sz="1250" b="1">
+                <a:solidFill>
+                  <a:srgbClr val="102A43"/>
+                </a:solidFill>
+                <a:latin typeface="微軟正黑體"/>
+              </a:rPr>
+              <a:t>要補什麼</a:t>
+            </a:r>
+          </a:p>
+          <a:p>
+            <a:pPr>
+              <a:lnSpc>
+                <a:spcPct val="125000"/>
+              </a:lnSpc>
+              <a:spcBef>
+                <a:spcPts val="0"/>
+              </a:spcBef>
+              <a:spcAft>
+                <a:spcPts val="0"/>
+              </a:spcAft>
+            </a:pPr>
+            <a:r>
+              <a:rPr sz="1150" b="0">
+                <a:solidFill>
+                  <a:srgbClr val="5B6B7B"/>
+                </a:solidFill>
+                <a:latin typeface="微軟正黑體"/>
+              </a:rPr>
+              <a:t>現有稽核日誌記的是「請求」，不是「意見的下場」。需新增一份意見記錄檔與匯出指令。</a:t>
+            </a:r>
+          </a:p>
+        </p:txBody>
+      </p:sp>
+      <p:sp>
+        <p:nvSpPr>
+          <p:cNvPr id="14" name="Rectangle 13"/>
+          <p:cNvSpPr/>
+          <p:nvPr/>
+        </p:nvSpPr>
+        <p:spPr>
+          <a:xfrm>
+            <a:off x="6254496" y="2103120"/>
+            <a:ext cx="5376672" cy="3310128"/>
+          </a:xfrm>
+          <a:prstGeom prst="rect">
+            <a:avLst/>
+          </a:prstGeom>
+          <a:noFill/>
+          <a:ln w="12700">
+            <a:solidFill>
+              <a:srgbClr val="D8DFE6"/>
+            </a:solidFill>
+          </a:ln>
+          <a:effectLst/>
+        </p:spPr>
+        <p:style>
+          <a:lnRef idx="1">
+            <a:schemeClr val="accent1"/>
+          </a:lnRef>
+          <a:fillRef idx="3">
+            <a:schemeClr val="accent1"/>
+          </a:fillRef>
+          <a:effectRef idx="2">
+            <a:schemeClr val="accent1"/>
+          </a:effectRef>
+          <a:fontRef idx="minor">
+            <a:schemeClr val="lt1"/>
+          </a:fontRef>
+        </p:style>
+        <p:txBody>
+          <a:bodyPr rtlCol="0" anchor="ctr"/>
+          <a:lstStyle/>
+          <a:p>
+            <a:pPr algn="ctr"/>
+          </a:p>
+        </p:txBody>
+      </p:sp>
+      <p:sp>
+        <p:nvSpPr>
+          <p:cNvPr id="15" name="TextBox 14"/>
+          <p:cNvSpPr txBox="1"/>
+          <p:nvPr/>
+        </p:nvSpPr>
+        <p:spPr>
+          <a:xfrm>
+            <a:off x="6528816" y="2286000"/>
+            <a:ext cx="4846320" cy="320040"/>
+          </a:xfrm>
+          <a:prstGeom prst="rect">
+            <a:avLst/>
+          </a:prstGeom>
+          <a:noFill/>
+        </p:spPr>
+        <p:txBody>
+          <a:bodyPr wrap="square" lIns="0" rIns="0" tIns="0" bIns="0" anchor="t">
+            <a:spAutoFit/>
+          </a:bodyPr>
+          <a:lstStyle/>
+          <a:p>
+            <a:pPr algn="l">
+              <a:spcBef>
+                <a:spcPts val="0"/>
+              </a:spcBef>
+              <a:spcAft>
+                <a:spcPts val="0"/>
+              </a:spcAft>
+            </a:pPr>
+            <a:r>
+              <a:rPr sz="1300" b="1">
+                <a:solidFill>
+                  <a:srgbClr val="119DA4"/>
+                </a:solidFill>
+                <a:latin typeface="微軟正黑體"/>
+              </a:rPr>
+              <a:t>指標分層</a:t>
+            </a:r>
+          </a:p>
+        </p:txBody>
+      </p:sp>
+      <p:sp>
+        <p:nvSpPr>
+          <p:cNvPr id="16" name="Rectangle 15"/>
+          <p:cNvSpPr/>
+          <p:nvPr/>
+        </p:nvSpPr>
+        <p:spPr>
+          <a:xfrm>
+            <a:off x="6528816" y="2670048"/>
+            <a:ext cx="932688" cy="566928"/>
+          </a:xfrm>
+          <a:prstGeom prst="rect">
+            <a:avLst/>
+          </a:prstGeom>
+          <a:solidFill>
+            <a:srgbClr val="119DA4"/>
+          </a:solidFill>
+          <a:ln>
+            <a:noFill/>
+          </a:ln>
+          <a:effectLst/>
+        </p:spPr>
+        <p:style>
+          <a:lnRef idx="1">
+            <a:schemeClr val="accent1"/>
+          </a:lnRef>
+          <a:fillRef idx="3">
+            <a:schemeClr val="accent1"/>
+          </a:fillRef>
+          <a:effectRef idx="2">
+            <a:schemeClr val="accent1"/>
+          </a:effectRef>
+          <a:fontRef idx="minor">
+            <a:schemeClr val="lt1"/>
+          </a:fontRef>
+        </p:style>
+        <p:txBody>
+          <a:bodyPr rtlCol="0" anchor="ctr"/>
+          <a:lstStyle/>
+          <a:p>
+            <a:pPr algn="ctr"/>
+          </a:p>
+        </p:txBody>
+      </p:sp>
+      <p:sp>
+        <p:nvSpPr>
+          <p:cNvPr id="17" name="TextBox 16"/>
+          <p:cNvSpPr txBox="1"/>
+          <p:nvPr/>
+        </p:nvSpPr>
+        <p:spPr>
+          <a:xfrm>
+            <a:off x="6528816" y="2834640"/>
+            <a:ext cx="932688" cy="274320"/>
+          </a:xfrm>
+          <a:prstGeom prst="rect">
+            <a:avLst/>
+          </a:prstGeom>
+          <a:noFill/>
+        </p:spPr>
+        <p:txBody>
+          <a:bodyPr wrap="square" lIns="0" rIns="0" tIns="0" bIns="0" anchor="t">
+            <a:spAutoFit/>
+          </a:bodyPr>
+          <a:lstStyle/>
+          <a:p>
+            <a:pPr algn="ctr">
+              <a:spcBef>
+                <a:spcPts val="0"/>
+              </a:spcBef>
+              <a:spcAft>
+                <a:spcPts val="0"/>
+              </a:spcAft>
+            </a:pPr>
+            <a:r>
+              <a:rPr sz="1150" b="1">
+                <a:solidFill>
+                  <a:srgbClr val="FFFFFF"/>
+                </a:solidFill>
+                <a:latin typeface="微軟正黑體"/>
+              </a:rPr>
+              <a:t>北極星</a:t>
+            </a:r>
+          </a:p>
+        </p:txBody>
+      </p:sp>
+      <p:sp>
+        <p:nvSpPr>
+          <p:cNvPr id="18" name="TextBox 17"/>
+          <p:cNvSpPr txBox="1"/>
+          <p:nvPr/>
+        </p:nvSpPr>
+        <p:spPr>
+          <a:xfrm>
+            <a:off x="7607808" y="2706624"/>
+            <a:ext cx="3840480" cy="566928"/>
+          </a:xfrm>
+          <a:prstGeom prst="rect">
+            <a:avLst/>
+          </a:prstGeom>
+          <a:noFill/>
+        </p:spPr>
+        <p:txBody>
+          <a:bodyPr wrap="square" lIns="0" rIns="0" tIns="0" bIns="0" anchor="t">
+            <a:spAutoFit/>
+          </a:bodyPr>
+          <a:lstStyle/>
+          <a:p>
+            <a:pPr algn="l">
+              <a:spcBef>
+                <a:spcPts val="0"/>
+              </a:spcBef>
+              <a:spcAft>
+                <a:spcPts val="200"/>
+              </a:spcAft>
+            </a:pPr>
+            <a:r>
+              <a:rPr sz="1250" b="1">
+                <a:solidFill>
+                  <a:srgbClr val="102A43"/>
+                </a:solidFill>
+                <a:latin typeface="微軟正黑體"/>
+              </a:rPr>
+              <a:t>採納率</a:t>
+            </a:r>
+          </a:p>
+          <a:p>
+            <a:pPr>
+              <a:lnSpc>
+                <a:spcPct val="120000"/>
+              </a:lnSpc>
+              <a:spcBef>
+                <a:spcPts val="0"/>
+              </a:spcBef>
+              <a:spcAft>
+                <a:spcPts val="0"/>
+              </a:spcAft>
+            </a:pPr>
+            <a:r>
+              <a:rPr sz="1100" b="0">
+                <a:solidFill>
+                  <a:srgbClr val="5B6B7B"/>
+                </a:solidFill>
+                <a:latin typeface="微軟正黑體"/>
+              </a:rPr>
+              <a:t>唯一不需要 ground truth 的價值證明</a:t>
+            </a:r>
+          </a:p>
+        </p:txBody>
+      </p:sp>
+      <p:sp>
+        <p:nvSpPr>
+          <p:cNvPr id="19" name="Rectangle 18"/>
+          <p:cNvSpPr/>
+          <p:nvPr/>
+        </p:nvSpPr>
+        <p:spPr>
+          <a:xfrm>
+            <a:off x="6528816" y="3328416"/>
+            <a:ext cx="932688" cy="566928"/>
+          </a:xfrm>
+          <a:prstGeom prst="rect">
+            <a:avLst/>
+          </a:prstGeom>
+          <a:solidFill>
+            <a:srgbClr val="1C446B"/>
+          </a:solidFill>
+          <a:ln>
+            <a:noFill/>
+          </a:ln>
+          <a:effectLst/>
+        </p:spPr>
+        <p:style>
+          <a:lnRef idx="1">
+            <a:schemeClr val="accent1"/>
+          </a:lnRef>
+          <a:fillRef idx="3">
+            <a:schemeClr val="accent1"/>
+          </a:fillRef>
+          <a:effectRef idx="2">
+            <a:schemeClr val="accent1"/>
+          </a:effectRef>
+          <a:fontRef idx="minor">
+            <a:schemeClr val="lt1"/>
+          </a:fontRef>
+        </p:style>
+        <p:txBody>
+          <a:bodyPr rtlCol="0" anchor="ctr"/>
+          <a:lstStyle/>
+          <a:p>
+            <a:pPr algn="ctr"/>
+          </a:p>
+        </p:txBody>
+      </p:sp>
+      <p:sp>
+        <p:nvSpPr>
+          <p:cNvPr id="20" name="TextBox 19"/>
+          <p:cNvSpPr txBox="1"/>
+          <p:nvPr/>
+        </p:nvSpPr>
+        <p:spPr>
+          <a:xfrm>
+            <a:off x="6528816" y="3493008"/>
+            <a:ext cx="932688" cy="274320"/>
+          </a:xfrm>
+          <a:prstGeom prst="rect">
+            <a:avLst/>
+          </a:prstGeom>
+          <a:noFill/>
+        </p:spPr>
+        <p:txBody>
+          <a:bodyPr wrap="square" lIns="0" rIns="0" tIns="0" bIns="0" anchor="t">
+            <a:spAutoFit/>
+          </a:bodyPr>
+          <a:lstStyle/>
+          <a:p>
+            <a:pPr algn="ctr">
+              <a:spcBef>
+                <a:spcPts val="0"/>
+              </a:spcBef>
+              <a:spcAft>
+                <a:spcPts val="0"/>
+              </a:spcAft>
+            </a:pPr>
+            <a:r>
+              <a:rPr sz="1150" b="1">
+                <a:solidFill>
+                  <a:srgbClr val="FFFFFF"/>
+                </a:solidFill>
+                <a:latin typeface="微軟正黑體"/>
+              </a:rPr>
+              <a:t>領先</a:t>
+            </a:r>
+          </a:p>
+        </p:txBody>
+      </p:sp>
+      <p:sp>
+        <p:nvSpPr>
+          <p:cNvPr id="21" name="TextBox 20"/>
+          <p:cNvSpPr txBox="1"/>
+          <p:nvPr/>
+        </p:nvSpPr>
+        <p:spPr>
+          <a:xfrm>
+            <a:off x="7607808" y="3364992"/>
+            <a:ext cx="3840480" cy="566928"/>
+          </a:xfrm>
+          <a:prstGeom prst="rect">
+            <a:avLst/>
+          </a:prstGeom>
+          <a:noFill/>
+        </p:spPr>
+        <p:txBody>
+          <a:bodyPr wrap="square" lIns="0" rIns="0" tIns="0" bIns="0" anchor="t">
+            <a:spAutoFit/>
+          </a:bodyPr>
+          <a:lstStyle/>
+          <a:p>
+            <a:pPr algn="l">
+              <a:spcBef>
+                <a:spcPts val="0"/>
+              </a:spcBef>
+              <a:spcAft>
+                <a:spcPts val="200"/>
+              </a:spcAft>
+            </a:pPr>
+            <a:r>
+              <a:rPr sz="1250" b="1">
+                <a:solidFill>
+                  <a:srgbClr val="102A43"/>
+                </a:solidFill>
+                <a:latin typeface="微軟正黑體"/>
+              </a:rPr>
+              <a:t>每週活躍人數、每人每週採納數</a:t>
+            </a:r>
+          </a:p>
+          <a:p>
+            <a:pPr>
+              <a:lnSpc>
+                <a:spcPct val="120000"/>
+              </a:lnSpc>
+              <a:spcBef>
+                <a:spcPts val="0"/>
+              </a:spcBef>
+              <a:spcAft>
+                <a:spcPts val="0"/>
+              </a:spcAft>
+            </a:pPr>
+            <a:r>
+              <a:rPr sz="1100" b="0">
+                <a:solidFill>
+                  <a:srgbClr val="5B6B7B"/>
+                </a:solidFill>
+                <a:latin typeface="微軟正黑體"/>
+              </a:rPr>
+              <a:t>兩週就看得出趨勢，不必等三個月</a:t>
+            </a:r>
+          </a:p>
+        </p:txBody>
+      </p:sp>
+      <p:sp>
+        <p:nvSpPr>
+          <p:cNvPr id="22" name="Rectangle 21"/>
+          <p:cNvSpPr/>
+          <p:nvPr/>
+        </p:nvSpPr>
+        <p:spPr>
+          <a:xfrm>
+            <a:off x="6528816" y="3986784"/>
+            <a:ext cx="932688" cy="566928"/>
+          </a:xfrm>
+          <a:prstGeom prst="rect">
+            <a:avLst/>
+          </a:prstGeom>
+          <a:solidFill>
+            <a:srgbClr val="1C446B"/>
+          </a:solidFill>
+          <a:ln>
+            <a:noFill/>
+          </a:ln>
+          <a:effectLst/>
+        </p:spPr>
+        <p:style>
+          <a:lnRef idx="1">
+            <a:schemeClr val="accent1"/>
+          </a:lnRef>
+          <a:fillRef idx="3">
+            <a:schemeClr val="accent1"/>
+          </a:fillRef>
+          <a:effectRef idx="2">
+            <a:schemeClr val="accent1"/>
+          </a:effectRef>
+          <a:fontRef idx="minor">
+            <a:schemeClr val="lt1"/>
+          </a:fontRef>
+        </p:style>
+        <p:txBody>
+          <a:bodyPr rtlCol="0" anchor="ctr"/>
+          <a:lstStyle/>
+          <a:p>
+            <a:pPr algn="ctr"/>
+          </a:p>
+        </p:txBody>
+      </p:sp>
+      <p:sp>
+        <p:nvSpPr>
+          <p:cNvPr id="23" name="TextBox 22"/>
+          <p:cNvSpPr txBox="1"/>
+          <p:nvPr/>
+        </p:nvSpPr>
+        <p:spPr>
+          <a:xfrm>
+            <a:off x="6528816" y="4151376"/>
+            <a:ext cx="932688" cy="274320"/>
+          </a:xfrm>
+          <a:prstGeom prst="rect">
+            <a:avLst/>
+          </a:prstGeom>
+          <a:noFill/>
+        </p:spPr>
+        <p:txBody>
+          <a:bodyPr wrap="square" lIns="0" rIns="0" tIns="0" bIns="0" anchor="t">
+            <a:spAutoFit/>
+          </a:bodyPr>
+          <a:lstStyle/>
+          <a:p>
+            <a:pPr algn="ctr">
+              <a:spcBef>
+                <a:spcPts val="0"/>
+              </a:spcBef>
+              <a:spcAft>
+                <a:spcPts val="0"/>
+              </a:spcAft>
+            </a:pPr>
+            <a:r>
+              <a:rPr sz="1150" b="1">
+                <a:solidFill>
+                  <a:srgbClr val="FFFFFF"/>
+                </a:solidFill>
+                <a:latin typeface="微軟正黑體"/>
+              </a:rPr>
+              <a:t>落後</a:t>
+            </a:r>
+          </a:p>
+        </p:txBody>
+      </p:sp>
+      <p:sp>
+        <p:nvSpPr>
+          <p:cNvPr id="24" name="TextBox 23"/>
+          <p:cNvSpPr txBox="1"/>
+          <p:nvPr/>
+        </p:nvSpPr>
+        <p:spPr>
+          <a:xfrm>
+            <a:off x="7607808" y="4023360"/>
+            <a:ext cx="3840480" cy="566928"/>
+          </a:xfrm>
+          <a:prstGeom prst="rect">
+            <a:avLst/>
+          </a:prstGeom>
+          <a:noFill/>
+        </p:spPr>
+        <p:txBody>
+          <a:bodyPr wrap="square" lIns="0" rIns="0" tIns="0" bIns="0" anchor="t">
+            <a:spAutoFit/>
+          </a:bodyPr>
+          <a:lstStyle/>
+          <a:p>
+            <a:pPr algn="l">
+              <a:spcBef>
+                <a:spcPts val="0"/>
+              </a:spcBef>
+              <a:spcAft>
+                <a:spcPts val="200"/>
+              </a:spcAft>
+            </a:pPr>
+            <a:r>
+              <a:rPr sz="1250" b="1">
+                <a:solidFill>
+                  <a:srgbClr val="102A43"/>
+                </a:solidFill>
+                <a:latin typeface="微軟正黑體"/>
+              </a:rPr>
+              <a:t>規則命中分布、反覆被否決的規則</a:t>
+            </a:r>
+          </a:p>
+          <a:p>
+            <a:pPr>
+              <a:lnSpc>
+                <a:spcPct val="120000"/>
+              </a:lnSpc>
+              <a:spcBef>
+                <a:spcPts val="0"/>
+              </a:spcBef>
+              <a:spcAft>
+                <a:spcPts val="0"/>
+              </a:spcAft>
+            </a:pPr>
+            <a:r>
+              <a:rPr sz="1100" b="0">
+                <a:solidFill>
+                  <a:srgbClr val="5B6B7B"/>
+                </a:solidFill>
+                <a:latin typeface="微軟正黑體"/>
+              </a:rPr>
+              <a:t>指出該補哪一條 except</a:t>
+            </a:r>
+          </a:p>
+        </p:txBody>
+      </p:sp>
+      <p:sp>
+        <p:nvSpPr>
+          <p:cNvPr id="25" name="Rectangle 24"/>
+          <p:cNvSpPr/>
+          <p:nvPr/>
+        </p:nvSpPr>
+        <p:spPr>
+          <a:xfrm>
+            <a:off x="6528816" y="4645152"/>
+            <a:ext cx="932688" cy="566928"/>
+          </a:xfrm>
+          <a:prstGeom prst="rect">
+            <a:avLst/>
+          </a:prstGeom>
+          <a:solidFill>
+            <a:srgbClr val="D18616"/>
+          </a:solidFill>
+          <a:ln>
+            <a:noFill/>
+          </a:ln>
+          <a:effectLst/>
+        </p:spPr>
+        <p:style>
+          <a:lnRef idx="1">
+            <a:schemeClr val="accent1"/>
+          </a:lnRef>
+          <a:fillRef idx="3">
+            <a:schemeClr val="accent1"/>
+          </a:fillRef>
+          <a:effectRef idx="2">
+            <a:schemeClr val="accent1"/>
+          </a:effectRef>
+          <a:fontRef idx="minor">
+            <a:schemeClr val="lt1"/>
+          </a:fontRef>
+        </p:style>
+        <p:txBody>
+          <a:bodyPr rtlCol="0" anchor="ctr"/>
+          <a:lstStyle/>
+          <a:p>
+            <a:pPr algn="ctr"/>
+          </a:p>
+        </p:txBody>
+      </p:sp>
+      <p:sp>
+        <p:nvSpPr>
+          <p:cNvPr id="26" name="TextBox 25"/>
+          <p:cNvSpPr txBox="1"/>
+          <p:nvPr/>
+        </p:nvSpPr>
+        <p:spPr>
+          <a:xfrm>
+            <a:off x="6528816" y="4809744"/>
+            <a:ext cx="932688" cy="274320"/>
+          </a:xfrm>
+          <a:prstGeom prst="rect">
+            <a:avLst/>
+          </a:prstGeom>
+          <a:noFill/>
+        </p:spPr>
+        <p:txBody>
+          <a:bodyPr wrap="square" lIns="0" rIns="0" tIns="0" bIns="0" anchor="t">
+            <a:spAutoFit/>
+          </a:bodyPr>
+          <a:lstStyle/>
+          <a:p>
+            <a:pPr algn="ctr">
+              <a:spcBef>
+                <a:spcPts val="0"/>
+              </a:spcBef>
+              <a:spcAft>
+                <a:spcPts val="0"/>
+              </a:spcAft>
+            </a:pPr>
+            <a:r>
+              <a:rPr sz="1150" b="1">
+                <a:solidFill>
+                  <a:srgbClr val="FFFFFF"/>
+                </a:solidFill>
+                <a:latin typeface="微軟正黑體"/>
+              </a:rPr>
+              <a:t>護欄</a:t>
+            </a:r>
+          </a:p>
+        </p:txBody>
+      </p:sp>
+      <p:sp>
+        <p:nvSpPr>
+          <p:cNvPr id="27" name="TextBox 26"/>
+          <p:cNvSpPr txBox="1"/>
+          <p:nvPr/>
+        </p:nvSpPr>
+        <p:spPr>
+          <a:xfrm>
+            <a:off x="7607808" y="4681728"/>
+            <a:ext cx="3840480" cy="566928"/>
+          </a:xfrm>
+          <a:prstGeom prst="rect">
+            <a:avLst/>
+          </a:prstGeom>
+          <a:noFill/>
+        </p:spPr>
+        <p:txBody>
+          <a:bodyPr wrap="square" lIns="0" rIns="0" tIns="0" bIns="0" anchor="t">
+            <a:spAutoFit/>
+          </a:bodyPr>
+          <a:lstStyle/>
+          <a:p>
+            <a:pPr algn="l">
+              <a:spcBef>
+                <a:spcPts val="0"/>
+              </a:spcBef>
+              <a:spcAft>
+                <a:spcPts val="200"/>
+              </a:spcAft>
+            </a:pPr>
+            <a:r>
+              <a:rPr sz="1250" b="1">
+                <a:solidFill>
+                  <a:srgbClr val="102A43"/>
+                </a:solidFill>
+                <a:latin typeface="微軟正黑體"/>
+              </a:rPr>
+              <a:t>p95 延遲、每人每週誤報數</a:t>
+            </a:r>
+          </a:p>
+          <a:p>
+            <a:pPr>
+              <a:lnSpc>
+                <a:spcPct val="120000"/>
+              </a:lnSpc>
+              <a:spcBef>
+                <a:spcPts val="0"/>
+              </a:spcBef>
+              <a:spcAft>
+                <a:spcPts val="0"/>
+              </a:spcAft>
+            </a:pPr>
+            <a:r>
+              <a:rPr sz="1100" b="0">
+                <a:solidFill>
+                  <a:srgbClr val="5B6B7B"/>
+                </a:solidFill>
+                <a:latin typeface="微軟正黑體"/>
+              </a:rPr>
+              <a:t>不准跌破的底線，不是要衝高的目標</a:t>
+            </a:r>
+          </a:p>
+        </p:txBody>
+      </p:sp>
+      <p:sp>
+        <p:nvSpPr>
+          <p:cNvPr id="28" name="Rectangle 27"/>
+          <p:cNvSpPr/>
+          <p:nvPr/>
+        </p:nvSpPr>
+        <p:spPr>
+          <a:xfrm>
+            <a:off x="566928" y="5559552"/>
+            <a:ext cx="11064240" cy="621792"/>
+          </a:xfrm>
+          <a:prstGeom prst="rect">
+            <a:avLst/>
+          </a:prstGeom>
+          <a:solidFill>
+            <a:srgbClr val="102A43"/>
+          </a:solidFill>
+          <a:ln>
+            <a:noFill/>
+          </a:ln>
+          <a:effectLst/>
+        </p:spPr>
+        <p:style>
+          <a:lnRef idx="1">
+            <a:schemeClr val="accent1"/>
+          </a:lnRef>
+          <a:fillRef idx="3">
+            <a:schemeClr val="accent1"/>
+          </a:fillRef>
+          <a:effectRef idx="2">
+            <a:schemeClr val="accent1"/>
+          </a:effectRef>
+          <a:fontRef idx="minor">
+            <a:schemeClr val="lt1"/>
+          </a:fontRef>
+        </p:style>
+        <p:txBody>
+          <a:bodyPr rtlCol="0" anchor="ctr"/>
+          <a:lstStyle/>
+          <a:p>
+            <a:pPr algn="ctr"/>
+          </a:p>
+        </p:txBody>
+      </p:sp>
+      <p:sp>
+        <p:nvSpPr>
+          <p:cNvPr id="29" name="TextBox 28"/>
+          <p:cNvSpPr txBox="1"/>
+          <p:nvPr/>
+        </p:nvSpPr>
+        <p:spPr>
+          <a:xfrm>
+            <a:off x="868680" y="5669280"/>
+            <a:ext cx="10515600" cy="420624"/>
+          </a:xfrm>
+          <a:prstGeom prst="rect">
+            <a:avLst/>
+          </a:prstGeom>
+          <a:noFill/>
+        </p:spPr>
+        <p:txBody>
+          <a:bodyPr wrap="square" lIns="0" rIns="0" tIns="0" bIns="0" anchor="t">
+            <a:spAutoFit/>
+          </a:bodyPr>
+          <a:lstStyle/>
+          <a:p>
+            <a:pPr algn="l">
+              <a:spcBef>
+                <a:spcPts val="0"/>
+              </a:spcBef>
+              <a:spcAft>
+                <a:spcPts val="0"/>
+              </a:spcAft>
+            </a:pPr>
+            <a:r>
+              <a:rPr sz="1300" b="1">
+                <a:solidFill>
+                  <a:srgbClr val="FFFFFF"/>
+                </a:solidFill>
+                <a:latin typeface="微軟正黑體"/>
+              </a:rPr>
+              <a:t>試行 4 週的報告格式：「n 則意見被實際修掉，其中 m 則是已合併進主線的既有缺陷」—— 比率是佐證，案例才是論點。</a:t>
+            </a:r>
+          </a:p>
+        </p:txBody>
+      </p:sp>
+    </p:spTree>
+  </p:cSld>
+  <p:clrMapOvr>
+    <a:masterClrMapping/>
+  </p:clrMapOvr>
+</p:sld>
+</file>
+
+<file path=ppt/slides/slide13.xml><?xml version="1.0" encoding="utf-8"?>
+<p:sld xmlns:a="http://schemas.openxmlformats.org/drawingml/2006/main" xmlns:p="http://schemas.openxmlformats.org/presentationml/2006/main" xmlns:r="http://schemas.openxmlformats.org/officeDocument/2006/relationships">
+  <p:cSld>
+    <p:spTree>
+      <p:nvGrpSpPr>
+        <p:cNvPr id="1" name=""/>
+        <p:cNvGrpSpPr/>
+        <p:nvPr/>
+      </p:nvGrpSpPr>
+      <p:grpSpPr/>
+      <p:sp>
+        <p:nvSpPr>
+          <p:cNvPr id="2" name="Rectangle 1"/>
+          <p:cNvSpPr/>
+          <p:nvPr/>
+        </p:nvSpPr>
+        <p:spPr>
+          <a:xfrm>
+            <a:off x="0" y="0"/>
+            <a:ext cx="118872" cy="6858000"/>
+          </a:xfrm>
+          <a:prstGeom prst="rect">
+            <a:avLst/>
+          </a:prstGeom>
+          <a:solidFill>
+            <a:srgbClr val="102A43"/>
+          </a:solidFill>
+          <a:ln>
+            <a:noFill/>
+          </a:ln>
+          <a:effectLst/>
+        </p:spPr>
+        <p:style>
+          <a:lnRef idx="1">
+            <a:schemeClr val="accent1"/>
+          </a:lnRef>
+          <a:fillRef idx="3">
+            <a:schemeClr val="accent1"/>
+          </a:fillRef>
+          <a:effectRef idx="2">
+            <a:schemeClr val="accent1"/>
+          </a:effectRef>
+          <a:fontRef idx="minor">
+            <a:schemeClr val="lt1"/>
+          </a:fontRef>
+        </p:style>
+        <p:txBody>
+          <a:bodyPr rtlCol="0" anchor="ctr"/>
+          <a:lstStyle/>
+          <a:p>
+            <a:pPr algn="ctr"/>
+          </a:p>
+        </p:txBody>
+      </p:sp>
+      <p:sp>
+        <p:nvSpPr>
+          <p:cNvPr id="3" name="TextBox 2"/>
+          <p:cNvSpPr txBox="1"/>
+          <p:nvPr/>
+        </p:nvSpPr>
+        <p:spPr>
+          <a:xfrm>
+            <a:off x="566928" y="384048"/>
+            <a:ext cx="10881360" cy="274320"/>
+          </a:xfrm>
+          <a:prstGeom prst="rect">
+            <a:avLst/>
+          </a:prstGeom>
+          <a:noFill/>
+        </p:spPr>
+        <p:txBody>
+          <a:bodyPr wrap="square" lIns="0" rIns="0" tIns="0" bIns="0" anchor="t">
+            <a:spAutoFit/>
+          </a:bodyPr>
+          <a:lstStyle/>
+          <a:p>
+            <a:pPr algn="l">
+              <a:spcBef>
+                <a:spcPts val="0"/>
+              </a:spcBef>
+              <a:spcAft>
+                <a:spcPts val="0"/>
+              </a:spcAft>
+            </a:pPr>
+            <a:r>
+              <a:rPr sz="1200" b="1">
+                <a:solidFill>
+                  <a:srgbClr val="119DA4"/>
+                </a:solidFill>
+                <a:latin typeface="微軟正黑體"/>
+              </a:rPr>
+              <a:t>NEXT</a:t>
+            </a:r>
+          </a:p>
+        </p:txBody>
+      </p:sp>
+      <p:sp>
+        <p:nvSpPr>
+          <p:cNvPr id="4" name="TextBox 3"/>
+          <p:cNvSpPr txBox="1"/>
+          <p:nvPr/>
+        </p:nvSpPr>
+        <p:spPr>
+          <a:xfrm>
+            <a:off x="566928" y="658368"/>
+            <a:ext cx="10881360" cy="502920"/>
+          </a:xfrm>
+          <a:prstGeom prst="rect">
+            <a:avLst/>
+          </a:prstGeom>
+          <a:noFill/>
+        </p:spPr>
+        <p:txBody>
+          <a:bodyPr wrap="square" lIns="0" rIns="0" tIns="0" bIns="0" anchor="t">
+            <a:spAutoFit/>
+          </a:bodyPr>
+          <a:lstStyle/>
+          <a:p>
+            <a:pPr algn="l">
+              <a:spcBef>
+                <a:spcPts val="0"/>
+              </a:spcBef>
+              <a:spcAft>
+                <a:spcPts val="0"/>
+              </a:spcAft>
+            </a:pPr>
+            <a:r>
+              <a:rPr sz="2800" b="1">
+                <a:solidFill>
+                  <a:srgbClr val="102A43"/>
+                </a:solidFill>
+                <a:latin typeface="微軟正黑體"/>
+              </a:rPr>
+              <a:t>下一步與所需支援</a:t>
+            </a:r>
+          </a:p>
+        </p:txBody>
+      </p:sp>
+      <p:sp>
+        <p:nvSpPr>
+          <p:cNvPr id="5" name="Rectangle 4"/>
+          <p:cNvSpPr/>
+          <p:nvPr/>
+        </p:nvSpPr>
+        <p:spPr>
+          <a:xfrm>
+            <a:off x="566928" y="1298448"/>
+            <a:ext cx="11064240" cy="11430"/>
+          </a:xfrm>
+          <a:prstGeom prst="rect">
+            <a:avLst/>
+          </a:prstGeom>
+          <a:solidFill>
+            <a:srgbClr val="D8DFE6"/>
+          </a:solidFill>
+          <a:ln>
+            <a:noFill/>
+          </a:ln>
+          <a:effectLst/>
+        </p:spPr>
+        <p:style>
+          <a:lnRef idx="1">
+            <a:schemeClr val="accent1"/>
+          </a:lnRef>
+          <a:fillRef idx="3">
+            <a:schemeClr val="accent1"/>
+          </a:fillRef>
+          <a:effectRef idx="2">
+            <a:schemeClr val="accent1"/>
+          </a:effectRef>
+          <a:fontRef idx="minor">
+            <a:schemeClr val="lt1"/>
+          </a:fontRef>
+        </p:style>
+        <p:txBody>
+          <a:bodyPr rtlCol="0" anchor="ctr"/>
+          <a:lstStyle/>
+          <a:p>
+            <a:pPr algn="ctr"/>
+          </a:p>
+        </p:txBody>
+      </p:sp>
+      <p:sp>
+        <p:nvSpPr>
+          <p:cNvPr id="6" name="TextBox 5"/>
+          <p:cNvSpPr txBox="1"/>
+          <p:nvPr/>
+        </p:nvSpPr>
+        <p:spPr>
+          <a:xfrm>
+            <a:off x="566928" y="6355080"/>
+            <a:ext cx="5486400" cy="256032"/>
+          </a:xfrm>
+          <a:prstGeom prst="rect">
+            <a:avLst/>
+          </a:prstGeom>
+          <a:noFill/>
+        </p:spPr>
+        <p:txBody>
+          <a:bodyPr wrap="square" lIns="0" rIns="0" tIns="0" bIns="0" anchor="t">
+            <a:spAutoFit/>
+          </a:bodyPr>
+          <a:lstStyle/>
+          <a:p>
+            <a:pPr algn="l">
+              <a:spcBef>
+                <a:spcPts val="0"/>
+              </a:spcBef>
+              <a:spcAft>
+                <a:spcPts val="0"/>
+              </a:spcAft>
+            </a:pPr>
+            <a:r>
+              <a:rPr sz="1000" b="0">
+                <a:solidFill>
+                  <a:srgbClr val="5B6B7B"/>
+                </a:solidFill>
+                <a:latin typeface="微軟正黑體"/>
+              </a:rPr>
+              <a:t>sensAI ｜ 韌體 AI Code Review ｜ v0.5.1</a:t>
+            </a:r>
+          </a:p>
+        </p:txBody>
+      </p:sp>
+      <p:sp>
+        <p:nvSpPr>
+          <p:cNvPr id="7" name="TextBox 6"/>
+          <p:cNvSpPr txBox="1"/>
+          <p:nvPr/>
+        </p:nvSpPr>
+        <p:spPr>
+          <a:xfrm>
+            <a:off x="10607040" y="6355080"/>
+            <a:ext cx="1005840" cy="256032"/>
+          </a:xfrm>
+          <a:prstGeom prst="rect">
+            <a:avLst/>
+          </a:prstGeom>
+          <a:noFill/>
+        </p:spPr>
+        <p:txBody>
+          <a:bodyPr wrap="square" lIns="0" rIns="0" tIns="0" bIns="0" anchor="t">
+            <a:spAutoFit/>
+          </a:bodyPr>
+          <a:lstStyle/>
+          <a:p>
+            <a:pPr algn="r">
+              <a:spcBef>
+                <a:spcPts val="0"/>
+              </a:spcBef>
+              <a:spcAft>
+                <a:spcPts val="0"/>
+              </a:spcAft>
+            </a:pPr>
+            <a:r>
+              <a:rPr sz="1000" b="0">
+                <a:solidFill>
+                  <a:srgbClr val="5B6B7B"/>
+                </a:solidFill>
+                <a:latin typeface="微軟正黑體"/>
+              </a:rPr>
+              <a:t>13</a:t>
             </a:r>
           </a:p>
         </p:txBody>
@@ -13415,7 +16027,7 @@
                 </a:solidFill>
                 <a:latin typeface="微軟正黑體"/>
               </a:rPr>
-              <a:t>實機畫面：範例檔 uart_dma.c —— 存檔後自動審查，6 則意見、附帶 3 個 header、8.4 秒</a:t>
+              <a:t>版面示意：以 src/panel.ts 的實際樣式重繪，意見內容取自 examples/uart_dma.c 檔尾列出的預期結果</a:t>
             </a:r>
           </a:p>
         </p:txBody>

--- a/docs/sensAI_報告.pptx
+++ b/docs/sensAI_報告.pptx
@@ -7554,7 +7554,7 @@
                 </a:solidFill>
                 <a:latin typeface="微軟正黑體"/>
               </a:rPr>
-              <a:t>如何驗證效益：量採納率，不量準確率</a:t>
+              <a:t>如何驗證效益：以使用次數為核心指標</a:t>
             </a:r>
           </a:p>
         </p:txBody>
@@ -7727,7 +7727,7 @@
                 </a:solidFill>
                 <a:latin typeface="微軟正黑體"/>
               </a:rPr>
-              <a:t>「準確率」需要知道程式碼裡到底有幾個 bug —— 那個答案永遠不存在，任何宣稱的準確率都是自己跟自己比。改量使用者用行動投票的結果。</a:t>
+              <a:t>使用次數今天就量得到 —— 稽核日誌每次請求自動記一筆，不必改程式、不必請人填表。但要先拆開看：sensAI 是存檔自動觸發的。</a:t>
             </a:r>
           </a:p>
         </p:txBody>
@@ -7741,7 +7741,93 @@
         <p:spPr>
           <a:xfrm>
             <a:off x="566928" y="2103120"/>
-            <a:ext cx="5376672" cy="3310128"/>
+            <a:ext cx="5989320" cy="3310128"/>
+          </a:xfrm>
+          <a:prstGeom prst="rect">
+            <a:avLst/>
+          </a:prstGeom>
+          <a:noFill/>
+          <a:ln w="12700">
+            <a:solidFill>
+              <a:srgbClr val="D8DFE6"/>
+            </a:solidFill>
+          </a:ln>
+          <a:effectLst/>
+        </p:spPr>
+        <p:style>
+          <a:lnRef idx="1">
+            <a:schemeClr val="accent1"/>
+          </a:lnRef>
+          <a:fillRef idx="3">
+            <a:schemeClr val="accent1"/>
+          </a:fillRef>
+          <a:effectRef idx="2">
+            <a:schemeClr val="accent1"/>
+          </a:effectRef>
+          <a:fontRef idx="minor">
+            <a:schemeClr val="lt1"/>
+          </a:fontRef>
+        </p:style>
+        <p:txBody>
+          <a:bodyPr rtlCol="0" anchor="ctr"/>
+          <a:lstStyle/>
+          <a:p>
+            <a:pPr algn="ctr"/>
+          </a:p>
+        </p:txBody>
+      </p:sp>
+      <p:sp>
+        <p:nvSpPr>
+          <p:cNvPr id="10" name="TextBox 9"/>
+          <p:cNvSpPr txBox="1"/>
+          <p:nvPr/>
+        </p:nvSpPr>
+        <p:spPr>
+          <a:xfrm>
+            <a:off x="841248" y="2286000"/>
+            <a:ext cx="5486400" cy="320040"/>
+          </a:xfrm>
+          <a:prstGeom prst="rect">
+            <a:avLst/>
+          </a:prstGeom>
+          <a:noFill/>
+        </p:spPr>
+        <p:txBody>
+          <a:bodyPr wrap="square" lIns="0" rIns="0" tIns="0" bIns="0" anchor="t">
+            <a:spAutoFit/>
+          </a:bodyPr>
+          <a:lstStyle/>
+          <a:p>
+            <a:pPr algn="l">
+              <a:spcBef>
+                <a:spcPts val="0"/>
+              </a:spcBef>
+              <a:spcAft>
+                <a:spcPts val="0"/>
+              </a:spcAft>
+            </a:pPr>
+            <a:r>
+              <a:rPr sz="1300" b="1">
+                <a:solidFill>
+                  <a:srgbClr val="119DA4"/>
+                </a:solidFill>
+                <a:latin typeface="微軟正黑體"/>
+              </a:rPr>
+              <a:t>使用次數的五個切面</a:t>
+            </a:r>
+          </a:p>
+        </p:txBody>
+      </p:sp>
+      <p:sp>
+        <p:nvSpPr>
+          <p:cNvPr id="11" name="Rectangle 10"/>
+          <p:cNvSpPr/>
+          <p:nvPr/>
+        </p:nvSpPr>
+        <p:spPr>
+          <a:xfrm>
+            <a:off x="841248" y="2651760"/>
+            <a:ext cx="5440680" cy="475488"/>
           </a:xfrm>
           <a:prstGeom prst="rect">
             <a:avLst/>
@@ -7778,14 +7864,14 @@
       </p:sp>
       <p:sp>
         <p:nvSpPr>
-          <p:cNvPr id="10" name="TextBox 9"/>
-          <p:cNvSpPr txBox="1"/>
-          <p:nvPr/>
-        </p:nvSpPr>
-        <p:spPr>
-          <a:xfrm>
-            <a:off x="841248" y="2286000"/>
-            <a:ext cx="4846320" cy="320040"/>
+          <p:cNvPr id="12" name="TextBox 11"/>
+          <p:cNvSpPr txBox="1"/>
+          <p:nvPr/>
+        </p:nvSpPr>
+        <p:spPr>
+          <a:xfrm>
+            <a:off x="969264" y="2697480"/>
+            <a:ext cx="1600200" cy="384048"/>
           </a:xfrm>
           <a:prstGeom prst="rect">
             <a:avLst/>
@@ -7807,101 +7893,13 @@
               </a:spcAft>
             </a:pPr>
             <a:r>
-              <a:rPr sz="1300" b="1">
-                <a:solidFill>
-                  <a:srgbClr val="119DA4"/>
-                </a:solidFill>
-                <a:latin typeface="微軟正黑體"/>
-              </a:rPr>
-              <a:t>北極星指標</a:t>
-            </a:r>
-          </a:p>
-        </p:txBody>
-      </p:sp>
-      <p:sp>
-        <p:nvSpPr>
-          <p:cNvPr id="11" name="Rectangle 10"/>
-          <p:cNvSpPr/>
-          <p:nvPr/>
-        </p:nvSpPr>
-        <p:spPr>
-          <a:xfrm>
-            <a:off x="841248" y="2633472"/>
-            <a:ext cx="4828032" cy="658368"/>
-          </a:xfrm>
-          <a:prstGeom prst="rect">
-            <a:avLst/>
-          </a:prstGeom>
-          <a:solidFill>
-            <a:srgbClr val="FFFFFF"/>
-          </a:solidFill>
-          <a:ln w="12700">
-            <a:solidFill>
-              <a:srgbClr val="D8DFE6"/>
-            </a:solidFill>
-          </a:ln>
-          <a:effectLst/>
-        </p:spPr>
-        <p:style>
-          <a:lnRef idx="1">
-            <a:schemeClr val="accent1"/>
-          </a:lnRef>
-          <a:fillRef idx="3">
-            <a:schemeClr val="accent1"/>
-          </a:fillRef>
-          <a:effectRef idx="2">
-            <a:schemeClr val="accent1"/>
-          </a:effectRef>
-          <a:fontRef idx="minor">
-            <a:schemeClr val="lt1"/>
-          </a:fontRef>
-        </p:style>
-        <p:txBody>
-          <a:bodyPr rtlCol="0" anchor="ctr"/>
-          <a:lstStyle/>
-          <a:p>
-            <a:pPr algn="ctr"/>
-          </a:p>
-        </p:txBody>
-      </p:sp>
-      <p:sp>
-        <p:nvSpPr>
-          <p:cNvPr id="12" name="TextBox 11"/>
-          <p:cNvSpPr txBox="1"/>
-          <p:nvPr/>
-        </p:nvSpPr>
-        <p:spPr>
-          <a:xfrm>
-            <a:off x="960120" y="2798064"/>
-            <a:ext cx="4590288" cy="365760"/>
-          </a:xfrm>
-          <a:prstGeom prst="rect">
-            <a:avLst/>
-          </a:prstGeom>
-          <a:noFill/>
-        </p:spPr>
-        <p:txBody>
-          <a:bodyPr wrap="square" lIns="0" rIns="0" tIns="0" bIns="0" anchor="t">
-            <a:spAutoFit/>
-          </a:bodyPr>
-          <a:lstStyle/>
-          <a:p>
-            <a:pPr algn="ctr">
-              <a:spcBef>
-                <a:spcPts val="0"/>
-              </a:spcBef>
-              <a:spcAft>
-                <a:spcPts val="0"/>
-              </a:spcAft>
-            </a:pPr>
-            <a:r>
-              <a:rPr sz="1550" b="1">
+              <a:rPr sz="1250" b="1">
                 <a:solidFill>
                   <a:srgbClr val="102A43"/>
                 </a:solidFill>
                 <a:latin typeface="微軟正黑體"/>
               </a:rPr>
-              <a:t>採納率　＝　被修掉的意見數　÷　提出的意見數</a:t>
+              <a:t>總審查次數</a:t>
             </a:r>
           </a:p>
         </p:txBody>
@@ -7914,8 +7912,8 @@
         </p:nvSpPr>
         <p:spPr>
           <a:xfrm>
-            <a:off x="841248" y="3493008"/>
-            <a:ext cx="4846320" cy="1737360"/>
+            <a:off x="2615184" y="2715768"/>
+            <a:ext cx="2788920" cy="384048"/>
           </a:xfrm>
           <a:prstGeom prst="rect">
             <a:avLst/>
@@ -7929,27 +7927,8 @@
           <a:lstStyle/>
           <a:p>
             <a:pPr algn="l">
-              <a:spcBef>
-                <a:spcPts val="0"/>
-              </a:spcBef>
-              <a:spcAft>
-                <a:spcPts val="300"/>
-              </a:spcAft>
-            </a:pPr>
-            <a:r>
-              <a:rPr sz="1250" b="1">
-                <a:solidFill>
-                  <a:srgbClr val="102A43"/>
-                </a:solidFill>
-                <a:latin typeface="微軟正黑體"/>
-              </a:rPr>
-              <a:t>為什麼可信</a:t>
-            </a:r>
-          </a:p>
-          <a:p>
-            <a:pPr>
               <a:lnSpc>
-                <a:spcPct val="125000"/>
+                <a:spcPct val="115000"/>
               </a:lnSpc>
               <a:spcBef>
                 <a:spcPts val="0"/>
@@ -7959,95 +7938,13 @@
               </a:spcAft>
             </a:pPr>
             <a:r>
-              <a:rPr sz="1150" b="0">
+              <a:rPr sz="1100" b="0">
                 <a:solidFill>
                   <a:srgbClr val="5B6B7B"/>
                 </a:solidFill>
                 <a:latin typeface="微軟正黑體"/>
               </a:rPr>
-              <a:t>工程師真的動手改了那行程式碼才算採納。沒有人會為了配合 KPI 去改自己的韌體。</a:t>
-            </a:r>
-          </a:p>
-          <a:p>
-            <a:pPr>
-              <a:spcBef>
-                <a:spcPts val="900"/>
-              </a:spcBef>
-              <a:spcAft>
-                <a:spcPts val="300"/>
-              </a:spcAft>
-            </a:pPr>
-            <a:r>
-              <a:rPr sz="1250" b="1">
-                <a:solidFill>
-                  <a:srgbClr val="102A43"/>
-                </a:solidFill>
-                <a:latin typeface="微軟正黑體"/>
-              </a:rPr>
-              <a:t>怎麼判定</a:t>
-            </a:r>
-          </a:p>
-          <a:p>
-            <a:pPr>
-              <a:lnSpc>
-                <a:spcPct val="125000"/>
-              </a:lnSpc>
-              <a:spcBef>
-                <a:spcPts val="0"/>
-              </a:spcBef>
-              <a:spcAft>
-                <a:spcPts val="0"/>
-              </a:spcAft>
-            </a:pPr>
-            <a:r>
-              <a:rPr sz="1150" b="0">
-                <a:solidFill>
-                  <a:srgbClr val="5B6B7B"/>
-                </a:solidFill>
-                <a:latin typeface="微軟正黑體"/>
-              </a:rPr>
-              <a:t>比對前後兩輪審查的意見識別碼：消失、且那行程式碼已變動即為已修正。全自動，使用者不必按任何按鈕。</a:t>
-            </a:r>
-          </a:p>
-          <a:p>
-            <a:pPr>
-              <a:spcBef>
-                <a:spcPts val="900"/>
-              </a:spcBef>
-              <a:spcAft>
-                <a:spcPts val="300"/>
-              </a:spcAft>
-            </a:pPr>
-            <a:r>
-              <a:rPr sz="1250" b="1">
-                <a:solidFill>
-                  <a:srgbClr val="102A43"/>
-                </a:solidFill>
-                <a:latin typeface="微軟正黑體"/>
-              </a:rPr>
-              <a:t>要補什麼</a:t>
-            </a:r>
-          </a:p>
-          <a:p>
-            <a:pPr>
-              <a:lnSpc>
-                <a:spcPct val="125000"/>
-              </a:lnSpc>
-              <a:spcBef>
-                <a:spcPts val="0"/>
-              </a:spcBef>
-              <a:spcAft>
-                <a:spcPts val="0"/>
-              </a:spcAft>
-            </a:pPr>
-            <a:r>
-              <a:rPr sz="1150" b="0">
-                <a:solidFill>
-                  <a:srgbClr val="5B6B7B"/>
-                </a:solidFill>
-                <a:latin typeface="微軟正黑體"/>
-              </a:rPr>
-              <a:t>現有稽核日誌記的是「請求」，不是「意見的下場」。需新增一份意見記錄檔與匯出指令。</a:t>
+              <a:t>每週成功完成的審查筆數</a:t>
             </a:r>
           </a:p>
         </p:txBody>
@@ -8060,94 +7957,8 @@
         </p:nvSpPr>
         <p:spPr>
           <a:xfrm>
-            <a:off x="6254496" y="2103120"/>
-            <a:ext cx="5376672" cy="3310128"/>
-          </a:xfrm>
-          <a:prstGeom prst="rect">
-            <a:avLst/>
-          </a:prstGeom>
-          <a:noFill/>
-          <a:ln w="12700">
-            <a:solidFill>
-              <a:srgbClr val="D8DFE6"/>
-            </a:solidFill>
-          </a:ln>
-          <a:effectLst/>
-        </p:spPr>
-        <p:style>
-          <a:lnRef idx="1">
-            <a:schemeClr val="accent1"/>
-          </a:lnRef>
-          <a:fillRef idx="3">
-            <a:schemeClr val="accent1"/>
-          </a:fillRef>
-          <a:effectRef idx="2">
-            <a:schemeClr val="accent1"/>
-          </a:effectRef>
-          <a:fontRef idx="minor">
-            <a:schemeClr val="lt1"/>
-          </a:fontRef>
-        </p:style>
-        <p:txBody>
-          <a:bodyPr rtlCol="0" anchor="ctr"/>
-          <a:lstStyle/>
-          <a:p>
-            <a:pPr algn="ctr"/>
-          </a:p>
-        </p:txBody>
-      </p:sp>
-      <p:sp>
-        <p:nvSpPr>
-          <p:cNvPr id="15" name="TextBox 14"/>
-          <p:cNvSpPr txBox="1"/>
-          <p:nvPr/>
-        </p:nvSpPr>
-        <p:spPr>
-          <a:xfrm>
-            <a:off x="6528816" y="2286000"/>
-            <a:ext cx="4846320" cy="320040"/>
-          </a:xfrm>
-          <a:prstGeom prst="rect">
-            <a:avLst/>
-          </a:prstGeom>
-          <a:noFill/>
-        </p:spPr>
-        <p:txBody>
-          <a:bodyPr wrap="square" lIns="0" rIns="0" tIns="0" bIns="0" anchor="t">
-            <a:spAutoFit/>
-          </a:bodyPr>
-          <a:lstStyle/>
-          <a:p>
-            <a:pPr algn="l">
-              <a:spcBef>
-                <a:spcPts val="0"/>
-              </a:spcBef>
-              <a:spcAft>
-                <a:spcPts val="0"/>
-              </a:spcAft>
-            </a:pPr>
-            <a:r>
-              <a:rPr sz="1300" b="1">
-                <a:solidFill>
-                  <a:srgbClr val="119DA4"/>
-                </a:solidFill>
-                <a:latin typeface="微軟正黑體"/>
-              </a:rPr>
-              <a:t>指標分層</a:t>
-            </a:r>
-          </a:p>
-        </p:txBody>
-      </p:sp>
-      <p:sp>
-        <p:nvSpPr>
-          <p:cNvPr id="16" name="Rectangle 15"/>
-          <p:cNvSpPr/>
-          <p:nvPr/>
-        </p:nvSpPr>
-        <p:spPr>
-          <a:xfrm>
-            <a:off x="6528816" y="2670048"/>
-            <a:ext cx="932688" cy="566928"/>
+            <a:off x="5532120" y="2752344"/>
+            <a:ext cx="658368" cy="274320"/>
           </a:xfrm>
           <a:prstGeom prst="rect">
             <a:avLst/>
@@ -8184,56 +7995,98 @@
       </p:sp>
       <p:sp>
         <p:nvSpPr>
+          <p:cNvPr id="15" name="TextBox 14"/>
+          <p:cNvSpPr txBox="1"/>
+          <p:nvPr/>
+        </p:nvSpPr>
+        <p:spPr>
+          <a:xfrm>
+            <a:off x="5532120" y="2793492"/>
+            <a:ext cx="658368" cy="219456"/>
+          </a:xfrm>
+          <a:prstGeom prst="rect">
+            <a:avLst/>
+          </a:prstGeom>
+          <a:noFill/>
+        </p:spPr>
+        <p:txBody>
+          <a:bodyPr wrap="square" lIns="0" rIns="0" tIns="0" bIns="0" anchor="t">
+            <a:spAutoFit/>
+          </a:bodyPr>
+          <a:lstStyle/>
+          <a:p>
+            <a:pPr algn="ctr">
+              <a:spcBef>
+                <a:spcPts val="0"/>
+              </a:spcBef>
+              <a:spcAft>
+                <a:spcPts val="0"/>
+              </a:spcAft>
+            </a:pPr>
+            <a:r>
+              <a:rPr sz="1000" b="1">
+                <a:solidFill>
+                  <a:srgbClr val="FFFFFF"/>
+                </a:solidFill>
+                <a:latin typeface="微軟正黑體"/>
+              </a:rPr>
+              <a:t>現成</a:t>
+            </a:r>
+          </a:p>
+        </p:txBody>
+      </p:sp>
+      <p:sp>
+        <p:nvSpPr>
+          <p:cNvPr id="16" name="TextBox 15"/>
+          <p:cNvSpPr txBox="1"/>
+          <p:nvPr/>
+        </p:nvSpPr>
+        <p:spPr>
+          <a:xfrm>
+            <a:off x="969264" y="3209544"/>
+            <a:ext cx="1600200" cy="384048"/>
+          </a:xfrm>
+          <a:prstGeom prst="rect">
+            <a:avLst/>
+          </a:prstGeom>
+          <a:noFill/>
+        </p:spPr>
+        <p:txBody>
+          <a:bodyPr wrap="square" lIns="0" rIns="0" tIns="0" bIns="0" anchor="t">
+            <a:spAutoFit/>
+          </a:bodyPr>
+          <a:lstStyle/>
+          <a:p>
+            <a:pPr algn="l">
+              <a:spcBef>
+                <a:spcPts val="0"/>
+              </a:spcBef>
+              <a:spcAft>
+                <a:spcPts val="0"/>
+              </a:spcAft>
+            </a:pPr>
+            <a:r>
+              <a:rPr sz="1250" b="1">
+                <a:solidFill>
+                  <a:srgbClr val="102A43"/>
+                </a:solidFill>
+                <a:latin typeface="微軟正黑體"/>
+              </a:rPr>
+              <a:t>週活躍人數</a:t>
+            </a:r>
+          </a:p>
+        </p:txBody>
+      </p:sp>
+      <p:sp>
+        <p:nvSpPr>
           <p:cNvPr id="17" name="TextBox 16"/>
           <p:cNvSpPr txBox="1"/>
           <p:nvPr/>
         </p:nvSpPr>
         <p:spPr>
           <a:xfrm>
-            <a:off x="6528816" y="2834640"/>
-            <a:ext cx="932688" cy="274320"/>
-          </a:xfrm>
-          <a:prstGeom prst="rect">
-            <a:avLst/>
-          </a:prstGeom>
-          <a:noFill/>
-        </p:spPr>
-        <p:txBody>
-          <a:bodyPr wrap="square" lIns="0" rIns="0" tIns="0" bIns="0" anchor="t">
-            <a:spAutoFit/>
-          </a:bodyPr>
-          <a:lstStyle/>
-          <a:p>
-            <a:pPr algn="ctr">
-              <a:spcBef>
-                <a:spcPts val="0"/>
-              </a:spcBef>
-              <a:spcAft>
-                <a:spcPts val="0"/>
-              </a:spcAft>
-            </a:pPr>
-            <a:r>
-              <a:rPr sz="1150" b="1">
-                <a:solidFill>
-                  <a:srgbClr val="FFFFFF"/>
-                </a:solidFill>
-                <a:latin typeface="微軟正黑體"/>
-              </a:rPr>
-              <a:t>北極星</a:t>
-            </a:r>
-          </a:p>
-        </p:txBody>
-      </p:sp>
-      <p:sp>
-        <p:nvSpPr>
-          <p:cNvPr id="18" name="TextBox 17"/>
-          <p:cNvSpPr txBox="1"/>
-          <p:nvPr/>
-        </p:nvSpPr>
-        <p:spPr>
-          <a:xfrm>
-            <a:off x="7607808" y="2706624"/>
-            <a:ext cx="3840480" cy="566928"/>
+            <a:off x="2615184" y="3227832"/>
+            <a:ext cx="2788920" cy="384048"/>
           </a:xfrm>
           <a:prstGeom prst="rect">
             <a:avLst/>
@@ -8247,27 +8100,8 @@
           <a:lstStyle/>
           <a:p>
             <a:pPr algn="l">
-              <a:spcBef>
-                <a:spcPts val="0"/>
-              </a:spcBef>
-              <a:spcAft>
-                <a:spcPts val="200"/>
-              </a:spcAft>
-            </a:pPr>
-            <a:r>
-              <a:rPr sz="1250" b="1">
-                <a:solidFill>
-                  <a:srgbClr val="102A43"/>
-                </a:solidFill>
-                <a:latin typeface="微軟正黑體"/>
-              </a:rPr>
-              <a:t>採納率</a:t>
-            </a:r>
-          </a:p>
-          <a:p>
-            <a:pPr>
               <a:lnSpc>
-                <a:spcPct val="120000"/>
+                <a:spcPct val="115000"/>
               </a:lnSpc>
               <a:spcBef>
                 <a:spcPts val="0"/>
@@ -8283,27 +8117,27 @@
                 </a:solidFill>
                 <a:latin typeface="微軟正黑體"/>
               </a:rPr>
-              <a:t>唯一不需要 ground truth 的價值證明</a:t>
-            </a:r>
-          </a:p>
-        </p:txBody>
-      </p:sp>
-      <p:sp>
-        <p:nvSpPr>
-          <p:cNvPr id="19" name="Rectangle 18"/>
+              <a:t>當週有審查記錄的人數</a:t>
+            </a:r>
+          </a:p>
+        </p:txBody>
+      </p:sp>
+      <p:sp>
+        <p:nvSpPr>
+          <p:cNvPr id="18" name="Rectangle 17"/>
           <p:cNvSpPr/>
           <p:nvPr/>
         </p:nvSpPr>
         <p:spPr>
           <a:xfrm>
-            <a:off x="6528816" y="3328416"/>
-            <a:ext cx="932688" cy="566928"/>
+            <a:off x="5532120" y="3264408"/>
+            <a:ext cx="658368" cy="274320"/>
           </a:xfrm>
           <a:prstGeom prst="rect">
             <a:avLst/>
           </a:prstGeom>
           <a:solidFill>
-            <a:srgbClr val="1C446B"/>
+            <a:srgbClr val="119DA4"/>
           </a:solidFill>
           <a:ln>
             <a:noFill/>
@@ -8334,14 +8168,14 @@
       </p:sp>
       <p:sp>
         <p:nvSpPr>
-          <p:cNvPr id="20" name="TextBox 19"/>
-          <p:cNvSpPr txBox="1"/>
-          <p:nvPr/>
-        </p:nvSpPr>
-        <p:spPr>
-          <a:xfrm>
-            <a:off x="6528816" y="3493008"/>
-            <a:ext cx="932688" cy="274320"/>
+          <p:cNvPr id="19" name="TextBox 18"/>
+          <p:cNvSpPr txBox="1"/>
+          <p:nvPr/>
+        </p:nvSpPr>
+        <p:spPr>
+          <a:xfrm>
+            <a:off x="5532120" y="3305556"/>
+            <a:ext cx="658368" cy="219456"/>
           </a:xfrm>
           <a:prstGeom prst="rect">
             <a:avLst/>
@@ -8363,97 +8197,33 @@
               </a:spcAft>
             </a:pPr>
             <a:r>
-              <a:rPr sz="1150" b="1">
+              <a:rPr sz="1000" b="1">
                 <a:solidFill>
                   <a:srgbClr val="FFFFFF"/>
                 </a:solidFill>
                 <a:latin typeface="微軟正黑體"/>
               </a:rPr>
-              <a:t>領先</a:t>
-            </a:r>
-          </a:p>
-        </p:txBody>
-      </p:sp>
-      <p:sp>
-        <p:nvSpPr>
-          <p:cNvPr id="21" name="TextBox 20"/>
-          <p:cNvSpPr txBox="1"/>
-          <p:nvPr/>
-        </p:nvSpPr>
-        <p:spPr>
-          <a:xfrm>
-            <a:off x="7607808" y="3364992"/>
-            <a:ext cx="3840480" cy="566928"/>
-          </a:xfrm>
-          <a:prstGeom prst="rect">
-            <a:avLst/>
-          </a:prstGeom>
-          <a:noFill/>
-        </p:spPr>
-        <p:txBody>
-          <a:bodyPr wrap="square" lIns="0" rIns="0" tIns="0" bIns="0" anchor="t">
-            <a:spAutoFit/>
-          </a:bodyPr>
-          <a:lstStyle/>
-          <a:p>
-            <a:pPr algn="l">
-              <a:spcBef>
-                <a:spcPts val="0"/>
-              </a:spcBef>
-              <a:spcAft>
-                <a:spcPts val="200"/>
-              </a:spcAft>
-            </a:pPr>
-            <a:r>
-              <a:rPr sz="1250" b="1">
-                <a:solidFill>
-                  <a:srgbClr val="102A43"/>
-                </a:solidFill>
-                <a:latin typeface="微軟正黑體"/>
-              </a:rPr>
-              <a:t>每週活躍人數、每人每週採納數</a:t>
-            </a:r>
-          </a:p>
-          <a:p>
-            <a:pPr>
-              <a:lnSpc>
-                <a:spcPct val="120000"/>
-              </a:lnSpc>
-              <a:spcBef>
-                <a:spcPts val="0"/>
-              </a:spcBef>
-              <a:spcAft>
-                <a:spcPts val="0"/>
-              </a:spcAft>
-            </a:pPr>
-            <a:r>
-              <a:rPr sz="1100" b="0">
-                <a:solidFill>
-                  <a:srgbClr val="5B6B7B"/>
-                </a:solidFill>
-                <a:latin typeface="微軟正黑體"/>
-              </a:rPr>
-              <a:t>兩週就看得出趨勢，不必等三個月</a:t>
-            </a:r>
-          </a:p>
-        </p:txBody>
-      </p:sp>
-      <p:sp>
-        <p:nvSpPr>
-          <p:cNvPr id="22" name="Rectangle 21"/>
+              <a:t>現成</a:t>
+            </a:r>
+          </a:p>
+        </p:txBody>
+      </p:sp>
+      <p:sp>
+        <p:nvSpPr>
+          <p:cNvPr id="20" name="Rectangle 19"/>
           <p:cNvSpPr/>
           <p:nvPr/>
         </p:nvSpPr>
         <p:spPr>
           <a:xfrm>
-            <a:off x="6528816" y="3986784"/>
-            <a:ext cx="932688" cy="566928"/>
+            <a:off x="841248" y="3675888"/>
+            <a:ext cx="5440680" cy="475488"/>
           </a:xfrm>
           <a:prstGeom prst="rect">
             <a:avLst/>
           </a:prstGeom>
           <a:solidFill>
-            <a:srgbClr val="1C446B"/>
+            <a:srgbClr val="F2F5F8"/>
           </a:solidFill>
           <a:ln>
             <a:noFill/>
@@ -8484,14 +8254,145 @@
       </p:sp>
       <p:sp>
         <p:nvSpPr>
-          <p:cNvPr id="23" name="TextBox 22"/>
-          <p:cNvSpPr txBox="1"/>
-          <p:nvPr/>
-        </p:nvSpPr>
-        <p:spPr>
-          <a:xfrm>
-            <a:off x="6528816" y="4151376"/>
-            <a:ext cx="932688" cy="274320"/>
+          <p:cNvPr id="21" name="TextBox 20"/>
+          <p:cNvSpPr txBox="1"/>
+          <p:nvPr/>
+        </p:nvSpPr>
+        <p:spPr>
+          <a:xfrm>
+            <a:off x="969264" y="3721608"/>
+            <a:ext cx="1600200" cy="384048"/>
+          </a:xfrm>
+          <a:prstGeom prst="rect">
+            <a:avLst/>
+          </a:prstGeom>
+          <a:noFill/>
+        </p:spPr>
+        <p:txBody>
+          <a:bodyPr wrap="square" lIns="0" rIns="0" tIns="0" bIns="0" anchor="t">
+            <a:spAutoFit/>
+          </a:bodyPr>
+          <a:lstStyle/>
+          <a:p>
+            <a:pPr algn="l">
+              <a:spcBef>
+                <a:spcPts val="0"/>
+              </a:spcBef>
+              <a:spcAft>
+                <a:spcPts val="0"/>
+              </a:spcAft>
+            </a:pPr>
+            <a:r>
+              <a:rPr sz="1250" b="1">
+                <a:solidFill>
+                  <a:srgbClr val="102A43"/>
+                </a:solidFill>
+                <a:latin typeface="微軟正黑體"/>
+              </a:rPr>
+              <a:t>人均每週次數</a:t>
+            </a:r>
+          </a:p>
+        </p:txBody>
+      </p:sp>
+      <p:sp>
+        <p:nvSpPr>
+          <p:cNvPr id="22" name="TextBox 21"/>
+          <p:cNvSpPr txBox="1"/>
+          <p:nvPr/>
+        </p:nvSpPr>
+        <p:spPr>
+          <a:xfrm>
+            <a:off x="2615184" y="3739896"/>
+            <a:ext cx="2788920" cy="384048"/>
+          </a:xfrm>
+          <a:prstGeom prst="rect">
+            <a:avLst/>
+          </a:prstGeom>
+          <a:noFill/>
+        </p:spPr>
+        <p:txBody>
+          <a:bodyPr wrap="square" lIns="0" rIns="0" tIns="0" bIns="0" anchor="t">
+            <a:spAutoFit/>
+          </a:bodyPr>
+          <a:lstStyle/>
+          <a:p>
+            <a:pPr algn="l">
+              <a:lnSpc>
+                <a:spcPct val="115000"/>
+              </a:lnSpc>
+              <a:spcBef>
+                <a:spcPts val="0"/>
+              </a:spcBef>
+              <a:spcAft>
+                <a:spcPts val="0"/>
+              </a:spcAft>
+            </a:pPr>
+            <a:r>
+              <a:rPr sz="1100" b="0">
+                <a:solidFill>
+                  <a:srgbClr val="5B6B7B"/>
+                </a:solidFill>
+                <a:latin typeface="微軟正黑體"/>
+              </a:rPr>
+              <a:t>前兩者相除 —— 看的是黏著度</a:t>
+            </a:r>
+          </a:p>
+        </p:txBody>
+      </p:sp>
+      <p:sp>
+        <p:nvSpPr>
+          <p:cNvPr id="23" name="Rectangle 22"/>
+          <p:cNvSpPr/>
+          <p:nvPr/>
+        </p:nvSpPr>
+        <p:spPr>
+          <a:xfrm>
+            <a:off x="5532120" y="3776472"/>
+            <a:ext cx="658368" cy="274320"/>
+          </a:xfrm>
+          <a:prstGeom prst="rect">
+            <a:avLst/>
+          </a:prstGeom>
+          <a:solidFill>
+            <a:srgbClr val="119DA4"/>
+          </a:solidFill>
+          <a:ln>
+            <a:noFill/>
+          </a:ln>
+          <a:effectLst/>
+        </p:spPr>
+        <p:style>
+          <a:lnRef idx="1">
+            <a:schemeClr val="accent1"/>
+          </a:lnRef>
+          <a:fillRef idx="3">
+            <a:schemeClr val="accent1"/>
+          </a:fillRef>
+          <a:effectRef idx="2">
+            <a:schemeClr val="accent1"/>
+          </a:effectRef>
+          <a:fontRef idx="minor">
+            <a:schemeClr val="lt1"/>
+          </a:fontRef>
+        </p:style>
+        <p:txBody>
+          <a:bodyPr rtlCol="0" anchor="ctr"/>
+          <a:lstStyle/>
+          <a:p>
+            <a:pPr algn="ctr"/>
+          </a:p>
+        </p:txBody>
+      </p:sp>
+      <p:sp>
+        <p:nvSpPr>
+          <p:cNvPr id="24" name="TextBox 23"/>
+          <p:cNvSpPr txBox="1"/>
+          <p:nvPr/>
+        </p:nvSpPr>
+        <p:spPr>
+          <a:xfrm>
+            <a:off x="5532120" y="3817620"/>
+            <a:ext cx="658368" cy="219456"/>
           </a:xfrm>
           <a:prstGeom prst="rect">
             <a:avLst/>
@@ -8513,27 +8414,27 @@
               </a:spcAft>
             </a:pPr>
             <a:r>
-              <a:rPr sz="1150" b="1">
+              <a:rPr sz="1000" b="1">
                 <a:solidFill>
                   <a:srgbClr val="FFFFFF"/>
                 </a:solidFill>
                 <a:latin typeface="微軟正黑體"/>
               </a:rPr>
-              <a:t>落後</a:t>
-            </a:r>
-          </a:p>
-        </p:txBody>
-      </p:sp>
-      <p:sp>
-        <p:nvSpPr>
-          <p:cNvPr id="24" name="TextBox 23"/>
-          <p:cNvSpPr txBox="1"/>
-          <p:nvPr/>
-        </p:nvSpPr>
-        <p:spPr>
-          <a:xfrm>
-            <a:off x="7607808" y="4023360"/>
-            <a:ext cx="3840480" cy="566928"/>
+              <a:t>現成</a:t>
+            </a:r>
+          </a:p>
+        </p:txBody>
+      </p:sp>
+      <p:sp>
+        <p:nvSpPr>
+          <p:cNvPr id="25" name="TextBox 24"/>
+          <p:cNvSpPr txBox="1"/>
+          <p:nvPr/>
+        </p:nvSpPr>
+        <p:spPr>
+          <a:xfrm>
+            <a:off x="969264" y="4233672"/>
+            <a:ext cx="1600200" cy="384048"/>
           </a:xfrm>
           <a:prstGeom prst="rect">
             <a:avLst/>
@@ -8551,7 +8452,7 @@
                 <a:spcPts val="0"/>
               </a:spcBef>
               <a:spcAft>
-                <a:spcPts val="200"/>
+                <a:spcPts val="0"/>
               </a:spcAft>
             </a:pPr>
             <a:r>
@@ -8561,13 +8462,36 @@
                 </a:solidFill>
                 <a:latin typeface="微軟正黑體"/>
               </a:rPr>
-              <a:t>規則命中分布、反覆被否決的規則</a:t>
-            </a:r>
-          </a:p>
-          <a:p>
-            <a:pPr>
+              <a:t>涵蓋檔案數</a:t>
+            </a:r>
+          </a:p>
+        </p:txBody>
+      </p:sp>
+      <p:sp>
+        <p:nvSpPr>
+          <p:cNvPr id="26" name="TextBox 25"/>
+          <p:cNvSpPr txBox="1"/>
+          <p:nvPr/>
+        </p:nvSpPr>
+        <p:spPr>
+          <a:xfrm>
+            <a:off x="2615184" y="4251960"/>
+            <a:ext cx="2788920" cy="384048"/>
+          </a:xfrm>
+          <a:prstGeom prst="rect">
+            <a:avLst/>
+          </a:prstGeom>
+          <a:noFill/>
+        </p:spPr>
+        <p:txBody>
+          <a:bodyPr wrap="square" lIns="0" rIns="0" tIns="0" bIns="0" anchor="t">
+            <a:spAutoFit/>
+          </a:bodyPr>
+          <a:lstStyle/>
+          <a:p>
+            <a:pPr algn="l">
               <a:lnSpc>
-                <a:spcPct val="120000"/>
+                <a:spcPct val="115000"/>
               </a:lnSpc>
               <a:spcBef>
                 <a:spcPts val="0"/>
@@ -8583,21 +8507,238 @@
                 </a:solidFill>
                 <a:latin typeface="微軟正黑體"/>
               </a:rPr>
-              <a:t>指出該補哪一條 except</a:t>
-            </a:r>
-          </a:p>
-        </p:txBody>
-      </p:sp>
-      <p:sp>
-        <p:nvSpPr>
-          <p:cNvPr id="25" name="Rectangle 24"/>
+              <a:t>被審過的相異檔案數 ÷ 專案檔案數</a:t>
+            </a:r>
+          </a:p>
+        </p:txBody>
+      </p:sp>
+      <p:sp>
+        <p:nvSpPr>
+          <p:cNvPr id="27" name="Rectangle 26"/>
           <p:cNvSpPr/>
           <p:nvPr/>
         </p:nvSpPr>
         <p:spPr>
           <a:xfrm>
-            <a:off x="6528816" y="4645152"/>
-            <a:ext cx="932688" cy="566928"/>
+            <a:off x="5532120" y="4288536"/>
+            <a:ext cx="658368" cy="274320"/>
+          </a:xfrm>
+          <a:prstGeom prst="rect">
+            <a:avLst/>
+          </a:prstGeom>
+          <a:solidFill>
+            <a:srgbClr val="119DA4"/>
+          </a:solidFill>
+          <a:ln>
+            <a:noFill/>
+          </a:ln>
+          <a:effectLst/>
+        </p:spPr>
+        <p:style>
+          <a:lnRef idx="1">
+            <a:schemeClr val="accent1"/>
+          </a:lnRef>
+          <a:fillRef idx="3">
+            <a:schemeClr val="accent1"/>
+          </a:fillRef>
+          <a:effectRef idx="2">
+            <a:schemeClr val="accent1"/>
+          </a:effectRef>
+          <a:fontRef idx="minor">
+            <a:schemeClr val="lt1"/>
+          </a:fontRef>
+        </p:style>
+        <p:txBody>
+          <a:bodyPr rtlCol="0" anchor="ctr"/>
+          <a:lstStyle/>
+          <a:p>
+            <a:pPr algn="ctr"/>
+          </a:p>
+        </p:txBody>
+      </p:sp>
+      <p:sp>
+        <p:nvSpPr>
+          <p:cNvPr id="28" name="TextBox 27"/>
+          <p:cNvSpPr txBox="1"/>
+          <p:nvPr/>
+        </p:nvSpPr>
+        <p:spPr>
+          <a:xfrm>
+            <a:off x="5532120" y="4329684"/>
+            <a:ext cx="658368" cy="219456"/>
+          </a:xfrm>
+          <a:prstGeom prst="rect">
+            <a:avLst/>
+          </a:prstGeom>
+          <a:noFill/>
+        </p:spPr>
+        <p:txBody>
+          <a:bodyPr wrap="square" lIns="0" rIns="0" tIns="0" bIns="0" anchor="t">
+            <a:spAutoFit/>
+          </a:bodyPr>
+          <a:lstStyle/>
+          <a:p>
+            <a:pPr algn="ctr">
+              <a:spcBef>
+                <a:spcPts val="0"/>
+              </a:spcBef>
+              <a:spcAft>
+                <a:spcPts val="0"/>
+              </a:spcAft>
+            </a:pPr>
+            <a:r>
+              <a:rPr sz="1000" b="1">
+                <a:solidFill>
+                  <a:srgbClr val="FFFFFF"/>
+                </a:solidFill>
+                <a:latin typeface="微軟正黑體"/>
+              </a:rPr>
+              <a:t>現成</a:t>
+            </a:r>
+          </a:p>
+        </p:txBody>
+      </p:sp>
+      <p:sp>
+        <p:nvSpPr>
+          <p:cNvPr id="29" name="Rectangle 28"/>
+          <p:cNvSpPr/>
+          <p:nvPr/>
+        </p:nvSpPr>
+        <p:spPr>
+          <a:xfrm>
+            <a:off x="841248" y="4700016"/>
+            <a:ext cx="5440680" cy="475488"/>
+          </a:xfrm>
+          <a:prstGeom prst="rect">
+            <a:avLst/>
+          </a:prstGeom>
+          <a:solidFill>
+            <a:srgbClr val="F2F5F8"/>
+          </a:solidFill>
+          <a:ln>
+            <a:noFill/>
+          </a:ln>
+          <a:effectLst/>
+        </p:spPr>
+        <p:style>
+          <a:lnRef idx="1">
+            <a:schemeClr val="accent1"/>
+          </a:lnRef>
+          <a:fillRef idx="3">
+            <a:schemeClr val="accent1"/>
+          </a:fillRef>
+          <a:effectRef idx="2">
+            <a:schemeClr val="accent1"/>
+          </a:effectRef>
+          <a:fontRef idx="minor">
+            <a:schemeClr val="lt1"/>
+          </a:fontRef>
+        </p:style>
+        <p:txBody>
+          <a:bodyPr rtlCol="0" anchor="ctr"/>
+          <a:lstStyle/>
+          <a:p>
+            <a:pPr algn="ctr"/>
+          </a:p>
+        </p:txBody>
+      </p:sp>
+      <p:sp>
+        <p:nvSpPr>
+          <p:cNvPr id="30" name="TextBox 29"/>
+          <p:cNvSpPr txBox="1"/>
+          <p:nvPr/>
+        </p:nvSpPr>
+        <p:spPr>
+          <a:xfrm>
+            <a:off x="969264" y="4745736"/>
+            <a:ext cx="1600200" cy="384048"/>
+          </a:xfrm>
+          <a:prstGeom prst="rect">
+            <a:avLst/>
+          </a:prstGeom>
+          <a:noFill/>
+        </p:spPr>
+        <p:txBody>
+          <a:bodyPr wrap="square" lIns="0" rIns="0" tIns="0" bIns="0" anchor="t">
+            <a:spAutoFit/>
+          </a:bodyPr>
+          <a:lstStyle/>
+          <a:p>
+            <a:pPr algn="l">
+              <a:spcBef>
+                <a:spcPts val="0"/>
+              </a:spcBef>
+              <a:spcAft>
+                <a:spcPts val="0"/>
+              </a:spcAft>
+            </a:pPr>
+            <a:r>
+              <a:rPr sz="1250" b="1">
+                <a:solidFill>
+                  <a:srgbClr val="102A43"/>
+                </a:solidFill>
+                <a:latin typeface="微軟正黑體"/>
+              </a:rPr>
+              <a:t>手動觸發佔比</a:t>
+            </a:r>
+          </a:p>
+        </p:txBody>
+      </p:sp>
+      <p:sp>
+        <p:nvSpPr>
+          <p:cNvPr id="31" name="TextBox 30"/>
+          <p:cNvSpPr txBox="1"/>
+          <p:nvPr/>
+        </p:nvSpPr>
+        <p:spPr>
+          <a:xfrm>
+            <a:off x="2615184" y="4764024"/>
+            <a:ext cx="2788920" cy="384048"/>
+          </a:xfrm>
+          <a:prstGeom prst="rect">
+            <a:avLst/>
+          </a:prstGeom>
+          <a:noFill/>
+        </p:spPr>
+        <p:txBody>
+          <a:bodyPr wrap="square" lIns="0" rIns="0" tIns="0" bIns="0" anchor="t">
+            <a:spAutoFit/>
+          </a:bodyPr>
+          <a:lstStyle/>
+          <a:p>
+            <a:pPr algn="l">
+              <a:lnSpc>
+                <a:spcPct val="115000"/>
+              </a:lnSpc>
+              <a:spcBef>
+                <a:spcPts val="0"/>
+              </a:spcBef>
+              <a:spcAft>
+                <a:spcPts val="0"/>
+              </a:spcAft>
+            </a:pPr>
+            <a:r>
+              <a:rPr sz="1100" b="0">
+                <a:solidFill>
+                  <a:srgbClr val="5B6B7B"/>
+                </a:solidFill>
+                <a:latin typeface="微軟正黑體"/>
+              </a:rPr>
+              <a:t>主動執行 Review Current File 的比例</a:t>
+            </a:r>
+          </a:p>
+        </p:txBody>
+      </p:sp>
+      <p:sp>
+        <p:nvSpPr>
+          <p:cNvPr id="32" name="Rectangle 31"/>
+          <p:cNvSpPr/>
+          <p:nvPr/>
+        </p:nvSpPr>
+        <p:spPr>
+          <a:xfrm>
+            <a:off x="5532120" y="4800600"/>
+            <a:ext cx="658368" cy="274320"/>
           </a:xfrm>
           <a:prstGeom prst="rect">
             <a:avLst/>
@@ -8634,14 +8775,14 @@
       </p:sp>
       <p:sp>
         <p:nvSpPr>
-          <p:cNvPr id="26" name="TextBox 25"/>
-          <p:cNvSpPr txBox="1"/>
-          <p:nvPr/>
-        </p:nvSpPr>
-        <p:spPr>
-          <a:xfrm>
-            <a:off x="6528816" y="4809744"/>
-            <a:ext cx="932688" cy="274320"/>
+          <p:cNvPr id="33" name="TextBox 32"/>
+          <p:cNvSpPr txBox="1"/>
+          <p:nvPr/>
+        </p:nvSpPr>
+        <p:spPr>
+          <a:xfrm>
+            <a:off x="5532120" y="4841748"/>
+            <a:ext cx="658368" cy="219456"/>
           </a:xfrm>
           <a:prstGeom prst="rect">
             <a:avLst/>
@@ -8663,27 +8804,27 @@
               </a:spcAft>
             </a:pPr>
             <a:r>
-              <a:rPr sz="1150" b="1">
+              <a:rPr sz="1000" b="1">
                 <a:solidFill>
                   <a:srgbClr val="FFFFFF"/>
                 </a:solidFill>
                 <a:latin typeface="微軟正黑體"/>
               </a:rPr>
-              <a:t>護欄</a:t>
-            </a:r>
-          </a:p>
-        </p:txBody>
-      </p:sp>
-      <p:sp>
-        <p:nvSpPr>
-          <p:cNvPr id="27" name="TextBox 26"/>
-          <p:cNvSpPr txBox="1"/>
-          <p:nvPr/>
-        </p:nvSpPr>
-        <p:spPr>
-          <a:xfrm>
-            <a:off x="7607808" y="4681728"/>
-            <a:ext cx="3840480" cy="566928"/>
+              <a:t>待補</a:t>
+            </a:r>
+          </a:p>
+        </p:txBody>
+      </p:sp>
+      <p:sp>
+        <p:nvSpPr>
+          <p:cNvPr id="34" name="TextBox 33"/>
+          <p:cNvSpPr txBox="1"/>
+          <p:nvPr/>
+        </p:nvSpPr>
+        <p:spPr>
+          <a:xfrm>
+            <a:off x="841248" y="5266944"/>
+            <a:ext cx="5486400" cy="274320"/>
           </a:xfrm>
           <a:prstGeom prst="rect">
             <a:avLst/>
@@ -8701,46 +8842,255 @@
                 <a:spcPts val="0"/>
               </a:spcBef>
               <a:spcAft>
-                <a:spcPts val="200"/>
-              </a:spcAft>
-            </a:pPr>
-            <a:r>
-              <a:rPr sz="1250" b="1">
+                <a:spcPts val="0"/>
+              </a:spcAft>
+            </a:pPr>
+            <a:r>
+              <a:rPr sz="1050" b="0">
+                <a:solidFill>
+                  <a:srgbClr val="5B6B7B"/>
+                </a:solidFill>
+                <a:latin typeface="微軟正黑體"/>
+              </a:rPr>
+              <a:t>「現成」＝ .sensai/sent.log 已有欄位，收回日誌直接統計即可。</a:t>
+            </a:r>
+          </a:p>
+        </p:txBody>
+      </p:sp>
+      <p:sp>
+        <p:nvSpPr>
+          <p:cNvPr id="35" name="Rectangle 34"/>
+          <p:cNvSpPr/>
+          <p:nvPr/>
+        </p:nvSpPr>
+        <p:spPr>
+          <a:xfrm>
+            <a:off x="6812280" y="2103120"/>
+            <a:ext cx="4818888" cy="3310128"/>
+          </a:xfrm>
+          <a:prstGeom prst="rect">
+            <a:avLst/>
+          </a:prstGeom>
+          <a:solidFill>
+            <a:srgbClr val="F2F5F8"/>
+          </a:solidFill>
+          <a:ln>
+            <a:noFill/>
+          </a:ln>
+          <a:effectLst/>
+        </p:spPr>
+        <p:style>
+          <a:lnRef idx="1">
+            <a:schemeClr val="accent1"/>
+          </a:lnRef>
+          <a:fillRef idx="3">
+            <a:schemeClr val="accent1"/>
+          </a:fillRef>
+          <a:effectRef idx="2">
+            <a:schemeClr val="accent1"/>
+          </a:effectRef>
+          <a:fontRef idx="minor">
+            <a:schemeClr val="lt1"/>
+          </a:fontRef>
+        </p:style>
+        <p:txBody>
+          <a:bodyPr rtlCol="0" anchor="ctr"/>
+          <a:lstStyle/>
+          <a:p>
+            <a:pPr algn="ctr"/>
+          </a:p>
+        </p:txBody>
+      </p:sp>
+      <p:sp>
+        <p:nvSpPr>
+          <p:cNvPr id="36" name="TextBox 35"/>
+          <p:cNvSpPr txBox="1"/>
+          <p:nvPr/>
+        </p:nvSpPr>
+        <p:spPr>
+          <a:xfrm>
+            <a:off x="7086600" y="2304288"/>
+            <a:ext cx="4270248" cy="3017520"/>
+          </a:xfrm>
+          <a:prstGeom prst="rect">
+            <a:avLst/>
+          </a:prstGeom>
+          <a:noFill/>
+        </p:spPr>
+        <p:txBody>
+          <a:bodyPr wrap="square" lIns="0" rIns="0" tIns="0" bIns="0" anchor="t">
+            <a:spAutoFit/>
+          </a:bodyPr>
+          <a:lstStyle/>
+          <a:p>
+            <a:pPr algn="l">
+              <a:spcBef>
+                <a:spcPts val="0"/>
+              </a:spcBef>
+              <a:spcAft>
+                <a:spcPts val="900"/>
+              </a:spcAft>
+            </a:pPr>
+            <a:r>
+              <a:rPr sz="1300" b="1">
+                <a:solidFill>
+                  <a:srgbClr val="119DA4"/>
+                </a:solidFill>
+                <a:latin typeface="微軟正黑體"/>
+              </a:rPr>
+              <a:t>關鍵：自動與手動要分開算</a:t>
+            </a:r>
+          </a:p>
+          <a:p>
+            <a:pPr>
+              <a:spcBef>
+                <a:spcPts val="0"/>
+              </a:spcBef>
+              <a:spcAft>
+                <a:spcPts val="300"/>
+              </a:spcAft>
+            </a:pPr>
+            <a:r>
+              <a:rPr sz="1200" b="1">
                 <a:solidFill>
                   <a:srgbClr val="102A43"/>
                 </a:solidFill>
                 <a:latin typeface="微軟正黑體"/>
               </a:rPr>
-              <a:t>p95 延遲、每人每週誤報數</a:t>
+              <a:t>自動觸發次數 ≈ 存檔次數</a:t>
             </a:r>
           </a:p>
           <a:p>
             <a:pPr>
               <a:lnSpc>
-                <a:spcPct val="120000"/>
+                <a:spcPct val="122000"/>
               </a:lnSpc>
               <a:spcBef>
                 <a:spcPts val="0"/>
               </a:spcBef>
               <a:spcAft>
-                <a:spcPts val="0"/>
+                <a:spcPts val="900"/>
               </a:spcAft>
             </a:pPr>
             <a:r>
               <a:rPr sz="1100" b="0">
                 <a:solidFill>
+                  <a:srgbClr val="1B2633"/>
+                </a:solidFill>
+                <a:latin typeface="微軟正黑體"/>
+              </a:rPr>
+              <a:t>反映的是開發活動頻繁程度，不是工具價值。總次數高，可能只代表那週改的東西多。</a:t>
+            </a:r>
+          </a:p>
+          <a:p>
+            <a:pPr>
+              <a:spcBef>
+                <a:spcPts val="0"/>
+              </a:spcBef>
+              <a:spcAft>
+                <a:spcPts val="300"/>
+              </a:spcAft>
+            </a:pPr>
+            <a:r>
+              <a:rPr sz="1200" b="1">
+                <a:solidFill>
+                  <a:srgbClr val="102A43"/>
+                </a:solidFill>
+                <a:latin typeface="微軟正黑體"/>
+              </a:rPr>
+              <a:t>手動觸發是主動行為</a:t>
+            </a:r>
+          </a:p>
+          <a:p>
+            <a:pPr>
+              <a:lnSpc>
+                <a:spcPct val="122000"/>
+              </a:lnSpc>
+              <a:spcBef>
+                <a:spcPts val="0"/>
+              </a:spcBef>
+              <a:spcAft>
+                <a:spcPts val="900"/>
+              </a:spcAft>
+            </a:pPr>
+            <a:r>
+              <a:rPr sz="1100" b="0">
+                <a:solidFill>
+                  <a:srgbClr val="1B2633"/>
+                </a:solidFill>
+                <a:latin typeface="微軟正黑體"/>
+              </a:rPr>
+              <a:t>沒有人會主動執行一個自己不信任的工具。手動佔比逐週上升，代表 sensAI 從背景雜訊變成會主動叫出來用的工具。</a:t>
+            </a:r>
+          </a:p>
+          <a:p>
+            <a:pPr>
+              <a:spcBef>
+                <a:spcPts val="0"/>
+              </a:spcBef>
+              <a:spcAft>
+                <a:spcPts val="300"/>
+              </a:spcAft>
+            </a:pPr>
+            <a:r>
+              <a:rPr sz="1200" b="1">
+                <a:solidFill>
+                  <a:srgbClr val="D18616"/>
+                </a:solidFill>
+                <a:latin typeface="微軟正黑體"/>
+              </a:rPr>
+              <a:t>差距只有一個欄位</a:t>
+            </a:r>
+          </a:p>
+          <a:p>
+            <a:pPr>
+              <a:lnSpc>
+                <a:spcPct val="122000"/>
+              </a:lnSpc>
+              <a:spcBef>
+                <a:spcPts val="0"/>
+              </a:spcBef>
+              <a:spcAft>
+                <a:spcPts val="900"/>
+              </a:spcAft>
+            </a:pPr>
+            <a:r>
+              <a:rPr sz="1100" b="0">
+                <a:solidFill>
+                  <a:srgbClr val="1B2633"/>
+                </a:solidFill>
+                <a:latin typeface="微軟正黑體"/>
+              </a:rPr>
+              <a:t>trigger 值（manual／save）程式內部已經有，只是沒寫進稽核日誌，補上即可統計。</a:t>
+            </a:r>
+          </a:p>
+          <a:p>
+            <a:pPr>
+              <a:lnSpc>
+                <a:spcPct val="122000"/>
+              </a:lnSpc>
+              <a:spcBef>
+                <a:spcPts val="0"/>
+              </a:spcBef>
+              <a:spcAft>
+                <a:spcPts val="0"/>
+              </a:spcAft>
+            </a:pPr>
+            <a:r>
+              <a:rPr sz="1050" b="0">
+                <a:solidFill>
                   <a:srgbClr val="5B6B7B"/>
                 </a:solidFill>
                 <a:latin typeface="微軟正黑體"/>
               </a:rPr>
-              <a:t>不准跌破的底線，不是要衝高的目標</a:t>
-            </a:r>
-          </a:p>
-        </p:txBody>
-      </p:sp>
-      <p:sp>
-        <p:nvSpPr>
-          <p:cNvPr id="28" name="Rectangle 27"/>
+              <a:t>護欄：使用次數不可單獨當 KPI，須並列 p95 延遲與每人每週誤報數。</a:t>
+            </a:r>
+          </a:p>
+        </p:txBody>
+      </p:sp>
+      <p:sp>
+        <p:nvSpPr>
+          <p:cNvPr id="37" name="Rectangle 36"/>
           <p:cNvSpPr/>
           <p:nvPr/>
         </p:nvSpPr>
@@ -8784,7 +9134,7 @@
       </p:sp>
       <p:sp>
         <p:nvSpPr>
-          <p:cNvPr id="29" name="TextBox 28"/>
+          <p:cNvPr id="38" name="TextBox 37"/>
           <p:cNvSpPr txBox="1"/>
           <p:nvPr/>
         </p:nvSpPr>
@@ -8819,7 +9169,7 @@
                 </a:solidFill>
                 <a:latin typeface="微軟正黑體"/>
               </a:rPr>
-              <a:t>試行 4 週的報告格式：「n 則意見被實際修掉，其中 m 則是已合併進主線的既有缺陷」—— 比率是佐證，案例才是論點。</a:t>
+              <a:t>試行 4 週的目標設定：週活躍人數、人均每週使用次數、手動觸發佔比逐週上升—— 三個數字都來自同一份稽核日誌。</a:t>
             </a:r>
           </a:p>
         </p:txBody>
@@ -9311,7 +9661,7 @@
                 </a:solidFill>
                 <a:latin typeface="微軟正黑體"/>
               </a:rPr>
-              <a:t>・追蹤指標：意見被實際修掉的比例（而非準確率 —— 準確率沒有 ground truth）</a:t>
+              <a:t>・追蹤指標：週活躍人數、人均每週使用次數、手動觸發佔比</a:t>
             </a:r>
           </a:p>
           <a:p>
@@ -9333,7 +9683,7 @@
                 </a:solidFill>
                 <a:latin typeface="微軟正黑體"/>
               </a:rPr>
-              <a:t>・目標：每位使用者每週至少 1 則被採納的意見</a:t>
+              <a:t>・資料全部來自稽核日誌，不需要任何人填表</a:t>
             </a:r>
           </a:p>
         </p:txBody>

--- a/docs/sensAI_報告.pptx
+++ b/docs/sensAI_報告.pptx
@@ -7512,7 +7512,7 @@
                 </a:solidFill>
                 <a:latin typeface="微軟正黑體"/>
               </a:rPr>
-              <a:t>MEASUREMENT</a:t>
+              <a:t>DEPLOYMENT</a:t>
             </a:r>
           </a:p>
         </p:txBody>
@@ -7554,7 +7554,7 @@
                 </a:solidFill>
                 <a:latin typeface="微軟正黑體"/>
               </a:rPr>
-              <a:t>如何驗證效益：以使用次數為核心指標</a:t>
+              <a:t>部署狀況：已安裝 8 台開發機</a:t>
             </a:r>
           </a:p>
         </p:txBody>
@@ -7727,7 +7727,7 @@
                 </a:solidFill>
                 <a:latin typeface="微軟正黑體"/>
               </a:rPr>
-              <a:t>使用次數今天就量得到 —— 稽核日誌每次請求自動記一筆，不必改程式、不必請人填表。但要先拆開看：sensAI 是存檔自動觸發的。</a:t>
+              <a:t>sensAI 沒有透過任何統一派送機制推送。這 8 台，是 8 位工程師各自決定安裝的結果。</a:t>
             </a:r>
           </a:p>
         </p:txBody>
@@ -7741,7 +7741,202 @@
         <p:spPr>
           <a:xfrm>
             <a:off x="566928" y="2103120"/>
-            <a:ext cx="5989320" cy="3310128"/>
+            <a:ext cx="3310128" cy="3310128"/>
+          </a:xfrm>
+          <a:prstGeom prst="rect">
+            <a:avLst/>
+          </a:prstGeom>
+          <a:solidFill>
+            <a:srgbClr val="102A43"/>
+          </a:solidFill>
+          <a:ln>
+            <a:noFill/>
+          </a:ln>
+          <a:effectLst/>
+        </p:spPr>
+        <p:style>
+          <a:lnRef idx="1">
+            <a:schemeClr val="accent1"/>
+          </a:lnRef>
+          <a:fillRef idx="3">
+            <a:schemeClr val="accent1"/>
+          </a:fillRef>
+          <a:effectRef idx="2">
+            <a:schemeClr val="accent1"/>
+          </a:effectRef>
+          <a:fontRef idx="minor">
+            <a:schemeClr val="lt1"/>
+          </a:fontRef>
+        </p:style>
+        <p:txBody>
+          <a:bodyPr rtlCol="0" anchor="ctr"/>
+          <a:lstStyle/>
+          <a:p>
+            <a:pPr algn="ctr"/>
+          </a:p>
+        </p:txBody>
+      </p:sp>
+      <p:sp>
+        <p:nvSpPr>
+          <p:cNvPr id="10" name="TextBox 9"/>
+          <p:cNvSpPr txBox="1"/>
+          <p:nvPr/>
+        </p:nvSpPr>
+        <p:spPr>
+          <a:xfrm>
+            <a:off x="841248" y="2487168"/>
+            <a:ext cx="2743200" cy="1371600"/>
+          </a:xfrm>
+          <a:prstGeom prst="rect">
+            <a:avLst/>
+          </a:prstGeom>
+          <a:noFill/>
+        </p:spPr>
+        <p:txBody>
+          <a:bodyPr wrap="square" lIns="0" rIns="0" tIns="0" bIns="0" anchor="t">
+            <a:spAutoFit/>
+          </a:bodyPr>
+          <a:lstStyle/>
+          <a:p>
+            <a:pPr algn="ctr">
+              <a:spcBef>
+                <a:spcPts val="0"/>
+              </a:spcBef>
+              <a:spcAft>
+                <a:spcPts val="0"/>
+              </a:spcAft>
+            </a:pPr>
+            <a:r>
+              <a:rPr sz="9600" b="1">
+                <a:solidFill>
+                  <a:srgbClr val="FFFFFF"/>
+                </a:solidFill>
+                <a:latin typeface="微軟正黑體"/>
+              </a:rPr>
+              <a:t>8</a:t>
+            </a:r>
+          </a:p>
+        </p:txBody>
+      </p:sp>
+      <p:sp>
+        <p:nvSpPr>
+          <p:cNvPr id="11" name="Rectangle 10"/>
+          <p:cNvSpPr/>
+          <p:nvPr/>
+        </p:nvSpPr>
+        <p:spPr>
+          <a:xfrm>
+            <a:off x="1481328" y="3858768"/>
+            <a:ext cx="1463040" cy="22860"/>
+          </a:xfrm>
+          <a:prstGeom prst="rect">
+            <a:avLst/>
+          </a:prstGeom>
+          <a:solidFill>
+            <a:srgbClr val="119DA4"/>
+          </a:solidFill>
+          <a:ln>
+            <a:noFill/>
+          </a:ln>
+          <a:effectLst/>
+        </p:spPr>
+        <p:style>
+          <a:lnRef idx="1">
+            <a:schemeClr val="accent1"/>
+          </a:lnRef>
+          <a:fillRef idx="3">
+            <a:schemeClr val="accent1"/>
+          </a:fillRef>
+          <a:effectRef idx="2">
+            <a:schemeClr val="accent1"/>
+          </a:effectRef>
+          <a:fontRef idx="minor">
+            <a:schemeClr val="lt1"/>
+          </a:fontRef>
+        </p:style>
+        <p:txBody>
+          <a:bodyPr rtlCol="0" anchor="ctr"/>
+          <a:lstStyle/>
+          <a:p>
+            <a:pPr algn="ctr"/>
+          </a:p>
+        </p:txBody>
+      </p:sp>
+      <p:sp>
+        <p:nvSpPr>
+          <p:cNvPr id="12" name="TextBox 11"/>
+          <p:cNvSpPr txBox="1"/>
+          <p:nvPr/>
+        </p:nvSpPr>
+        <p:spPr>
+          <a:xfrm>
+            <a:off x="841248" y="4114800"/>
+            <a:ext cx="2743200" cy="1097280"/>
+          </a:xfrm>
+          <a:prstGeom prst="rect">
+            <a:avLst/>
+          </a:prstGeom>
+          <a:noFill/>
+        </p:spPr>
+        <p:txBody>
+          <a:bodyPr wrap="square" lIns="0" rIns="0" tIns="0" bIns="0" anchor="t">
+            <a:spAutoFit/>
+          </a:bodyPr>
+          <a:lstStyle/>
+          <a:p>
+            <a:pPr algn="ctr">
+              <a:spcBef>
+                <a:spcPts val="0"/>
+              </a:spcBef>
+              <a:spcAft>
+                <a:spcPts val="800"/>
+              </a:spcAft>
+            </a:pPr>
+            <a:r>
+              <a:rPr sz="1700" b="1">
+                <a:solidFill>
+                  <a:srgbClr val="FFFFFF"/>
+                </a:solidFill>
+                <a:latin typeface="微軟正黑體"/>
+              </a:rPr>
+              <a:t>台開發機已安裝</a:t>
+            </a:r>
+          </a:p>
+          <a:p>
+            <a:pPr algn="ctr">
+              <a:lnSpc>
+                <a:spcPct val="130000"/>
+              </a:lnSpc>
+              <a:spcBef>
+                <a:spcPts val="0"/>
+              </a:spcBef>
+              <a:spcAft>
+                <a:spcPts val="0"/>
+              </a:spcAft>
+            </a:pPr>
+            <a:r>
+              <a:rPr sz="1100" b="0">
+                <a:solidFill>
+                  <a:srgbClr val="A8C4D8"/>
+                </a:solidFill>
+                <a:latin typeface="微軟正黑體"/>
+              </a:rPr>
+              <a:t>來源：VS Code 擴充頁安裝數
+（可於擴充詳細頁當場複查）</a:t>
+            </a:r>
+          </a:p>
+        </p:txBody>
+      </p:sp>
+      <p:sp>
+        <p:nvSpPr>
+          <p:cNvPr id="13" name="Rectangle 12"/>
+          <p:cNvSpPr/>
+          <p:nvPr/>
+        </p:nvSpPr>
+        <p:spPr>
+          <a:xfrm>
+            <a:off x="4078224" y="2103120"/>
+            <a:ext cx="3657600" cy="3310128"/>
           </a:xfrm>
           <a:prstGeom prst="rect">
             <a:avLst/>
@@ -7778,14 +7973,14 @@
       </p:sp>
       <p:sp>
         <p:nvSpPr>
-          <p:cNvPr id="10" name="TextBox 9"/>
+          <p:cNvPr id="14" name="TextBox 13"/>
           <p:cNvSpPr txBox="1"/>
           <p:nvPr/>
         </p:nvSpPr>
         <p:spPr>
           <a:xfrm>
-            <a:off x="841248" y="2286000"/>
-            <a:ext cx="5486400" cy="320040"/>
+            <a:off x="4352544" y="2304288"/>
+            <a:ext cx="3108960" cy="3017520"/>
           </a:xfrm>
           <a:prstGeom prst="rect">
             <a:avLst/>
@@ -7803,7 +7998,7 @@
                 <a:spcPts val="0"/>
               </a:spcBef>
               <a:spcAft>
-                <a:spcPts val="0"/>
+                <a:spcPts val="1000"/>
               </a:spcAft>
             </a:pPr>
             <a:r>
@@ -7813,21 +8008,144 @@
                 </a:solidFill>
                 <a:latin typeface="微軟正黑體"/>
               </a:rPr>
-              <a:t>使用次數的五個切面</a:t>
-            </a:r>
-          </a:p>
-        </p:txBody>
-      </p:sp>
-      <p:sp>
-        <p:nvSpPr>
-          <p:cNvPr id="11" name="Rectangle 10"/>
+              <a:t>這個數字的意義</a:t>
+            </a:r>
+          </a:p>
+          <a:p>
+            <a:pPr>
+              <a:spcBef>
+                <a:spcPts val="0"/>
+              </a:spcBef>
+              <a:spcAft>
+                <a:spcPts val="300"/>
+              </a:spcAft>
+            </a:pPr>
+            <a:r>
+              <a:rPr sz="1250" b="1">
+                <a:solidFill>
+                  <a:srgbClr val="102A43"/>
+                </a:solidFill>
+                <a:latin typeface="微軟正黑體"/>
+              </a:rPr>
+              <a:t>全部為主動安裝</a:t>
+            </a:r>
+          </a:p>
+          <a:p>
+            <a:pPr>
+              <a:lnSpc>
+                <a:spcPct val="125000"/>
+              </a:lnSpc>
+              <a:spcBef>
+                <a:spcPts val="0"/>
+              </a:spcBef>
+              <a:spcAft>
+                <a:spcPts val="0"/>
+              </a:spcAft>
+            </a:pPr>
+            <a:r>
+              <a:rPr sz="1100" b="0">
+                <a:solidFill>
+                  <a:srgbClr val="5B6B7B"/>
+                </a:solidFill>
+                <a:latin typeface="微軟正黑體"/>
+              </a:rPr>
+              <a:t>未納入任何統一派送。每一台都要工程師自己從 Marketplace 裝上去。</a:t>
+            </a:r>
+          </a:p>
+          <a:p>
+            <a:pPr>
+              <a:spcBef>
+                <a:spcPts val="1200"/>
+              </a:spcBef>
+              <a:spcAft>
+                <a:spcPts val="300"/>
+              </a:spcAft>
+            </a:pPr>
+            <a:r>
+              <a:rPr sz="1250" b="1">
+                <a:solidFill>
+                  <a:srgbClr val="102A43"/>
+                </a:solidFill>
+                <a:latin typeface="微軟正黑體"/>
+              </a:rPr>
+              <a:t>零採購成本</a:t>
+            </a:r>
+          </a:p>
+          <a:p>
+            <a:pPr>
+              <a:lnSpc>
+                <a:spcPct val="125000"/>
+              </a:lnSpc>
+              <a:spcBef>
+                <a:spcPts val="0"/>
+              </a:spcBef>
+              <a:spcAft>
+                <a:spcPts val="0"/>
+              </a:spcAft>
+            </a:pPr>
+            <a:r>
+              <a:rPr sz="1100" b="0">
+                <a:solidFill>
+                  <a:srgbClr val="5B6B7B"/>
+                </a:solidFill>
+                <a:latin typeface="微軟正黑體"/>
+              </a:rPr>
+              <a:t>自行開發，無授權費，安裝不需要走採購流程。</a:t>
+            </a:r>
+          </a:p>
+          <a:p>
+            <a:pPr>
+              <a:spcBef>
+                <a:spcPts val="1200"/>
+              </a:spcBef>
+              <a:spcAft>
+                <a:spcPts val="300"/>
+              </a:spcAft>
+            </a:pPr>
+            <a:r>
+              <a:rPr sz="1250" b="1">
+                <a:solidFill>
+                  <a:srgbClr val="102A43"/>
+                </a:solidFill>
+                <a:latin typeface="微軟正黑體"/>
+              </a:rPr>
+              <a:t>零設定門檻</a:t>
+            </a:r>
+          </a:p>
+          <a:p>
+            <a:pPr>
+              <a:lnSpc>
+                <a:spcPct val="125000"/>
+              </a:lnSpc>
+              <a:spcBef>
+                <a:spcPts val="0"/>
+              </a:spcBef>
+              <a:spcAft>
+                <a:spcPts val="0"/>
+              </a:spcAft>
+            </a:pPr>
+            <a:r>
+              <a:rPr sz="1100" b="0">
+                <a:solidFill>
+                  <a:srgbClr val="5B6B7B"/>
+                </a:solidFill>
+                <a:latin typeface="微軟正黑體"/>
+              </a:rPr>
+              <a:t>一個 Initialize Project 指令即建立專案設定，不需要 build system 整合。</a:t>
+            </a:r>
+          </a:p>
+        </p:txBody>
+      </p:sp>
+      <p:sp>
+        <p:nvSpPr>
+          <p:cNvPr id="15" name="Rectangle 14"/>
           <p:cNvSpPr/>
           <p:nvPr/>
         </p:nvSpPr>
         <p:spPr>
           <a:xfrm>
-            <a:off x="841248" y="2651760"/>
-            <a:ext cx="5440680" cy="475488"/>
+            <a:off x="7936992" y="2103120"/>
+            <a:ext cx="3694176" cy="3310128"/>
           </a:xfrm>
           <a:prstGeom prst="rect">
             <a:avLst/>
@@ -7864,14 +8182,14 @@
       </p:sp>
       <p:sp>
         <p:nvSpPr>
-          <p:cNvPr id="12" name="TextBox 11"/>
+          <p:cNvPr id="16" name="TextBox 15"/>
           <p:cNvSpPr txBox="1"/>
           <p:nvPr/>
         </p:nvSpPr>
         <p:spPr>
           <a:xfrm>
-            <a:off x="969264" y="2697480"/>
-            <a:ext cx="1600200" cy="384048"/>
+            <a:off x="8211312" y="2304288"/>
+            <a:ext cx="3145536" cy="320040"/>
           </a:xfrm>
           <a:prstGeom prst="rect">
             <a:avLst/>
@@ -7893,74 +8211,29 @@
               </a:spcAft>
             </a:pPr>
             <a:r>
-              <a:rPr sz="1250" b="1">
-                <a:solidFill>
-                  <a:srgbClr val="102A43"/>
-                </a:solidFill>
-                <a:latin typeface="微軟正黑體"/>
-              </a:rPr>
-              <a:t>總審查次數</a:t>
-            </a:r>
-          </a:p>
-        </p:txBody>
-      </p:sp>
-      <p:sp>
-        <p:nvSpPr>
-          <p:cNvPr id="13" name="TextBox 12"/>
-          <p:cNvSpPr txBox="1"/>
-          <p:nvPr/>
-        </p:nvSpPr>
-        <p:spPr>
-          <a:xfrm>
-            <a:off x="2615184" y="2715768"/>
-            <a:ext cx="2788920" cy="384048"/>
-          </a:xfrm>
-          <a:prstGeom prst="rect">
-            <a:avLst/>
-          </a:prstGeom>
-          <a:noFill/>
-        </p:spPr>
-        <p:txBody>
-          <a:bodyPr wrap="square" lIns="0" rIns="0" tIns="0" bIns="0" anchor="t">
-            <a:spAutoFit/>
-          </a:bodyPr>
-          <a:lstStyle/>
-          <a:p>
-            <a:pPr algn="l">
-              <a:lnSpc>
-                <a:spcPct val="115000"/>
-              </a:lnSpc>
-              <a:spcBef>
-                <a:spcPts val="0"/>
-              </a:spcBef>
-              <a:spcAft>
-                <a:spcPts val="0"/>
-              </a:spcAft>
-            </a:pPr>
-            <a:r>
-              <a:rPr sz="1100" b="0">
-                <a:solidFill>
-                  <a:srgbClr val="5B6B7B"/>
-                </a:solidFill>
-                <a:latin typeface="微軟正黑體"/>
-              </a:rPr>
-              <a:t>每週成功完成的審查筆數</a:t>
-            </a:r>
-          </a:p>
-        </p:txBody>
-      </p:sp>
-      <p:sp>
-        <p:nvSpPr>
-          <p:cNvPr id="14" name="Rectangle 13"/>
+              <a:rPr sz="1300" b="1">
+                <a:solidFill>
+                  <a:srgbClr val="119DA4"/>
+                </a:solidFill>
+                <a:latin typeface="微軟正黑體"/>
+              </a:rPr>
+              <a:t>部署進程</a:t>
+            </a:r>
+          </a:p>
+        </p:txBody>
+      </p:sp>
+      <p:sp>
+        <p:nvSpPr>
+          <p:cNvPr id="17" name="Oval 16"/>
           <p:cNvSpPr/>
           <p:nvPr/>
         </p:nvSpPr>
         <p:spPr>
           <a:xfrm>
-            <a:off x="5532120" y="2752344"/>
-            <a:ext cx="658368" cy="274320"/>
-          </a:xfrm>
-          <a:prstGeom prst="rect">
+            <a:off x="8211312" y="2834640"/>
+            <a:ext cx="146304" cy="146304"/>
+          </a:xfrm>
+          <a:prstGeom prst="ellipse">
             <a:avLst/>
           </a:prstGeom>
           <a:solidFill>
@@ -7995,14 +8268,14 @@
       </p:sp>
       <p:sp>
         <p:nvSpPr>
-          <p:cNvPr id="15" name="TextBox 14"/>
+          <p:cNvPr id="18" name="TextBox 17"/>
           <p:cNvSpPr txBox="1"/>
           <p:nvPr/>
         </p:nvSpPr>
         <p:spPr>
           <a:xfrm>
-            <a:off x="5532120" y="2793492"/>
-            <a:ext cx="658368" cy="219456"/>
+            <a:off x="8522208" y="2743200"/>
+            <a:ext cx="1737360" cy="320040"/>
           </a:xfrm>
           <a:prstGeom prst="rect">
             <a:avLst/>
@@ -8015,36 +8288,36 @@
           </a:bodyPr>
           <a:lstStyle/>
           <a:p>
-            <a:pPr algn="ctr">
-              <a:spcBef>
-                <a:spcPts val="0"/>
-              </a:spcBef>
-              <a:spcAft>
-                <a:spcPts val="0"/>
-              </a:spcAft>
-            </a:pPr>
-            <a:r>
-              <a:rPr sz="1000" b="1">
-                <a:solidFill>
-                  <a:srgbClr val="FFFFFF"/>
-                </a:solidFill>
-                <a:latin typeface="微軟正黑體"/>
-              </a:rPr>
-              <a:t>現成</a:t>
-            </a:r>
-          </a:p>
-        </p:txBody>
-      </p:sp>
-      <p:sp>
-        <p:nvSpPr>
-          <p:cNvPr id="16" name="TextBox 15"/>
+            <a:pPr algn="l">
+              <a:spcBef>
+                <a:spcPts val="0"/>
+              </a:spcBef>
+              <a:spcAft>
+                <a:spcPts val="0"/>
+              </a:spcAft>
+            </a:pPr>
+            <a:r>
+              <a:rPr sz="1250" b="1">
+                <a:solidFill>
+                  <a:srgbClr val="102A43"/>
+                </a:solidFill>
+                <a:latin typeface="微軟正黑體"/>
+              </a:rPr>
+              <a:t>開發驗證</a:t>
+            </a:r>
+          </a:p>
+        </p:txBody>
+      </p:sp>
+      <p:sp>
+        <p:nvSpPr>
+          <p:cNvPr id="19" name="TextBox 18"/>
           <p:cNvSpPr txBox="1"/>
           <p:nvPr/>
         </p:nvSpPr>
         <p:spPr>
           <a:xfrm>
-            <a:off x="969264" y="3209544"/>
-            <a:ext cx="1600200" cy="384048"/>
+            <a:off x="10332720" y="2752344"/>
+            <a:ext cx="1051560" cy="320040"/>
           </a:xfrm>
           <a:prstGeom prst="rect">
             <a:avLst/>
@@ -8057,7 +8330,7 @@
           </a:bodyPr>
           <a:lstStyle/>
           <a:p>
-            <a:pPr algn="l">
+            <a:pPr algn="r">
               <a:spcBef>
                 <a:spcPts val="0"/>
               </a:spcBef>
@@ -8072,68 +8345,23 @@
                 </a:solidFill>
                 <a:latin typeface="微軟正黑體"/>
               </a:rPr>
-              <a:t>週活躍人數</a:t>
-            </a:r>
-          </a:p>
-        </p:txBody>
-      </p:sp>
-      <p:sp>
-        <p:nvSpPr>
-          <p:cNvPr id="17" name="TextBox 16"/>
-          <p:cNvSpPr txBox="1"/>
-          <p:nvPr/>
-        </p:nvSpPr>
-        <p:spPr>
-          <a:xfrm>
-            <a:off x="2615184" y="3227832"/>
-            <a:ext cx="2788920" cy="384048"/>
-          </a:xfrm>
-          <a:prstGeom prst="rect">
-            <a:avLst/>
-          </a:prstGeom>
-          <a:noFill/>
-        </p:spPr>
-        <p:txBody>
-          <a:bodyPr wrap="square" lIns="0" rIns="0" tIns="0" bIns="0" anchor="t">
-            <a:spAutoFit/>
-          </a:bodyPr>
-          <a:lstStyle/>
-          <a:p>
-            <a:pPr algn="l">
-              <a:lnSpc>
-                <a:spcPct val="115000"/>
-              </a:lnSpc>
-              <a:spcBef>
-                <a:spcPts val="0"/>
-              </a:spcBef>
-              <a:spcAft>
-                <a:spcPts val="0"/>
-              </a:spcAft>
-            </a:pPr>
-            <a:r>
-              <a:rPr sz="1100" b="0">
-                <a:solidFill>
-                  <a:srgbClr val="5B6B7B"/>
-                </a:solidFill>
-                <a:latin typeface="微軟正黑體"/>
-              </a:rPr>
-              <a:t>當週有審查記錄的人數</a:t>
-            </a:r>
-          </a:p>
-        </p:txBody>
-      </p:sp>
-      <p:sp>
-        <p:nvSpPr>
-          <p:cNvPr id="18" name="Rectangle 17"/>
+              <a:t>1 台</a:t>
+            </a:r>
+          </a:p>
+        </p:txBody>
+      </p:sp>
+      <p:sp>
+        <p:nvSpPr>
+          <p:cNvPr id="20" name="Oval 19"/>
           <p:cNvSpPr/>
           <p:nvPr/>
         </p:nvSpPr>
         <p:spPr>
           <a:xfrm>
-            <a:off x="5532120" y="3264408"/>
-            <a:ext cx="658368" cy="274320"/>
-          </a:xfrm>
-          <a:prstGeom prst="rect">
+            <a:off x="8211312" y="3401568"/>
+            <a:ext cx="146304" cy="146304"/>
+          </a:xfrm>
+          <a:prstGeom prst="ellipse">
             <a:avLst/>
           </a:prstGeom>
           <a:solidFill>
@@ -8168,14 +8396,14 @@
       </p:sp>
       <p:sp>
         <p:nvSpPr>
-          <p:cNvPr id="19" name="TextBox 18"/>
+          <p:cNvPr id="21" name="TextBox 20"/>
           <p:cNvSpPr txBox="1"/>
           <p:nvPr/>
         </p:nvSpPr>
         <p:spPr>
           <a:xfrm>
-            <a:off x="5532120" y="3305556"/>
-            <a:ext cx="658368" cy="219456"/>
+            <a:off x="8522208" y="3310128"/>
+            <a:ext cx="1737360" cy="320040"/>
           </a:xfrm>
           <a:prstGeom prst="rect">
             <a:avLst/>
@@ -8188,42 +8416,84 @@
           </a:bodyPr>
           <a:lstStyle/>
           <a:p>
-            <a:pPr algn="ctr">
-              <a:spcBef>
-                <a:spcPts val="0"/>
-              </a:spcBef>
-              <a:spcAft>
-                <a:spcPts val="0"/>
-              </a:spcAft>
-            </a:pPr>
-            <a:r>
-              <a:rPr sz="1000" b="1">
-                <a:solidFill>
-                  <a:srgbClr val="FFFFFF"/>
-                </a:solidFill>
-                <a:latin typeface="微軟正黑體"/>
-              </a:rPr>
-              <a:t>現成</a:t>
-            </a:r>
-          </a:p>
-        </p:txBody>
-      </p:sp>
-      <p:sp>
-        <p:nvSpPr>
-          <p:cNvPr id="20" name="Rectangle 19"/>
+            <a:pPr algn="l">
+              <a:spcBef>
+                <a:spcPts val="0"/>
+              </a:spcBef>
+              <a:spcAft>
+                <a:spcPts val="0"/>
+              </a:spcAft>
+            </a:pPr>
+            <a:r>
+              <a:rPr sz="1250" b="1">
+                <a:solidFill>
+                  <a:srgbClr val="102A43"/>
+                </a:solidFill>
+                <a:latin typeface="微軟正黑體"/>
+              </a:rPr>
+              <a:t>目前</a:t>
+            </a:r>
+          </a:p>
+        </p:txBody>
+      </p:sp>
+      <p:sp>
+        <p:nvSpPr>
+          <p:cNvPr id="22" name="TextBox 21"/>
+          <p:cNvSpPr txBox="1"/>
+          <p:nvPr/>
+        </p:nvSpPr>
+        <p:spPr>
+          <a:xfrm>
+            <a:off x="10332720" y="3319272"/>
+            <a:ext cx="1051560" cy="320040"/>
+          </a:xfrm>
+          <a:prstGeom prst="rect">
+            <a:avLst/>
+          </a:prstGeom>
+          <a:noFill/>
+        </p:spPr>
+        <p:txBody>
+          <a:bodyPr wrap="square" lIns="0" rIns="0" tIns="0" bIns="0" anchor="t">
+            <a:spAutoFit/>
+          </a:bodyPr>
+          <a:lstStyle/>
+          <a:p>
+            <a:pPr algn="r">
+              <a:spcBef>
+                <a:spcPts val="0"/>
+              </a:spcBef>
+              <a:spcAft>
+                <a:spcPts val="0"/>
+              </a:spcAft>
+            </a:pPr>
+            <a:r>
+              <a:rPr sz="1250" b="1">
+                <a:solidFill>
+                  <a:srgbClr val="102A43"/>
+                </a:solidFill>
+                <a:latin typeface="微軟正黑體"/>
+              </a:rPr>
+              <a:t>8 台</a:t>
+            </a:r>
+          </a:p>
+        </p:txBody>
+      </p:sp>
+      <p:sp>
+        <p:nvSpPr>
+          <p:cNvPr id="23" name="Oval 22"/>
           <p:cNvSpPr/>
           <p:nvPr/>
         </p:nvSpPr>
         <p:spPr>
           <a:xfrm>
-            <a:off x="841248" y="3675888"/>
-            <a:ext cx="5440680" cy="475488"/>
-          </a:xfrm>
-          <a:prstGeom prst="rect">
+            <a:off x="8211312" y="3968496"/>
+            <a:ext cx="146304" cy="146304"/>
+          </a:xfrm>
+          <a:prstGeom prst="ellipse">
             <a:avLst/>
           </a:prstGeom>
           <a:solidFill>
-            <a:srgbClr val="F2F5F8"/>
+            <a:srgbClr val="B0BCC8"/>
           </a:solidFill>
           <a:ln>
             <a:noFill/>
@@ -8254,14 +8524,14 @@
       </p:sp>
       <p:sp>
         <p:nvSpPr>
-          <p:cNvPr id="21" name="TextBox 20"/>
+          <p:cNvPr id="24" name="TextBox 23"/>
           <p:cNvSpPr txBox="1"/>
           <p:nvPr/>
         </p:nvSpPr>
         <p:spPr>
           <a:xfrm>
-            <a:off x="969264" y="3721608"/>
-            <a:ext cx="1600200" cy="384048"/>
+            <a:off x="8522208" y="3877056"/>
+            <a:ext cx="1737360" cy="320040"/>
           </a:xfrm>
           <a:prstGeom prst="rect">
             <a:avLst/>
@@ -8283,27 +8553,27 @@
               </a:spcAft>
             </a:pPr>
             <a:r>
-              <a:rPr sz="1250" b="1">
-                <a:solidFill>
-                  <a:srgbClr val="102A43"/>
-                </a:solidFill>
-                <a:latin typeface="微軟正黑體"/>
-              </a:rPr>
-              <a:t>人均每週次數</a:t>
-            </a:r>
-          </a:p>
-        </p:txBody>
-      </p:sp>
-      <p:sp>
-        <p:nvSpPr>
-          <p:cNvPr id="22" name="TextBox 21"/>
+              <a:rPr sz="1250" b="0">
+                <a:solidFill>
+                  <a:srgbClr val="5B6B7B"/>
+                </a:solidFill>
+                <a:latin typeface="微軟正黑體"/>
+              </a:rPr>
+              <a:t>試行專案全員</a:t>
+            </a:r>
+          </a:p>
+        </p:txBody>
+      </p:sp>
+      <p:sp>
+        <p:nvSpPr>
+          <p:cNvPr id="25" name="TextBox 24"/>
           <p:cNvSpPr txBox="1"/>
           <p:nvPr/>
         </p:nvSpPr>
         <p:spPr>
           <a:xfrm>
-            <a:off x="2615184" y="3739896"/>
-            <a:ext cx="2788920" cy="384048"/>
+            <a:off x="10332720" y="3886200"/>
+            <a:ext cx="1051560" cy="320040"/>
           </a:xfrm>
           <a:prstGeom prst="rect">
             <a:avLst/>
@@ -8316,45 +8586,42 @@
           </a:bodyPr>
           <a:lstStyle/>
           <a:p>
-            <a:pPr algn="l">
-              <a:lnSpc>
-                <a:spcPct val="115000"/>
-              </a:lnSpc>
-              <a:spcBef>
-                <a:spcPts val="0"/>
-              </a:spcBef>
-              <a:spcAft>
-                <a:spcPts val="0"/>
-              </a:spcAft>
-            </a:pPr>
-            <a:r>
-              <a:rPr sz="1100" b="0">
+            <a:pPr algn="r">
+              <a:spcBef>
+                <a:spcPts val="0"/>
+              </a:spcBef>
+              <a:spcAft>
+                <a:spcPts val="0"/>
+              </a:spcAft>
+            </a:pPr>
+            <a:r>
+              <a:rPr sz="1250" b="0">
                 <a:solidFill>
                   <a:srgbClr val="5B6B7B"/>
                 </a:solidFill>
                 <a:latin typeface="微軟正黑體"/>
               </a:rPr>
-              <a:t>前兩者相除 —— 看的是黏著度</a:t>
-            </a:r>
-          </a:p>
-        </p:txBody>
-      </p:sp>
-      <p:sp>
-        <p:nvSpPr>
-          <p:cNvPr id="23" name="Rectangle 22"/>
+              <a:t>待展開</a:t>
+            </a:r>
+          </a:p>
+        </p:txBody>
+      </p:sp>
+      <p:sp>
+        <p:nvSpPr>
+          <p:cNvPr id="26" name="Oval 25"/>
           <p:cNvSpPr/>
           <p:nvPr/>
         </p:nvSpPr>
         <p:spPr>
           <a:xfrm>
-            <a:off x="5532120" y="3776472"/>
-            <a:ext cx="658368" cy="274320"/>
-          </a:xfrm>
-          <a:prstGeom prst="rect">
+            <a:off x="8211312" y="4535424"/>
+            <a:ext cx="146304" cy="146304"/>
+          </a:xfrm>
+          <a:prstGeom prst="ellipse">
             <a:avLst/>
           </a:prstGeom>
           <a:solidFill>
-            <a:srgbClr val="119DA4"/>
+            <a:srgbClr val="B0BCC8"/>
           </a:solidFill>
           <a:ln>
             <a:noFill/>
@@ -8385,14 +8652,14 @@
       </p:sp>
       <p:sp>
         <p:nvSpPr>
-          <p:cNvPr id="24" name="TextBox 23"/>
+          <p:cNvPr id="27" name="TextBox 26"/>
           <p:cNvSpPr txBox="1"/>
           <p:nvPr/>
         </p:nvSpPr>
         <p:spPr>
           <a:xfrm>
-            <a:off x="5532120" y="3817620"/>
-            <a:ext cx="658368" cy="219456"/>
+            <a:off x="8522208" y="4443984"/>
+            <a:ext cx="1737360" cy="320040"/>
           </a:xfrm>
           <a:prstGeom prst="rect">
             <a:avLst/>
@@ -8405,36 +8672,36 @@
           </a:bodyPr>
           <a:lstStyle/>
           <a:p>
-            <a:pPr algn="ctr">
-              <a:spcBef>
-                <a:spcPts val="0"/>
-              </a:spcBef>
-              <a:spcAft>
-                <a:spcPts val="0"/>
-              </a:spcAft>
-            </a:pPr>
-            <a:r>
-              <a:rPr sz="1000" b="1">
-                <a:solidFill>
-                  <a:srgbClr val="FFFFFF"/>
-                </a:solidFill>
-                <a:latin typeface="微軟正黑體"/>
-              </a:rPr>
-              <a:t>現成</a:t>
-            </a:r>
-          </a:p>
-        </p:txBody>
-      </p:sp>
-      <p:sp>
-        <p:nvSpPr>
-          <p:cNvPr id="25" name="TextBox 24"/>
+            <a:pPr algn="l">
+              <a:spcBef>
+                <a:spcPts val="0"/>
+              </a:spcBef>
+              <a:spcAft>
+                <a:spcPts val="0"/>
+              </a:spcAft>
+            </a:pPr>
+            <a:r>
+              <a:rPr sz="1250" b="0">
+                <a:solidFill>
+                  <a:srgbClr val="5B6B7B"/>
+                </a:solidFill>
+                <a:latin typeface="微軟正黑體"/>
+              </a:rPr>
+              <a:t>部門推廣</a:t>
+            </a:r>
+          </a:p>
+        </p:txBody>
+      </p:sp>
+      <p:sp>
+        <p:nvSpPr>
+          <p:cNvPr id="28" name="TextBox 27"/>
           <p:cNvSpPr txBox="1"/>
           <p:nvPr/>
         </p:nvSpPr>
         <p:spPr>
           <a:xfrm>
-            <a:off x="969264" y="4233672"/>
-            <a:ext cx="1600200" cy="384048"/>
+            <a:off x="10332720" y="4453128"/>
+            <a:ext cx="1051560" cy="320040"/>
           </a:xfrm>
           <a:prstGeom prst="rect">
             <a:avLst/>
@@ -8447,36 +8714,36 @@
           </a:bodyPr>
           <a:lstStyle/>
           <a:p>
-            <a:pPr algn="l">
-              <a:spcBef>
-                <a:spcPts val="0"/>
-              </a:spcBef>
-              <a:spcAft>
-                <a:spcPts val="0"/>
-              </a:spcAft>
-            </a:pPr>
-            <a:r>
-              <a:rPr sz="1250" b="1">
-                <a:solidFill>
-                  <a:srgbClr val="102A43"/>
-                </a:solidFill>
-                <a:latin typeface="微軟正黑體"/>
-              </a:rPr>
-              <a:t>涵蓋檔案數</a:t>
-            </a:r>
-          </a:p>
-        </p:txBody>
-      </p:sp>
-      <p:sp>
-        <p:nvSpPr>
-          <p:cNvPr id="26" name="TextBox 25"/>
+            <a:pPr algn="r">
+              <a:spcBef>
+                <a:spcPts val="0"/>
+              </a:spcBef>
+              <a:spcAft>
+                <a:spcPts val="0"/>
+              </a:spcAft>
+            </a:pPr>
+            <a:r>
+              <a:rPr sz="1250" b="0">
+                <a:solidFill>
+                  <a:srgbClr val="5B6B7B"/>
+                </a:solidFill>
+                <a:latin typeface="微軟正黑體"/>
+              </a:rPr>
+              <a:t>待評估</a:t>
+            </a:r>
+          </a:p>
+        </p:txBody>
+      </p:sp>
+      <p:sp>
+        <p:nvSpPr>
+          <p:cNvPr id="29" name="TextBox 28"/>
           <p:cNvSpPr txBox="1"/>
           <p:nvPr/>
         </p:nvSpPr>
         <p:spPr>
           <a:xfrm>
-            <a:off x="2615184" y="4251960"/>
-            <a:ext cx="2788920" cy="384048"/>
+            <a:off x="8211312" y="5084064"/>
+            <a:ext cx="3145536" cy="365760"/>
           </a:xfrm>
           <a:prstGeom prst="rect">
             <a:avLst/>
@@ -8491,7 +8758,7 @@
           <a:p>
             <a:pPr algn="l">
               <a:lnSpc>
-                <a:spcPct val="115000"/>
+                <a:spcPct val="120000"/>
               </a:lnSpc>
               <a:spcBef>
                 <a:spcPts val="0"/>
@@ -8501,596 +8768,20 @@
               </a:spcAft>
             </a:pPr>
             <a:r>
-              <a:rPr sz="1100" b="0">
+              <a:rPr sz="1000" b="0">
                 <a:solidFill>
                   <a:srgbClr val="5B6B7B"/>
                 </a:solidFill>
                 <a:latin typeface="微軟正黑體"/>
               </a:rPr>
-              <a:t>被審過的相異檔案數 ÷ 專案檔案數</a:t>
-            </a:r>
-          </a:p>
-        </p:txBody>
-      </p:sp>
-      <p:sp>
-        <p:nvSpPr>
-          <p:cNvPr id="27" name="Rectangle 26"/>
-          <p:cNvSpPr/>
-          <p:nvPr/>
-        </p:nvSpPr>
-        <p:spPr>
-          <a:xfrm>
-            <a:off x="5532120" y="4288536"/>
-            <a:ext cx="658368" cy="274320"/>
-          </a:xfrm>
-          <a:prstGeom prst="rect">
-            <a:avLst/>
-          </a:prstGeom>
-          <a:solidFill>
-            <a:srgbClr val="119DA4"/>
-          </a:solidFill>
-          <a:ln>
-            <a:noFill/>
-          </a:ln>
-          <a:effectLst/>
-        </p:spPr>
-        <p:style>
-          <a:lnRef idx="1">
-            <a:schemeClr val="accent1"/>
-          </a:lnRef>
-          <a:fillRef idx="3">
-            <a:schemeClr val="accent1"/>
-          </a:fillRef>
-          <a:effectRef idx="2">
-            <a:schemeClr val="accent1"/>
-          </a:effectRef>
-          <a:fontRef idx="minor">
-            <a:schemeClr val="lt1"/>
-          </a:fontRef>
-        </p:style>
-        <p:txBody>
-          <a:bodyPr rtlCol="0" anchor="ctr"/>
-          <a:lstStyle/>
-          <a:p>
-            <a:pPr algn="ctr"/>
-          </a:p>
-        </p:txBody>
-      </p:sp>
-      <p:sp>
-        <p:nvSpPr>
-          <p:cNvPr id="28" name="TextBox 27"/>
-          <p:cNvSpPr txBox="1"/>
-          <p:nvPr/>
-        </p:nvSpPr>
-        <p:spPr>
-          <a:xfrm>
-            <a:off x="5532120" y="4329684"/>
-            <a:ext cx="658368" cy="219456"/>
-          </a:xfrm>
-          <a:prstGeom prst="rect">
-            <a:avLst/>
-          </a:prstGeom>
-          <a:noFill/>
-        </p:spPr>
-        <p:txBody>
-          <a:bodyPr wrap="square" lIns="0" rIns="0" tIns="0" bIns="0" anchor="t">
-            <a:spAutoFit/>
-          </a:bodyPr>
-          <a:lstStyle/>
-          <a:p>
-            <a:pPr algn="ctr">
-              <a:spcBef>
-                <a:spcPts val="0"/>
-              </a:spcBef>
-              <a:spcAft>
-                <a:spcPts val="0"/>
-              </a:spcAft>
-            </a:pPr>
-            <a:r>
-              <a:rPr sz="1000" b="1">
-                <a:solidFill>
-                  <a:srgbClr val="FFFFFF"/>
-                </a:solidFill>
-                <a:latin typeface="微軟正黑體"/>
-              </a:rPr>
-              <a:t>現成</a:t>
-            </a:r>
-          </a:p>
-        </p:txBody>
-      </p:sp>
-      <p:sp>
-        <p:nvSpPr>
-          <p:cNvPr id="29" name="Rectangle 28"/>
-          <p:cNvSpPr/>
-          <p:nvPr/>
-        </p:nvSpPr>
-        <p:spPr>
-          <a:xfrm>
-            <a:off x="841248" y="4700016"/>
-            <a:ext cx="5440680" cy="475488"/>
-          </a:xfrm>
-          <a:prstGeom prst="rect">
-            <a:avLst/>
-          </a:prstGeom>
-          <a:solidFill>
-            <a:srgbClr val="F2F5F8"/>
-          </a:solidFill>
-          <a:ln>
-            <a:noFill/>
-          </a:ln>
-          <a:effectLst/>
-        </p:spPr>
-        <p:style>
-          <a:lnRef idx="1">
-            <a:schemeClr val="accent1"/>
-          </a:lnRef>
-          <a:fillRef idx="3">
-            <a:schemeClr val="accent1"/>
-          </a:fillRef>
-          <a:effectRef idx="2">
-            <a:schemeClr val="accent1"/>
-          </a:effectRef>
-          <a:fontRef idx="minor">
-            <a:schemeClr val="lt1"/>
-          </a:fontRef>
-        </p:style>
-        <p:txBody>
-          <a:bodyPr rtlCol="0" anchor="ctr"/>
-          <a:lstStyle/>
-          <a:p>
-            <a:pPr algn="ctr"/>
-          </a:p>
-        </p:txBody>
-      </p:sp>
-      <p:sp>
-        <p:nvSpPr>
-          <p:cNvPr id="30" name="TextBox 29"/>
-          <p:cNvSpPr txBox="1"/>
-          <p:nvPr/>
-        </p:nvSpPr>
-        <p:spPr>
-          <a:xfrm>
-            <a:off x="969264" y="4745736"/>
-            <a:ext cx="1600200" cy="384048"/>
-          </a:xfrm>
-          <a:prstGeom prst="rect">
-            <a:avLst/>
-          </a:prstGeom>
-          <a:noFill/>
-        </p:spPr>
-        <p:txBody>
-          <a:bodyPr wrap="square" lIns="0" rIns="0" tIns="0" bIns="0" anchor="t">
-            <a:spAutoFit/>
-          </a:bodyPr>
-          <a:lstStyle/>
-          <a:p>
-            <a:pPr algn="l">
-              <a:spcBef>
-                <a:spcPts val="0"/>
-              </a:spcBef>
-              <a:spcAft>
-                <a:spcPts val="0"/>
-              </a:spcAft>
-            </a:pPr>
-            <a:r>
-              <a:rPr sz="1250" b="1">
-                <a:solidFill>
-                  <a:srgbClr val="102A43"/>
-                </a:solidFill>
-                <a:latin typeface="微軟正黑體"/>
-              </a:rPr>
-              <a:t>手動觸發佔比</a:t>
-            </a:r>
-          </a:p>
-        </p:txBody>
-      </p:sp>
-      <p:sp>
-        <p:nvSpPr>
-          <p:cNvPr id="31" name="TextBox 30"/>
-          <p:cNvSpPr txBox="1"/>
-          <p:nvPr/>
-        </p:nvSpPr>
-        <p:spPr>
-          <a:xfrm>
-            <a:off x="2615184" y="4764024"/>
-            <a:ext cx="2788920" cy="384048"/>
-          </a:xfrm>
-          <a:prstGeom prst="rect">
-            <a:avLst/>
-          </a:prstGeom>
-          <a:noFill/>
-        </p:spPr>
-        <p:txBody>
-          <a:bodyPr wrap="square" lIns="0" rIns="0" tIns="0" bIns="0" anchor="t">
-            <a:spAutoFit/>
-          </a:bodyPr>
-          <a:lstStyle/>
-          <a:p>
-            <a:pPr algn="l">
-              <a:lnSpc>
-                <a:spcPct val="115000"/>
-              </a:lnSpc>
-              <a:spcBef>
-                <a:spcPts val="0"/>
-              </a:spcBef>
-              <a:spcAft>
-                <a:spcPts val="0"/>
-              </a:spcAft>
-            </a:pPr>
-            <a:r>
-              <a:rPr sz="1100" b="0">
-                <a:solidFill>
-                  <a:srgbClr val="5B6B7B"/>
-                </a:solidFill>
-                <a:latin typeface="微軟正黑體"/>
-              </a:rPr>
-              <a:t>主動執行 Review Current File 的比例</a:t>
-            </a:r>
-          </a:p>
-        </p:txBody>
-      </p:sp>
-      <p:sp>
-        <p:nvSpPr>
-          <p:cNvPr id="32" name="Rectangle 31"/>
-          <p:cNvSpPr/>
-          <p:nvPr/>
-        </p:nvSpPr>
-        <p:spPr>
-          <a:xfrm>
-            <a:off x="5532120" y="4800600"/>
-            <a:ext cx="658368" cy="274320"/>
-          </a:xfrm>
-          <a:prstGeom prst="rect">
-            <a:avLst/>
-          </a:prstGeom>
-          <a:solidFill>
-            <a:srgbClr val="D18616"/>
-          </a:solidFill>
-          <a:ln>
-            <a:noFill/>
-          </a:ln>
-          <a:effectLst/>
-        </p:spPr>
-        <p:style>
-          <a:lnRef idx="1">
-            <a:schemeClr val="accent1"/>
-          </a:lnRef>
-          <a:fillRef idx="3">
-            <a:schemeClr val="accent1"/>
-          </a:fillRef>
-          <a:effectRef idx="2">
-            <a:schemeClr val="accent1"/>
-          </a:effectRef>
-          <a:fontRef idx="minor">
-            <a:schemeClr val="lt1"/>
-          </a:fontRef>
-        </p:style>
-        <p:txBody>
-          <a:bodyPr rtlCol="0" anchor="ctr"/>
-          <a:lstStyle/>
-          <a:p>
-            <a:pPr algn="ctr"/>
-          </a:p>
-        </p:txBody>
-      </p:sp>
-      <p:sp>
-        <p:nvSpPr>
-          <p:cNvPr id="33" name="TextBox 32"/>
-          <p:cNvSpPr txBox="1"/>
-          <p:nvPr/>
-        </p:nvSpPr>
-        <p:spPr>
-          <a:xfrm>
-            <a:off x="5532120" y="4841748"/>
-            <a:ext cx="658368" cy="219456"/>
-          </a:xfrm>
-          <a:prstGeom prst="rect">
-            <a:avLst/>
-          </a:prstGeom>
-          <a:noFill/>
-        </p:spPr>
-        <p:txBody>
-          <a:bodyPr wrap="square" lIns="0" rIns="0" tIns="0" bIns="0" anchor="t">
-            <a:spAutoFit/>
-          </a:bodyPr>
-          <a:lstStyle/>
-          <a:p>
-            <a:pPr algn="ctr">
-              <a:spcBef>
-                <a:spcPts val="0"/>
-              </a:spcBef>
-              <a:spcAft>
-                <a:spcPts val="0"/>
-              </a:spcAft>
-            </a:pPr>
-            <a:r>
-              <a:rPr sz="1000" b="1">
-                <a:solidFill>
-                  <a:srgbClr val="FFFFFF"/>
-                </a:solidFill>
-                <a:latin typeface="微軟正黑體"/>
-              </a:rPr>
-              <a:t>待補</a:t>
-            </a:r>
-          </a:p>
-        </p:txBody>
-      </p:sp>
-      <p:sp>
-        <p:nvSpPr>
-          <p:cNvPr id="34" name="TextBox 33"/>
-          <p:cNvSpPr txBox="1"/>
-          <p:nvPr/>
-        </p:nvSpPr>
-        <p:spPr>
-          <a:xfrm>
-            <a:off x="841248" y="5266944"/>
-            <a:ext cx="5486400" cy="274320"/>
-          </a:xfrm>
-          <a:prstGeom prst="rect">
-            <a:avLst/>
-          </a:prstGeom>
-          <a:noFill/>
-        </p:spPr>
-        <p:txBody>
-          <a:bodyPr wrap="square" lIns="0" rIns="0" tIns="0" bIns="0" anchor="t">
-            <a:spAutoFit/>
-          </a:bodyPr>
-          <a:lstStyle/>
-          <a:p>
-            <a:pPr algn="l">
-              <a:spcBef>
-                <a:spcPts val="0"/>
-              </a:spcBef>
-              <a:spcAft>
-                <a:spcPts val="0"/>
-              </a:spcAft>
-            </a:pPr>
-            <a:r>
-              <a:rPr sz="1050" b="0">
-                <a:solidFill>
-                  <a:srgbClr val="5B6B7B"/>
-                </a:solidFill>
-                <a:latin typeface="微軟正黑體"/>
-              </a:rPr>
-              <a:t>「現成」＝ .sensai/sent.log 已有欄位，收回日誌直接統計即可。</a:t>
-            </a:r>
-          </a:p>
-        </p:txBody>
-      </p:sp>
-      <p:sp>
-        <p:nvSpPr>
-          <p:cNvPr id="35" name="Rectangle 34"/>
-          <p:cNvSpPr/>
-          <p:nvPr/>
-        </p:nvSpPr>
-        <p:spPr>
-          <a:xfrm>
-            <a:off x="6812280" y="2103120"/>
-            <a:ext cx="4818888" cy="3310128"/>
-          </a:xfrm>
-          <a:prstGeom prst="rect">
-            <a:avLst/>
-          </a:prstGeom>
-          <a:solidFill>
-            <a:srgbClr val="F2F5F8"/>
-          </a:solidFill>
-          <a:ln>
-            <a:noFill/>
-          </a:ln>
-          <a:effectLst/>
-        </p:spPr>
-        <p:style>
-          <a:lnRef idx="1">
-            <a:schemeClr val="accent1"/>
-          </a:lnRef>
-          <a:fillRef idx="3">
-            <a:schemeClr val="accent1"/>
-          </a:fillRef>
-          <a:effectRef idx="2">
-            <a:schemeClr val="accent1"/>
-          </a:effectRef>
-          <a:fontRef idx="minor">
-            <a:schemeClr val="lt1"/>
-          </a:fontRef>
-        </p:style>
-        <p:txBody>
-          <a:bodyPr rtlCol="0" anchor="ctr"/>
-          <a:lstStyle/>
-          <a:p>
-            <a:pPr algn="ctr"/>
-          </a:p>
-        </p:txBody>
-      </p:sp>
-      <p:sp>
-        <p:nvSpPr>
-          <p:cNvPr id="36" name="TextBox 35"/>
-          <p:cNvSpPr txBox="1"/>
-          <p:nvPr/>
-        </p:nvSpPr>
-        <p:spPr>
-          <a:xfrm>
-            <a:off x="7086600" y="2304288"/>
-            <a:ext cx="4270248" cy="3017520"/>
-          </a:xfrm>
-          <a:prstGeom prst="rect">
-            <a:avLst/>
-          </a:prstGeom>
-          <a:noFill/>
-        </p:spPr>
-        <p:txBody>
-          <a:bodyPr wrap="square" lIns="0" rIns="0" tIns="0" bIns="0" anchor="t">
-            <a:spAutoFit/>
-          </a:bodyPr>
-          <a:lstStyle/>
-          <a:p>
-            <a:pPr algn="l">
-              <a:spcBef>
-                <a:spcPts val="0"/>
-              </a:spcBef>
-              <a:spcAft>
-                <a:spcPts val="900"/>
-              </a:spcAft>
-            </a:pPr>
-            <a:r>
-              <a:rPr sz="1300" b="1">
-                <a:solidFill>
-                  <a:srgbClr val="119DA4"/>
-                </a:solidFill>
-                <a:latin typeface="微軟正黑體"/>
-              </a:rPr>
-              <a:t>關鍵：自動與手動要分開算</a:t>
-            </a:r>
-          </a:p>
-          <a:p>
-            <a:pPr>
-              <a:spcBef>
-                <a:spcPts val="0"/>
-              </a:spcBef>
-              <a:spcAft>
-                <a:spcPts val="300"/>
-              </a:spcAft>
-            </a:pPr>
-            <a:r>
-              <a:rPr sz="1200" b="1">
-                <a:solidFill>
-                  <a:srgbClr val="102A43"/>
-                </a:solidFill>
-                <a:latin typeface="微軟正黑體"/>
-              </a:rPr>
-              <a:t>自動觸發次數 ≈ 存檔次數</a:t>
-            </a:r>
-          </a:p>
-          <a:p>
-            <a:pPr>
-              <a:lnSpc>
-                <a:spcPct val="122000"/>
-              </a:lnSpc>
-              <a:spcBef>
-                <a:spcPts val="0"/>
-              </a:spcBef>
-              <a:spcAft>
-                <a:spcPts val="900"/>
-              </a:spcAft>
-            </a:pPr>
-            <a:r>
-              <a:rPr sz="1100" b="0">
-                <a:solidFill>
-                  <a:srgbClr val="1B2633"/>
-                </a:solidFill>
-                <a:latin typeface="微軟正黑體"/>
-              </a:rPr>
-              <a:t>反映的是開發活動頻繁程度，不是工具價值。總次數高，可能只代表那週改的東西多。</a:t>
-            </a:r>
-          </a:p>
-          <a:p>
-            <a:pPr>
-              <a:spcBef>
-                <a:spcPts val="0"/>
-              </a:spcBef>
-              <a:spcAft>
-                <a:spcPts val="300"/>
-              </a:spcAft>
-            </a:pPr>
-            <a:r>
-              <a:rPr sz="1200" b="1">
-                <a:solidFill>
-                  <a:srgbClr val="102A43"/>
-                </a:solidFill>
-                <a:latin typeface="微軟正黑體"/>
-              </a:rPr>
-              <a:t>手動觸發是主動行為</a:t>
-            </a:r>
-          </a:p>
-          <a:p>
-            <a:pPr>
-              <a:lnSpc>
-                <a:spcPct val="122000"/>
-              </a:lnSpc>
-              <a:spcBef>
-                <a:spcPts val="0"/>
-              </a:spcBef>
-              <a:spcAft>
-                <a:spcPts val="900"/>
-              </a:spcAft>
-            </a:pPr>
-            <a:r>
-              <a:rPr sz="1100" b="0">
-                <a:solidFill>
-                  <a:srgbClr val="1B2633"/>
-                </a:solidFill>
-                <a:latin typeface="微軟正黑體"/>
-              </a:rPr>
-              <a:t>沒有人會主動執行一個自己不信任的工具。手動佔比逐週上升，代表 sensAI 從背景雜訊變成會主動叫出來用的工具。</a:t>
-            </a:r>
-          </a:p>
-          <a:p>
-            <a:pPr>
-              <a:spcBef>
-                <a:spcPts val="0"/>
-              </a:spcBef>
-              <a:spcAft>
-                <a:spcPts val="300"/>
-              </a:spcAft>
-            </a:pPr>
-            <a:r>
-              <a:rPr sz="1200" b="1">
-                <a:solidFill>
-                  <a:srgbClr val="D18616"/>
-                </a:solidFill>
-                <a:latin typeface="微軟正黑體"/>
-              </a:rPr>
-              <a:t>差距只有一個欄位</a:t>
-            </a:r>
-          </a:p>
-          <a:p>
-            <a:pPr>
-              <a:lnSpc>
-                <a:spcPct val="122000"/>
-              </a:lnSpc>
-              <a:spcBef>
-                <a:spcPts val="0"/>
-              </a:spcBef>
-              <a:spcAft>
-                <a:spcPts val="900"/>
-              </a:spcAft>
-            </a:pPr>
-            <a:r>
-              <a:rPr sz="1100" b="0">
-                <a:solidFill>
-                  <a:srgbClr val="1B2633"/>
-                </a:solidFill>
-                <a:latin typeface="微軟正黑體"/>
-              </a:rPr>
-              <a:t>trigger 值（manual／save）程式內部已經有，只是沒寫進稽核日誌，補上即可統計。</a:t>
-            </a:r>
-          </a:p>
-          <a:p>
-            <a:pPr>
-              <a:lnSpc>
-                <a:spcPct val="122000"/>
-              </a:lnSpc>
-              <a:spcBef>
-                <a:spcPts val="0"/>
-              </a:spcBef>
-              <a:spcAft>
-                <a:spcPts val="0"/>
-              </a:spcAft>
-            </a:pPr>
-            <a:r>
-              <a:rPr sz="1050" b="0">
-                <a:solidFill>
-                  <a:srgbClr val="5B6B7B"/>
-                </a:solidFill>
-                <a:latin typeface="微軟正黑體"/>
-              </a:rPr>
-              <a:t>護欄：使用次數不可單獨當 KPI，須並列 p95 延遲與每人每週誤報數。</a:t>
-            </a:r>
-          </a:p>
-        </p:txBody>
-      </p:sp>
-      <p:sp>
-        <p:nvSpPr>
-          <p:cNvPr id="37" name="Rectangle 36"/>
+              <a:t>安裝數不等於活躍台數。每週仍在產生審查記錄的台數，需收回稽核日誌後才算得出。</a:t>
+            </a:r>
+          </a:p>
+        </p:txBody>
+      </p:sp>
+      <p:sp>
+        <p:nvSpPr>
+          <p:cNvPr id="30" name="Rectangle 29"/>
           <p:cNvSpPr/>
           <p:nvPr/>
         </p:nvSpPr>
@@ -9134,7 +8825,7 @@
       </p:sp>
       <p:sp>
         <p:nvSpPr>
-          <p:cNvPr id="38" name="TextBox 37"/>
+          <p:cNvPr id="31" name="TextBox 30"/>
           <p:cNvSpPr txBox="1"/>
           <p:nvPr/>
         </p:nvSpPr>
@@ -9169,7 +8860,7 @@
                 </a:solidFill>
                 <a:latin typeface="微軟正黑體"/>
               </a:rPr>
-              <a:t>試行 4 週的目標設定：週活躍人數、人均每週使用次數、手動觸發佔比逐週上升—— 三個數字都來自同一份稽核日誌。</a:t>
+              <a:t>下一個里程碑：試行專案全員部署 —— 目標是讓部署台數從「自己找到的人」變成「整個專案的標準配備」。</a:t>
             </a:r>
           </a:p>
         </p:txBody>
@@ -9661,7 +9352,7 @@
                 </a:solidFill>
                 <a:latin typeface="微軟正黑體"/>
               </a:rPr>
-              <a:t>・追蹤指標：週活躍人數、人均每週使用次數、手動觸發佔比</a:t>
+              <a:t>・追蹤指標：部署台數，以及每週仍在產生審查記錄的台數</a:t>
             </a:r>
           </a:p>
           <a:p>
@@ -9683,7 +9374,7 @@
                 </a:solidFill>
                 <a:latin typeface="微軟正黑體"/>
               </a:rPr>
-              <a:t>・資料全部來自稽核日誌，不需要任何人填表</a:t>
+              <a:t>・目標：試行專案全員部署，成為專案標準配備</a:t>
             </a:r>
           </a:p>
         </p:txBody>

--- a/docs/sensAI_報告.pptx
+++ b/docs/sensAI_報告.pptx
@@ -18,6 +18,7 @@
     <p:sldId id="266" r:id="rId17"/>
     <p:sldId id="267" r:id="rId18"/>
     <p:sldId id="268" r:id="rId19"/>
+    <p:sldId id="269" r:id="rId20"/>
   </p:sldIdLst>
   <p:sldSz cx="12191695" cy="6858000" type="screen4x3"/>
   <p:notesSz cx="6858000" cy="9144000"/>
@@ -3537,7 +3538,7 @@
                 </a:solidFill>
                 <a:latin typeface="微軟正黑體"/>
               </a:rPr>
-              <a:t>STATUS</a:t>
+              <a:t>TOKEN FOOTPRINT</a:t>
             </a:r>
           </a:p>
         </p:txBody>
@@ -3579,7 +3580,7 @@
                 </a:solidFill>
                 <a:latin typeface="微軟正黑體"/>
               </a:rPr>
-              <a:t>目前進度：已可使用，非概念驗證</a:t>
+              <a:t>單次審查的實際用量：為什麼適合地端模型</a:t>
             </a:r>
           </a:p>
         </p:txBody>
@@ -3714,14 +3715,573 @@
       </p:sp>
       <p:sp>
         <p:nvSpPr>
-          <p:cNvPr id="8" name="Rectangle 7"/>
+          <p:cNvPr id="8" name="TextBox 7"/>
+          <p:cNvSpPr txBox="1"/>
+          <p:nvPr/>
+        </p:nvSpPr>
+        <p:spPr>
+          <a:xfrm>
+            <a:off x="566928" y="1572768"/>
+            <a:ext cx="11064240" cy="365760"/>
+          </a:xfrm>
+          <a:prstGeom prst="rect">
+            <a:avLst/>
+          </a:prstGeom>
+          <a:noFill/>
+        </p:spPr>
+        <p:txBody>
+          <a:bodyPr wrap="square" lIns="0" rIns="0" tIns="0" bIns="0" anchor="t">
+            <a:spAutoFit/>
+          </a:bodyPr>
+          <a:lstStyle/>
+          <a:p>
+            <a:pPr algn="l">
+              <a:lnSpc>
+                <a:spcPct val="125000"/>
+              </a:lnSpc>
+              <a:spcBef>
+                <a:spcPts val="0"/>
+              </a:spcBef>
+              <a:spcAft>
+                <a:spcPts val="0"/>
+              </a:spcAft>
+            </a:pPr>
+            <a:r>
+              <a:rPr sz="1300" b="0">
+                <a:solidFill>
+                  <a:srgbClr val="1B2633"/>
+                </a:solidFill>
+                <a:latin typeface="微軟正黑體"/>
+              </a:rPr>
+              <a:t>以下 prompt 大小為實際產生後量測（npm run review -- &lt;檔案&gt; --show-prompt），非估計值。token 數以程式碼約 3.5〜4 bytes／token 換算。</a:t>
+            </a:r>
+          </a:p>
+        </p:txBody>
+      </p:sp>
+      <p:sp>
+        <p:nvSpPr>
+          <p:cNvPr id="9" name="Rectangle 8"/>
           <p:cNvSpPr/>
           <p:nvPr/>
         </p:nvSpPr>
         <p:spPr>
           <a:xfrm>
-            <a:off x="566928" y="1627632"/>
-            <a:ext cx="2651760" cy="1207008"/>
+            <a:off x="566928" y="2103120"/>
+            <a:ext cx="5989320" cy="3310128"/>
+          </a:xfrm>
+          <a:prstGeom prst="rect">
+            <a:avLst/>
+          </a:prstGeom>
+          <a:noFill/>
+          <a:ln w="12700">
+            <a:solidFill>
+              <a:srgbClr val="D8DFE6"/>
+            </a:solidFill>
+          </a:ln>
+          <a:effectLst/>
+        </p:spPr>
+        <p:style>
+          <a:lnRef idx="1">
+            <a:schemeClr val="accent1"/>
+          </a:lnRef>
+          <a:fillRef idx="3">
+            <a:schemeClr val="accent1"/>
+          </a:fillRef>
+          <a:effectRef idx="2">
+            <a:schemeClr val="accent1"/>
+          </a:effectRef>
+          <a:fontRef idx="minor">
+            <a:schemeClr val="lt1"/>
+          </a:fontRef>
+        </p:style>
+        <p:txBody>
+          <a:bodyPr rtlCol="0" anchor="ctr"/>
+          <a:lstStyle/>
+          <a:p>
+            <a:pPr algn="ctr"/>
+          </a:p>
+        </p:txBody>
+      </p:sp>
+      <p:sp>
+        <p:nvSpPr>
+          <p:cNvPr id="10" name="TextBox 9"/>
+          <p:cNvSpPr txBox="1"/>
+          <p:nvPr/>
+        </p:nvSpPr>
+        <p:spPr>
+          <a:xfrm>
+            <a:off x="841248" y="2286000"/>
+            <a:ext cx="5486400" cy="320040"/>
+          </a:xfrm>
+          <a:prstGeom prst="rect">
+            <a:avLst/>
+          </a:prstGeom>
+          <a:noFill/>
+        </p:spPr>
+        <p:txBody>
+          <a:bodyPr wrap="square" lIns="0" rIns="0" tIns="0" bIns="0" anchor="t">
+            <a:spAutoFit/>
+          </a:bodyPr>
+          <a:lstStyle/>
+          <a:p>
+            <a:pPr algn="l">
+              <a:spcBef>
+                <a:spcPts val="0"/>
+              </a:spcBef>
+              <a:spcAft>
+                <a:spcPts val="0"/>
+              </a:spcAft>
+            </a:pPr>
+            <a:r>
+              <a:rPr sz="1300" b="1">
+                <a:solidFill>
+                  <a:srgbClr val="119DA4"/>
+                </a:solidFill>
+                <a:latin typeface="微軟正黑體"/>
+              </a:rPr>
+              <a:t>單次請求的 prompt 大小（實測）</a:t>
+            </a:r>
+          </a:p>
+        </p:txBody>
+      </p:sp>
+      <p:sp>
+        <p:nvSpPr>
+          <p:cNvPr id="11" name="TextBox 10"/>
+          <p:cNvSpPr txBox="1"/>
+          <p:nvPr/>
+        </p:nvSpPr>
+        <p:spPr>
+          <a:xfrm>
+            <a:off x="969264" y="2670048"/>
+            <a:ext cx="2651760" cy="219456"/>
+          </a:xfrm>
+          <a:prstGeom prst="rect">
+            <a:avLst/>
+          </a:prstGeom>
+          <a:noFill/>
+        </p:spPr>
+        <p:txBody>
+          <a:bodyPr wrap="square" lIns="0" rIns="0" tIns="0" bIns="0" anchor="t">
+            <a:spAutoFit/>
+          </a:bodyPr>
+          <a:lstStyle/>
+          <a:p>
+            <a:pPr algn="l">
+              <a:spcBef>
+                <a:spcPts val="0"/>
+              </a:spcBef>
+              <a:spcAft>
+                <a:spcPts val="0"/>
+              </a:spcAft>
+            </a:pPr>
+            <a:r>
+              <a:rPr sz="1050" b="1">
+                <a:solidFill>
+                  <a:srgbClr val="5B6B7B"/>
+                </a:solidFill>
+                <a:latin typeface="微軟正黑體"/>
+              </a:rPr>
+              <a:t>情境</a:t>
+            </a:r>
+          </a:p>
+        </p:txBody>
+      </p:sp>
+      <p:sp>
+        <p:nvSpPr>
+          <p:cNvPr id="12" name="TextBox 11"/>
+          <p:cNvSpPr txBox="1"/>
+          <p:nvPr/>
+        </p:nvSpPr>
+        <p:spPr>
+          <a:xfrm>
+            <a:off x="3749039" y="2670048"/>
+            <a:ext cx="1188720" cy="219456"/>
+          </a:xfrm>
+          <a:prstGeom prst="rect">
+            <a:avLst/>
+          </a:prstGeom>
+          <a:noFill/>
+        </p:spPr>
+        <p:txBody>
+          <a:bodyPr wrap="square" lIns="0" rIns="0" tIns="0" bIns="0" anchor="t">
+            <a:spAutoFit/>
+          </a:bodyPr>
+          <a:lstStyle/>
+          <a:p>
+            <a:pPr algn="r">
+              <a:spcBef>
+                <a:spcPts val="0"/>
+              </a:spcBef>
+              <a:spcAft>
+                <a:spcPts val="0"/>
+              </a:spcAft>
+            </a:pPr>
+            <a:r>
+              <a:rPr sz="1050" b="1">
+                <a:solidFill>
+                  <a:srgbClr val="5B6B7B"/>
+                </a:solidFill>
+                <a:latin typeface="微軟正黑體"/>
+              </a:rPr>
+              <a:t>bytes</a:t>
+            </a:r>
+          </a:p>
+        </p:txBody>
+      </p:sp>
+      <p:sp>
+        <p:nvSpPr>
+          <p:cNvPr id="13" name="TextBox 12"/>
+          <p:cNvSpPr txBox="1"/>
+          <p:nvPr/>
+        </p:nvSpPr>
+        <p:spPr>
+          <a:xfrm>
+            <a:off x="5074920" y="2670048"/>
+            <a:ext cx="1188720" cy="219456"/>
+          </a:xfrm>
+          <a:prstGeom prst="rect">
+            <a:avLst/>
+          </a:prstGeom>
+          <a:noFill/>
+        </p:spPr>
+        <p:txBody>
+          <a:bodyPr wrap="square" lIns="0" rIns="0" tIns="0" bIns="0" anchor="t">
+            <a:spAutoFit/>
+          </a:bodyPr>
+          <a:lstStyle/>
+          <a:p>
+            <a:pPr algn="r">
+              <a:spcBef>
+                <a:spcPts val="0"/>
+              </a:spcBef>
+              <a:spcAft>
+                <a:spcPts val="0"/>
+              </a:spcAft>
+            </a:pPr>
+            <a:r>
+              <a:rPr sz="1050" b="1">
+                <a:solidFill>
+                  <a:srgbClr val="5B6B7B"/>
+                </a:solidFill>
+                <a:latin typeface="微軟正黑體"/>
+              </a:rPr>
+              <a:t>≈ tokens</a:t>
+            </a:r>
+          </a:p>
+        </p:txBody>
+      </p:sp>
+      <p:sp>
+        <p:nvSpPr>
+          <p:cNvPr id="14" name="Rectangle 13"/>
+          <p:cNvSpPr/>
+          <p:nvPr/>
+        </p:nvSpPr>
+        <p:spPr>
+          <a:xfrm>
+            <a:off x="969264" y="2926080"/>
+            <a:ext cx="5303520" cy="9525"/>
+          </a:xfrm>
+          <a:prstGeom prst="rect">
+            <a:avLst/>
+          </a:prstGeom>
+          <a:solidFill>
+            <a:srgbClr val="D8DFE6"/>
+          </a:solidFill>
+          <a:ln>
+            <a:noFill/>
+          </a:ln>
+          <a:effectLst/>
+        </p:spPr>
+        <p:style>
+          <a:lnRef idx="1">
+            <a:schemeClr val="accent1"/>
+          </a:lnRef>
+          <a:fillRef idx="3">
+            <a:schemeClr val="accent1"/>
+          </a:fillRef>
+          <a:effectRef idx="2">
+            <a:schemeClr val="accent1"/>
+          </a:effectRef>
+          <a:fontRef idx="minor">
+            <a:schemeClr val="lt1"/>
+          </a:fontRef>
+        </p:style>
+        <p:txBody>
+          <a:bodyPr rtlCol="0" anchor="ctr"/>
+          <a:lstStyle/>
+          <a:p>
+            <a:pPr algn="ctr"/>
+          </a:p>
+        </p:txBody>
+      </p:sp>
+      <p:sp>
+        <p:nvSpPr>
+          <p:cNvPr id="15" name="TextBox 14"/>
+          <p:cNvSpPr txBox="1"/>
+          <p:nvPr/>
+        </p:nvSpPr>
+        <p:spPr>
+          <a:xfrm>
+            <a:off x="969264" y="3063240"/>
+            <a:ext cx="2697480" cy="402336"/>
+          </a:xfrm>
+          <a:prstGeom prst="rect">
+            <a:avLst/>
+          </a:prstGeom>
+          <a:noFill/>
+        </p:spPr>
+        <p:txBody>
+          <a:bodyPr wrap="square" lIns="0" rIns="0" tIns="0" bIns="0" anchor="t">
+            <a:spAutoFit/>
+          </a:bodyPr>
+          <a:lstStyle/>
+          <a:p>
+            <a:pPr algn="l">
+              <a:lnSpc>
+                <a:spcPct val="118000"/>
+              </a:lnSpc>
+              <a:spcBef>
+                <a:spcPts val="0"/>
+              </a:spcBef>
+              <a:spcAft>
+                <a:spcPts val="0"/>
+              </a:spcAft>
+            </a:pPr>
+            <a:r>
+              <a:rPr sz="1150" b="0">
+                <a:solidFill>
+                  <a:srgbClr val="1B2633"/>
+                </a:solidFill>
+                <a:latin typeface="微軟正黑體"/>
+              </a:rPr>
+              <a:t>C 檔（uart_dma.c ＋ 1 header ＋ 10 條規則）</a:t>
+            </a:r>
+          </a:p>
+        </p:txBody>
+      </p:sp>
+      <p:sp>
+        <p:nvSpPr>
+          <p:cNvPr id="16" name="TextBox 15"/>
+          <p:cNvSpPr txBox="1"/>
+          <p:nvPr/>
+        </p:nvSpPr>
+        <p:spPr>
+          <a:xfrm>
+            <a:off x="3749039" y="3081528"/>
+            <a:ext cx="1188720" cy="274320"/>
+          </a:xfrm>
+          <a:prstGeom prst="rect">
+            <a:avLst/>
+          </a:prstGeom>
+          <a:noFill/>
+        </p:spPr>
+        <p:txBody>
+          <a:bodyPr wrap="square" lIns="0" rIns="0" tIns="0" bIns="0" anchor="t">
+            <a:spAutoFit/>
+          </a:bodyPr>
+          <a:lstStyle/>
+          <a:p>
+            <a:pPr algn="r">
+              <a:spcBef>
+                <a:spcPts val="0"/>
+              </a:spcBef>
+              <a:spcAft>
+                <a:spcPts val="0"/>
+              </a:spcAft>
+            </a:pPr>
+            <a:r>
+              <a:rPr sz="1250" b="1">
+                <a:solidFill>
+                  <a:srgbClr val="102A43"/>
+                </a:solidFill>
+                <a:latin typeface="微軟正黑體"/>
+              </a:rPr>
+              <a:t>20,142</a:t>
+            </a:r>
+          </a:p>
+        </p:txBody>
+      </p:sp>
+      <p:sp>
+        <p:nvSpPr>
+          <p:cNvPr id="17" name="TextBox 16"/>
+          <p:cNvSpPr txBox="1"/>
+          <p:nvPr/>
+        </p:nvSpPr>
+        <p:spPr>
+          <a:xfrm>
+            <a:off x="5074920" y="3081528"/>
+            <a:ext cx="1188720" cy="274320"/>
+          </a:xfrm>
+          <a:prstGeom prst="rect">
+            <a:avLst/>
+          </a:prstGeom>
+          <a:noFill/>
+        </p:spPr>
+        <p:txBody>
+          <a:bodyPr wrap="square" lIns="0" rIns="0" tIns="0" bIns="0" anchor="t">
+            <a:spAutoFit/>
+          </a:bodyPr>
+          <a:lstStyle/>
+          <a:p>
+            <a:pPr algn="r">
+              <a:spcBef>
+                <a:spcPts val="0"/>
+              </a:spcBef>
+              <a:spcAft>
+                <a:spcPts val="0"/>
+              </a:spcAft>
+            </a:pPr>
+            <a:r>
+              <a:rPr sz="1250" b="1">
+                <a:solidFill>
+                  <a:srgbClr val="102A43"/>
+                </a:solidFill>
+                <a:latin typeface="微軟正黑體"/>
+              </a:rPr>
+              <a:t>5.0k〜5.8k</a:t>
+            </a:r>
+          </a:p>
+        </p:txBody>
+      </p:sp>
+      <p:sp>
+        <p:nvSpPr>
+          <p:cNvPr id="18" name="TextBox 17"/>
+          <p:cNvSpPr txBox="1"/>
+          <p:nvPr/>
+        </p:nvSpPr>
+        <p:spPr>
+          <a:xfrm>
+            <a:off x="969264" y="3611880"/>
+            <a:ext cx="2697480" cy="402336"/>
+          </a:xfrm>
+          <a:prstGeom prst="rect">
+            <a:avLst/>
+          </a:prstGeom>
+          <a:noFill/>
+        </p:spPr>
+        <p:txBody>
+          <a:bodyPr wrap="square" lIns="0" rIns="0" tIns="0" bIns="0" anchor="t">
+            <a:spAutoFit/>
+          </a:bodyPr>
+          <a:lstStyle/>
+          <a:p>
+            <a:pPr algn="l">
+              <a:lnSpc>
+                <a:spcPct val="118000"/>
+              </a:lnSpc>
+              <a:spcBef>
+                <a:spcPts val="0"/>
+              </a:spcBef>
+              <a:spcAft>
+                <a:spcPts val="0"/>
+              </a:spcAft>
+            </a:pPr>
+            <a:r>
+              <a:rPr sz="1150" b="0">
+                <a:solidFill>
+                  <a:srgbClr val="1B2633"/>
+                </a:solidFill>
+                <a:latin typeface="微軟正黑體"/>
+              </a:rPr>
+              <a:t>組語檔（uart_dma.s ＋ 內建 ABI 事實）</a:t>
+            </a:r>
+          </a:p>
+        </p:txBody>
+      </p:sp>
+      <p:sp>
+        <p:nvSpPr>
+          <p:cNvPr id="19" name="TextBox 18"/>
+          <p:cNvSpPr txBox="1"/>
+          <p:nvPr/>
+        </p:nvSpPr>
+        <p:spPr>
+          <a:xfrm>
+            <a:off x="3749039" y="3630168"/>
+            <a:ext cx="1188720" cy="274320"/>
+          </a:xfrm>
+          <a:prstGeom prst="rect">
+            <a:avLst/>
+          </a:prstGeom>
+          <a:noFill/>
+        </p:spPr>
+        <p:txBody>
+          <a:bodyPr wrap="square" lIns="0" rIns="0" tIns="0" bIns="0" anchor="t">
+            <a:spAutoFit/>
+          </a:bodyPr>
+          <a:lstStyle/>
+          <a:p>
+            <a:pPr algn="r">
+              <a:spcBef>
+                <a:spcPts val="0"/>
+              </a:spcBef>
+              <a:spcAft>
+                <a:spcPts val="0"/>
+              </a:spcAft>
+            </a:pPr>
+            <a:r>
+              <a:rPr sz="1250" b="1">
+                <a:solidFill>
+                  <a:srgbClr val="102A43"/>
+                </a:solidFill>
+                <a:latin typeface="微軟正黑體"/>
+              </a:rPr>
+              <a:t>12,254</a:t>
+            </a:r>
+          </a:p>
+        </p:txBody>
+      </p:sp>
+      <p:sp>
+        <p:nvSpPr>
+          <p:cNvPr id="20" name="TextBox 19"/>
+          <p:cNvSpPr txBox="1"/>
+          <p:nvPr/>
+        </p:nvSpPr>
+        <p:spPr>
+          <a:xfrm>
+            <a:off x="5074920" y="3630168"/>
+            <a:ext cx="1188720" cy="274320"/>
+          </a:xfrm>
+          <a:prstGeom prst="rect">
+            <a:avLst/>
+          </a:prstGeom>
+          <a:noFill/>
+        </p:spPr>
+        <p:txBody>
+          <a:bodyPr wrap="square" lIns="0" rIns="0" tIns="0" bIns="0" anchor="t">
+            <a:spAutoFit/>
+          </a:bodyPr>
+          <a:lstStyle/>
+          <a:p>
+            <a:pPr algn="r">
+              <a:spcBef>
+                <a:spcPts val="0"/>
+              </a:spcBef>
+              <a:spcAft>
+                <a:spcPts val="0"/>
+              </a:spcAft>
+            </a:pPr>
+            <a:r>
+              <a:rPr sz="1250" b="1">
+                <a:solidFill>
+                  <a:srgbClr val="102A43"/>
+                </a:solidFill>
+                <a:latin typeface="微軟正黑體"/>
+              </a:rPr>
+              <a:t>3.1k〜3.5k</a:t>
+            </a:r>
+          </a:p>
+        </p:txBody>
+      </p:sp>
+      <p:sp>
+        <p:nvSpPr>
+          <p:cNvPr id="21" name="Rectangle 20"/>
+          <p:cNvSpPr/>
+          <p:nvPr/>
+        </p:nvSpPr>
+        <p:spPr>
+          <a:xfrm>
+            <a:off x="969264" y="4096512"/>
+            <a:ext cx="5303520" cy="475488"/>
           </a:xfrm>
           <a:prstGeom prst="rect">
             <a:avLst/>
@@ -3758,20 +4318,149 @@
       </p:sp>
       <p:sp>
         <p:nvSpPr>
-          <p:cNvPr id="9" name="Rectangle 8"/>
+          <p:cNvPr id="22" name="TextBox 21"/>
+          <p:cNvSpPr txBox="1"/>
+          <p:nvPr/>
+        </p:nvSpPr>
+        <p:spPr>
+          <a:xfrm>
+            <a:off x="969264" y="4160520"/>
+            <a:ext cx="2697480" cy="402336"/>
+          </a:xfrm>
+          <a:prstGeom prst="rect">
+            <a:avLst/>
+          </a:prstGeom>
+          <a:noFill/>
+        </p:spPr>
+        <p:txBody>
+          <a:bodyPr wrap="square" lIns="0" rIns="0" tIns="0" bIns="0" anchor="t">
+            <a:spAutoFit/>
+          </a:bodyPr>
+          <a:lstStyle/>
+          <a:p>
+            <a:pPr algn="l">
+              <a:lnSpc>
+                <a:spcPct val="118000"/>
+              </a:lnSpc>
+              <a:spcBef>
+                <a:spcPts val="0"/>
+              </a:spcBef>
+              <a:spcAft>
+                <a:spcPts val="0"/>
+              </a:spcAft>
+            </a:pPr>
+            <a:r>
+              <a:rPr sz="1150" b="1">
+                <a:solidFill>
+                  <a:srgbClr val="102A43"/>
+                </a:solidFill>
+                <a:latin typeface="微軟正黑體"/>
+              </a:rPr>
+              <a:t>上下文預算滿載（硬上限）</a:t>
+            </a:r>
+          </a:p>
+        </p:txBody>
+      </p:sp>
+      <p:sp>
+        <p:nvSpPr>
+          <p:cNvPr id="23" name="TextBox 22"/>
+          <p:cNvSpPr txBox="1"/>
+          <p:nvPr/>
+        </p:nvSpPr>
+        <p:spPr>
+          <a:xfrm>
+            <a:off x="3749039" y="4178808"/>
+            <a:ext cx="1188720" cy="274320"/>
+          </a:xfrm>
+          <a:prstGeom prst="rect">
+            <a:avLst/>
+          </a:prstGeom>
+          <a:noFill/>
+        </p:spPr>
+        <p:txBody>
+          <a:bodyPr wrap="square" lIns="0" rIns="0" tIns="0" bIns="0" anchor="t">
+            <a:spAutoFit/>
+          </a:bodyPr>
+          <a:lstStyle/>
+          <a:p>
+            <a:pPr algn="r">
+              <a:spcBef>
+                <a:spcPts val="0"/>
+              </a:spcBef>
+              <a:spcAft>
+                <a:spcPts val="0"/>
+              </a:spcAft>
+            </a:pPr>
+            <a:r>
+              <a:rPr sz="1250" b="1">
+                <a:solidFill>
+                  <a:srgbClr val="D18616"/>
+                </a:solidFill>
+                <a:latin typeface="微軟正黑體"/>
+              </a:rPr>
+              <a:t>145,654</a:t>
+            </a:r>
+          </a:p>
+        </p:txBody>
+      </p:sp>
+      <p:sp>
+        <p:nvSpPr>
+          <p:cNvPr id="24" name="TextBox 23"/>
+          <p:cNvSpPr txBox="1"/>
+          <p:nvPr/>
+        </p:nvSpPr>
+        <p:spPr>
+          <a:xfrm>
+            <a:off x="5074920" y="4178808"/>
+            <a:ext cx="1188720" cy="274320"/>
+          </a:xfrm>
+          <a:prstGeom prst="rect">
+            <a:avLst/>
+          </a:prstGeom>
+          <a:noFill/>
+        </p:spPr>
+        <p:txBody>
+          <a:bodyPr wrap="square" lIns="0" rIns="0" tIns="0" bIns="0" anchor="t">
+            <a:spAutoFit/>
+          </a:bodyPr>
+          <a:lstStyle/>
+          <a:p>
+            <a:pPr algn="r">
+              <a:spcBef>
+                <a:spcPts val="0"/>
+              </a:spcBef>
+              <a:spcAft>
+                <a:spcPts val="0"/>
+              </a:spcAft>
+            </a:pPr>
+            <a:r>
+              <a:rPr sz="1250" b="1">
+                <a:solidFill>
+                  <a:srgbClr val="D18616"/>
+                </a:solidFill>
+                <a:latin typeface="微軟正黑體"/>
+              </a:rPr>
+              <a:t>36k〜42k</a:t>
+            </a:r>
+          </a:p>
+        </p:txBody>
+      </p:sp>
+      <p:sp>
+        <p:nvSpPr>
+          <p:cNvPr id="25" name="Rectangle 24"/>
           <p:cNvSpPr/>
           <p:nvPr/>
         </p:nvSpPr>
         <p:spPr>
           <a:xfrm>
-            <a:off x="566928" y="1627632"/>
-            <a:ext cx="34290" cy="1207008"/>
+            <a:off x="969264" y="4736592"/>
+            <a:ext cx="5303520" cy="566928"/>
           </a:xfrm>
           <a:prstGeom prst="rect">
             <a:avLst/>
           </a:prstGeom>
           <a:solidFill>
-            <a:srgbClr val="119DA4"/>
+            <a:srgbClr val="102A43"/>
           </a:solidFill>
           <a:ln>
             <a:noFill/>
@@ -3802,14 +4491,14 @@
       </p:sp>
       <p:sp>
         <p:nvSpPr>
-          <p:cNvPr id="10" name="TextBox 9"/>
-          <p:cNvSpPr txBox="1"/>
-          <p:nvPr/>
-        </p:nvSpPr>
-        <p:spPr>
-          <a:xfrm>
-            <a:off x="768096" y="1755648"/>
-            <a:ext cx="2340864" cy="475488"/>
+          <p:cNvPr id="26" name="TextBox 25"/>
+          <p:cNvSpPr txBox="1"/>
+          <p:nvPr/>
+        </p:nvSpPr>
+        <p:spPr>
+          <a:xfrm>
+            <a:off x="1152144" y="4846320"/>
+            <a:ext cx="4937760" cy="384048"/>
           </a:xfrm>
           <a:prstGeom prst="rect">
             <a:avLst/>
@@ -3823,96 +4512,38 @@
           <a:lstStyle/>
           <a:p>
             <a:pPr algn="l">
-              <a:spcBef>
-                <a:spcPts val="0"/>
-              </a:spcBef>
-              <a:spcAft>
-                <a:spcPts val="0"/>
-              </a:spcAft>
-            </a:pPr>
-            <a:r>
-              <a:rPr sz="3000" b="1">
-                <a:solidFill>
-                  <a:srgbClr val="102A43"/>
-                </a:solidFill>
-                <a:latin typeface="微軟正黑體"/>
-              </a:rPr>
-              <a:t>14 天</a:t>
-            </a:r>
-          </a:p>
-        </p:txBody>
-      </p:sp>
-      <p:sp>
-        <p:nvSpPr>
-          <p:cNvPr id="11" name="TextBox 10"/>
-          <p:cNvSpPr txBox="1"/>
-          <p:nvPr/>
-        </p:nvSpPr>
-        <p:spPr>
-          <a:xfrm>
-            <a:off x="768096" y="2249424"/>
-            <a:ext cx="2340864" cy="502920"/>
-          </a:xfrm>
-          <a:prstGeom prst="rect">
-            <a:avLst/>
-          </a:prstGeom>
-          <a:noFill/>
-        </p:spPr>
-        <p:txBody>
-          <a:bodyPr wrap="square" lIns="0" rIns="0" tIns="0" bIns="0" anchor="t">
-            <a:spAutoFit/>
-          </a:bodyPr>
-          <a:lstStyle/>
-          <a:p>
-            <a:pPr algn="l">
-              <a:spcBef>
-                <a:spcPts val="0"/>
-              </a:spcBef>
-              <a:spcAft>
-                <a:spcPts val="200"/>
-              </a:spcAft>
-            </a:pPr>
-            <a:r>
-              <a:rPr sz="1300" b="1">
-                <a:solidFill>
-                  <a:srgbClr val="1B2633"/>
-                </a:solidFill>
-                <a:latin typeface="微軟正黑體"/>
-              </a:rPr>
-              <a:t>從構想到可用版本</a:t>
-            </a:r>
-          </a:p>
-          <a:p>
-            <a:pPr>
-              <a:spcBef>
-                <a:spcPts val="0"/>
-              </a:spcBef>
-              <a:spcAft>
-                <a:spcPts val="0"/>
-              </a:spcAft>
-            </a:pPr>
-            <a:r>
-              <a:rPr sz="1050" b="0">
-                <a:solidFill>
-                  <a:srgbClr val="5B6B7B"/>
-                </a:solidFill>
-                <a:latin typeface="微軟正黑體"/>
-              </a:rPr>
-              <a:t>2026/08/22 → 09/04　45 次提交</a:t>
-            </a:r>
-          </a:p>
-        </p:txBody>
-      </p:sp>
-      <p:sp>
-        <p:nvSpPr>
-          <p:cNvPr id="12" name="Rectangle 11"/>
+              <a:lnSpc>
+                <a:spcPct val="120000"/>
+              </a:lnSpc>
+              <a:spcBef>
+                <a:spcPts val="0"/>
+              </a:spcBef>
+              <a:spcAft>
+                <a:spcPts val="0"/>
+              </a:spcAft>
+            </a:pPr>
+            <a:r>
+              <a:rPr sz="1200" b="1">
+                <a:solidFill>
+                  <a:srgbClr val="FFFFFF"/>
+                </a:solidFill>
+                <a:latin typeface="微軟正黑體"/>
+              </a:rPr>
+              <a:t>每次審查送出 1〜2 個請求（兩階段）；連續存檔期間降為 1 個。</a:t>
+            </a:r>
+          </a:p>
+        </p:txBody>
+      </p:sp>
+      <p:sp>
+        <p:nvSpPr>
+          <p:cNvPr id="27" name="Rectangle 26"/>
           <p:cNvSpPr/>
           <p:nvPr/>
         </p:nvSpPr>
         <p:spPr>
           <a:xfrm>
-            <a:off x="3401568" y="1627632"/>
-            <a:ext cx="2651760" cy="1207008"/>
+            <a:off x="6812280" y="2103120"/>
+            <a:ext cx="4818888" cy="3310128"/>
           </a:xfrm>
           <a:prstGeom prst="rect">
             <a:avLst/>
@@ -3949,20 +4580,226 @@
       </p:sp>
       <p:sp>
         <p:nvSpPr>
-          <p:cNvPr id="13" name="Rectangle 12"/>
+          <p:cNvPr id="28" name="TextBox 27"/>
+          <p:cNvSpPr txBox="1"/>
+          <p:nvPr/>
+        </p:nvSpPr>
+        <p:spPr>
+          <a:xfrm>
+            <a:off x="7086600" y="2304288"/>
+            <a:ext cx="4270248" cy="3017520"/>
+          </a:xfrm>
+          <a:prstGeom prst="rect">
+            <a:avLst/>
+          </a:prstGeom>
+          <a:noFill/>
+        </p:spPr>
+        <p:txBody>
+          <a:bodyPr wrap="square" lIns="0" rIns="0" tIns="0" bIns="0" anchor="t">
+            <a:spAutoFit/>
+          </a:bodyPr>
+          <a:lstStyle/>
+          <a:p>
+            <a:pPr algn="l">
+              <a:spcBef>
+                <a:spcPts val="0"/>
+              </a:spcBef>
+              <a:spcAft>
+                <a:spcPts val="1000"/>
+              </a:spcAft>
+            </a:pPr>
+            <a:r>
+              <a:rPr sz="1300" b="1">
+                <a:solidFill>
+                  <a:srgbClr val="119DA4"/>
+                </a:solidFill>
+                <a:latin typeface="微軟正黑體"/>
+              </a:rPr>
+              <a:t>為什麼這個形狀適合地端模型</a:t>
+            </a:r>
+          </a:p>
+          <a:p>
+            <a:pPr>
+              <a:spcBef>
+                <a:spcPts val="0"/>
+              </a:spcBef>
+              <a:spcAft>
+                <a:spcPts val="300"/>
+              </a:spcAft>
+            </a:pPr>
+            <a:r>
+              <a:rPr sz="1200" b="1">
+                <a:solidFill>
+                  <a:srgbClr val="102A43"/>
+                </a:solidFill>
+                <a:latin typeface="微軟正黑體"/>
+              </a:rPr>
+              <a:t>上界是設定值，不是期望值</a:t>
+            </a:r>
+          </a:p>
+          <a:p>
+            <a:pPr>
+              <a:lnSpc>
+                <a:spcPct val="122000"/>
+              </a:lnSpc>
+              <a:spcBef>
+                <a:spcPts val="0"/>
+              </a:spcBef>
+              <a:spcAft>
+                <a:spcPts val="0"/>
+              </a:spcAft>
+            </a:pPr>
+            <a:r>
+              <a:rPr sz="1050" b="0">
+                <a:solidFill>
+                  <a:srgbClr val="1B2633"/>
+                </a:solidFill>
+                <a:latin typeface="微軟正黑體"/>
+              </a:rPr>
+              <a:t>contextBudgetBytes 預設 120 KB 是硬上限，超過就截斷。單次請求的最大值可事先算出 —— 地端 GPU 的 context window 與顯存據此規劃即可。</a:t>
+            </a:r>
+          </a:p>
+          <a:p>
+            <a:pPr>
+              <a:spcBef>
+                <a:spcPts val="900"/>
+              </a:spcBef>
+              <a:spcAft>
+                <a:spcPts val="300"/>
+              </a:spcAft>
+            </a:pPr>
+            <a:r>
+              <a:rPr sz="1200" b="1">
+                <a:solidFill>
+                  <a:srgbClr val="102A43"/>
+                </a:solidFill>
+                <a:latin typeface="微軟正黑體"/>
+              </a:rPr>
+              <a:t>單輪請求，沒有 agentic 迴圈</a:t>
+            </a:r>
+          </a:p>
+          <a:p>
+            <a:pPr>
+              <a:lnSpc>
+                <a:spcPct val="122000"/>
+              </a:lnSpc>
+              <a:spcBef>
+                <a:spcPts val="0"/>
+              </a:spcBef>
+              <a:spcAft>
+                <a:spcPts val="0"/>
+              </a:spcAft>
+            </a:pPr>
+            <a:r>
+              <a:rPr sz="1050" b="0">
+                <a:solidFill>
+                  <a:srgbClr val="1B2633"/>
+                </a:solidFill>
+                <a:latin typeface="微軟正黑體"/>
+              </a:rPr>
+              <a:t>一次請求換一個回答。沒有 tool use 多輪探索把 token 一層層疊上去，也就沒有「這次特別貴」的意外。</a:t>
+            </a:r>
+          </a:p>
+          <a:p>
+            <a:pPr>
+              <a:spcBef>
+                <a:spcPts val="900"/>
+              </a:spcBef>
+              <a:spcAft>
+                <a:spcPts val="300"/>
+              </a:spcAft>
+            </a:pPr>
+            <a:r>
+              <a:rPr sz="1200" b="1">
+                <a:solidFill>
+                  <a:srgbClr val="102A43"/>
+                </a:solidFill>
+                <a:latin typeface="微軟正黑體"/>
+              </a:rPr>
+              <a:t>不做全庫檢索</a:t>
+            </a:r>
+          </a:p>
+          <a:p>
+            <a:pPr>
+              <a:lnSpc>
+                <a:spcPct val="122000"/>
+              </a:lnSpc>
+              <a:spcBef>
+                <a:spcPts val="0"/>
+              </a:spcBef>
+              <a:spcAft>
+                <a:spcPts val="0"/>
+              </a:spcAft>
+            </a:pPr>
+            <a:r>
+              <a:rPr sz="1050" b="0">
+                <a:solidFill>
+                  <a:srgbClr val="1B2633"/>
+                </a:solidFill>
+                <a:latin typeface="微軟正黑體"/>
+              </a:rPr>
+              <a:t>只帶當前檔案與它 #include 到的專案 header。不需要向量資料庫、不需要全庫索引、不需要 build system 整合。</a:t>
+            </a:r>
+          </a:p>
+          <a:p>
+            <a:pPr>
+              <a:spcBef>
+                <a:spcPts val="900"/>
+              </a:spcBef>
+              <a:spcAft>
+                <a:spcPts val="300"/>
+              </a:spcAft>
+            </a:pPr>
+            <a:r>
+              <a:rPr sz="1200" b="1">
+                <a:solidFill>
+                  <a:srgbClr val="102A43"/>
+                </a:solidFill>
+                <a:latin typeface="微軟正黑體"/>
+              </a:rPr>
+              <a:t>負載隨存檔次數成長，不隨 repo 大小成長</a:t>
+            </a:r>
+          </a:p>
+          <a:p>
+            <a:pPr>
+              <a:lnSpc>
+                <a:spcPct val="122000"/>
+              </a:lnSpc>
+              <a:spcBef>
+                <a:spcPts val="0"/>
+              </a:spcBef>
+              <a:spcAft>
+                <a:spcPts val="0"/>
+              </a:spcAft>
+            </a:pPr>
+            <a:r>
+              <a:rPr sz="1050" b="0">
+                <a:solidFill>
+                  <a:srgbClr val="1B2633"/>
+                </a:solidFill>
+                <a:latin typeface="微軟正黑體"/>
+              </a:rPr>
+              <a:t>百萬行的專案與一萬行的專案，單次請求大小相同。容量規劃因此可行。</a:t>
+            </a:r>
+          </a:p>
+        </p:txBody>
+      </p:sp>
+      <p:sp>
+        <p:nvSpPr>
+          <p:cNvPr id="29" name="Rectangle 28"/>
           <p:cNvSpPr/>
           <p:nvPr/>
         </p:nvSpPr>
         <p:spPr>
           <a:xfrm>
-            <a:off x="3401568" y="1627632"/>
-            <a:ext cx="34290" cy="1207008"/>
+            <a:off x="566928" y="5559552"/>
+            <a:ext cx="11064240" cy="621792"/>
           </a:xfrm>
           <a:prstGeom prst="rect">
             <a:avLst/>
           </a:prstGeom>
           <a:solidFill>
-            <a:srgbClr val="119DA4"/>
+            <a:srgbClr val="102A43"/>
           </a:solidFill>
           <a:ln>
             <a:noFill/>
@@ -3993,14 +4830,14 @@
       </p:sp>
       <p:sp>
         <p:nvSpPr>
-          <p:cNvPr id="14" name="TextBox 13"/>
-          <p:cNvSpPr txBox="1"/>
-          <p:nvPr/>
-        </p:nvSpPr>
-        <p:spPr>
-          <a:xfrm>
-            <a:off x="3602736" y="1755648"/>
-            <a:ext cx="2340864" cy="475488"/>
+          <p:cNvPr id="30" name="TextBox 29"/>
+          <p:cNvSpPr txBox="1"/>
+          <p:nvPr/>
+        </p:nvSpPr>
+        <p:spPr>
+          <a:xfrm>
+            <a:off x="868680" y="5669280"/>
+            <a:ext cx="10515600" cy="420624"/>
           </a:xfrm>
           <a:prstGeom prst="rect">
             <a:avLst/>
@@ -4022,782 +4859,13 @@
               </a:spcAft>
             </a:pPr>
             <a:r>
-              <a:rPr sz="3000" b="1">
-                <a:solidFill>
-                  <a:srgbClr val="102A43"/>
-                </a:solidFill>
-                <a:latin typeface="微軟正黑體"/>
-              </a:rPr>
-              <a:t>3,603 行</a:t>
-            </a:r>
-          </a:p>
-        </p:txBody>
-      </p:sp>
-      <p:sp>
-        <p:nvSpPr>
-          <p:cNvPr id="15" name="TextBox 14"/>
-          <p:cNvSpPr txBox="1"/>
-          <p:nvPr/>
-        </p:nvSpPr>
-        <p:spPr>
-          <a:xfrm>
-            <a:off x="3602736" y="2249424"/>
-            <a:ext cx="2340864" cy="502920"/>
-          </a:xfrm>
-          <a:prstGeom prst="rect">
-            <a:avLst/>
-          </a:prstGeom>
-          <a:noFill/>
-        </p:spPr>
-        <p:txBody>
-          <a:bodyPr wrap="square" lIns="0" rIns="0" tIns="0" bIns="0" anchor="t">
-            <a:spAutoFit/>
-          </a:bodyPr>
-          <a:lstStyle/>
-          <a:p>
-            <a:pPr algn="l">
-              <a:spcBef>
-                <a:spcPts val="0"/>
-              </a:spcBef>
-              <a:spcAft>
-                <a:spcPts val="200"/>
-              </a:spcAft>
-            </a:pPr>
-            <a:r>
               <a:rPr sz="1300" b="1">
                 <a:solidFill>
-                  <a:srgbClr val="1B2633"/>
-                </a:solidFill>
-                <a:latin typeface="微軟正黑體"/>
-              </a:rPr>
-              <a:t>TypeScript　19 個模組</a:t>
-            </a:r>
-          </a:p>
-          <a:p>
-            <a:pPr>
-              <a:spcBef>
-                <a:spcPts val="0"/>
-              </a:spcBef>
-              <a:spcAft>
-                <a:spcPts val="0"/>
-              </a:spcAft>
-            </a:pPr>
-            <a:r>
-              <a:rPr sz="1050" b="0">
-                <a:solidFill>
-                  <a:srgbClr val="5B6B7B"/>
-                </a:solidFill>
-                <a:latin typeface="微軟正黑體"/>
-              </a:rPr>
-              <a:t>另有 1,495 行測試程式</a:t>
-            </a:r>
-          </a:p>
-        </p:txBody>
-      </p:sp>
-      <p:sp>
-        <p:nvSpPr>
-          <p:cNvPr id="16" name="Rectangle 15"/>
-          <p:cNvSpPr/>
-          <p:nvPr/>
-        </p:nvSpPr>
-        <p:spPr>
-          <a:xfrm>
-            <a:off x="6236208" y="1627632"/>
-            <a:ext cx="2651760" cy="1207008"/>
-          </a:xfrm>
-          <a:prstGeom prst="rect">
-            <a:avLst/>
-          </a:prstGeom>
-          <a:solidFill>
-            <a:srgbClr val="F2F5F8"/>
-          </a:solidFill>
-          <a:ln>
-            <a:noFill/>
-          </a:ln>
-          <a:effectLst/>
-        </p:spPr>
-        <p:style>
-          <a:lnRef idx="1">
-            <a:schemeClr val="accent1"/>
-          </a:lnRef>
-          <a:fillRef idx="3">
-            <a:schemeClr val="accent1"/>
-          </a:fillRef>
-          <a:effectRef idx="2">
-            <a:schemeClr val="accent1"/>
-          </a:effectRef>
-          <a:fontRef idx="minor">
-            <a:schemeClr val="lt1"/>
-          </a:fontRef>
-        </p:style>
-        <p:txBody>
-          <a:bodyPr rtlCol="0" anchor="ctr"/>
-          <a:lstStyle/>
-          <a:p>
-            <a:pPr algn="ctr"/>
-          </a:p>
-        </p:txBody>
-      </p:sp>
-      <p:sp>
-        <p:nvSpPr>
-          <p:cNvPr id="17" name="Rectangle 16"/>
-          <p:cNvSpPr/>
-          <p:nvPr/>
-        </p:nvSpPr>
-        <p:spPr>
-          <a:xfrm>
-            <a:off x="6236208" y="1627632"/>
-            <a:ext cx="34290" cy="1207008"/>
-          </a:xfrm>
-          <a:prstGeom prst="rect">
-            <a:avLst/>
-          </a:prstGeom>
-          <a:solidFill>
-            <a:srgbClr val="119DA4"/>
-          </a:solidFill>
-          <a:ln>
-            <a:noFill/>
-          </a:ln>
-          <a:effectLst/>
-        </p:spPr>
-        <p:style>
-          <a:lnRef idx="1">
-            <a:schemeClr val="accent1"/>
-          </a:lnRef>
-          <a:fillRef idx="3">
-            <a:schemeClr val="accent1"/>
-          </a:fillRef>
-          <a:effectRef idx="2">
-            <a:schemeClr val="accent1"/>
-          </a:effectRef>
-          <a:fontRef idx="minor">
-            <a:schemeClr val="lt1"/>
-          </a:fontRef>
-        </p:style>
-        <p:txBody>
-          <a:bodyPr rtlCol="0" anchor="ctr"/>
-          <a:lstStyle/>
-          <a:p>
-            <a:pPr algn="ctr"/>
-          </a:p>
-        </p:txBody>
-      </p:sp>
-      <p:sp>
-        <p:nvSpPr>
-          <p:cNvPr id="18" name="TextBox 17"/>
-          <p:cNvSpPr txBox="1"/>
-          <p:nvPr/>
-        </p:nvSpPr>
-        <p:spPr>
-          <a:xfrm>
-            <a:off x="6437376" y="1755648"/>
-            <a:ext cx="2340864" cy="475488"/>
-          </a:xfrm>
-          <a:prstGeom prst="rect">
-            <a:avLst/>
-          </a:prstGeom>
-          <a:noFill/>
-        </p:spPr>
-        <p:txBody>
-          <a:bodyPr wrap="square" lIns="0" rIns="0" tIns="0" bIns="0" anchor="t">
-            <a:spAutoFit/>
-          </a:bodyPr>
-          <a:lstStyle/>
-          <a:p>
-            <a:pPr algn="l">
-              <a:spcBef>
-                <a:spcPts val="0"/>
-              </a:spcBef>
-              <a:spcAft>
-                <a:spcPts val="0"/>
-              </a:spcAft>
-            </a:pPr>
-            <a:r>
-              <a:rPr sz="3000" b="1">
-                <a:solidFill>
-                  <a:srgbClr val="102A43"/>
-                </a:solidFill>
-                <a:latin typeface="微軟正黑體"/>
-              </a:rPr>
-              <a:t>96 / 96</a:t>
-            </a:r>
-          </a:p>
-        </p:txBody>
-      </p:sp>
-      <p:sp>
-        <p:nvSpPr>
-          <p:cNvPr id="19" name="TextBox 18"/>
-          <p:cNvSpPr txBox="1"/>
-          <p:nvPr/>
-        </p:nvSpPr>
-        <p:spPr>
-          <a:xfrm>
-            <a:off x="6437376" y="2249424"/>
-            <a:ext cx="2340864" cy="502920"/>
-          </a:xfrm>
-          <a:prstGeom prst="rect">
-            <a:avLst/>
-          </a:prstGeom>
-          <a:noFill/>
-        </p:spPr>
-        <p:txBody>
-          <a:bodyPr wrap="square" lIns="0" rIns="0" tIns="0" bIns="0" anchor="t">
-            <a:spAutoFit/>
-          </a:bodyPr>
-          <a:lstStyle/>
-          <a:p>
-            <a:pPr algn="l">
-              <a:spcBef>
-                <a:spcPts val="0"/>
-              </a:spcBef>
-              <a:spcAft>
-                <a:spcPts val="200"/>
-              </a:spcAft>
-            </a:pPr>
-            <a:r>
-              <a:rPr sz="1300" b="1">
-                <a:solidFill>
-                  <a:srgbClr val="1B2633"/>
-                </a:solidFill>
-                <a:latin typeface="微軟正黑體"/>
-              </a:rPr>
-              <a:t>自動化測試通過</a:t>
-            </a:r>
-          </a:p>
-          <a:p>
-            <a:pPr>
-              <a:spcBef>
-                <a:spcPts val="0"/>
-              </a:spcBef>
-              <a:spcAft>
-                <a:spcPts val="0"/>
-              </a:spcAft>
-            </a:pPr>
-            <a:r>
-              <a:rPr sz="1050" b="0">
-                <a:solidFill>
-                  <a:srgbClr val="5B6B7B"/>
-                </a:solidFill>
-                <a:latin typeface="微軟正黑體"/>
-              </a:rPr>
-              <a:t>涵蓋差異判定、上下文、過濾、節流</a:t>
-            </a:r>
-          </a:p>
-        </p:txBody>
-      </p:sp>
-      <p:sp>
-        <p:nvSpPr>
-          <p:cNvPr id="20" name="Rectangle 19"/>
-          <p:cNvSpPr/>
-          <p:nvPr/>
-        </p:nvSpPr>
-        <p:spPr>
-          <a:xfrm>
-            <a:off x="9070848" y="1627632"/>
-            <a:ext cx="2560320" cy="1207008"/>
-          </a:xfrm>
-          <a:prstGeom prst="rect">
-            <a:avLst/>
-          </a:prstGeom>
-          <a:solidFill>
-            <a:srgbClr val="F2F5F8"/>
-          </a:solidFill>
-          <a:ln>
-            <a:noFill/>
-          </a:ln>
-          <a:effectLst/>
-        </p:spPr>
-        <p:style>
-          <a:lnRef idx="1">
-            <a:schemeClr val="accent1"/>
-          </a:lnRef>
-          <a:fillRef idx="3">
-            <a:schemeClr val="accent1"/>
-          </a:fillRef>
-          <a:effectRef idx="2">
-            <a:schemeClr val="accent1"/>
-          </a:effectRef>
-          <a:fontRef idx="minor">
-            <a:schemeClr val="lt1"/>
-          </a:fontRef>
-        </p:style>
-        <p:txBody>
-          <a:bodyPr rtlCol="0" anchor="ctr"/>
-          <a:lstStyle/>
-          <a:p>
-            <a:pPr algn="ctr"/>
-          </a:p>
-        </p:txBody>
-      </p:sp>
-      <p:sp>
-        <p:nvSpPr>
-          <p:cNvPr id="21" name="Rectangle 20"/>
-          <p:cNvSpPr/>
-          <p:nvPr/>
-        </p:nvSpPr>
-        <p:spPr>
-          <a:xfrm>
-            <a:off x="9070848" y="1627632"/>
-            <a:ext cx="34290" cy="1207008"/>
-          </a:xfrm>
-          <a:prstGeom prst="rect">
-            <a:avLst/>
-          </a:prstGeom>
-          <a:solidFill>
-            <a:srgbClr val="119DA4"/>
-          </a:solidFill>
-          <a:ln>
-            <a:noFill/>
-          </a:ln>
-          <a:effectLst/>
-        </p:spPr>
-        <p:style>
-          <a:lnRef idx="1">
-            <a:schemeClr val="accent1"/>
-          </a:lnRef>
-          <a:fillRef idx="3">
-            <a:schemeClr val="accent1"/>
-          </a:fillRef>
-          <a:effectRef idx="2">
-            <a:schemeClr val="accent1"/>
-          </a:effectRef>
-          <a:fontRef idx="minor">
-            <a:schemeClr val="lt1"/>
-          </a:fontRef>
-        </p:style>
-        <p:txBody>
-          <a:bodyPr rtlCol="0" anchor="ctr"/>
-          <a:lstStyle/>
-          <a:p>
-            <a:pPr algn="ctr"/>
-          </a:p>
-        </p:txBody>
-      </p:sp>
-      <p:sp>
-        <p:nvSpPr>
-          <p:cNvPr id="22" name="TextBox 21"/>
-          <p:cNvSpPr txBox="1"/>
-          <p:nvPr/>
-        </p:nvSpPr>
-        <p:spPr>
-          <a:xfrm>
-            <a:off x="9272016" y="1755648"/>
-            <a:ext cx="2249424" cy="475488"/>
-          </a:xfrm>
-          <a:prstGeom prst="rect">
-            <a:avLst/>
-          </a:prstGeom>
-          <a:noFill/>
-        </p:spPr>
-        <p:txBody>
-          <a:bodyPr wrap="square" lIns="0" rIns="0" tIns="0" bIns="0" anchor="t">
-            <a:spAutoFit/>
-          </a:bodyPr>
-          <a:lstStyle/>
-          <a:p>
-            <a:pPr algn="l">
-              <a:spcBef>
-                <a:spcPts val="0"/>
-              </a:spcBef>
-              <a:spcAft>
-                <a:spcPts val="0"/>
-              </a:spcAft>
-            </a:pPr>
-            <a:r>
-              <a:rPr sz="3000" b="1">
-                <a:solidFill>
-                  <a:srgbClr val="102A43"/>
-                </a:solidFill>
-                <a:latin typeface="微軟正黑體"/>
-              </a:rPr>
-              <a:t>v0.5.1</a:t>
-            </a:r>
-          </a:p>
-        </p:txBody>
-      </p:sp>
-      <p:sp>
-        <p:nvSpPr>
-          <p:cNvPr id="23" name="TextBox 22"/>
-          <p:cNvSpPr txBox="1"/>
-          <p:nvPr/>
-        </p:nvSpPr>
-        <p:spPr>
-          <a:xfrm>
-            <a:off x="9272016" y="2249424"/>
-            <a:ext cx="2249424" cy="502920"/>
-          </a:xfrm>
-          <a:prstGeom prst="rect">
-            <a:avLst/>
-          </a:prstGeom>
-          <a:noFill/>
-        </p:spPr>
-        <p:txBody>
-          <a:bodyPr wrap="square" lIns="0" rIns="0" tIns="0" bIns="0" anchor="t">
-            <a:spAutoFit/>
-          </a:bodyPr>
-          <a:lstStyle/>
-          <a:p>
-            <a:pPr algn="l">
-              <a:spcBef>
-                <a:spcPts val="0"/>
-              </a:spcBef>
-              <a:spcAft>
-                <a:spcPts val="200"/>
-              </a:spcAft>
-            </a:pPr>
-            <a:r>
-              <a:rPr sz="1300" b="1">
-                <a:solidFill>
-                  <a:srgbClr val="1B2633"/>
-                </a:solidFill>
-                <a:latin typeface="微軟正黑體"/>
-              </a:rPr>
-              <a:t>目前版本</a:t>
-            </a:r>
-          </a:p>
-          <a:p>
-            <a:pPr>
-              <a:spcBef>
-                <a:spcPts val="0"/>
-              </a:spcBef>
-              <a:spcAft>
-                <a:spcPts val="0"/>
-              </a:spcAft>
-            </a:pPr>
-            <a:r>
-              <a:rPr sz="1050" b="0">
-                <a:solidFill>
-                  <a:srgbClr val="5B6B7B"/>
-                </a:solidFill>
-                <a:latin typeface="微軟正黑體"/>
-              </a:rPr>
-              <a:t>已可安裝於 VS Code 使用</a:t>
-            </a:r>
-          </a:p>
-        </p:txBody>
-      </p:sp>
-      <p:sp>
-        <p:nvSpPr>
-          <p:cNvPr id="24" name="TextBox 23"/>
-          <p:cNvSpPr txBox="1"/>
-          <p:nvPr/>
-        </p:nvSpPr>
-        <p:spPr>
-          <a:xfrm>
-            <a:off x="566928" y="3108960"/>
-            <a:ext cx="5486400" cy="320040"/>
-          </a:xfrm>
-          <a:prstGeom prst="rect">
-            <a:avLst/>
-          </a:prstGeom>
-          <a:noFill/>
-        </p:spPr>
-        <p:txBody>
-          <a:bodyPr wrap="square" lIns="0" rIns="0" tIns="0" bIns="0" anchor="t">
-            <a:spAutoFit/>
-          </a:bodyPr>
-          <a:lstStyle/>
-          <a:p>
-            <a:pPr algn="l">
-              <a:spcBef>
-                <a:spcPts val="0"/>
-              </a:spcBef>
-              <a:spcAft>
-                <a:spcPts val="900"/>
-              </a:spcAft>
-            </a:pPr>
-            <a:r>
-              <a:rPr sz="1500" b="1">
-                <a:solidFill>
-                  <a:srgbClr val="102A43"/>
-                </a:solidFill>
-                <a:latin typeface="微軟正黑體"/>
-              </a:rPr>
-              <a:t>已完成</a:t>
-            </a:r>
-          </a:p>
-          <a:p>
-            <a:pPr>
-              <a:lnSpc>
-                <a:spcPct val="120000"/>
-              </a:lnSpc>
-              <a:spcBef>
-                <a:spcPts val="0"/>
-              </a:spcBef>
-              <a:spcAft>
-                <a:spcPts val="600"/>
-              </a:spcAft>
-            </a:pPr>
-            <a:r>
-              <a:rPr sz="1300" b="0">
-                <a:solidFill>
-                  <a:srgbClr val="1B2633"/>
-                </a:solidFill>
-                <a:latin typeface="微軟正黑體"/>
-              </a:rPr>
-              <a:t>✓　存檔自動審查（C 與組語）、手動審查指令</a:t>
-            </a:r>
-          </a:p>
-          <a:p>
-            <a:pPr>
-              <a:lnSpc>
-                <a:spcPct val="120000"/>
-              </a:lnSpc>
-              <a:spcBef>
-                <a:spcPts val="0"/>
-              </a:spcBef>
-              <a:spcAft>
-                <a:spcPts val="600"/>
-              </a:spcAft>
-            </a:pPr>
-            <a:r>
-              <a:rPr sz="1300" b="0">
-                <a:solidFill>
-                  <a:srgbClr val="1B2633"/>
-                </a:solidFill>
-                <a:latin typeface="微軟正黑體"/>
-              </a:rPr>
-              <a:t>✓　專案 header 自動解析與上下文預算控管</a:t>
-            </a:r>
-          </a:p>
-          <a:p>
-            <a:pPr>
-              <a:lnSpc>
-                <a:spcPct val="120000"/>
-              </a:lnSpc>
-              <a:spcBef>
-                <a:spcPts val="0"/>
-              </a:spcBef>
-              <a:spcAft>
-                <a:spcPts val="600"/>
-              </a:spcAft>
-            </a:pPr>
-            <a:r>
-              <a:rPr sz="1300" b="0">
-                <a:solidFill>
-                  <a:srgbClr val="1B2633"/>
-                </a:solidFill>
-                <a:latin typeface="微軟正黑體"/>
-              </a:rPr>
-              <a:t>✓　規則引擎、語言過濾、ABI 事實注入</a:t>
-            </a:r>
-          </a:p>
-          <a:p>
-            <a:pPr>
-              <a:lnSpc>
-                <a:spcPct val="120000"/>
-              </a:lnSpc>
-              <a:spcBef>
-                <a:spcPts val="0"/>
-              </a:spcBef>
-              <a:spcAft>
-                <a:spcPts val="600"/>
-              </a:spcAft>
-            </a:pPr>
-            <a:r>
-              <a:rPr sz="1300" b="0">
-                <a:solidFill>
-                  <a:srgbClr val="1B2633"/>
-                </a:solidFill>
-                <a:latin typeface="微軟正黑體"/>
-              </a:rPr>
-              <a:t>✓　三層節流、審查取消、結果保留不閃爍</a:t>
-            </a:r>
-          </a:p>
-          <a:p>
-            <a:pPr>
-              <a:lnSpc>
-                <a:spcPct val="120000"/>
-              </a:lnSpc>
-              <a:spcBef>
-                <a:spcPts val="0"/>
-              </a:spcBef>
-              <a:spcAft>
-                <a:spcPts val="600"/>
-              </a:spcAft>
-            </a:pPr>
-            <a:r>
-              <a:rPr sz="1300" b="0">
-                <a:solidFill>
-                  <a:srgbClr val="1B2633"/>
-                </a:solidFill>
-                <a:latin typeface="微軟正黑體"/>
-              </a:rPr>
-              <a:t>✓　釘選與筆記、誤報靜音與匯出報告</a:t>
-            </a:r>
-          </a:p>
-          <a:p>
-            <a:pPr>
-              <a:lnSpc>
-                <a:spcPct val="120000"/>
-              </a:lnSpc>
-              <a:spcBef>
-                <a:spcPts val="0"/>
-              </a:spcBef>
-              <a:spcAft>
-                <a:spcPts val="600"/>
-              </a:spcAft>
-            </a:pPr>
-            <a:r>
-              <a:rPr sz="1300" b="0">
-                <a:solidFill>
-                  <a:srgbClr val="1B2633"/>
-                </a:solidFill>
-                <a:latin typeface="微軟正黑體"/>
-              </a:rPr>
-              <a:t>✓　隱私排除清單與稽核日誌</a:t>
-            </a:r>
-          </a:p>
-        </p:txBody>
-      </p:sp>
-      <p:sp>
-        <p:nvSpPr>
-          <p:cNvPr id="25" name="TextBox 24"/>
-          <p:cNvSpPr txBox="1"/>
-          <p:nvPr/>
-        </p:nvSpPr>
-        <p:spPr>
-          <a:xfrm>
-            <a:off x="6309360" y="3108960"/>
-            <a:ext cx="5303520" cy="320040"/>
-          </a:xfrm>
-          <a:prstGeom prst="rect">
-            <a:avLst/>
-          </a:prstGeom>
-          <a:noFill/>
-        </p:spPr>
-        <p:txBody>
-          <a:bodyPr wrap="square" lIns="0" rIns="0" tIns="0" bIns="0" anchor="t">
-            <a:spAutoFit/>
-          </a:bodyPr>
-          <a:lstStyle/>
-          <a:p>
-            <a:pPr algn="l">
-              <a:spcBef>
-                <a:spcPts val="0"/>
-              </a:spcBef>
-              <a:spcAft>
-                <a:spcPts val="900"/>
-              </a:spcAft>
-            </a:pPr>
-            <a:r>
-              <a:rPr sz="1500" b="1">
-                <a:solidFill>
-                  <a:srgbClr val="102A43"/>
-                </a:solidFill>
-                <a:latin typeface="微軟正黑體"/>
-              </a:rPr>
-              <a:t>已知限制（誠實揭露）</a:t>
-            </a:r>
-          </a:p>
-          <a:p>
-            <a:pPr>
-              <a:lnSpc>
-                <a:spcPct val="120000"/>
-              </a:lnSpc>
-              <a:spcBef>
-                <a:spcPts val="0"/>
-              </a:spcBef>
-              <a:spcAft>
-                <a:spcPts val="600"/>
-              </a:spcAft>
-            </a:pPr>
-            <a:r>
-              <a:rPr sz="1300" b="0">
-                <a:solidFill>
-                  <a:srgbClr val="5B6B7B"/>
-                </a:solidFill>
-                <a:latin typeface="微軟正黑體"/>
-              </a:rPr>
-              <a:t>・多根工作區目前只讀取第一個資料夾</a:t>
-            </a:r>
-          </a:p>
-          <a:p>
-            <a:pPr>
-              <a:lnSpc>
-                <a:spcPct val="120000"/>
-              </a:lnSpc>
-              <a:spcBef>
-                <a:spcPts val="0"/>
-              </a:spcBef>
-              <a:spcAft>
-                <a:spcPts val="600"/>
-              </a:spcAft>
-            </a:pPr>
-            <a:r>
-              <a:rPr sz="1300" b="0">
-                <a:solidFill>
-                  <a:srgbClr val="5B6B7B"/>
-                </a:solidFill>
-                <a:latin typeface="微軟正黑體"/>
-              </a:rPr>
-              <a:t>・組語巨集不展開；上下文不足時要求模型保守不報</a:t>
-            </a:r>
-          </a:p>
-          <a:p>
-            <a:pPr>
-              <a:lnSpc>
-                <a:spcPct val="120000"/>
-              </a:lnSpc>
-              <a:spcBef>
-                <a:spcPts val="0"/>
-              </a:spcBef>
-              <a:spcAft>
-                <a:spcPts val="600"/>
-              </a:spcAft>
-            </a:pPr>
-            <a:r>
-              <a:rPr sz="1300" b="0">
-                <a:solidFill>
-                  <a:srgbClr val="5B6B7B"/>
-                </a:solidFill>
-                <a:latin typeface="微軟正黑體"/>
-              </a:rPr>
-              <a:t>・組語審查僅看單檔，抓不到跨檔的 C／組語簽章不一致</a:t>
-            </a:r>
-          </a:p>
-          <a:p>
-            <a:pPr>
-              <a:lnSpc>
-                <a:spcPct val="120000"/>
-              </a:lnSpc>
-              <a:spcBef>
-                <a:spcPts val="0"/>
-              </a:spcBef>
-              <a:spcAft>
-                <a:spcPts val="600"/>
-              </a:spcAft>
-            </a:pPr>
-            <a:r>
-              <a:rPr sz="1300" b="0">
-                <a:solidFill>
-                  <a:srgbClr val="5B6B7B"/>
-                </a:solidFill>
-                <a:latin typeface="微軟正黑體"/>
-              </a:rPr>
-              <a:t>・只提供意見，不產生也不套用修補程式</a:t>
-            </a:r>
-          </a:p>
-          <a:p>
-            <a:pPr>
-              <a:lnSpc>
-                <a:spcPct val="120000"/>
-              </a:lnSpc>
-              <a:spcBef>
-                <a:spcPts val="0"/>
-              </a:spcBef>
-              <a:spcAft>
-                <a:spcPts val="600"/>
-              </a:spcAft>
-            </a:pPr>
-            <a:r>
-              <a:rPr sz="1300" b="0">
-                <a:solidFill>
-                  <a:srgbClr val="5B6B7B"/>
-                </a:solidFill>
-                <a:latin typeface="微軟正黑體"/>
-              </a:rPr>
-              <a:t>・尚未累積足夠樣本計算「意見被實際修掉的比例」</a:t>
+                  <a:srgbClr val="FFFFFF"/>
+                </a:solidFill>
+                <a:latin typeface="微軟正黑體"/>
+              </a:rPr>
+              <a:t>地端模型的前提是「用量可預測」。sensAI 的用量由設定值決定上界，不由程式碼庫規模或模型的探索意願決定。</a:t>
             </a:r>
           </a:p>
         </p:txBody>
@@ -4901,7 +4969,7 @@
                 </a:solidFill>
                 <a:latin typeface="微軟正黑體"/>
               </a:rPr>
-              <a:t>DATA</a:t>
+              <a:t>STATUS</a:t>
             </a:r>
           </a:p>
         </p:txBody>
@@ -4943,7 +5011,7 @@
                 </a:solidFill>
                 <a:latin typeface="微軟正黑體"/>
               </a:rPr>
-              <a:t>目前已有的數據與出處</a:t>
+              <a:t>目前進度：已可使用，非概念驗證</a:t>
             </a:r>
           </a:p>
         </p:txBody>
@@ -5078,46 +5146,45 @@
       </p:sp>
       <p:sp>
         <p:nvSpPr>
-          <p:cNvPr id="8" name="TextBox 7"/>
-          <p:cNvSpPr txBox="1"/>
-          <p:nvPr/>
-        </p:nvSpPr>
-        <p:spPr>
-          <a:xfrm>
-            <a:off x="566928" y="1572768"/>
-            <a:ext cx="11064240" cy="365760"/>
-          </a:xfrm>
-          <a:prstGeom prst="rect">
-            <a:avLst/>
-          </a:prstGeom>
-          <a:noFill/>
-        </p:spPr>
-        <p:txBody>
-          <a:bodyPr wrap="square" lIns="0" rIns="0" tIns="0" bIns="0" anchor="t">
-            <a:spAutoFit/>
-          </a:bodyPr>
-          <a:lstStyle/>
-          <a:p>
-            <a:pPr algn="l">
-              <a:lnSpc>
-                <a:spcPct val="125000"/>
-              </a:lnSpc>
-              <a:spcBef>
-                <a:spcPts val="0"/>
-              </a:spcBef>
-              <a:spcAft>
-                <a:spcPts val="0"/>
-              </a:spcAft>
-            </a:pPr>
-            <a:r>
-              <a:rPr sz="1400" b="0">
-                <a:solidFill>
-                  <a:srgbClr val="1B2633"/>
-                </a:solidFill>
-                <a:latin typeface="微軟正黑體"/>
-              </a:rPr>
-              <a:t>以下每個數字都可當場複查。現場使用數據（採納率、延遲分布、成本）要等導入後由稽核日誌自動累積 —— 今天還沒有。</a:t>
-            </a:r>
+          <p:cNvPr id="8" name="Rectangle 7"/>
+          <p:cNvSpPr/>
+          <p:nvPr/>
+        </p:nvSpPr>
+        <p:spPr>
+          <a:xfrm>
+            <a:off x="566928" y="1627632"/>
+            <a:ext cx="2651760" cy="1207008"/>
+          </a:xfrm>
+          <a:prstGeom prst="rect">
+            <a:avLst/>
+          </a:prstGeom>
+          <a:solidFill>
+            <a:srgbClr val="F2F5F8"/>
+          </a:solidFill>
+          <a:ln>
+            <a:noFill/>
+          </a:ln>
+          <a:effectLst/>
+        </p:spPr>
+        <p:style>
+          <a:lnRef idx="1">
+            <a:schemeClr val="accent1"/>
+          </a:lnRef>
+          <a:fillRef idx="3">
+            <a:schemeClr val="accent1"/>
+          </a:fillRef>
+          <a:effectRef idx="2">
+            <a:schemeClr val="accent1"/>
+          </a:effectRef>
+          <a:fontRef idx="minor">
+            <a:schemeClr val="lt1"/>
+          </a:fontRef>
+        </p:style>
+        <p:txBody>
+          <a:bodyPr rtlCol="0" anchor="ctr"/>
+          <a:lstStyle/>
+          <a:p>
+            <a:pPr algn="ctr"/>
           </a:p>
         </p:txBody>
       </p:sp>
@@ -5129,8 +5196,8 @@
         </p:nvSpPr>
         <p:spPr>
           <a:xfrm>
-            <a:off x="566928" y="2121408"/>
-            <a:ext cx="34290" cy="237744"/>
+            <a:off x="566928" y="1627632"/>
+            <a:ext cx="34290" cy="1207008"/>
           </a:xfrm>
           <a:prstGeom prst="rect">
             <a:avLst/>
@@ -5173,8 +5240,8 @@
         </p:nvSpPr>
         <p:spPr>
           <a:xfrm>
-            <a:off x="694944" y="2139696"/>
-            <a:ext cx="5376672" cy="219456"/>
+            <a:off x="768096" y="1755648"/>
+            <a:ext cx="2340864" cy="475488"/>
           </a:xfrm>
           <a:prstGeom prst="rect">
             <a:avLst/>
@@ -5196,27 +5263,88 @@
               </a:spcAft>
             </a:pPr>
             <a:r>
-              <a:rPr sz="1150" b="1">
-                <a:solidFill>
-                  <a:srgbClr val="119DA4"/>
-                </a:solidFill>
-                <a:latin typeface="微軟正黑體"/>
-              </a:rPr>
-              <a:t>產品規模與品質</a:t>
-            </a:r>
-          </a:p>
-        </p:txBody>
-      </p:sp>
-      <p:sp>
-        <p:nvSpPr>
-          <p:cNvPr id="11" name="Rectangle 10"/>
+              <a:rPr sz="3000" b="1">
+                <a:solidFill>
+                  <a:srgbClr val="102A43"/>
+                </a:solidFill>
+                <a:latin typeface="微軟正黑體"/>
+              </a:rPr>
+              <a:t>14 天</a:t>
+            </a:r>
+          </a:p>
+        </p:txBody>
+      </p:sp>
+      <p:sp>
+        <p:nvSpPr>
+          <p:cNvPr id="11" name="TextBox 10"/>
+          <p:cNvSpPr txBox="1"/>
+          <p:nvPr/>
+        </p:nvSpPr>
+        <p:spPr>
+          <a:xfrm>
+            <a:off x="768096" y="2249424"/>
+            <a:ext cx="2340864" cy="502920"/>
+          </a:xfrm>
+          <a:prstGeom prst="rect">
+            <a:avLst/>
+          </a:prstGeom>
+          <a:noFill/>
+        </p:spPr>
+        <p:txBody>
+          <a:bodyPr wrap="square" lIns="0" rIns="0" tIns="0" bIns="0" anchor="t">
+            <a:spAutoFit/>
+          </a:bodyPr>
+          <a:lstStyle/>
+          <a:p>
+            <a:pPr algn="l">
+              <a:spcBef>
+                <a:spcPts val="0"/>
+              </a:spcBef>
+              <a:spcAft>
+                <a:spcPts val="200"/>
+              </a:spcAft>
+            </a:pPr>
+            <a:r>
+              <a:rPr sz="1300" b="1">
+                <a:solidFill>
+                  <a:srgbClr val="1B2633"/>
+                </a:solidFill>
+                <a:latin typeface="微軟正黑體"/>
+              </a:rPr>
+              <a:t>從構想到可用版本</a:t>
+            </a:r>
+          </a:p>
+          <a:p>
+            <a:pPr>
+              <a:spcBef>
+                <a:spcPts val="0"/>
+              </a:spcBef>
+              <a:spcAft>
+                <a:spcPts val="0"/>
+              </a:spcAft>
+            </a:pPr>
+            <a:r>
+              <a:rPr sz="1050" b="0">
+                <a:solidFill>
+                  <a:srgbClr val="5B6B7B"/>
+                </a:solidFill>
+                <a:latin typeface="微軟正黑體"/>
+              </a:rPr>
+              <a:t>2026/08/22 → 09/04　45 次提交</a:t>
+            </a:r>
+          </a:p>
+        </p:txBody>
+      </p:sp>
+      <p:sp>
+        <p:nvSpPr>
+          <p:cNvPr id="12" name="Rectangle 11"/>
           <p:cNvSpPr/>
           <p:nvPr/>
         </p:nvSpPr>
         <p:spPr>
           <a:xfrm>
-            <a:off x="566928" y="2432304"/>
-            <a:ext cx="5376672" cy="310896"/>
+            <a:off x="3401568" y="1627632"/>
+            <a:ext cx="2651760" cy="1207008"/>
           </a:xfrm>
           <a:prstGeom prst="rect">
             <a:avLst/>
@@ -5253,14 +5381,58 @@
       </p:sp>
       <p:sp>
         <p:nvSpPr>
-          <p:cNvPr id="12" name="TextBox 11"/>
-          <p:cNvSpPr txBox="1"/>
-          <p:nvPr/>
-        </p:nvSpPr>
-        <p:spPr>
-          <a:xfrm>
-            <a:off x="694944" y="2496312"/>
-            <a:ext cx="1572768" cy="219456"/>
+          <p:cNvPr id="13" name="Rectangle 12"/>
+          <p:cNvSpPr/>
+          <p:nvPr/>
+        </p:nvSpPr>
+        <p:spPr>
+          <a:xfrm>
+            <a:off x="3401568" y="1627632"/>
+            <a:ext cx="34290" cy="1207008"/>
+          </a:xfrm>
+          <a:prstGeom prst="rect">
+            <a:avLst/>
+          </a:prstGeom>
+          <a:solidFill>
+            <a:srgbClr val="119DA4"/>
+          </a:solidFill>
+          <a:ln>
+            <a:noFill/>
+          </a:ln>
+          <a:effectLst/>
+        </p:spPr>
+        <p:style>
+          <a:lnRef idx="1">
+            <a:schemeClr val="accent1"/>
+          </a:lnRef>
+          <a:fillRef idx="3">
+            <a:schemeClr val="accent1"/>
+          </a:fillRef>
+          <a:effectRef idx="2">
+            <a:schemeClr val="accent1"/>
+          </a:effectRef>
+          <a:fontRef idx="minor">
+            <a:schemeClr val="lt1"/>
+          </a:fontRef>
+        </p:style>
+        <p:txBody>
+          <a:bodyPr rtlCol="0" anchor="ctr"/>
+          <a:lstStyle/>
+          <a:p>
+            <a:pPr algn="ctr"/>
+          </a:p>
+        </p:txBody>
+      </p:sp>
+      <p:sp>
+        <p:nvSpPr>
+          <p:cNvPr id="14" name="TextBox 13"/>
+          <p:cNvSpPr txBox="1"/>
+          <p:nvPr/>
+        </p:nvSpPr>
+        <p:spPr>
+          <a:xfrm>
+            <a:off x="3602736" y="1755648"/>
+            <a:ext cx="2340864" cy="475488"/>
           </a:xfrm>
           <a:prstGeom prst="rect">
             <a:avLst/>
@@ -5282,237 +5454,88 @@
               </a:spcAft>
             </a:pPr>
             <a:r>
-              <a:rPr sz="1150" b="0">
+              <a:rPr sz="3000" b="1">
+                <a:solidFill>
+                  <a:srgbClr val="102A43"/>
+                </a:solidFill>
+                <a:latin typeface="微軟正黑體"/>
+              </a:rPr>
+              <a:t>3,603 行</a:t>
+            </a:r>
+          </a:p>
+        </p:txBody>
+      </p:sp>
+      <p:sp>
+        <p:nvSpPr>
+          <p:cNvPr id="15" name="TextBox 14"/>
+          <p:cNvSpPr txBox="1"/>
+          <p:nvPr/>
+        </p:nvSpPr>
+        <p:spPr>
+          <a:xfrm>
+            <a:off x="3602736" y="2249424"/>
+            <a:ext cx="2340864" cy="502920"/>
+          </a:xfrm>
+          <a:prstGeom prst="rect">
+            <a:avLst/>
+          </a:prstGeom>
+          <a:noFill/>
+        </p:spPr>
+        <p:txBody>
+          <a:bodyPr wrap="square" lIns="0" rIns="0" tIns="0" bIns="0" anchor="t">
+            <a:spAutoFit/>
+          </a:bodyPr>
+          <a:lstStyle/>
+          <a:p>
+            <a:pPr algn="l">
+              <a:spcBef>
+                <a:spcPts val="0"/>
+              </a:spcBef>
+              <a:spcAft>
+                <a:spcPts val="200"/>
+              </a:spcAft>
+            </a:pPr>
+            <a:r>
+              <a:rPr sz="1300" b="1">
                 <a:solidFill>
                   <a:srgbClr val="1B2633"/>
                 </a:solidFill>
                 <a:latin typeface="微軟正黑體"/>
               </a:rPr>
-              <a:t>程式碼規模</a:t>
-            </a:r>
-          </a:p>
-        </p:txBody>
-      </p:sp>
-      <p:sp>
-        <p:nvSpPr>
-          <p:cNvPr id="13" name="TextBox 12"/>
-          <p:cNvSpPr txBox="1"/>
-          <p:nvPr/>
-        </p:nvSpPr>
-        <p:spPr>
-          <a:xfrm>
-            <a:off x="2322576" y="2487168"/>
-            <a:ext cx="1901952" cy="219456"/>
-          </a:xfrm>
-          <a:prstGeom prst="rect">
-            <a:avLst/>
-          </a:prstGeom>
-          <a:noFill/>
-        </p:spPr>
-        <p:txBody>
-          <a:bodyPr wrap="square" lIns="0" rIns="0" tIns="0" bIns="0" anchor="t">
-            <a:spAutoFit/>
-          </a:bodyPr>
-          <a:lstStyle/>
-          <a:p>
-            <a:pPr algn="l">
-              <a:spcBef>
-                <a:spcPts val="0"/>
-              </a:spcBef>
-              <a:spcAft>
-                <a:spcPts val="0"/>
-              </a:spcAft>
-            </a:pPr>
-            <a:r>
-              <a:rPr sz="1200" b="1">
-                <a:solidFill>
-                  <a:srgbClr val="102A43"/>
-                </a:solidFill>
-                <a:latin typeface="微軟正黑體"/>
-              </a:rPr>
-              <a:t>3,603 行 ／ 19 個模組</a:t>
-            </a:r>
-          </a:p>
-        </p:txBody>
-      </p:sp>
-      <p:sp>
-        <p:nvSpPr>
-          <p:cNvPr id="14" name="TextBox 13"/>
-          <p:cNvSpPr txBox="1"/>
-          <p:nvPr/>
-        </p:nvSpPr>
-        <p:spPr>
-          <a:xfrm>
-            <a:off x="4279391" y="2505456"/>
-            <a:ext cx="1572768" cy="219456"/>
-          </a:xfrm>
-          <a:prstGeom prst="rect">
-            <a:avLst/>
-          </a:prstGeom>
-          <a:noFill/>
-        </p:spPr>
-        <p:txBody>
-          <a:bodyPr wrap="square" lIns="0" rIns="0" tIns="0" bIns="0" anchor="t">
-            <a:spAutoFit/>
-          </a:bodyPr>
-          <a:lstStyle/>
-          <a:p>
-            <a:pPr algn="l">
-              <a:spcBef>
-                <a:spcPts val="0"/>
-              </a:spcBef>
-              <a:spcAft>
-                <a:spcPts val="0"/>
-              </a:spcAft>
-            </a:pPr>
-            <a:r>
-              <a:rPr sz="1000" b="0">
+              <a:t>TypeScript　19 個模組</a:t>
+            </a:r>
+          </a:p>
+          <a:p>
+            <a:pPr>
+              <a:spcBef>
+                <a:spcPts val="0"/>
+              </a:spcBef>
+              <a:spcAft>
+                <a:spcPts val="0"/>
+              </a:spcAft>
+            </a:pPr>
+            <a:r>
+              <a:rPr sz="1050" b="0">
                 <a:solidFill>
                   <a:srgbClr val="5B6B7B"/>
                 </a:solidFill>
-                <a:latin typeface="Consolas"/>
-              </a:rPr>
-              <a:t>wc -l src/*.ts</a:t>
-            </a:r>
-          </a:p>
-        </p:txBody>
-      </p:sp>
-      <p:sp>
-        <p:nvSpPr>
-          <p:cNvPr id="15" name="TextBox 14"/>
-          <p:cNvSpPr txBox="1"/>
-          <p:nvPr/>
-        </p:nvSpPr>
-        <p:spPr>
-          <a:xfrm>
-            <a:off x="694944" y="2807208"/>
-            <a:ext cx="1572768" cy="219456"/>
-          </a:xfrm>
-          <a:prstGeom prst="rect">
-            <a:avLst/>
-          </a:prstGeom>
-          <a:noFill/>
-        </p:spPr>
-        <p:txBody>
-          <a:bodyPr wrap="square" lIns="0" rIns="0" tIns="0" bIns="0" anchor="t">
-            <a:spAutoFit/>
-          </a:bodyPr>
-          <a:lstStyle/>
-          <a:p>
-            <a:pPr algn="l">
-              <a:spcBef>
-                <a:spcPts val="0"/>
-              </a:spcBef>
-              <a:spcAft>
-                <a:spcPts val="0"/>
-              </a:spcAft>
-            </a:pPr>
-            <a:r>
-              <a:rPr sz="1150" b="0">
-                <a:solidFill>
-                  <a:srgbClr val="1B2633"/>
-                </a:solidFill>
-                <a:latin typeface="微軟正黑體"/>
-              </a:rPr>
-              <a:t>測試</a:t>
-            </a:r>
-          </a:p>
-        </p:txBody>
-      </p:sp>
-      <p:sp>
-        <p:nvSpPr>
-          <p:cNvPr id="16" name="TextBox 15"/>
-          <p:cNvSpPr txBox="1"/>
-          <p:nvPr/>
-        </p:nvSpPr>
-        <p:spPr>
-          <a:xfrm>
-            <a:off x="2322576" y="2798064"/>
-            <a:ext cx="1901952" cy="219456"/>
-          </a:xfrm>
-          <a:prstGeom prst="rect">
-            <a:avLst/>
-          </a:prstGeom>
-          <a:noFill/>
-        </p:spPr>
-        <p:txBody>
-          <a:bodyPr wrap="square" lIns="0" rIns="0" tIns="0" bIns="0" anchor="t">
-            <a:spAutoFit/>
-          </a:bodyPr>
-          <a:lstStyle/>
-          <a:p>
-            <a:pPr algn="l">
-              <a:spcBef>
-                <a:spcPts val="0"/>
-              </a:spcBef>
-              <a:spcAft>
-                <a:spcPts val="0"/>
-              </a:spcAft>
-            </a:pPr>
-            <a:r>
-              <a:rPr sz="1200" b="1">
-                <a:solidFill>
-                  <a:srgbClr val="102A43"/>
-                </a:solidFill>
-                <a:latin typeface="微軟正黑體"/>
-              </a:rPr>
-              <a:t>96 項，全數通過</a:t>
-            </a:r>
-          </a:p>
-        </p:txBody>
-      </p:sp>
-      <p:sp>
-        <p:nvSpPr>
-          <p:cNvPr id="17" name="TextBox 16"/>
-          <p:cNvSpPr txBox="1"/>
-          <p:nvPr/>
-        </p:nvSpPr>
-        <p:spPr>
-          <a:xfrm>
-            <a:off x="4279391" y="2816352"/>
-            <a:ext cx="1572768" cy="219456"/>
-          </a:xfrm>
-          <a:prstGeom prst="rect">
-            <a:avLst/>
-          </a:prstGeom>
-          <a:noFill/>
-        </p:spPr>
-        <p:txBody>
-          <a:bodyPr wrap="square" lIns="0" rIns="0" tIns="0" bIns="0" anchor="t">
-            <a:spAutoFit/>
-          </a:bodyPr>
-          <a:lstStyle/>
-          <a:p>
-            <a:pPr algn="l">
-              <a:spcBef>
-                <a:spcPts val="0"/>
-              </a:spcBef>
-              <a:spcAft>
-                <a:spcPts val="0"/>
-              </a:spcAft>
-            </a:pPr>
-            <a:r>
-              <a:rPr sz="1000" b="0">
-                <a:solidFill>
-                  <a:srgbClr val="5B6B7B"/>
-                </a:solidFill>
-                <a:latin typeface="Consolas"/>
-              </a:rPr>
-              <a:t>npm test</a:t>
-            </a:r>
-          </a:p>
-        </p:txBody>
-      </p:sp>
-      <p:sp>
-        <p:nvSpPr>
-          <p:cNvPr id="18" name="Rectangle 17"/>
+                <a:latin typeface="微軟正黑體"/>
+              </a:rPr>
+              <a:t>另有 1,495 行測試程式</a:t>
+            </a:r>
+          </a:p>
+        </p:txBody>
+      </p:sp>
+      <p:sp>
+        <p:nvSpPr>
+          <p:cNvPr id="16" name="Rectangle 15"/>
           <p:cNvSpPr/>
           <p:nvPr/>
         </p:nvSpPr>
         <p:spPr>
           <a:xfrm>
-            <a:off x="566928" y="3054096"/>
-            <a:ext cx="5376672" cy="310896"/>
+            <a:off x="6236208" y="1627632"/>
+            <a:ext cx="2651760" cy="1207008"/>
           </a:xfrm>
           <a:prstGeom prst="rect">
             <a:avLst/>
@@ -5549,266 +5572,14 @@
       </p:sp>
       <p:sp>
         <p:nvSpPr>
-          <p:cNvPr id="19" name="TextBox 18"/>
-          <p:cNvSpPr txBox="1"/>
-          <p:nvPr/>
-        </p:nvSpPr>
-        <p:spPr>
-          <a:xfrm>
-            <a:off x="694944" y="3118104"/>
-            <a:ext cx="1572768" cy="219456"/>
-          </a:xfrm>
-          <a:prstGeom prst="rect">
-            <a:avLst/>
-          </a:prstGeom>
-          <a:noFill/>
-        </p:spPr>
-        <p:txBody>
-          <a:bodyPr wrap="square" lIns="0" rIns="0" tIns="0" bIns="0" anchor="t">
-            <a:spAutoFit/>
-          </a:bodyPr>
-          <a:lstStyle/>
-          <a:p>
-            <a:pPr algn="l">
-              <a:spcBef>
-                <a:spcPts val="0"/>
-              </a:spcBef>
-              <a:spcAft>
-                <a:spcPts val="0"/>
-              </a:spcAft>
-            </a:pPr>
-            <a:r>
-              <a:rPr sz="1150" b="0">
-                <a:solidFill>
-                  <a:srgbClr val="1B2633"/>
-                </a:solidFill>
-                <a:latin typeface="微軟正黑體"/>
-              </a:rPr>
-              <a:t>開發期間</a:t>
-            </a:r>
-          </a:p>
-        </p:txBody>
-      </p:sp>
-      <p:sp>
-        <p:nvSpPr>
-          <p:cNvPr id="20" name="TextBox 19"/>
-          <p:cNvSpPr txBox="1"/>
-          <p:nvPr/>
-        </p:nvSpPr>
-        <p:spPr>
-          <a:xfrm>
-            <a:off x="2322576" y="3108960"/>
-            <a:ext cx="1901952" cy="219456"/>
-          </a:xfrm>
-          <a:prstGeom prst="rect">
-            <a:avLst/>
-          </a:prstGeom>
-          <a:noFill/>
-        </p:spPr>
-        <p:txBody>
-          <a:bodyPr wrap="square" lIns="0" rIns="0" tIns="0" bIns="0" anchor="t">
-            <a:spAutoFit/>
-          </a:bodyPr>
-          <a:lstStyle/>
-          <a:p>
-            <a:pPr algn="l">
-              <a:spcBef>
-                <a:spcPts val="0"/>
-              </a:spcBef>
-              <a:spcAft>
-                <a:spcPts val="0"/>
-              </a:spcAft>
-            </a:pPr>
-            <a:r>
-              <a:rPr sz="1200" b="1">
-                <a:solidFill>
-                  <a:srgbClr val="102A43"/>
-                </a:solidFill>
-                <a:latin typeface="微軟正黑體"/>
-              </a:rPr>
-              <a:t>14 天 ／ 45 次提交</a:t>
-            </a:r>
-          </a:p>
-        </p:txBody>
-      </p:sp>
-      <p:sp>
-        <p:nvSpPr>
-          <p:cNvPr id="21" name="TextBox 20"/>
-          <p:cNvSpPr txBox="1"/>
-          <p:nvPr/>
-        </p:nvSpPr>
-        <p:spPr>
-          <a:xfrm>
-            <a:off x="4279391" y="3127248"/>
-            <a:ext cx="1572768" cy="219456"/>
-          </a:xfrm>
-          <a:prstGeom prst="rect">
-            <a:avLst/>
-          </a:prstGeom>
-          <a:noFill/>
-        </p:spPr>
-        <p:txBody>
-          <a:bodyPr wrap="square" lIns="0" rIns="0" tIns="0" bIns="0" anchor="t">
-            <a:spAutoFit/>
-          </a:bodyPr>
-          <a:lstStyle/>
-          <a:p>
-            <a:pPr algn="l">
-              <a:spcBef>
-                <a:spcPts val="0"/>
-              </a:spcBef>
-              <a:spcAft>
-                <a:spcPts val="0"/>
-              </a:spcAft>
-            </a:pPr>
-            <a:r>
-              <a:rPr sz="1000" b="0">
-                <a:solidFill>
-                  <a:srgbClr val="5B6B7B"/>
-                </a:solidFill>
-                <a:latin typeface="Consolas"/>
-              </a:rPr>
-              <a:t>git log</a:t>
-            </a:r>
-          </a:p>
-        </p:txBody>
-      </p:sp>
-      <p:sp>
-        <p:nvSpPr>
-          <p:cNvPr id="22" name="TextBox 21"/>
-          <p:cNvSpPr txBox="1"/>
-          <p:nvPr/>
-        </p:nvSpPr>
-        <p:spPr>
-          <a:xfrm>
-            <a:off x="694944" y="3429000"/>
-            <a:ext cx="1572768" cy="219456"/>
-          </a:xfrm>
-          <a:prstGeom prst="rect">
-            <a:avLst/>
-          </a:prstGeom>
-          <a:noFill/>
-        </p:spPr>
-        <p:txBody>
-          <a:bodyPr wrap="square" lIns="0" rIns="0" tIns="0" bIns="0" anchor="t">
-            <a:spAutoFit/>
-          </a:bodyPr>
-          <a:lstStyle/>
-          <a:p>
-            <a:pPr algn="l">
-              <a:spcBef>
-                <a:spcPts val="0"/>
-              </a:spcBef>
-              <a:spcAft>
-                <a:spcPts val="0"/>
-              </a:spcAft>
-            </a:pPr>
-            <a:r>
-              <a:rPr sz="1150" b="0">
-                <a:solidFill>
-                  <a:srgbClr val="1B2633"/>
-                </a:solidFill>
-                <a:latin typeface="微軟正黑體"/>
-              </a:rPr>
-              <a:t>目前版本</a:t>
-            </a:r>
-          </a:p>
-        </p:txBody>
-      </p:sp>
-      <p:sp>
-        <p:nvSpPr>
-          <p:cNvPr id="23" name="TextBox 22"/>
-          <p:cNvSpPr txBox="1"/>
-          <p:nvPr/>
-        </p:nvSpPr>
-        <p:spPr>
-          <a:xfrm>
-            <a:off x="2322576" y="3419856"/>
-            <a:ext cx="1901952" cy="219456"/>
-          </a:xfrm>
-          <a:prstGeom prst="rect">
-            <a:avLst/>
-          </a:prstGeom>
-          <a:noFill/>
-        </p:spPr>
-        <p:txBody>
-          <a:bodyPr wrap="square" lIns="0" rIns="0" tIns="0" bIns="0" anchor="t">
-            <a:spAutoFit/>
-          </a:bodyPr>
-          <a:lstStyle/>
-          <a:p>
-            <a:pPr algn="l">
-              <a:spcBef>
-                <a:spcPts val="0"/>
-              </a:spcBef>
-              <a:spcAft>
-                <a:spcPts val="0"/>
-              </a:spcAft>
-            </a:pPr>
-            <a:r>
-              <a:rPr sz="1200" b="1">
-                <a:solidFill>
-                  <a:srgbClr val="102A43"/>
-                </a:solidFill>
-                <a:latin typeface="微軟正黑體"/>
-              </a:rPr>
-              <a:t>v0.5.1</a:t>
-            </a:r>
-          </a:p>
-        </p:txBody>
-      </p:sp>
-      <p:sp>
-        <p:nvSpPr>
-          <p:cNvPr id="24" name="TextBox 23"/>
-          <p:cNvSpPr txBox="1"/>
-          <p:nvPr/>
-        </p:nvSpPr>
-        <p:spPr>
-          <a:xfrm>
-            <a:off x="4279391" y="3438144"/>
-            <a:ext cx="1572768" cy="219456"/>
-          </a:xfrm>
-          <a:prstGeom prst="rect">
-            <a:avLst/>
-          </a:prstGeom>
-          <a:noFill/>
-        </p:spPr>
-        <p:txBody>
-          <a:bodyPr wrap="square" lIns="0" rIns="0" tIns="0" bIns="0" anchor="t">
-            <a:spAutoFit/>
-          </a:bodyPr>
-          <a:lstStyle/>
-          <a:p>
-            <a:pPr algn="l">
-              <a:spcBef>
-                <a:spcPts val="0"/>
-              </a:spcBef>
-              <a:spcAft>
-                <a:spcPts val="0"/>
-              </a:spcAft>
-            </a:pPr>
-            <a:r>
-              <a:rPr sz="1000" b="0">
-                <a:solidFill>
-                  <a:srgbClr val="5B6B7B"/>
-                </a:solidFill>
-                <a:latin typeface="Consolas"/>
-              </a:rPr>
-              <a:t>package.json</a:t>
-            </a:r>
-          </a:p>
-        </p:txBody>
-      </p:sp>
-      <p:sp>
-        <p:nvSpPr>
-          <p:cNvPr id="25" name="Rectangle 24"/>
+          <p:cNvPr id="17" name="Rectangle 16"/>
           <p:cNvSpPr/>
           <p:nvPr/>
         </p:nvSpPr>
         <p:spPr>
           <a:xfrm>
-            <a:off x="566928" y="3803904"/>
-            <a:ext cx="34290" cy="237744"/>
+            <a:off x="6236208" y="1627632"/>
+            <a:ext cx="34290" cy="1207008"/>
           </a:xfrm>
           <a:prstGeom prst="rect">
             <a:avLst/>
@@ -5845,14 +5616,14 @@
       </p:sp>
       <p:sp>
         <p:nvSpPr>
-          <p:cNvPr id="26" name="TextBox 25"/>
-          <p:cNvSpPr txBox="1"/>
-          <p:nvPr/>
-        </p:nvSpPr>
-        <p:spPr>
-          <a:xfrm>
-            <a:off x="694944" y="3822192"/>
-            <a:ext cx="5376672" cy="219456"/>
+          <p:cNvPr id="18" name="TextBox 17"/>
+          <p:cNvSpPr txBox="1"/>
+          <p:nvPr/>
+        </p:nvSpPr>
+        <p:spPr>
+          <a:xfrm>
+            <a:off x="6437376" y="1755648"/>
+            <a:ext cx="2340864" cy="475488"/>
           </a:xfrm>
           <a:prstGeom prst="rect">
             <a:avLst/>
@@ -5874,27 +5645,88 @@
               </a:spcAft>
             </a:pPr>
             <a:r>
-              <a:rPr sz="1150" b="1">
-                <a:solidFill>
-                  <a:srgbClr val="119DA4"/>
-                </a:solidFill>
-                <a:latin typeface="微軟正黑體"/>
-              </a:rPr>
-              <a:t>規則與知識庫</a:t>
-            </a:r>
-          </a:p>
-        </p:txBody>
-      </p:sp>
-      <p:sp>
-        <p:nvSpPr>
-          <p:cNvPr id="27" name="Rectangle 26"/>
+              <a:rPr sz="3000" b="1">
+                <a:solidFill>
+                  <a:srgbClr val="102A43"/>
+                </a:solidFill>
+                <a:latin typeface="微軟正黑體"/>
+              </a:rPr>
+              <a:t>96 / 96</a:t>
+            </a:r>
+          </a:p>
+        </p:txBody>
+      </p:sp>
+      <p:sp>
+        <p:nvSpPr>
+          <p:cNvPr id="19" name="TextBox 18"/>
+          <p:cNvSpPr txBox="1"/>
+          <p:nvPr/>
+        </p:nvSpPr>
+        <p:spPr>
+          <a:xfrm>
+            <a:off x="6437376" y="2249424"/>
+            <a:ext cx="2340864" cy="502920"/>
+          </a:xfrm>
+          <a:prstGeom prst="rect">
+            <a:avLst/>
+          </a:prstGeom>
+          <a:noFill/>
+        </p:spPr>
+        <p:txBody>
+          <a:bodyPr wrap="square" lIns="0" rIns="0" tIns="0" bIns="0" anchor="t">
+            <a:spAutoFit/>
+          </a:bodyPr>
+          <a:lstStyle/>
+          <a:p>
+            <a:pPr algn="l">
+              <a:spcBef>
+                <a:spcPts val="0"/>
+              </a:spcBef>
+              <a:spcAft>
+                <a:spcPts val="200"/>
+              </a:spcAft>
+            </a:pPr>
+            <a:r>
+              <a:rPr sz="1300" b="1">
+                <a:solidFill>
+                  <a:srgbClr val="1B2633"/>
+                </a:solidFill>
+                <a:latin typeface="微軟正黑體"/>
+              </a:rPr>
+              <a:t>自動化測試通過</a:t>
+            </a:r>
+          </a:p>
+          <a:p>
+            <a:pPr>
+              <a:spcBef>
+                <a:spcPts val="0"/>
+              </a:spcBef>
+              <a:spcAft>
+                <a:spcPts val="0"/>
+              </a:spcAft>
+            </a:pPr>
+            <a:r>
+              <a:rPr sz="1050" b="0">
+                <a:solidFill>
+                  <a:srgbClr val="5B6B7B"/>
+                </a:solidFill>
+                <a:latin typeface="微軟正黑體"/>
+              </a:rPr>
+              <a:t>涵蓋差異判定、上下文、過濾、節流</a:t>
+            </a:r>
+          </a:p>
+        </p:txBody>
+      </p:sp>
+      <p:sp>
+        <p:nvSpPr>
+          <p:cNvPr id="20" name="Rectangle 19"/>
           <p:cNvSpPr/>
           <p:nvPr/>
         </p:nvSpPr>
         <p:spPr>
           <a:xfrm>
-            <a:off x="566928" y="4114800"/>
-            <a:ext cx="5376672" cy="310896"/>
+            <a:off x="9070848" y="1627632"/>
+            <a:ext cx="2560320" cy="1207008"/>
           </a:xfrm>
           <a:prstGeom prst="rect">
             <a:avLst/>
@@ -5931,266 +5763,14 @@
       </p:sp>
       <p:sp>
         <p:nvSpPr>
-          <p:cNvPr id="28" name="TextBox 27"/>
-          <p:cNvSpPr txBox="1"/>
-          <p:nvPr/>
-        </p:nvSpPr>
-        <p:spPr>
-          <a:xfrm>
-            <a:off x="694944" y="4178808"/>
-            <a:ext cx="1572768" cy="219456"/>
-          </a:xfrm>
-          <a:prstGeom prst="rect">
-            <a:avLst/>
-          </a:prstGeom>
-          <a:noFill/>
-        </p:spPr>
-        <p:txBody>
-          <a:bodyPr wrap="square" lIns="0" rIns="0" tIns="0" bIns="0" anchor="t">
-            <a:spAutoFit/>
-          </a:bodyPr>
-          <a:lstStyle/>
-          <a:p>
-            <a:pPr algn="l">
-              <a:spcBef>
-                <a:spcPts val="0"/>
-              </a:spcBef>
-              <a:spcAft>
-                <a:spcPts val="0"/>
-              </a:spcAft>
-            </a:pPr>
-            <a:r>
-              <a:rPr sz="1150" b="0">
-                <a:solidFill>
-                  <a:srgbClr val="1B2633"/>
-                </a:solidFill>
-                <a:latin typeface="微軟正黑體"/>
-              </a:rPr>
-              <a:t>團隊規則</a:t>
-            </a:r>
-          </a:p>
-        </p:txBody>
-      </p:sp>
-      <p:sp>
-        <p:nvSpPr>
-          <p:cNvPr id="29" name="TextBox 28"/>
-          <p:cNvSpPr txBox="1"/>
-          <p:nvPr/>
-        </p:nvSpPr>
-        <p:spPr>
-          <a:xfrm>
-            <a:off x="2322576" y="4169664"/>
-            <a:ext cx="1901952" cy="219456"/>
-          </a:xfrm>
-          <a:prstGeom prst="rect">
-            <a:avLst/>
-          </a:prstGeom>
-          <a:noFill/>
-        </p:spPr>
-        <p:txBody>
-          <a:bodyPr wrap="square" lIns="0" rIns="0" tIns="0" bIns="0" anchor="t">
-            <a:spAutoFit/>
-          </a:bodyPr>
-          <a:lstStyle/>
-          <a:p>
-            <a:pPr algn="l">
-              <a:spcBef>
-                <a:spcPts val="0"/>
-              </a:spcBef>
-              <a:spcAft>
-                <a:spcPts val="0"/>
-              </a:spcAft>
-            </a:pPr>
-            <a:r>
-              <a:rPr sz="1200" b="1">
-                <a:solidFill>
-                  <a:srgbClr val="102A43"/>
-                </a:solidFill>
-                <a:latin typeface="微軟正黑體"/>
-              </a:rPr>
-              <a:t>10 條（error 8／warning 2）</a:t>
-            </a:r>
-          </a:p>
-        </p:txBody>
-      </p:sp>
-      <p:sp>
-        <p:nvSpPr>
-          <p:cNvPr id="30" name="TextBox 29"/>
-          <p:cNvSpPr txBox="1"/>
-          <p:nvPr/>
-        </p:nvSpPr>
-        <p:spPr>
-          <a:xfrm>
-            <a:off x="4279391" y="4187952"/>
-            <a:ext cx="1572768" cy="219456"/>
-          </a:xfrm>
-          <a:prstGeom prst="rect">
-            <a:avLst/>
-          </a:prstGeom>
-          <a:noFill/>
-        </p:spPr>
-        <p:txBody>
-          <a:bodyPr wrap="square" lIns="0" rIns="0" tIns="0" bIns="0" anchor="t">
-            <a:spAutoFit/>
-          </a:bodyPr>
-          <a:lstStyle/>
-          <a:p>
-            <a:pPr algn="l">
-              <a:spcBef>
-                <a:spcPts val="0"/>
-              </a:spcBef>
-              <a:spcAft>
-                <a:spcPts val="0"/>
-              </a:spcAft>
-            </a:pPr>
-            <a:r>
-              <a:rPr sz="1000" b="0">
-                <a:solidFill>
-                  <a:srgbClr val="5B6B7B"/>
-                </a:solidFill>
-                <a:latin typeface="Consolas"/>
-              </a:rPr>
-              <a:t>.sensai/rules.yaml</a:t>
-            </a:r>
-          </a:p>
-        </p:txBody>
-      </p:sp>
-      <p:sp>
-        <p:nvSpPr>
-          <p:cNvPr id="31" name="TextBox 30"/>
-          <p:cNvSpPr txBox="1"/>
-          <p:nvPr/>
-        </p:nvSpPr>
-        <p:spPr>
-          <a:xfrm>
-            <a:off x="694944" y="4489704"/>
-            <a:ext cx="1572768" cy="219456"/>
-          </a:xfrm>
-          <a:prstGeom prst="rect">
-            <a:avLst/>
-          </a:prstGeom>
-          <a:noFill/>
-        </p:spPr>
-        <p:txBody>
-          <a:bodyPr wrap="square" lIns="0" rIns="0" tIns="0" bIns="0" anchor="t">
-            <a:spAutoFit/>
-          </a:bodyPr>
-          <a:lstStyle/>
-          <a:p>
-            <a:pPr algn="l">
-              <a:spcBef>
-                <a:spcPts val="0"/>
-              </a:spcBef>
-              <a:spcAft>
-                <a:spcPts val="0"/>
-              </a:spcAft>
-            </a:pPr>
-            <a:r>
-              <a:rPr sz="1150" b="0">
-                <a:solidFill>
-                  <a:srgbClr val="1B2633"/>
-                </a:solidFill>
-                <a:latin typeface="微軟正黑體"/>
-              </a:rPr>
-              <a:t>架構 ABI 事實</a:t>
-            </a:r>
-          </a:p>
-        </p:txBody>
-      </p:sp>
-      <p:sp>
-        <p:nvSpPr>
-          <p:cNvPr id="32" name="TextBox 31"/>
-          <p:cNvSpPr txBox="1"/>
-          <p:nvPr/>
-        </p:nvSpPr>
-        <p:spPr>
-          <a:xfrm>
-            <a:off x="2322576" y="4480560"/>
-            <a:ext cx="1901952" cy="219456"/>
-          </a:xfrm>
-          <a:prstGeom prst="rect">
-            <a:avLst/>
-          </a:prstGeom>
-          <a:noFill/>
-        </p:spPr>
-        <p:txBody>
-          <a:bodyPr wrap="square" lIns="0" rIns="0" tIns="0" bIns="0" anchor="t">
-            <a:spAutoFit/>
-          </a:bodyPr>
-          <a:lstStyle/>
-          <a:p>
-            <a:pPr algn="l">
-              <a:spcBef>
-                <a:spcPts val="0"/>
-              </a:spcBef>
-              <a:spcAft>
-                <a:spcPts val="0"/>
-              </a:spcAft>
-            </a:pPr>
-            <a:r>
-              <a:rPr sz="1200" b="1">
-                <a:solidFill>
-                  <a:srgbClr val="102A43"/>
-                </a:solidFill>
-                <a:latin typeface="微軟正黑體"/>
-              </a:rPr>
-              <a:t>2 組（Andes V5／ARMv7E-M）</a:t>
-            </a:r>
-          </a:p>
-        </p:txBody>
-      </p:sp>
-      <p:sp>
-        <p:nvSpPr>
-          <p:cNvPr id="33" name="TextBox 32"/>
-          <p:cNvSpPr txBox="1"/>
-          <p:nvPr/>
-        </p:nvSpPr>
-        <p:spPr>
-          <a:xfrm>
-            <a:off x="4279391" y="4498848"/>
-            <a:ext cx="1572768" cy="219456"/>
-          </a:xfrm>
-          <a:prstGeom prst="rect">
-            <a:avLst/>
-          </a:prstGeom>
-          <a:noFill/>
-        </p:spPr>
-        <p:txBody>
-          <a:bodyPr wrap="square" lIns="0" rIns="0" tIns="0" bIns="0" anchor="t">
-            <a:spAutoFit/>
-          </a:bodyPr>
-          <a:lstStyle/>
-          <a:p>
-            <a:pPr algn="l">
-              <a:spcBef>
-                <a:spcPts val="0"/>
-              </a:spcBef>
-              <a:spcAft>
-                <a:spcPts val="0"/>
-              </a:spcAft>
-            </a:pPr>
-            <a:r>
-              <a:rPr sz="1000" b="0">
-                <a:solidFill>
-                  <a:srgbClr val="5B6B7B"/>
-                </a:solidFill>
-                <a:latin typeface="Consolas"/>
-              </a:rPr>
-              <a:t>src/abi.ts</a:t>
-            </a:r>
-          </a:p>
-        </p:txBody>
-      </p:sp>
-      <p:sp>
-        <p:nvSpPr>
-          <p:cNvPr id="34" name="Rectangle 33"/>
+          <p:cNvPr id="21" name="Rectangle 20"/>
           <p:cNvSpPr/>
           <p:nvPr/>
         </p:nvSpPr>
         <p:spPr>
           <a:xfrm>
-            <a:off x="566928" y="4864608"/>
-            <a:ext cx="34290" cy="237744"/>
+            <a:off x="9070848" y="1627632"/>
+            <a:ext cx="34290" cy="1207008"/>
           </a:xfrm>
           <a:prstGeom prst="rect">
             <a:avLst/>
@@ -6227,14 +5807,14 @@
       </p:sp>
       <p:sp>
         <p:nvSpPr>
-          <p:cNvPr id="35" name="TextBox 34"/>
-          <p:cNvSpPr txBox="1"/>
-          <p:nvPr/>
-        </p:nvSpPr>
-        <p:spPr>
-          <a:xfrm>
-            <a:off x="694944" y="4882896"/>
-            <a:ext cx="5376672" cy="219456"/>
+          <p:cNvPr id="22" name="TextBox 21"/>
+          <p:cNvSpPr txBox="1"/>
+          <p:nvPr/>
+        </p:nvSpPr>
+        <p:spPr>
+          <a:xfrm>
+            <a:off x="9272016" y="1755648"/>
+            <a:ext cx="2249424" cy="475488"/>
           </a:xfrm>
           <a:prstGeom prst="rect">
             <a:avLst/>
@@ -6256,71 +5836,27 @@
               </a:spcAft>
             </a:pPr>
             <a:r>
-              <a:rPr sz="1150" b="1">
-                <a:solidFill>
-                  <a:srgbClr val="119DA4"/>
-                </a:solidFill>
-                <a:latin typeface="微軟正黑體"/>
-              </a:rPr>
-              <a:t>運作參數（預設值）</a:t>
-            </a:r>
-          </a:p>
-        </p:txBody>
-      </p:sp>
-      <p:sp>
-        <p:nvSpPr>
-          <p:cNvPr id="36" name="Rectangle 35"/>
-          <p:cNvSpPr/>
-          <p:nvPr/>
-        </p:nvSpPr>
-        <p:spPr>
-          <a:xfrm>
-            <a:off x="566928" y="5175504"/>
-            <a:ext cx="5376672" cy="310896"/>
-          </a:xfrm>
-          <a:prstGeom prst="rect">
-            <a:avLst/>
-          </a:prstGeom>
-          <a:solidFill>
-            <a:srgbClr val="F2F5F8"/>
-          </a:solidFill>
-          <a:ln>
-            <a:noFill/>
-          </a:ln>
-          <a:effectLst/>
-        </p:spPr>
-        <p:style>
-          <a:lnRef idx="1">
-            <a:schemeClr val="accent1"/>
-          </a:lnRef>
-          <a:fillRef idx="3">
-            <a:schemeClr val="accent1"/>
-          </a:fillRef>
-          <a:effectRef idx="2">
-            <a:schemeClr val="accent1"/>
-          </a:effectRef>
-          <a:fontRef idx="minor">
-            <a:schemeClr val="lt1"/>
-          </a:fontRef>
-        </p:style>
-        <p:txBody>
-          <a:bodyPr rtlCol="0" anchor="ctr"/>
-          <a:lstStyle/>
-          <a:p>
-            <a:pPr algn="ctr"/>
-          </a:p>
-        </p:txBody>
-      </p:sp>
-      <p:sp>
-        <p:nvSpPr>
-          <p:cNvPr id="37" name="TextBox 36"/>
-          <p:cNvSpPr txBox="1"/>
-          <p:nvPr/>
-        </p:nvSpPr>
-        <p:spPr>
-          <a:xfrm>
-            <a:off x="694944" y="5239512"/>
-            <a:ext cx="1572768" cy="219456"/>
+              <a:rPr sz="3000" b="1">
+                <a:solidFill>
+                  <a:srgbClr val="102A43"/>
+                </a:solidFill>
+                <a:latin typeface="微軟正黑體"/>
+              </a:rPr>
+              <a:t>v0.5.1</a:t>
+            </a:r>
+          </a:p>
+        </p:txBody>
+      </p:sp>
+      <p:sp>
+        <p:nvSpPr>
+          <p:cNvPr id="23" name="TextBox 22"/>
+          <p:cNvSpPr txBox="1"/>
+          <p:nvPr/>
+        </p:nvSpPr>
+        <p:spPr>
+          <a:xfrm>
+            <a:off x="9272016" y="2249424"/>
+            <a:ext cx="2249424" cy="502920"/>
           </a:xfrm>
           <a:prstGeom prst="rect">
             <a:avLst/>
@@ -6338,31 +5874,50 @@
                 <a:spcPts val="0"/>
               </a:spcBef>
               <a:spcAft>
-                <a:spcPts val="0"/>
-              </a:spcAft>
-            </a:pPr>
-            <a:r>
-              <a:rPr sz="1150" b="0">
+                <a:spcPts val="200"/>
+              </a:spcAft>
+            </a:pPr>
+            <a:r>
+              <a:rPr sz="1300" b="1">
                 <a:solidFill>
                   <a:srgbClr val="1B2633"/>
                 </a:solidFill>
                 <a:latin typeface="微軟正黑體"/>
               </a:rPr>
-              <a:t>存檔去抖動</a:t>
-            </a:r>
-          </a:p>
-        </p:txBody>
-      </p:sp>
-      <p:sp>
-        <p:nvSpPr>
-          <p:cNvPr id="38" name="TextBox 37"/>
-          <p:cNvSpPr txBox="1"/>
-          <p:nvPr/>
-        </p:nvSpPr>
-        <p:spPr>
-          <a:xfrm>
-            <a:off x="2322576" y="5230368"/>
-            <a:ext cx="1901952" cy="219456"/>
+              <a:t>目前版本</a:t>
+            </a:r>
+          </a:p>
+          <a:p>
+            <a:pPr>
+              <a:spcBef>
+                <a:spcPts val="0"/>
+              </a:spcBef>
+              <a:spcAft>
+                <a:spcPts val="0"/>
+              </a:spcAft>
+            </a:pPr>
+            <a:r>
+              <a:rPr sz="1050" b="0">
+                <a:solidFill>
+                  <a:srgbClr val="5B6B7B"/>
+                </a:solidFill>
+                <a:latin typeface="微軟正黑體"/>
+              </a:rPr>
+              <a:t>已可安裝於 VS Code 使用</a:t>
+            </a:r>
+          </a:p>
+        </p:txBody>
+      </p:sp>
+      <p:sp>
+        <p:nvSpPr>
+          <p:cNvPr id="24" name="TextBox 23"/>
+          <p:cNvSpPr txBox="1"/>
+          <p:nvPr/>
+        </p:nvSpPr>
+        <p:spPr>
+          <a:xfrm>
+            <a:off x="566928" y="3108960"/>
+            <a:ext cx="5486400" cy="320040"/>
           </a:xfrm>
           <a:prstGeom prst="rect">
             <a:avLst/>
@@ -6380,1035 +5935,301 @@
                 <a:spcPts val="0"/>
               </a:spcBef>
               <a:spcAft>
-                <a:spcPts val="0"/>
-              </a:spcAft>
-            </a:pPr>
-            <a:r>
-              <a:rPr sz="1200" b="1">
+                <a:spcPts val="900"/>
+              </a:spcAft>
+            </a:pPr>
+            <a:r>
+              <a:rPr sz="1500" b="1">
                 <a:solidFill>
                   <a:srgbClr val="102A43"/>
                 </a:solidFill>
                 <a:latin typeface="微軟正黑體"/>
               </a:rPr>
-              <a:t>1,000 ms</a:t>
-            </a:r>
-          </a:p>
-        </p:txBody>
-      </p:sp>
-      <p:sp>
-        <p:nvSpPr>
-          <p:cNvPr id="39" name="TextBox 38"/>
-          <p:cNvSpPr txBox="1"/>
-          <p:nvPr/>
-        </p:nvSpPr>
-        <p:spPr>
-          <a:xfrm>
-            <a:off x="4279391" y="5248656"/>
-            <a:ext cx="1572768" cy="219456"/>
-          </a:xfrm>
-          <a:prstGeom prst="rect">
-            <a:avLst/>
-          </a:prstGeom>
-          <a:noFill/>
-        </p:spPr>
-        <p:txBody>
-          <a:bodyPr wrap="square" lIns="0" rIns="0" tIns="0" bIns="0" anchor="t">
-            <a:spAutoFit/>
-          </a:bodyPr>
-          <a:lstStyle/>
-          <a:p>
-            <a:pPr algn="l">
-              <a:spcBef>
-                <a:spcPts val="0"/>
-              </a:spcBef>
-              <a:spcAft>
-                <a:spcPts val="0"/>
-              </a:spcAft>
-            </a:pPr>
-            <a:r>
-              <a:rPr sz="1000" b="0">
-                <a:solidFill>
-                  <a:srgbClr val="5B6B7B"/>
-                </a:solidFill>
-                <a:latin typeface="Consolas"/>
-              </a:rPr>
-              <a:t>sensai.debounceMs</a:t>
-            </a:r>
-          </a:p>
-        </p:txBody>
-      </p:sp>
-      <p:sp>
-        <p:nvSpPr>
-          <p:cNvPr id="40" name="TextBox 39"/>
-          <p:cNvSpPr txBox="1"/>
-          <p:nvPr/>
-        </p:nvSpPr>
-        <p:spPr>
-          <a:xfrm>
-            <a:off x="694944" y="5550408"/>
-            <a:ext cx="1572768" cy="219456"/>
-          </a:xfrm>
-          <a:prstGeom prst="rect">
-            <a:avLst/>
-          </a:prstGeom>
-          <a:noFill/>
-        </p:spPr>
-        <p:txBody>
-          <a:bodyPr wrap="square" lIns="0" rIns="0" tIns="0" bIns="0" anchor="t">
-            <a:spAutoFit/>
-          </a:bodyPr>
-          <a:lstStyle/>
-          <a:p>
-            <a:pPr algn="l">
-              <a:spcBef>
-                <a:spcPts val="0"/>
-              </a:spcBef>
-              <a:spcAft>
-                <a:spcPts val="0"/>
-              </a:spcAft>
-            </a:pPr>
-            <a:r>
-              <a:rPr sz="1150" b="0">
-                <a:solidFill>
-                  <a:srgbClr val="1B2633"/>
-                </a:solidFill>
-                <a:latin typeface="微軟正黑體"/>
-              </a:rPr>
-              <a:t>上下文上限</a:t>
-            </a:r>
-          </a:p>
-        </p:txBody>
-      </p:sp>
-      <p:sp>
-        <p:nvSpPr>
-          <p:cNvPr id="41" name="TextBox 40"/>
-          <p:cNvSpPr txBox="1"/>
-          <p:nvPr/>
-        </p:nvSpPr>
-        <p:spPr>
-          <a:xfrm>
-            <a:off x="2322576" y="5541264"/>
-            <a:ext cx="1901952" cy="219456"/>
-          </a:xfrm>
-          <a:prstGeom prst="rect">
-            <a:avLst/>
-          </a:prstGeom>
-          <a:noFill/>
-        </p:spPr>
-        <p:txBody>
-          <a:bodyPr wrap="square" lIns="0" rIns="0" tIns="0" bIns="0" anchor="t">
-            <a:spAutoFit/>
-          </a:bodyPr>
-          <a:lstStyle/>
-          <a:p>
-            <a:pPr algn="l">
-              <a:spcBef>
-                <a:spcPts val="0"/>
-              </a:spcBef>
-              <a:spcAft>
-                <a:spcPts val="0"/>
-              </a:spcAft>
-            </a:pPr>
-            <a:r>
-              <a:rPr sz="1200" b="1">
-                <a:solidFill>
-                  <a:srgbClr val="102A43"/>
-                </a:solidFill>
-                <a:latin typeface="微軟正黑體"/>
-              </a:rPr>
-              <a:t>120 KB ／ include 深度 2</a:t>
-            </a:r>
-          </a:p>
-        </p:txBody>
-      </p:sp>
-      <p:sp>
-        <p:nvSpPr>
-          <p:cNvPr id="42" name="TextBox 41"/>
-          <p:cNvSpPr txBox="1"/>
-          <p:nvPr/>
-        </p:nvSpPr>
-        <p:spPr>
-          <a:xfrm>
-            <a:off x="4279391" y="5559552"/>
-            <a:ext cx="1572768" cy="219456"/>
-          </a:xfrm>
-          <a:prstGeom prst="rect">
-            <a:avLst/>
-          </a:prstGeom>
-          <a:noFill/>
-        </p:spPr>
-        <p:txBody>
-          <a:bodyPr wrap="square" lIns="0" rIns="0" tIns="0" bIns="0" anchor="t">
-            <a:spAutoFit/>
-          </a:bodyPr>
-          <a:lstStyle/>
-          <a:p>
-            <a:pPr algn="l">
-              <a:spcBef>
-                <a:spcPts val="0"/>
-              </a:spcBef>
-              <a:spcAft>
-                <a:spcPts val="0"/>
-              </a:spcAft>
-            </a:pPr>
-            <a:r>
-              <a:rPr sz="1000" b="0">
-                <a:solidFill>
-                  <a:srgbClr val="5B6B7B"/>
-                </a:solidFill>
-                <a:latin typeface="Consolas"/>
-              </a:rPr>
-              <a:t>sensai.includeDepth</a:t>
-            </a:r>
-          </a:p>
-        </p:txBody>
-      </p:sp>
-      <p:sp>
-        <p:nvSpPr>
-          <p:cNvPr id="43" name="Rectangle 42"/>
-          <p:cNvSpPr/>
-          <p:nvPr/>
-        </p:nvSpPr>
-        <p:spPr>
-          <a:xfrm>
-            <a:off x="6254496" y="2121408"/>
-            <a:ext cx="34290" cy="237744"/>
-          </a:xfrm>
-          <a:prstGeom prst="rect">
-            <a:avLst/>
-          </a:prstGeom>
-          <a:solidFill>
-            <a:srgbClr val="D18616"/>
-          </a:solidFill>
-          <a:ln>
-            <a:noFill/>
-          </a:ln>
-          <a:effectLst/>
-        </p:spPr>
-        <p:style>
-          <a:lnRef idx="1">
-            <a:schemeClr val="accent1"/>
-          </a:lnRef>
-          <a:fillRef idx="3">
-            <a:schemeClr val="accent1"/>
-          </a:fillRef>
-          <a:effectRef idx="2">
-            <a:schemeClr val="accent1"/>
-          </a:effectRef>
-          <a:fontRef idx="minor">
-            <a:schemeClr val="lt1"/>
-          </a:fontRef>
-        </p:style>
-        <p:txBody>
-          <a:bodyPr rtlCol="0" anchor="ctr"/>
-          <a:lstStyle/>
-          <a:p>
-            <a:pPr algn="ctr"/>
-          </a:p>
-        </p:txBody>
-      </p:sp>
-      <p:sp>
-        <p:nvSpPr>
-          <p:cNvPr id="44" name="TextBox 43"/>
-          <p:cNvSpPr txBox="1"/>
-          <p:nvPr/>
-        </p:nvSpPr>
-        <p:spPr>
-          <a:xfrm>
-            <a:off x="6382512" y="2139696"/>
-            <a:ext cx="5376672" cy="219456"/>
-          </a:xfrm>
-          <a:prstGeom prst="rect">
-            <a:avLst/>
-          </a:prstGeom>
-          <a:noFill/>
-        </p:spPr>
-        <p:txBody>
-          <a:bodyPr wrap="square" lIns="0" rIns="0" tIns="0" bIns="0" anchor="t">
-            <a:spAutoFit/>
-          </a:bodyPr>
-          <a:lstStyle/>
-          <a:p>
-            <a:pPr algn="l">
-              <a:spcBef>
-                <a:spcPts val="0"/>
-              </a:spcBef>
-              <a:spcAft>
-                <a:spcPts val="0"/>
-              </a:spcAft>
-            </a:pPr>
-            <a:r>
-              <a:rPr sz="1150" b="1">
-                <a:solidFill>
-                  <a:srgbClr val="D18616"/>
-                </a:solidFill>
-                <a:latin typeface="微軟正黑體"/>
-              </a:rPr>
-              <a:t>實際執行觀測（樣本數 n＝1）</a:t>
-            </a:r>
-          </a:p>
-        </p:txBody>
-      </p:sp>
-      <p:sp>
-        <p:nvSpPr>
-          <p:cNvPr id="45" name="Rectangle 44"/>
-          <p:cNvSpPr/>
-          <p:nvPr/>
-        </p:nvSpPr>
-        <p:spPr>
-          <a:xfrm>
-            <a:off x="6254496" y="2432304"/>
-            <a:ext cx="5376672" cy="310896"/>
-          </a:xfrm>
-          <a:prstGeom prst="rect">
-            <a:avLst/>
-          </a:prstGeom>
-          <a:solidFill>
-            <a:srgbClr val="F2F5F8"/>
-          </a:solidFill>
-          <a:ln>
-            <a:noFill/>
-          </a:ln>
-          <a:effectLst/>
-        </p:spPr>
-        <p:style>
-          <a:lnRef idx="1">
-            <a:schemeClr val="accent1"/>
-          </a:lnRef>
-          <a:fillRef idx="3">
-            <a:schemeClr val="accent1"/>
-          </a:fillRef>
-          <a:effectRef idx="2">
-            <a:schemeClr val="accent1"/>
-          </a:effectRef>
-          <a:fontRef idx="minor">
-            <a:schemeClr val="lt1"/>
-          </a:fontRef>
-        </p:style>
-        <p:txBody>
-          <a:bodyPr rtlCol="0" anchor="ctr"/>
-          <a:lstStyle/>
-          <a:p>
-            <a:pPr algn="ctr"/>
-          </a:p>
-        </p:txBody>
-      </p:sp>
-      <p:sp>
-        <p:nvSpPr>
-          <p:cNvPr id="46" name="TextBox 45"/>
-          <p:cNvSpPr txBox="1"/>
-          <p:nvPr/>
-        </p:nvSpPr>
-        <p:spPr>
-          <a:xfrm>
-            <a:off x="6382512" y="2496312"/>
-            <a:ext cx="1572768" cy="219456"/>
-          </a:xfrm>
-          <a:prstGeom prst="rect">
-            <a:avLst/>
-          </a:prstGeom>
-          <a:noFill/>
-        </p:spPr>
-        <p:txBody>
-          <a:bodyPr wrap="square" lIns="0" rIns="0" tIns="0" bIns="0" anchor="t">
-            <a:spAutoFit/>
-          </a:bodyPr>
-          <a:lstStyle/>
-          <a:p>
-            <a:pPr algn="l">
-              <a:spcBef>
-                <a:spcPts val="0"/>
-              </a:spcBef>
-              <a:spcAft>
-                <a:spcPts val="0"/>
-              </a:spcAft>
-            </a:pPr>
-            <a:r>
-              <a:rPr sz="1150" b="0">
-                <a:solidFill>
-                  <a:srgbClr val="1B2633"/>
-                </a:solidFill>
-                <a:latin typeface="微軟正黑體"/>
-              </a:rPr>
-              <a:t>單檔審查耗時</a:t>
-            </a:r>
-          </a:p>
-        </p:txBody>
-      </p:sp>
-      <p:sp>
-        <p:nvSpPr>
-          <p:cNvPr id="47" name="TextBox 46"/>
-          <p:cNvSpPr txBox="1"/>
-          <p:nvPr/>
-        </p:nvSpPr>
-        <p:spPr>
-          <a:xfrm>
-            <a:off x="8010144" y="2487168"/>
-            <a:ext cx="1901952" cy="219456"/>
-          </a:xfrm>
-          <a:prstGeom prst="rect">
-            <a:avLst/>
-          </a:prstGeom>
-          <a:noFill/>
-        </p:spPr>
-        <p:txBody>
-          <a:bodyPr wrap="square" lIns="0" rIns="0" tIns="0" bIns="0" anchor="t">
-            <a:spAutoFit/>
-          </a:bodyPr>
-          <a:lstStyle/>
-          <a:p>
-            <a:pPr algn="l">
-              <a:spcBef>
-                <a:spcPts val="0"/>
-              </a:spcBef>
-              <a:spcAft>
-                <a:spcPts val="0"/>
-              </a:spcAft>
-            </a:pPr>
-            <a:r>
-              <a:rPr sz="1200" b="1">
-                <a:solidFill>
-                  <a:srgbClr val="102A43"/>
-                </a:solidFill>
-                <a:latin typeface="微軟正黑體"/>
-              </a:rPr>
-              <a:t>65.9 秒</a:t>
-            </a:r>
-          </a:p>
-        </p:txBody>
-      </p:sp>
-      <p:sp>
-        <p:nvSpPr>
-          <p:cNvPr id="48" name="TextBox 47"/>
-          <p:cNvSpPr txBox="1"/>
-          <p:nvPr/>
-        </p:nvSpPr>
-        <p:spPr>
-          <a:xfrm>
-            <a:off x="9966959" y="2505456"/>
-            <a:ext cx="1572768" cy="219456"/>
-          </a:xfrm>
-          <a:prstGeom prst="rect">
-            <a:avLst/>
-          </a:prstGeom>
-          <a:noFill/>
-        </p:spPr>
-        <p:txBody>
-          <a:bodyPr wrap="square" lIns="0" rIns="0" tIns="0" bIns="0" anchor="t">
-            <a:spAutoFit/>
-          </a:bodyPr>
-          <a:lstStyle/>
-          <a:p>
-            <a:pPr algn="l">
-              <a:spcBef>
-                <a:spcPts val="0"/>
-              </a:spcBef>
-              <a:spcAft>
-                <a:spcPts val="0"/>
-              </a:spcAft>
-            </a:pPr>
-            <a:r>
-              <a:rPr sz="1000" b="0">
-                <a:solidFill>
-                  <a:srgbClr val="5B6B7B"/>
-                </a:solidFill>
-                <a:latin typeface="Consolas"/>
-              </a:rPr>
-              <a:t>phal_sys.c 實機</a:t>
-            </a:r>
-          </a:p>
-        </p:txBody>
-      </p:sp>
-      <p:sp>
-        <p:nvSpPr>
-          <p:cNvPr id="49" name="TextBox 48"/>
-          <p:cNvSpPr txBox="1"/>
-          <p:nvPr/>
-        </p:nvSpPr>
-        <p:spPr>
-          <a:xfrm>
-            <a:off x="6382512" y="2807208"/>
-            <a:ext cx="1572768" cy="219456"/>
-          </a:xfrm>
-          <a:prstGeom prst="rect">
-            <a:avLst/>
-          </a:prstGeom>
-          <a:noFill/>
-        </p:spPr>
-        <p:txBody>
-          <a:bodyPr wrap="square" lIns="0" rIns="0" tIns="0" bIns="0" anchor="t">
-            <a:spAutoFit/>
-          </a:bodyPr>
-          <a:lstStyle/>
-          <a:p>
-            <a:pPr algn="l">
-              <a:spcBef>
-                <a:spcPts val="0"/>
-              </a:spcBef>
-              <a:spcAft>
-                <a:spcPts val="0"/>
-              </a:spcAft>
-            </a:pPr>
-            <a:r>
-              <a:rPr sz="1150" b="0">
-                <a:solidFill>
-                  <a:srgbClr val="1B2633"/>
-                </a:solidFill>
-                <a:latin typeface="微軟正黑體"/>
-              </a:rPr>
-              <a:t>附帶 header</a:t>
-            </a:r>
-          </a:p>
-        </p:txBody>
-      </p:sp>
-      <p:sp>
-        <p:nvSpPr>
-          <p:cNvPr id="50" name="TextBox 49"/>
-          <p:cNvSpPr txBox="1"/>
-          <p:nvPr/>
-        </p:nvSpPr>
-        <p:spPr>
-          <a:xfrm>
-            <a:off x="8010144" y="2798064"/>
-            <a:ext cx="1901952" cy="219456"/>
-          </a:xfrm>
-          <a:prstGeom prst="rect">
-            <a:avLst/>
-          </a:prstGeom>
-          <a:noFill/>
-        </p:spPr>
-        <p:txBody>
-          <a:bodyPr wrap="square" lIns="0" rIns="0" tIns="0" bIns="0" anchor="t">
-            <a:spAutoFit/>
-          </a:bodyPr>
-          <a:lstStyle/>
-          <a:p>
-            <a:pPr algn="l">
-              <a:spcBef>
-                <a:spcPts val="0"/>
-              </a:spcBef>
-              <a:spcAft>
-                <a:spcPts val="0"/>
-              </a:spcAft>
-            </a:pPr>
-            <a:r>
-              <a:rPr sz="1200" b="1">
-                <a:solidFill>
-                  <a:srgbClr val="102A43"/>
-                </a:solidFill>
-                <a:latin typeface="微軟正黑體"/>
-              </a:rPr>
-              <a:t>18 個（上下文已截斷）</a:t>
-            </a:r>
-          </a:p>
-        </p:txBody>
-      </p:sp>
-      <p:sp>
-        <p:nvSpPr>
-          <p:cNvPr id="51" name="TextBox 50"/>
-          <p:cNvSpPr txBox="1"/>
-          <p:nvPr/>
-        </p:nvSpPr>
-        <p:spPr>
-          <a:xfrm>
-            <a:off x="9966959" y="2816352"/>
-            <a:ext cx="1572768" cy="219456"/>
-          </a:xfrm>
-          <a:prstGeom prst="rect">
-            <a:avLst/>
-          </a:prstGeom>
-          <a:noFill/>
-        </p:spPr>
-        <p:txBody>
-          <a:bodyPr wrap="square" lIns="0" rIns="0" tIns="0" bIns="0" anchor="t">
-            <a:spAutoFit/>
-          </a:bodyPr>
-          <a:lstStyle/>
-          <a:p>
-            <a:pPr algn="l">
-              <a:spcBef>
-                <a:spcPts val="0"/>
-              </a:spcBef>
-              <a:spcAft>
-                <a:spcPts val="0"/>
-              </a:spcAft>
-            </a:pPr>
-            <a:r>
-              <a:rPr sz="1000" b="0">
-                <a:solidFill>
-                  <a:srgbClr val="5B6B7B"/>
-                </a:solidFill>
-                <a:latin typeface="Consolas"/>
-              </a:rPr>
-              <a:t>同上</a:t>
-            </a:r>
-          </a:p>
-        </p:txBody>
-      </p:sp>
-      <p:sp>
-        <p:nvSpPr>
-          <p:cNvPr id="52" name="Rectangle 51"/>
-          <p:cNvSpPr/>
-          <p:nvPr/>
-        </p:nvSpPr>
-        <p:spPr>
-          <a:xfrm>
-            <a:off x="6254496" y="3054096"/>
-            <a:ext cx="5376672" cy="310896"/>
-          </a:xfrm>
-          <a:prstGeom prst="rect">
-            <a:avLst/>
-          </a:prstGeom>
-          <a:solidFill>
-            <a:srgbClr val="F2F5F8"/>
-          </a:solidFill>
-          <a:ln>
-            <a:noFill/>
-          </a:ln>
-          <a:effectLst/>
-        </p:spPr>
-        <p:style>
-          <a:lnRef idx="1">
-            <a:schemeClr val="accent1"/>
-          </a:lnRef>
-          <a:fillRef idx="3">
-            <a:schemeClr val="accent1"/>
-          </a:fillRef>
-          <a:effectRef idx="2">
-            <a:schemeClr val="accent1"/>
-          </a:effectRef>
-          <a:fontRef idx="minor">
-            <a:schemeClr val="lt1"/>
-          </a:fontRef>
-        </p:style>
-        <p:txBody>
-          <a:bodyPr rtlCol="0" anchor="ctr"/>
-          <a:lstStyle/>
-          <a:p>
-            <a:pPr algn="ctr"/>
-          </a:p>
-        </p:txBody>
-      </p:sp>
-      <p:sp>
-        <p:nvSpPr>
-          <p:cNvPr id="53" name="TextBox 52"/>
-          <p:cNvSpPr txBox="1"/>
-          <p:nvPr/>
-        </p:nvSpPr>
-        <p:spPr>
-          <a:xfrm>
-            <a:off x="6382512" y="3118104"/>
-            <a:ext cx="1572768" cy="219456"/>
-          </a:xfrm>
-          <a:prstGeom prst="rect">
-            <a:avLst/>
-          </a:prstGeom>
-          <a:noFill/>
-        </p:spPr>
-        <p:txBody>
-          <a:bodyPr wrap="square" lIns="0" rIns="0" tIns="0" bIns="0" anchor="t">
-            <a:spAutoFit/>
-          </a:bodyPr>
-          <a:lstStyle/>
-          <a:p>
-            <a:pPr algn="l">
-              <a:spcBef>
-                <a:spcPts val="0"/>
-              </a:spcBef>
-              <a:spcAft>
-                <a:spcPts val="0"/>
-              </a:spcAft>
-            </a:pPr>
-            <a:r>
-              <a:rPr sz="1150" b="0">
-                <a:solidFill>
-                  <a:srgbClr val="1B2633"/>
-                </a:solidFill>
-                <a:latin typeface="微軟正黑體"/>
-              </a:rPr>
-              <a:t>產生意見</a:t>
-            </a:r>
-          </a:p>
-        </p:txBody>
-      </p:sp>
-      <p:sp>
-        <p:nvSpPr>
-          <p:cNvPr id="54" name="TextBox 53"/>
-          <p:cNvSpPr txBox="1"/>
-          <p:nvPr/>
-        </p:nvSpPr>
-        <p:spPr>
-          <a:xfrm>
-            <a:off x="8010144" y="3108960"/>
-            <a:ext cx="1901952" cy="219456"/>
-          </a:xfrm>
-          <a:prstGeom prst="rect">
-            <a:avLst/>
-          </a:prstGeom>
-          <a:noFill/>
-        </p:spPr>
-        <p:txBody>
-          <a:bodyPr wrap="square" lIns="0" rIns="0" tIns="0" bIns="0" anchor="t">
-            <a:spAutoFit/>
-          </a:bodyPr>
-          <a:lstStyle/>
-          <a:p>
-            <a:pPr algn="l">
-              <a:spcBef>
-                <a:spcPts val="0"/>
-              </a:spcBef>
-              <a:spcAft>
-                <a:spcPts val="0"/>
-              </a:spcAft>
-            </a:pPr>
-            <a:r>
-              <a:rPr sz="1200" b="1">
-                <a:solidFill>
-                  <a:srgbClr val="102A43"/>
-                </a:solidFill>
-                <a:latin typeface="微軟正黑體"/>
-              </a:rPr>
-              <a:t>1 則 error，無誤報</a:t>
-            </a:r>
-          </a:p>
-        </p:txBody>
-      </p:sp>
-      <p:sp>
-        <p:nvSpPr>
-          <p:cNvPr id="55" name="TextBox 54"/>
-          <p:cNvSpPr txBox="1"/>
-          <p:nvPr/>
-        </p:nvSpPr>
-        <p:spPr>
-          <a:xfrm>
-            <a:off x="9966959" y="3127248"/>
-            <a:ext cx="1572768" cy="219456"/>
-          </a:xfrm>
-          <a:prstGeom prst="rect">
-            <a:avLst/>
-          </a:prstGeom>
-          <a:noFill/>
-        </p:spPr>
-        <p:txBody>
-          <a:bodyPr wrap="square" lIns="0" rIns="0" tIns="0" bIns="0" anchor="t">
-            <a:spAutoFit/>
-          </a:bodyPr>
-          <a:lstStyle/>
-          <a:p>
-            <a:pPr algn="l">
-              <a:spcBef>
-                <a:spcPts val="0"/>
-              </a:spcBef>
-              <a:spcAft>
-                <a:spcPts val="0"/>
-              </a:spcAft>
-            </a:pPr>
-            <a:r>
-              <a:rPr sz="1000" b="0">
-                <a:solidFill>
-                  <a:srgbClr val="5B6B7B"/>
-                </a:solidFill>
-                <a:latin typeface="Consolas"/>
-              </a:rPr>
-              <a:t>同上</a:t>
-            </a:r>
-          </a:p>
-        </p:txBody>
-      </p:sp>
-      <p:sp>
-        <p:nvSpPr>
-          <p:cNvPr id="56" name="TextBox 55"/>
-          <p:cNvSpPr txBox="1"/>
-          <p:nvPr/>
-        </p:nvSpPr>
-        <p:spPr>
-          <a:xfrm>
-            <a:off x="6382512" y="3429000"/>
-            <a:ext cx="1572768" cy="219456"/>
-          </a:xfrm>
-          <a:prstGeom prst="rect">
-            <a:avLst/>
-          </a:prstGeom>
-          <a:noFill/>
-        </p:spPr>
-        <p:txBody>
-          <a:bodyPr wrap="square" lIns="0" rIns="0" tIns="0" bIns="0" anchor="t">
-            <a:spAutoFit/>
-          </a:bodyPr>
-          <a:lstStyle/>
-          <a:p>
-            <a:pPr algn="l">
-              <a:spcBef>
-                <a:spcPts val="0"/>
-              </a:spcBef>
-              <a:spcAft>
-                <a:spcPts val="0"/>
-              </a:spcAft>
-            </a:pPr>
-            <a:r>
-              <a:rPr sz="1150" b="0">
-                <a:solidFill>
-                  <a:srgbClr val="1B2633"/>
-                </a:solidFill>
-                <a:latin typeface="微軟正黑體"/>
-              </a:rPr>
-              <a:t>命中缺陷潛伏</a:t>
-            </a:r>
-          </a:p>
-        </p:txBody>
-      </p:sp>
-      <p:sp>
-        <p:nvSpPr>
-          <p:cNvPr id="57" name="TextBox 56"/>
-          <p:cNvSpPr txBox="1"/>
-          <p:nvPr/>
-        </p:nvSpPr>
-        <p:spPr>
-          <a:xfrm>
-            <a:off x="8010144" y="3419856"/>
-            <a:ext cx="1901952" cy="219456"/>
-          </a:xfrm>
-          <a:prstGeom prst="rect">
-            <a:avLst/>
-          </a:prstGeom>
-          <a:noFill/>
-        </p:spPr>
-        <p:txBody>
-          <a:bodyPr wrap="square" lIns="0" rIns="0" tIns="0" bIns="0" anchor="t">
-            <a:spAutoFit/>
-          </a:bodyPr>
-          <a:lstStyle/>
-          <a:p>
-            <a:pPr algn="l">
-              <a:spcBef>
-                <a:spcPts val="0"/>
-              </a:spcBef>
-              <a:spcAft>
-                <a:spcPts val="0"/>
-              </a:spcAft>
-            </a:pPr>
-            <a:r>
-              <a:rPr sz="1200" b="1">
-                <a:solidFill>
-                  <a:srgbClr val="102A43"/>
-                </a:solidFill>
-                <a:latin typeface="微軟正黑體"/>
-              </a:rPr>
-              <a:t>7 個月</a:t>
-            </a:r>
-          </a:p>
-        </p:txBody>
-      </p:sp>
-      <p:sp>
-        <p:nvSpPr>
-          <p:cNvPr id="58" name="TextBox 57"/>
-          <p:cNvSpPr txBox="1"/>
-          <p:nvPr/>
-        </p:nvSpPr>
-        <p:spPr>
-          <a:xfrm>
-            <a:off x="9966959" y="3438144"/>
-            <a:ext cx="1572768" cy="219456"/>
-          </a:xfrm>
-          <a:prstGeom prst="rect">
-            <a:avLst/>
-          </a:prstGeom>
-          <a:noFill/>
-        </p:spPr>
-        <p:txBody>
-          <a:bodyPr wrap="square" lIns="0" rIns="0" tIns="0" bIns="0" anchor="t">
-            <a:spAutoFit/>
-          </a:bodyPr>
-          <a:lstStyle/>
-          <a:p>
-            <a:pPr algn="l">
-              <a:spcBef>
-                <a:spcPts val="0"/>
-              </a:spcBef>
-              <a:spcAft>
-                <a:spcPts val="0"/>
-              </a:spcAft>
-            </a:pPr>
-            <a:r>
-              <a:rPr sz="1000" b="0">
-                <a:solidFill>
-                  <a:srgbClr val="5B6B7B"/>
-                </a:solidFill>
-                <a:latin typeface="Consolas"/>
-              </a:rPr>
-              <a:t>git blame</a:t>
-            </a:r>
-          </a:p>
-        </p:txBody>
-      </p:sp>
-      <p:sp>
-        <p:nvSpPr>
-          <p:cNvPr id="59" name="Rectangle 58"/>
-          <p:cNvSpPr/>
-          <p:nvPr/>
-        </p:nvSpPr>
-        <p:spPr>
-          <a:xfrm>
-            <a:off x="6254496" y="3858768"/>
-            <a:ext cx="5376672" cy="1828800"/>
-          </a:xfrm>
-          <a:prstGeom prst="rect">
-            <a:avLst/>
-          </a:prstGeom>
-          <a:solidFill>
-            <a:srgbClr val="F2F5F8"/>
-          </a:solidFill>
-          <a:ln>
-            <a:noFill/>
-          </a:ln>
-          <a:effectLst/>
-        </p:spPr>
-        <p:style>
-          <a:lnRef idx="1">
-            <a:schemeClr val="accent1"/>
-          </a:lnRef>
-          <a:fillRef idx="3">
-            <a:schemeClr val="accent1"/>
-          </a:fillRef>
-          <a:effectRef idx="2">
-            <a:schemeClr val="accent1"/>
-          </a:effectRef>
-          <a:fontRef idx="minor">
-            <a:schemeClr val="lt1"/>
-          </a:fontRef>
-        </p:style>
-        <p:txBody>
-          <a:bodyPr rtlCol="0" anchor="ctr"/>
-          <a:lstStyle/>
-          <a:p>
-            <a:pPr algn="ctr"/>
-          </a:p>
-        </p:txBody>
-      </p:sp>
-      <p:sp>
-        <p:nvSpPr>
-          <p:cNvPr id="60" name="TextBox 59"/>
-          <p:cNvSpPr txBox="1"/>
-          <p:nvPr/>
-        </p:nvSpPr>
-        <p:spPr>
-          <a:xfrm>
-            <a:off x="6528816" y="4041648"/>
-            <a:ext cx="4828032" cy="1554480"/>
-          </a:xfrm>
-          <a:prstGeom prst="rect">
-            <a:avLst/>
-          </a:prstGeom>
-          <a:noFill/>
-        </p:spPr>
-        <p:txBody>
-          <a:bodyPr wrap="square" lIns="0" rIns="0" tIns="0" bIns="0" anchor="t">
-            <a:spAutoFit/>
-          </a:bodyPr>
-          <a:lstStyle/>
-          <a:p>
-            <a:pPr algn="l">
-              <a:spcBef>
-                <a:spcPts val="0"/>
-              </a:spcBef>
-              <a:spcAft>
-                <a:spcPts val="700"/>
-              </a:spcAft>
-            </a:pPr>
-            <a:r>
-              <a:rPr sz="1300" b="1">
-                <a:solidFill>
-                  <a:srgbClr val="102A43"/>
-                </a:solidFill>
-                <a:latin typeface="微軟正黑體"/>
-              </a:rPr>
-              <a:t>為什麼右欄只有一筆</a:t>
+              <a:t>已完成</a:t>
             </a:r>
           </a:p>
           <a:p>
             <a:pPr>
               <a:lnSpc>
-                <a:spcPct val="125000"/>
+                <a:spcPct val="120000"/>
               </a:lnSpc>
               <a:spcBef>
                 <a:spcPts val="0"/>
               </a:spcBef>
               <a:spcAft>
-                <a:spcPts val="800"/>
-              </a:spcAft>
-            </a:pPr>
-            <a:r>
-              <a:rPr sz="1150" b="0">
+                <a:spcPts val="600"/>
+              </a:spcAft>
+            </a:pPr>
+            <a:r>
+              <a:rPr sz="1300" b="0">
                 <a:solidFill>
                   <a:srgbClr val="1B2633"/>
                 </a:solidFill>
                 <a:latin typeface="微軟正黑體"/>
               </a:rPr>
-              <a:t>稽核日誌（.sensai/sent.log）只在擴充於 VS Code 實際執行時才寫入，命令列工具不寫。目前僅有一次實機審查的觀測記錄。</a:t>
+              <a:t>✓　存檔自動審查（C 與組語）、手動審查指令</a:t>
             </a:r>
           </a:p>
           <a:p>
             <a:pPr>
               <a:lnSpc>
-                <a:spcPct val="125000"/>
+                <a:spcPct val="120000"/>
               </a:lnSpc>
               <a:spcBef>
                 <a:spcPts val="0"/>
               </a:spcBef>
               <a:spcAft>
-                <a:spcPts val="0"/>
-              </a:spcAft>
-            </a:pPr>
-            <a:r>
-              <a:rPr sz="1150" b="0">
+                <a:spcPts val="600"/>
+              </a:spcAft>
+            </a:pPr>
+            <a:r>
+              <a:rPr sz="1300" b="0">
+                <a:solidFill>
+                  <a:srgbClr val="1B2633"/>
+                </a:solidFill>
+                <a:latin typeface="微軟正黑體"/>
+              </a:rPr>
+              <a:t>✓　專案 header 自動解析與上下文預算控管</a:t>
+            </a:r>
+          </a:p>
+          <a:p>
+            <a:pPr>
+              <a:lnSpc>
+                <a:spcPct val="120000"/>
+              </a:lnSpc>
+              <a:spcBef>
+                <a:spcPts val="0"/>
+              </a:spcBef>
+              <a:spcAft>
+                <a:spcPts val="600"/>
+              </a:spcAft>
+            </a:pPr>
+            <a:r>
+              <a:rPr sz="1300" b="0">
+                <a:solidFill>
+                  <a:srgbClr val="1B2633"/>
+                </a:solidFill>
+                <a:latin typeface="微軟正黑體"/>
+              </a:rPr>
+              <a:t>✓　規則引擎、語言過濾、ABI 事實注入</a:t>
+            </a:r>
+          </a:p>
+          <a:p>
+            <a:pPr>
+              <a:lnSpc>
+                <a:spcPct val="120000"/>
+              </a:lnSpc>
+              <a:spcBef>
+                <a:spcPts val="0"/>
+              </a:spcBef>
+              <a:spcAft>
+                <a:spcPts val="600"/>
+              </a:spcAft>
+            </a:pPr>
+            <a:r>
+              <a:rPr sz="1300" b="0">
+                <a:solidFill>
+                  <a:srgbClr val="1B2633"/>
+                </a:solidFill>
+                <a:latin typeface="微軟正黑體"/>
+              </a:rPr>
+              <a:t>✓　三層節流、審查取消、結果保留不閃爍</a:t>
+            </a:r>
+          </a:p>
+          <a:p>
+            <a:pPr>
+              <a:lnSpc>
+                <a:spcPct val="120000"/>
+              </a:lnSpc>
+              <a:spcBef>
+                <a:spcPts val="0"/>
+              </a:spcBef>
+              <a:spcAft>
+                <a:spcPts val="600"/>
+              </a:spcAft>
+            </a:pPr>
+            <a:r>
+              <a:rPr sz="1300" b="0">
+                <a:solidFill>
+                  <a:srgbClr val="1B2633"/>
+                </a:solidFill>
+                <a:latin typeface="微軟正黑體"/>
+              </a:rPr>
+              <a:t>✓　釘選與筆記、誤報靜音與匯出報告</a:t>
+            </a:r>
+          </a:p>
+          <a:p>
+            <a:pPr>
+              <a:lnSpc>
+                <a:spcPct val="120000"/>
+              </a:lnSpc>
+              <a:spcBef>
+                <a:spcPts val="0"/>
+              </a:spcBef>
+              <a:spcAft>
+                <a:spcPts val="600"/>
+              </a:spcAft>
+            </a:pPr>
+            <a:r>
+              <a:rPr sz="1300" b="0">
+                <a:solidFill>
+                  <a:srgbClr val="1B2633"/>
+                </a:solidFill>
+                <a:latin typeface="微軟正黑體"/>
+              </a:rPr>
+              <a:t>✓　隱私排除清單與稽核日誌</a:t>
+            </a:r>
+          </a:p>
+        </p:txBody>
+      </p:sp>
+      <p:sp>
+        <p:nvSpPr>
+          <p:cNvPr id="25" name="TextBox 24"/>
+          <p:cNvSpPr txBox="1"/>
+          <p:nvPr/>
+        </p:nvSpPr>
+        <p:spPr>
+          <a:xfrm>
+            <a:off x="6309360" y="3108960"/>
+            <a:ext cx="5303520" cy="320040"/>
+          </a:xfrm>
+          <a:prstGeom prst="rect">
+            <a:avLst/>
+          </a:prstGeom>
+          <a:noFill/>
+        </p:spPr>
+        <p:txBody>
+          <a:bodyPr wrap="square" lIns="0" rIns="0" tIns="0" bIns="0" anchor="t">
+            <a:spAutoFit/>
+          </a:bodyPr>
+          <a:lstStyle/>
+          <a:p>
+            <a:pPr algn="l">
+              <a:spcBef>
+                <a:spcPts val="0"/>
+              </a:spcBef>
+              <a:spcAft>
+                <a:spcPts val="900"/>
+              </a:spcAft>
+            </a:pPr>
+            <a:r>
+              <a:rPr sz="1500" b="1">
+                <a:solidFill>
+                  <a:srgbClr val="102A43"/>
+                </a:solidFill>
+                <a:latin typeface="微軟正黑體"/>
+              </a:rPr>
+              <a:t>已知限制（誠實揭露）</a:t>
+            </a:r>
+          </a:p>
+          <a:p>
+            <a:pPr>
+              <a:lnSpc>
+                <a:spcPct val="120000"/>
+              </a:lnSpc>
+              <a:spcBef>
+                <a:spcPts val="0"/>
+              </a:spcBef>
+              <a:spcAft>
+                <a:spcPts val="600"/>
+              </a:spcAft>
+            </a:pPr>
+            <a:r>
+              <a:rPr sz="1300" b="0">
                 <a:solidFill>
                   <a:srgbClr val="5B6B7B"/>
                 </a:solidFill>
                 <a:latin typeface="微軟正黑體"/>
               </a:rPr>
-              <a:t>導入後每次請求會自動記一筆，含 ts、file、outcome、headers、bytes、findings、dropped、durationMs —— 屆時右欄可由單點改為分布，覆蓋率、意見密度、過濾效果與成本也一併算得出來。</a:t>
-            </a:r>
-          </a:p>
-        </p:txBody>
-      </p:sp>
-      <p:sp>
-        <p:nvSpPr>
-          <p:cNvPr id="61" name="TextBox 60"/>
-          <p:cNvSpPr txBox="1"/>
-          <p:nvPr/>
-        </p:nvSpPr>
-        <p:spPr>
-          <a:xfrm>
-            <a:off x="566928" y="5943600"/>
-            <a:ext cx="11064240" cy="274320"/>
-          </a:xfrm>
-          <a:prstGeom prst="rect">
-            <a:avLst/>
-          </a:prstGeom>
-          <a:noFill/>
-        </p:spPr>
-        <p:txBody>
-          <a:bodyPr wrap="square" lIns="0" rIns="0" tIns="0" bIns="0" anchor="t">
-            <a:spAutoFit/>
-          </a:bodyPr>
-          <a:lstStyle/>
-          <a:p>
-            <a:pPr algn="l">
-              <a:spcBef>
-                <a:spcPts val="0"/>
-              </a:spcBef>
-              <a:spcAft>
-                <a:spcPts val="0"/>
-              </a:spcAft>
-            </a:pPr>
-            <a:r>
-              <a:rPr sz="1100" b="0">
+              <a:t>・多根工作區目前只讀取第一個資料夾</a:t>
+            </a:r>
+          </a:p>
+          <a:p>
+            <a:pPr>
+              <a:lnSpc>
+                <a:spcPct val="120000"/>
+              </a:lnSpc>
+              <a:spcBef>
+                <a:spcPts val="0"/>
+              </a:spcBef>
+              <a:spcAft>
+                <a:spcPts val="600"/>
+              </a:spcAft>
+            </a:pPr>
+            <a:r>
+              <a:rPr sz="1300" b="0">
                 <a:solidFill>
                   <a:srgbClr val="5B6B7B"/>
                 </a:solidFill>
                 <a:latin typeface="微軟正黑體"/>
               </a:rPr>
-              <a:t>※ n＝1 的觀測不能拿來推論平均值。本頁左欄是可驗證的計數，右欄是單次觀測 —— 兩者的證據強度不同，報告時分開看。</a:t>
+              <a:t>・組語巨集不展開；上下文不足時要求模型保守不報</a:t>
+            </a:r>
+          </a:p>
+          <a:p>
+            <a:pPr>
+              <a:lnSpc>
+                <a:spcPct val="120000"/>
+              </a:lnSpc>
+              <a:spcBef>
+                <a:spcPts val="0"/>
+              </a:spcBef>
+              <a:spcAft>
+                <a:spcPts val="600"/>
+              </a:spcAft>
+            </a:pPr>
+            <a:r>
+              <a:rPr sz="1300" b="0">
+                <a:solidFill>
+                  <a:srgbClr val="5B6B7B"/>
+                </a:solidFill>
+                <a:latin typeface="微軟正黑體"/>
+              </a:rPr>
+              <a:t>・組語審查僅看單檔，抓不到跨檔的 C／組語簽章不一致</a:t>
+            </a:r>
+          </a:p>
+          <a:p>
+            <a:pPr>
+              <a:lnSpc>
+                <a:spcPct val="120000"/>
+              </a:lnSpc>
+              <a:spcBef>
+                <a:spcPts val="0"/>
+              </a:spcBef>
+              <a:spcAft>
+                <a:spcPts val="600"/>
+              </a:spcAft>
+            </a:pPr>
+            <a:r>
+              <a:rPr sz="1300" b="0">
+                <a:solidFill>
+                  <a:srgbClr val="5B6B7B"/>
+                </a:solidFill>
+                <a:latin typeface="微軟正黑體"/>
+              </a:rPr>
+              <a:t>・只提供意見，不產生也不套用修補程式</a:t>
+            </a:r>
+          </a:p>
+          <a:p>
+            <a:pPr>
+              <a:lnSpc>
+                <a:spcPct val="120000"/>
+              </a:lnSpc>
+              <a:spcBef>
+                <a:spcPts val="0"/>
+              </a:spcBef>
+              <a:spcAft>
+                <a:spcPts val="600"/>
+              </a:spcAft>
+            </a:pPr>
+            <a:r>
+              <a:rPr sz="1300" b="0">
+                <a:solidFill>
+                  <a:srgbClr val="5B6B7B"/>
+                </a:solidFill>
+                <a:latin typeface="微軟正黑體"/>
+              </a:rPr>
+              <a:t>・尚未累積足夠樣本計算「意見被實際修掉的比例」</a:t>
             </a:r>
           </a:p>
         </p:txBody>
@@ -7512,7 +6333,7 @@
                 </a:solidFill>
                 <a:latin typeface="微軟正黑體"/>
               </a:rPr>
-              <a:t>DEPLOYMENT</a:t>
+              <a:t>DATA</a:t>
             </a:r>
           </a:p>
         </p:txBody>
@@ -7554,7 +6375,7 @@
                 </a:solidFill>
                 <a:latin typeface="微軟正黑體"/>
               </a:rPr>
-              <a:t>部署狀況：已安裝 8 台開發機</a:t>
+              <a:t>目前已有的數據與出處</a:t>
             </a:r>
           </a:p>
         </p:txBody>
@@ -7727,7 +6548,7 @@
                 </a:solidFill>
                 <a:latin typeface="微軟正黑體"/>
               </a:rPr>
-              <a:t>sensAI 沒有透過任何統一派送機制推送。這 8 台，是 8 位工程師各自決定安裝的結果。</a:t>
+              <a:t>以下每個數字都可當場複查。現場使用數據（採納率、延遲分布、成本）要等導入後由稽核日誌自動累積 —— 今天還沒有。</a:t>
             </a:r>
           </a:p>
         </p:txBody>
@@ -7740,94 +6561,8 @@
         </p:nvSpPr>
         <p:spPr>
           <a:xfrm>
-            <a:off x="566928" y="2103120"/>
-            <a:ext cx="3310128" cy="3310128"/>
-          </a:xfrm>
-          <a:prstGeom prst="rect">
-            <a:avLst/>
-          </a:prstGeom>
-          <a:solidFill>
-            <a:srgbClr val="102A43"/>
-          </a:solidFill>
-          <a:ln>
-            <a:noFill/>
-          </a:ln>
-          <a:effectLst/>
-        </p:spPr>
-        <p:style>
-          <a:lnRef idx="1">
-            <a:schemeClr val="accent1"/>
-          </a:lnRef>
-          <a:fillRef idx="3">
-            <a:schemeClr val="accent1"/>
-          </a:fillRef>
-          <a:effectRef idx="2">
-            <a:schemeClr val="accent1"/>
-          </a:effectRef>
-          <a:fontRef idx="minor">
-            <a:schemeClr val="lt1"/>
-          </a:fontRef>
-        </p:style>
-        <p:txBody>
-          <a:bodyPr rtlCol="0" anchor="ctr"/>
-          <a:lstStyle/>
-          <a:p>
-            <a:pPr algn="ctr"/>
-          </a:p>
-        </p:txBody>
-      </p:sp>
-      <p:sp>
-        <p:nvSpPr>
-          <p:cNvPr id="10" name="TextBox 9"/>
-          <p:cNvSpPr txBox="1"/>
-          <p:nvPr/>
-        </p:nvSpPr>
-        <p:spPr>
-          <a:xfrm>
-            <a:off x="841248" y="2487168"/>
-            <a:ext cx="2743200" cy="1371600"/>
-          </a:xfrm>
-          <a:prstGeom prst="rect">
-            <a:avLst/>
-          </a:prstGeom>
-          <a:noFill/>
-        </p:spPr>
-        <p:txBody>
-          <a:bodyPr wrap="square" lIns="0" rIns="0" tIns="0" bIns="0" anchor="t">
-            <a:spAutoFit/>
-          </a:bodyPr>
-          <a:lstStyle/>
-          <a:p>
-            <a:pPr algn="ctr">
-              <a:spcBef>
-                <a:spcPts val="0"/>
-              </a:spcBef>
-              <a:spcAft>
-                <a:spcPts val="0"/>
-              </a:spcAft>
-            </a:pPr>
-            <a:r>
-              <a:rPr sz="9600" b="1">
-                <a:solidFill>
-                  <a:srgbClr val="FFFFFF"/>
-                </a:solidFill>
-                <a:latin typeface="微軟正黑體"/>
-              </a:rPr>
-              <a:t>8</a:t>
-            </a:r>
-          </a:p>
-        </p:txBody>
-      </p:sp>
-      <p:sp>
-        <p:nvSpPr>
-          <p:cNvPr id="11" name="Rectangle 10"/>
-          <p:cNvSpPr/>
-          <p:nvPr/>
-        </p:nvSpPr>
-        <p:spPr>
-          <a:xfrm>
-            <a:off x="1481328" y="3858768"/>
-            <a:ext cx="1463040" cy="22860"/>
+            <a:off x="566928" y="2121408"/>
+            <a:ext cx="34290" cy="237744"/>
           </a:xfrm>
           <a:prstGeom prst="rect">
             <a:avLst/>
@@ -7864,288 +6599,56 @@
       </p:sp>
       <p:sp>
         <p:nvSpPr>
-          <p:cNvPr id="12" name="TextBox 11"/>
-          <p:cNvSpPr txBox="1"/>
-          <p:nvPr/>
-        </p:nvSpPr>
-        <p:spPr>
-          <a:xfrm>
-            <a:off x="841248" y="4114800"/>
-            <a:ext cx="2743200" cy="1097280"/>
-          </a:xfrm>
-          <a:prstGeom prst="rect">
-            <a:avLst/>
-          </a:prstGeom>
-          <a:noFill/>
-        </p:spPr>
-        <p:txBody>
-          <a:bodyPr wrap="square" lIns="0" rIns="0" tIns="0" bIns="0" anchor="t">
-            <a:spAutoFit/>
-          </a:bodyPr>
-          <a:lstStyle/>
-          <a:p>
-            <a:pPr algn="ctr">
-              <a:spcBef>
-                <a:spcPts val="0"/>
-              </a:spcBef>
-              <a:spcAft>
-                <a:spcPts val="800"/>
-              </a:spcAft>
-            </a:pPr>
-            <a:r>
-              <a:rPr sz="1700" b="1">
-                <a:solidFill>
-                  <a:srgbClr val="FFFFFF"/>
-                </a:solidFill>
-                <a:latin typeface="微軟正黑體"/>
-              </a:rPr>
-              <a:t>台開發機已安裝</a:t>
-            </a:r>
-          </a:p>
-          <a:p>
-            <a:pPr algn="ctr">
-              <a:lnSpc>
-                <a:spcPct val="130000"/>
-              </a:lnSpc>
-              <a:spcBef>
-                <a:spcPts val="0"/>
-              </a:spcBef>
-              <a:spcAft>
-                <a:spcPts val="0"/>
-              </a:spcAft>
-            </a:pPr>
-            <a:r>
-              <a:rPr sz="1100" b="0">
-                <a:solidFill>
-                  <a:srgbClr val="A8C4D8"/>
-                </a:solidFill>
-                <a:latin typeface="微軟正黑體"/>
-              </a:rPr>
-              <a:t>來源：VS Code 擴充頁安裝數
-（可於擴充詳細頁當場複查）</a:t>
-            </a:r>
-          </a:p>
-        </p:txBody>
-      </p:sp>
-      <p:sp>
-        <p:nvSpPr>
-          <p:cNvPr id="13" name="Rectangle 12"/>
+          <p:cNvPr id="10" name="TextBox 9"/>
+          <p:cNvSpPr txBox="1"/>
+          <p:nvPr/>
+        </p:nvSpPr>
+        <p:spPr>
+          <a:xfrm>
+            <a:off x="694944" y="2139696"/>
+            <a:ext cx="5376672" cy="219456"/>
+          </a:xfrm>
+          <a:prstGeom prst="rect">
+            <a:avLst/>
+          </a:prstGeom>
+          <a:noFill/>
+        </p:spPr>
+        <p:txBody>
+          <a:bodyPr wrap="square" lIns="0" rIns="0" tIns="0" bIns="0" anchor="t">
+            <a:spAutoFit/>
+          </a:bodyPr>
+          <a:lstStyle/>
+          <a:p>
+            <a:pPr algn="l">
+              <a:spcBef>
+                <a:spcPts val="0"/>
+              </a:spcBef>
+              <a:spcAft>
+                <a:spcPts val="0"/>
+              </a:spcAft>
+            </a:pPr>
+            <a:r>
+              <a:rPr sz="1150" b="1">
+                <a:solidFill>
+                  <a:srgbClr val="119DA4"/>
+                </a:solidFill>
+                <a:latin typeface="微軟正黑體"/>
+              </a:rPr>
+              <a:t>產品規模與品質</a:t>
+            </a:r>
+          </a:p>
+        </p:txBody>
+      </p:sp>
+      <p:sp>
+        <p:nvSpPr>
+          <p:cNvPr id="11" name="Rectangle 10"/>
           <p:cNvSpPr/>
           <p:nvPr/>
         </p:nvSpPr>
         <p:spPr>
           <a:xfrm>
-            <a:off x="4078224" y="2103120"/>
-            <a:ext cx="3657600" cy="3310128"/>
-          </a:xfrm>
-          <a:prstGeom prst="rect">
-            <a:avLst/>
-          </a:prstGeom>
-          <a:noFill/>
-          <a:ln w="12700">
-            <a:solidFill>
-              <a:srgbClr val="D8DFE6"/>
-            </a:solidFill>
-          </a:ln>
-          <a:effectLst/>
-        </p:spPr>
-        <p:style>
-          <a:lnRef idx="1">
-            <a:schemeClr val="accent1"/>
-          </a:lnRef>
-          <a:fillRef idx="3">
-            <a:schemeClr val="accent1"/>
-          </a:fillRef>
-          <a:effectRef idx="2">
-            <a:schemeClr val="accent1"/>
-          </a:effectRef>
-          <a:fontRef idx="minor">
-            <a:schemeClr val="lt1"/>
-          </a:fontRef>
-        </p:style>
-        <p:txBody>
-          <a:bodyPr rtlCol="0" anchor="ctr"/>
-          <a:lstStyle/>
-          <a:p>
-            <a:pPr algn="ctr"/>
-          </a:p>
-        </p:txBody>
-      </p:sp>
-      <p:sp>
-        <p:nvSpPr>
-          <p:cNvPr id="14" name="TextBox 13"/>
-          <p:cNvSpPr txBox="1"/>
-          <p:nvPr/>
-        </p:nvSpPr>
-        <p:spPr>
-          <a:xfrm>
-            <a:off x="4352544" y="2304288"/>
-            <a:ext cx="3108960" cy="3017520"/>
-          </a:xfrm>
-          <a:prstGeom prst="rect">
-            <a:avLst/>
-          </a:prstGeom>
-          <a:noFill/>
-        </p:spPr>
-        <p:txBody>
-          <a:bodyPr wrap="square" lIns="0" rIns="0" tIns="0" bIns="0" anchor="t">
-            <a:spAutoFit/>
-          </a:bodyPr>
-          <a:lstStyle/>
-          <a:p>
-            <a:pPr algn="l">
-              <a:spcBef>
-                <a:spcPts val="0"/>
-              </a:spcBef>
-              <a:spcAft>
-                <a:spcPts val="1000"/>
-              </a:spcAft>
-            </a:pPr>
-            <a:r>
-              <a:rPr sz="1300" b="1">
-                <a:solidFill>
-                  <a:srgbClr val="119DA4"/>
-                </a:solidFill>
-                <a:latin typeface="微軟正黑體"/>
-              </a:rPr>
-              <a:t>這個數字的意義</a:t>
-            </a:r>
-          </a:p>
-          <a:p>
-            <a:pPr>
-              <a:spcBef>
-                <a:spcPts val="0"/>
-              </a:spcBef>
-              <a:spcAft>
-                <a:spcPts val="300"/>
-              </a:spcAft>
-            </a:pPr>
-            <a:r>
-              <a:rPr sz="1250" b="1">
-                <a:solidFill>
-                  <a:srgbClr val="102A43"/>
-                </a:solidFill>
-                <a:latin typeface="微軟正黑體"/>
-              </a:rPr>
-              <a:t>全部為主動安裝</a:t>
-            </a:r>
-          </a:p>
-          <a:p>
-            <a:pPr>
-              <a:lnSpc>
-                <a:spcPct val="125000"/>
-              </a:lnSpc>
-              <a:spcBef>
-                <a:spcPts val="0"/>
-              </a:spcBef>
-              <a:spcAft>
-                <a:spcPts val="0"/>
-              </a:spcAft>
-            </a:pPr>
-            <a:r>
-              <a:rPr sz="1100" b="0">
-                <a:solidFill>
-                  <a:srgbClr val="5B6B7B"/>
-                </a:solidFill>
-                <a:latin typeface="微軟正黑體"/>
-              </a:rPr>
-              <a:t>未納入任何統一派送。每一台都要工程師自己從 Marketplace 裝上去。</a:t>
-            </a:r>
-          </a:p>
-          <a:p>
-            <a:pPr>
-              <a:spcBef>
-                <a:spcPts val="1200"/>
-              </a:spcBef>
-              <a:spcAft>
-                <a:spcPts val="300"/>
-              </a:spcAft>
-            </a:pPr>
-            <a:r>
-              <a:rPr sz="1250" b="1">
-                <a:solidFill>
-                  <a:srgbClr val="102A43"/>
-                </a:solidFill>
-                <a:latin typeface="微軟正黑體"/>
-              </a:rPr>
-              <a:t>零採購成本</a:t>
-            </a:r>
-          </a:p>
-          <a:p>
-            <a:pPr>
-              <a:lnSpc>
-                <a:spcPct val="125000"/>
-              </a:lnSpc>
-              <a:spcBef>
-                <a:spcPts val="0"/>
-              </a:spcBef>
-              <a:spcAft>
-                <a:spcPts val="0"/>
-              </a:spcAft>
-            </a:pPr>
-            <a:r>
-              <a:rPr sz="1100" b="0">
-                <a:solidFill>
-                  <a:srgbClr val="5B6B7B"/>
-                </a:solidFill>
-                <a:latin typeface="微軟正黑體"/>
-              </a:rPr>
-              <a:t>自行開發，無授權費，安裝不需要走採購流程。</a:t>
-            </a:r>
-          </a:p>
-          <a:p>
-            <a:pPr>
-              <a:spcBef>
-                <a:spcPts val="1200"/>
-              </a:spcBef>
-              <a:spcAft>
-                <a:spcPts val="300"/>
-              </a:spcAft>
-            </a:pPr>
-            <a:r>
-              <a:rPr sz="1250" b="1">
-                <a:solidFill>
-                  <a:srgbClr val="102A43"/>
-                </a:solidFill>
-                <a:latin typeface="微軟正黑體"/>
-              </a:rPr>
-              <a:t>零設定門檻</a:t>
-            </a:r>
-          </a:p>
-          <a:p>
-            <a:pPr>
-              <a:lnSpc>
-                <a:spcPct val="125000"/>
-              </a:lnSpc>
-              <a:spcBef>
-                <a:spcPts val="0"/>
-              </a:spcBef>
-              <a:spcAft>
-                <a:spcPts val="0"/>
-              </a:spcAft>
-            </a:pPr>
-            <a:r>
-              <a:rPr sz="1100" b="0">
-                <a:solidFill>
-                  <a:srgbClr val="5B6B7B"/>
-                </a:solidFill>
-                <a:latin typeface="微軟正黑體"/>
-              </a:rPr>
-              <a:t>一個 Initialize Project 指令即建立專案設定，不需要 build system 整合。</a:t>
-            </a:r>
-          </a:p>
-        </p:txBody>
-      </p:sp>
-      <p:sp>
-        <p:nvSpPr>
-          <p:cNvPr id="15" name="Rectangle 14"/>
-          <p:cNvSpPr/>
-          <p:nvPr/>
-        </p:nvSpPr>
-        <p:spPr>
-          <a:xfrm>
-            <a:off x="7936992" y="2103120"/>
-            <a:ext cx="3694176" cy="3310128"/>
+            <a:off x="566928" y="2432304"/>
+            <a:ext cx="5376672" cy="310896"/>
           </a:xfrm>
           <a:prstGeom prst="rect">
             <a:avLst/>
@@ -8182,14 +6685,182 @@
       </p:sp>
       <p:sp>
         <p:nvSpPr>
+          <p:cNvPr id="12" name="TextBox 11"/>
+          <p:cNvSpPr txBox="1"/>
+          <p:nvPr/>
+        </p:nvSpPr>
+        <p:spPr>
+          <a:xfrm>
+            <a:off x="694944" y="2496312"/>
+            <a:ext cx="1572768" cy="219456"/>
+          </a:xfrm>
+          <a:prstGeom prst="rect">
+            <a:avLst/>
+          </a:prstGeom>
+          <a:noFill/>
+        </p:spPr>
+        <p:txBody>
+          <a:bodyPr wrap="square" lIns="0" rIns="0" tIns="0" bIns="0" anchor="t">
+            <a:spAutoFit/>
+          </a:bodyPr>
+          <a:lstStyle/>
+          <a:p>
+            <a:pPr algn="l">
+              <a:spcBef>
+                <a:spcPts val="0"/>
+              </a:spcBef>
+              <a:spcAft>
+                <a:spcPts val="0"/>
+              </a:spcAft>
+            </a:pPr>
+            <a:r>
+              <a:rPr sz="1150" b="0">
+                <a:solidFill>
+                  <a:srgbClr val="1B2633"/>
+                </a:solidFill>
+                <a:latin typeface="微軟正黑體"/>
+              </a:rPr>
+              <a:t>程式碼規模</a:t>
+            </a:r>
+          </a:p>
+        </p:txBody>
+      </p:sp>
+      <p:sp>
+        <p:nvSpPr>
+          <p:cNvPr id="13" name="TextBox 12"/>
+          <p:cNvSpPr txBox="1"/>
+          <p:nvPr/>
+        </p:nvSpPr>
+        <p:spPr>
+          <a:xfrm>
+            <a:off x="2322576" y="2487168"/>
+            <a:ext cx="1901952" cy="219456"/>
+          </a:xfrm>
+          <a:prstGeom prst="rect">
+            <a:avLst/>
+          </a:prstGeom>
+          <a:noFill/>
+        </p:spPr>
+        <p:txBody>
+          <a:bodyPr wrap="square" lIns="0" rIns="0" tIns="0" bIns="0" anchor="t">
+            <a:spAutoFit/>
+          </a:bodyPr>
+          <a:lstStyle/>
+          <a:p>
+            <a:pPr algn="l">
+              <a:spcBef>
+                <a:spcPts val="0"/>
+              </a:spcBef>
+              <a:spcAft>
+                <a:spcPts val="0"/>
+              </a:spcAft>
+            </a:pPr>
+            <a:r>
+              <a:rPr sz="1200" b="1">
+                <a:solidFill>
+                  <a:srgbClr val="102A43"/>
+                </a:solidFill>
+                <a:latin typeface="微軟正黑體"/>
+              </a:rPr>
+              <a:t>3,603 行 ／ 19 個模組</a:t>
+            </a:r>
+          </a:p>
+        </p:txBody>
+      </p:sp>
+      <p:sp>
+        <p:nvSpPr>
+          <p:cNvPr id="14" name="TextBox 13"/>
+          <p:cNvSpPr txBox="1"/>
+          <p:nvPr/>
+        </p:nvSpPr>
+        <p:spPr>
+          <a:xfrm>
+            <a:off x="4279391" y="2505456"/>
+            <a:ext cx="1572768" cy="219456"/>
+          </a:xfrm>
+          <a:prstGeom prst="rect">
+            <a:avLst/>
+          </a:prstGeom>
+          <a:noFill/>
+        </p:spPr>
+        <p:txBody>
+          <a:bodyPr wrap="square" lIns="0" rIns="0" tIns="0" bIns="0" anchor="t">
+            <a:spAutoFit/>
+          </a:bodyPr>
+          <a:lstStyle/>
+          <a:p>
+            <a:pPr algn="l">
+              <a:spcBef>
+                <a:spcPts val="0"/>
+              </a:spcBef>
+              <a:spcAft>
+                <a:spcPts val="0"/>
+              </a:spcAft>
+            </a:pPr>
+            <a:r>
+              <a:rPr sz="1000" b="0">
+                <a:solidFill>
+                  <a:srgbClr val="5B6B7B"/>
+                </a:solidFill>
+                <a:latin typeface="Consolas"/>
+              </a:rPr>
+              <a:t>wc -l src/*.ts</a:t>
+            </a:r>
+          </a:p>
+        </p:txBody>
+      </p:sp>
+      <p:sp>
+        <p:nvSpPr>
+          <p:cNvPr id="15" name="TextBox 14"/>
+          <p:cNvSpPr txBox="1"/>
+          <p:nvPr/>
+        </p:nvSpPr>
+        <p:spPr>
+          <a:xfrm>
+            <a:off x="694944" y="2807208"/>
+            <a:ext cx="1572768" cy="219456"/>
+          </a:xfrm>
+          <a:prstGeom prst="rect">
+            <a:avLst/>
+          </a:prstGeom>
+          <a:noFill/>
+        </p:spPr>
+        <p:txBody>
+          <a:bodyPr wrap="square" lIns="0" rIns="0" tIns="0" bIns="0" anchor="t">
+            <a:spAutoFit/>
+          </a:bodyPr>
+          <a:lstStyle/>
+          <a:p>
+            <a:pPr algn="l">
+              <a:spcBef>
+                <a:spcPts val="0"/>
+              </a:spcBef>
+              <a:spcAft>
+                <a:spcPts val="0"/>
+              </a:spcAft>
+            </a:pPr>
+            <a:r>
+              <a:rPr sz="1150" b="0">
+                <a:solidFill>
+                  <a:srgbClr val="1B2633"/>
+                </a:solidFill>
+                <a:latin typeface="微軟正黑體"/>
+              </a:rPr>
+              <a:t>測試</a:t>
+            </a:r>
+          </a:p>
+        </p:txBody>
+      </p:sp>
+      <p:sp>
+        <p:nvSpPr>
           <p:cNvPr id="16" name="TextBox 15"/>
           <p:cNvSpPr txBox="1"/>
           <p:nvPr/>
         </p:nvSpPr>
         <p:spPr>
           <a:xfrm>
-            <a:off x="8211312" y="2304288"/>
-            <a:ext cx="3145536" cy="320040"/>
+            <a:off x="2322576" y="2798064"/>
+            <a:ext cx="1901952" cy="219456"/>
           </a:xfrm>
           <a:prstGeom prst="rect">
             <a:avLst/>
@@ -8211,29 +6882,367 @@
               </a:spcAft>
             </a:pPr>
             <a:r>
-              <a:rPr sz="1300" b="1">
-                <a:solidFill>
-                  <a:srgbClr val="119DA4"/>
-                </a:solidFill>
-                <a:latin typeface="微軟正黑體"/>
-              </a:rPr>
-              <a:t>部署進程</a:t>
-            </a:r>
-          </a:p>
-        </p:txBody>
-      </p:sp>
-      <p:sp>
-        <p:nvSpPr>
-          <p:cNvPr id="17" name="Oval 16"/>
+              <a:rPr sz="1200" b="1">
+                <a:solidFill>
+                  <a:srgbClr val="102A43"/>
+                </a:solidFill>
+                <a:latin typeface="微軟正黑體"/>
+              </a:rPr>
+              <a:t>96 項，全數通過</a:t>
+            </a:r>
+          </a:p>
+        </p:txBody>
+      </p:sp>
+      <p:sp>
+        <p:nvSpPr>
+          <p:cNvPr id="17" name="TextBox 16"/>
+          <p:cNvSpPr txBox="1"/>
+          <p:nvPr/>
+        </p:nvSpPr>
+        <p:spPr>
+          <a:xfrm>
+            <a:off x="4279391" y="2816352"/>
+            <a:ext cx="1572768" cy="219456"/>
+          </a:xfrm>
+          <a:prstGeom prst="rect">
+            <a:avLst/>
+          </a:prstGeom>
+          <a:noFill/>
+        </p:spPr>
+        <p:txBody>
+          <a:bodyPr wrap="square" lIns="0" rIns="0" tIns="0" bIns="0" anchor="t">
+            <a:spAutoFit/>
+          </a:bodyPr>
+          <a:lstStyle/>
+          <a:p>
+            <a:pPr algn="l">
+              <a:spcBef>
+                <a:spcPts val="0"/>
+              </a:spcBef>
+              <a:spcAft>
+                <a:spcPts val="0"/>
+              </a:spcAft>
+            </a:pPr>
+            <a:r>
+              <a:rPr sz="1000" b="0">
+                <a:solidFill>
+                  <a:srgbClr val="5B6B7B"/>
+                </a:solidFill>
+                <a:latin typeface="Consolas"/>
+              </a:rPr>
+              <a:t>npm test</a:t>
+            </a:r>
+          </a:p>
+        </p:txBody>
+      </p:sp>
+      <p:sp>
+        <p:nvSpPr>
+          <p:cNvPr id="18" name="Rectangle 17"/>
           <p:cNvSpPr/>
           <p:nvPr/>
         </p:nvSpPr>
         <p:spPr>
           <a:xfrm>
-            <a:off x="8211312" y="2834640"/>
-            <a:ext cx="146304" cy="146304"/>
-          </a:xfrm>
-          <a:prstGeom prst="ellipse">
+            <a:off x="566928" y="3054096"/>
+            <a:ext cx="5376672" cy="310896"/>
+          </a:xfrm>
+          <a:prstGeom prst="rect">
+            <a:avLst/>
+          </a:prstGeom>
+          <a:solidFill>
+            <a:srgbClr val="F2F5F8"/>
+          </a:solidFill>
+          <a:ln>
+            <a:noFill/>
+          </a:ln>
+          <a:effectLst/>
+        </p:spPr>
+        <p:style>
+          <a:lnRef idx="1">
+            <a:schemeClr val="accent1"/>
+          </a:lnRef>
+          <a:fillRef idx="3">
+            <a:schemeClr val="accent1"/>
+          </a:fillRef>
+          <a:effectRef idx="2">
+            <a:schemeClr val="accent1"/>
+          </a:effectRef>
+          <a:fontRef idx="minor">
+            <a:schemeClr val="lt1"/>
+          </a:fontRef>
+        </p:style>
+        <p:txBody>
+          <a:bodyPr rtlCol="0" anchor="ctr"/>
+          <a:lstStyle/>
+          <a:p>
+            <a:pPr algn="ctr"/>
+          </a:p>
+        </p:txBody>
+      </p:sp>
+      <p:sp>
+        <p:nvSpPr>
+          <p:cNvPr id="19" name="TextBox 18"/>
+          <p:cNvSpPr txBox="1"/>
+          <p:nvPr/>
+        </p:nvSpPr>
+        <p:spPr>
+          <a:xfrm>
+            <a:off x="694944" y="3118104"/>
+            <a:ext cx="1572768" cy="219456"/>
+          </a:xfrm>
+          <a:prstGeom prst="rect">
+            <a:avLst/>
+          </a:prstGeom>
+          <a:noFill/>
+        </p:spPr>
+        <p:txBody>
+          <a:bodyPr wrap="square" lIns="0" rIns="0" tIns="0" bIns="0" anchor="t">
+            <a:spAutoFit/>
+          </a:bodyPr>
+          <a:lstStyle/>
+          <a:p>
+            <a:pPr algn="l">
+              <a:spcBef>
+                <a:spcPts val="0"/>
+              </a:spcBef>
+              <a:spcAft>
+                <a:spcPts val="0"/>
+              </a:spcAft>
+            </a:pPr>
+            <a:r>
+              <a:rPr sz="1150" b="0">
+                <a:solidFill>
+                  <a:srgbClr val="1B2633"/>
+                </a:solidFill>
+                <a:latin typeface="微軟正黑體"/>
+              </a:rPr>
+              <a:t>開發期間</a:t>
+            </a:r>
+          </a:p>
+        </p:txBody>
+      </p:sp>
+      <p:sp>
+        <p:nvSpPr>
+          <p:cNvPr id="20" name="TextBox 19"/>
+          <p:cNvSpPr txBox="1"/>
+          <p:nvPr/>
+        </p:nvSpPr>
+        <p:spPr>
+          <a:xfrm>
+            <a:off x="2322576" y="3108960"/>
+            <a:ext cx="1901952" cy="219456"/>
+          </a:xfrm>
+          <a:prstGeom prst="rect">
+            <a:avLst/>
+          </a:prstGeom>
+          <a:noFill/>
+        </p:spPr>
+        <p:txBody>
+          <a:bodyPr wrap="square" lIns="0" rIns="0" tIns="0" bIns="0" anchor="t">
+            <a:spAutoFit/>
+          </a:bodyPr>
+          <a:lstStyle/>
+          <a:p>
+            <a:pPr algn="l">
+              <a:spcBef>
+                <a:spcPts val="0"/>
+              </a:spcBef>
+              <a:spcAft>
+                <a:spcPts val="0"/>
+              </a:spcAft>
+            </a:pPr>
+            <a:r>
+              <a:rPr sz="1200" b="1">
+                <a:solidFill>
+                  <a:srgbClr val="102A43"/>
+                </a:solidFill>
+                <a:latin typeface="微軟正黑體"/>
+              </a:rPr>
+              <a:t>14 天 ／ 45 次提交</a:t>
+            </a:r>
+          </a:p>
+        </p:txBody>
+      </p:sp>
+      <p:sp>
+        <p:nvSpPr>
+          <p:cNvPr id="21" name="TextBox 20"/>
+          <p:cNvSpPr txBox="1"/>
+          <p:nvPr/>
+        </p:nvSpPr>
+        <p:spPr>
+          <a:xfrm>
+            <a:off x="4279391" y="3127248"/>
+            <a:ext cx="1572768" cy="219456"/>
+          </a:xfrm>
+          <a:prstGeom prst="rect">
+            <a:avLst/>
+          </a:prstGeom>
+          <a:noFill/>
+        </p:spPr>
+        <p:txBody>
+          <a:bodyPr wrap="square" lIns="0" rIns="0" tIns="0" bIns="0" anchor="t">
+            <a:spAutoFit/>
+          </a:bodyPr>
+          <a:lstStyle/>
+          <a:p>
+            <a:pPr algn="l">
+              <a:spcBef>
+                <a:spcPts val="0"/>
+              </a:spcBef>
+              <a:spcAft>
+                <a:spcPts val="0"/>
+              </a:spcAft>
+            </a:pPr>
+            <a:r>
+              <a:rPr sz="1000" b="0">
+                <a:solidFill>
+                  <a:srgbClr val="5B6B7B"/>
+                </a:solidFill>
+                <a:latin typeface="Consolas"/>
+              </a:rPr>
+              <a:t>git log</a:t>
+            </a:r>
+          </a:p>
+        </p:txBody>
+      </p:sp>
+      <p:sp>
+        <p:nvSpPr>
+          <p:cNvPr id="22" name="TextBox 21"/>
+          <p:cNvSpPr txBox="1"/>
+          <p:nvPr/>
+        </p:nvSpPr>
+        <p:spPr>
+          <a:xfrm>
+            <a:off x="694944" y="3429000"/>
+            <a:ext cx="1572768" cy="219456"/>
+          </a:xfrm>
+          <a:prstGeom prst="rect">
+            <a:avLst/>
+          </a:prstGeom>
+          <a:noFill/>
+        </p:spPr>
+        <p:txBody>
+          <a:bodyPr wrap="square" lIns="0" rIns="0" tIns="0" bIns="0" anchor="t">
+            <a:spAutoFit/>
+          </a:bodyPr>
+          <a:lstStyle/>
+          <a:p>
+            <a:pPr algn="l">
+              <a:spcBef>
+                <a:spcPts val="0"/>
+              </a:spcBef>
+              <a:spcAft>
+                <a:spcPts val="0"/>
+              </a:spcAft>
+            </a:pPr>
+            <a:r>
+              <a:rPr sz="1150" b="0">
+                <a:solidFill>
+                  <a:srgbClr val="1B2633"/>
+                </a:solidFill>
+                <a:latin typeface="微軟正黑體"/>
+              </a:rPr>
+              <a:t>目前版本</a:t>
+            </a:r>
+          </a:p>
+        </p:txBody>
+      </p:sp>
+      <p:sp>
+        <p:nvSpPr>
+          <p:cNvPr id="23" name="TextBox 22"/>
+          <p:cNvSpPr txBox="1"/>
+          <p:nvPr/>
+        </p:nvSpPr>
+        <p:spPr>
+          <a:xfrm>
+            <a:off x="2322576" y="3419856"/>
+            <a:ext cx="1901952" cy="219456"/>
+          </a:xfrm>
+          <a:prstGeom prst="rect">
+            <a:avLst/>
+          </a:prstGeom>
+          <a:noFill/>
+        </p:spPr>
+        <p:txBody>
+          <a:bodyPr wrap="square" lIns="0" rIns="0" tIns="0" bIns="0" anchor="t">
+            <a:spAutoFit/>
+          </a:bodyPr>
+          <a:lstStyle/>
+          <a:p>
+            <a:pPr algn="l">
+              <a:spcBef>
+                <a:spcPts val="0"/>
+              </a:spcBef>
+              <a:spcAft>
+                <a:spcPts val="0"/>
+              </a:spcAft>
+            </a:pPr>
+            <a:r>
+              <a:rPr sz="1200" b="1">
+                <a:solidFill>
+                  <a:srgbClr val="102A43"/>
+                </a:solidFill>
+                <a:latin typeface="微軟正黑體"/>
+              </a:rPr>
+              <a:t>v0.5.1</a:t>
+            </a:r>
+          </a:p>
+        </p:txBody>
+      </p:sp>
+      <p:sp>
+        <p:nvSpPr>
+          <p:cNvPr id="24" name="TextBox 23"/>
+          <p:cNvSpPr txBox="1"/>
+          <p:nvPr/>
+        </p:nvSpPr>
+        <p:spPr>
+          <a:xfrm>
+            <a:off x="4279391" y="3438144"/>
+            <a:ext cx="1572768" cy="219456"/>
+          </a:xfrm>
+          <a:prstGeom prst="rect">
+            <a:avLst/>
+          </a:prstGeom>
+          <a:noFill/>
+        </p:spPr>
+        <p:txBody>
+          <a:bodyPr wrap="square" lIns="0" rIns="0" tIns="0" bIns="0" anchor="t">
+            <a:spAutoFit/>
+          </a:bodyPr>
+          <a:lstStyle/>
+          <a:p>
+            <a:pPr algn="l">
+              <a:spcBef>
+                <a:spcPts val="0"/>
+              </a:spcBef>
+              <a:spcAft>
+                <a:spcPts val="0"/>
+              </a:spcAft>
+            </a:pPr>
+            <a:r>
+              <a:rPr sz="1000" b="0">
+                <a:solidFill>
+                  <a:srgbClr val="5B6B7B"/>
+                </a:solidFill>
+                <a:latin typeface="Consolas"/>
+              </a:rPr>
+              <a:t>package.json</a:t>
+            </a:r>
+          </a:p>
+        </p:txBody>
+      </p:sp>
+      <p:sp>
+        <p:nvSpPr>
+          <p:cNvPr id="25" name="Rectangle 24"/>
+          <p:cNvSpPr/>
+          <p:nvPr/>
+        </p:nvSpPr>
+        <p:spPr>
+          <a:xfrm>
+            <a:off x="566928" y="3803904"/>
+            <a:ext cx="34290" cy="237744"/>
+          </a:xfrm>
+          <a:prstGeom prst="rect">
             <a:avLst/>
           </a:prstGeom>
           <a:solidFill>
@@ -8268,14 +7277,14 @@
       </p:sp>
       <p:sp>
         <p:nvSpPr>
-          <p:cNvPr id="18" name="TextBox 17"/>
-          <p:cNvSpPr txBox="1"/>
-          <p:nvPr/>
-        </p:nvSpPr>
-        <p:spPr>
-          <a:xfrm>
-            <a:off x="8522208" y="2743200"/>
-            <a:ext cx="1737360" cy="320040"/>
+          <p:cNvPr id="26" name="TextBox 25"/>
+          <p:cNvSpPr txBox="1"/>
+          <p:nvPr/>
+        </p:nvSpPr>
+        <p:spPr>
+          <a:xfrm>
+            <a:off x="694944" y="3822192"/>
+            <a:ext cx="5376672" cy="219456"/>
           </a:xfrm>
           <a:prstGeom prst="rect">
             <a:avLst/>
@@ -8297,71 +7306,325 @@
               </a:spcAft>
             </a:pPr>
             <a:r>
-              <a:rPr sz="1250" b="1">
+              <a:rPr sz="1150" b="1">
+                <a:solidFill>
+                  <a:srgbClr val="119DA4"/>
+                </a:solidFill>
+                <a:latin typeface="微軟正黑體"/>
+              </a:rPr>
+              <a:t>規則與知識庫</a:t>
+            </a:r>
+          </a:p>
+        </p:txBody>
+      </p:sp>
+      <p:sp>
+        <p:nvSpPr>
+          <p:cNvPr id="27" name="Rectangle 26"/>
+          <p:cNvSpPr/>
+          <p:nvPr/>
+        </p:nvSpPr>
+        <p:spPr>
+          <a:xfrm>
+            <a:off x="566928" y="4114800"/>
+            <a:ext cx="5376672" cy="310896"/>
+          </a:xfrm>
+          <a:prstGeom prst="rect">
+            <a:avLst/>
+          </a:prstGeom>
+          <a:solidFill>
+            <a:srgbClr val="F2F5F8"/>
+          </a:solidFill>
+          <a:ln>
+            <a:noFill/>
+          </a:ln>
+          <a:effectLst/>
+        </p:spPr>
+        <p:style>
+          <a:lnRef idx="1">
+            <a:schemeClr val="accent1"/>
+          </a:lnRef>
+          <a:fillRef idx="3">
+            <a:schemeClr val="accent1"/>
+          </a:fillRef>
+          <a:effectRef idx="2">
+            <a:schemeClr val="accent1"/>
+          </a:effectRef>
+          <a:fontRef idx="minor">
+            <a:schemeClr val="lt1"/>
+          </a:fontRef>
+        </p:style>
+        <p:txBody>
+          <a:bodyPr rtlCol="0" anchor="ctr"/>
+          <a:lstStyle/>
+          <a:p>
+            <a:pPr algn="ctr"/>
+          </a:p>
+        </p:txBody>
+      </p:sp>
+      <p:sp>
+        <p:nvSpPr>
+          <p:cNvPr id="28" name="TextBox 27"/>
+          <p:cNvSpPr txBox="1"/>
+          <p:nvPr/>
+        </p:nvSpPr>
+        <p:spPr>
+          <a:xfrm>
+            <a:off x="694944" y="4178808"/>
+            <a:ext cx="1572768" cy="219456"/>
+          </a:xfrm>
+          <a:prstGeom prst="rect">
+            <a:avLst/>
+          </a:prstGeom>
+          <a:noFill/>
+        </p:spPr>
+        <p:txBody>
+          <a:bodyPr wrap="square" lIns="0" rIns="0" tIns="0" bIns="0" anchor="t">
+            <a:spAutoFit/>
+          </a:bodyPr>
+          <a:lstStyle/>
+          <a:p>
+            <a:pPr algn="l">
+              <a:spcBef>
+                <a:spcPts val="0"/>
+              </a:spcBef>
+              <a:spcAft>
+                <a:spcPts val="0"/>
+              </a:spcAft>
+            </a:pPr>
+            <a:r>
+              <a:rPr sz="1150" b="0">
+                <a:solidFill>
+                  <a:srgbClr val="1B2633"/>
+                </a:solidFill>
+                <a:latin typeface="微軟正黑體"/>
+              </a:rPr>
+              <a:t>團隊規則</a:t>
+            </a:r>
+          </a:p>
+        </p:txBody>
+      </p:sp>
+      <p:sp>
+        <p:nvSpPr>
+          <p:cNvPr id="29" name="TextBox 28"/>
+          <p:cNvSpPr txBox="1"/>
+          <p:nvPr/>
+        </p:nvSpPr>
+        <p:spPr>
+          <a:xfrm>
+            <a:off x="2322576" y="4169664"/>
+            <a:ext cx="1901952" cy="219456"/>
+          </a:xfrm>
+          <a:prstGeom prst="rect">
+            <a:avLst/>
+          </a:prstGeom>
+          <a:noFill/>
+        </p:spPr>
+        <p:txBody>
+          <a:bodyPr wrap="square" lIns="0" rIns="0" tIns="0" bIns="0" anchor="t">
+            <a:spAutoFit/>
+          </a:bodyPr>
+          <a:lstStyle/>
+          <a:p>
+            <a:pPr algn="l">
+              <a:spcBef>
+                <a:spcPts val="0"/>
+              </a:spcBef>
+              <a:spcAft>
+                <a:spcPts val="0"/>
+              </a:spcAft>
+            </a:pPr>
+            <a:r>
+              <a:rPr sz="1200" b="1">
                 <a:solidFill>
                   <a:srgbClr val="102A43"/>
                 </a:solidFill>
                 <a:latin typeface="微軟正黑體"/>
               </a:rPr>
-              <a:t>開發驗證</a:t>
-            </a:r>
-          </a:p>
-        </p:txBody>
-      </p:sp>
-      <p:sp>
-        <p:nvSpPr>
-          <p:cNvPr id="19" name="TextBox 18"/>
-          <p:cNvSpPr txBox="1"/>
-          <p:nvPr/>
-        </p:nvSpPr>
-        <p:spPr>
-          <a:xfrm>
-            <a:off x="10332720" y="2752344"/>
-            <a:ext cx="1051560" cy="320040"/>
-          </a:xfrm>
-          <a:prstGeom prst="rect">
-            <a:avLst/>
-          </a:prstGeom>
-          <a:noFill/>
-        </p:spPr>
-        <p:txBody>
-          <a:bodyPr wrap="square" lIns="0" rIns="0" tIns="0" bIns="0" anchor="t">
-            <a:spAutoFit/>
-          </a:bodyPr>
-          <a:lstStyle/>
-          <a:p>
-            <a:pPr algn="r">
-              <a:spcBef>
-                <a:spcPts val="0"/>
-              </a:spcBef>
-              <a:spcAft>
-                <a:spcPts val="0"/>
-              </a:spcAft>
-            </a:pPr>
-            <a:r>
-              <a:rPr sz="1250" b="1">
+              <a:t>10 條（error 8／warning 2）</a:t>
+            </a:r>
+          </a:p>
+        </p:txBody>
+      </p:sp>
+      <p:sp>
+        <p:nvSpPr>
+          <p:cNvPr id="30" name="TextBox 29"/>
+          <p:cNvSpPr txBox="1"/>
+          <p:nvPr/>
+        </p:nvSpPr>
+        <p:spPr>
+          <a:xfrm>
+            <a:off x="4279391" y="4187952"/>
+            <a:ext cx="1572768" cy="219456"/>
+          </a:xfrm>
+          <a:prstGeom prst="rect">
+            <a:avLst/>
+          </a:prstGeom>
+          <a:noFill/>
+        </p:spPr>
+        <p:txBody>
+          <a:bodyPr wrap="square" lIns="0" rIns="0" tIns="0" bIns="0" anchor="t">
+            <a:spAutoFit/>
+          </a:bodyPr>
+          <a:lstStyle/>
+          <a:p>
+            <a:pPr algn="l">
+              <a:spcBef>
+                <a:spcPts val="0"/>
+              </a:spcBef>
+              <a:spcAft>
+                <a:spcPts val="0"/>
+              </a:spcAft>
+            </a:pPr>
+            <a:r>
+              <a:rPr sz="1000" b="0">
+                <a:solidFill>
+                  <a:srgbClr val="5B6B7B"/>
+                </a:solidFill>
+                <a:latin typeface="Consolas"/>
+              </a:rPr>
+              <a:t>.sensai/rules.yaml</a:t>
+            </a:r>
+          </a:p>
+        </p:txBody>
+      </p:sp>
+      <p:sp>
+        <p:nvSpPr>
+          <p:cNvPr id="31" name="TextBox 30"/>
+          <p:cNvSpPr txBox="1"/>
+          <p:nvPr/>
+        </p:nvSpPr>
+        <p:spPr>
+          <a:xfrm>
+            <a:off x="694944" y="4489704"/>
+            <a:ext cx="1572768" cy="219456"/>
+          </a:xfrm>
+          <a:prstGeom prst="rect">
+            <a:avLst/>
+          </a:prstGeom>
+          <a:noFill/>
+        </p:spPr>
+        <p:txBody>
+          <a:bodyPr wrap="square" lIns="0" rIns="0" tIns="0" bIns="0" anchor="t">
+            <a:spAutoFit/>
+          </a:bodyPr>
+          <a:lstStyle/>
+          <a:p>
+            <a:pPr algn="l">
+              <a:spcBef>
+                <a:spcPts val="0"/>
+              </a:spcBef>
+              <a:spcAft>
+                <a:spcPts val="0"/>
+              </a:spcAft>
+            </a:pPr>
+            <a:r>
+              <a:rPr sz="1150" b="0">
+                <a:solidFill>
+                  <a:srgbClr val="1B2633"/>
+                </a:solidFill>
+                <a:latin typeface="微軟正黑體"/>
+              </a:rPr>
+              <a:t>架構 ABI 事實</a:t>
+            </a:r>
+          </a:p>
+        </p:txBody>
+      </p:sp>
+      <p:sp>
+        <p:nvSpPr>
+          <p:cNvPr id="32" name="TextBox 31"/>
+          <p:cNvSpPr txBox="1"/>
+          <p:nvPr/>
+        </p:nvSpPr>
+        <p:spPr>
+          <a:xfrm>
+            <a:off x="2322576" y="4480560"/>
+            <a:ext cx="1901952" cy="219456"/>
+          </a:xfrm>
+          <a:prstGeom prst="rect">
+            <a:avLst/>
+          </a:prstGeom>
+          <a:noFill/>
+        </p:spPr>
+        <p:txBody>
+          <a:bodyPr wrap="square" lIns="0" rIns="0" tIns="0" bIns="0" anchor="t">
+            <a:spAutoFit/>
+          </a:bodyPr>
+          <a:lstStyle/>
+          <a:p>
+            <a:pPr algn="l">
+              <a:spcBef>
+                <a:spcPts val="0"/>
+              </a:spcBef>
+              <a:spcAft>
+                <a:spcPts val="0"/>
+              </a:spcAft>
+            </a:pPr>
+            <a:r>
+              <a:rPr sz="1200" b="1">
                 <a:solidFill>
                   <a:srgbClr val="102A43"/>
                 </a:solidFill>
                 <a:latin typeface="微軟正黑體"/>
               </a:rPr>
-              <a:t>1 台</a:t>
-            </a:r>
-          </a:p>
-        </p:txBody>
-      </p:sp>
-      <p:sp>
-        <p:nvSpPr>
-          <p:cNvPr id="20" name="Oval 19"/>
+              <a:t>2 組（Andes V5／ARMv7E-M）</a:t>
+            </a:r>
+          </a:p>
+        </p:txBody>
+      </p:sp>
+      <p:sp>
+        <p:nvSpPr>
+          <p:cNvPr id="33" name="TextBox 32"/>
+          <p:cNvSpPr txBox="1"/>
+          <p:nvPr/>
+        </p:nvSpPr>
+        <p:spPr>
+          <a:xfrm>
+            <a:off x="4279391" y="4498848"/>
+            <a:ext cx="1572768" cy="219456"/>
+          </a:xfrm>
+          <a:prstGeom prst="rect">
+            <a:avLst/>
+          </a:prstGeom>
+          <a:noFill/>
+        </p:spPr>
+        <p:txBody>
+          <a:bodyPr wrap="square" lIns="0" rIns="0" tIns="0" bIns="0" anchor="t">
+            <a:spAutoFit/>
+          </a:bodyPr>
+          <a:lstStyle/>
+          <a:p>
+            <a:pPr algn="l">
+              <a:spcBef>
+                <a:spcPts val="0"/>
+              </a:spcBef>
+              <a:spcAft>
+                <a:spcPts val="0"/>
+              </a:spcAft>
+            </a:pPr>
+            <a:r>
+              <a:rPr sz="1000" b="0">
+                <a:solidFill>
+                  <a:srgbClr val="5B6B7B"/>
+                </a:solidFill>
+                <a:latin typeface="Consolas"/>
+              </a:rPr>
+              <a:t>src/abi.ts</a:t>
+            </a:r>
+          </a:p>
+        </p:txBody>
+      </p:sp>
+      <p:sp>
+        <p:nvSpPr>
+          <p:cNvPr id="34" name="Rectangle 33"/>
           <p:cNvSpPr/>
           <p:nvPr/>
         </p:nvSpPr>
         <p:spPr>
           <a:xfrm>
-            <a:off x="8211312" y="3401568"/>
-            <a:ext cx="146304" cy="146304"/>
-          </a:xfrm>
-          <a:prstGeom prst="ellipse">
+            <a:off x="566928" y="4864608"/>
+            <a:ext cx="34290" cy="237744"/>
+          </a:xfrm>
+          <a:prstGeom prst="rect">
             <a:avLst/>
           </a:prstGeom>
           <a:solidFill>
@@ -8396,14 +7659,14 @@
       </p:sp>
       <p:sp>
         <p:nvSpPr>
-          <p:cNvPr id="21" name="TextBox 20"/>
-          <p:cNvSpPr txBox="1"/>
-          <p:nvPr/>
-        </p:nvSpPr>
-        <p:spPr>
-          <a:xfrm>
-            <a:off x="8522208" y="3310128"/>
-            <a:ext cx="1737360" cy="320040"/>
+          <p:cNvPr id="35" name="TextBox 34"/>
+          <p:cNvSpPr txBox="1"/>
+          <p:nvPr/>
+        </p:nvSpPr>
+        <p:spPr>
+          <a:xfrm>
+            <a:off x="694944" y="4882896"/>
+            <a:ext cx="5376672" cy="219456"/>
           </a:xfrm>
           <a:prstGeom prst="rect">
             <a:avLst/>
@@ -8425,75 +7688,33 @@
               </a:spcAft>
             </a:pPr>
             <a:r>
-              <a:rPr sz="1250" b="1">
-                <a:solidFill>
-                  <a:srgbClr val="102A43"/>
-                </a:solidFill>
-                <a:latin typeface="微軟正黑體"/>
-              </a:rPr>
-              <a:t>目前</a:t>
-            </a:r>
-          </a:p>
-        </p:txBody>
-      </p:sp>
-      <p:sp>
-        <p:nvSpPr>
-          <p:cNvPr id="22" name="TextBox 21"/>
-          <p:cNvSpPr txBox="1"/>
-          <p:nvPr/>
-        </p:nvSpPr>
-        <p:spPr>
-          <a:xfrm>
-            <a:off x="10332720" y="3319272"/>
-            <a:ext cx="1051560" cy="320040"/>
-          </a:xfrm>
-          <a:prstGeom prst="rect">
-            <a:avLst/>
-          </a:prstGeom>
-          <a:noFill/>
-        </p:spPr>
-        <p:txBody>
-          <a:bodyPr wrap="square" lIns="0" rIns="0" tIns="0" bIns="0" anchor="t">
-            <a:spAutoFit/>
-          </a:bodyPr>
-          <a:lstStyle/>
-          <a:p>
-            <a:pPr algn="r">
-              <a:spcBef>
-                <a:spcPts val="0"/>
-              </a:spcBef>
-              <a:spcAft>
-                <a:spcPts val="0"/>
-              </a:spcAft>
-            </a:pPr>
-            <a:r>
-              <a:rPr sz="1250" b="1">
-                <a:solidFill>
-                  <a:srgbClr val="102A43"/>
-                </a:solidFill>
-                <a:latin typeface="微軟正黑體"/>
-              </a:rPr>
-              <a:t>8 台</a:t>
-            </a:r>
-          </a:p>
-        </p:txBody>
-      </p:sp>
-      <p:sp>
-        <p:nvSpPr>
-          <p:cNvPr id="23" name="Oval 22"/>
+              <a:rPr sz="1150" b="1">
+                <a:solidFill>
+                  <a:srgbClr val="119DA4"/>
+                </a:solidFill>
+                <a:latin typeface="微軟正黑體"/>
+              </a:rPr>
+              <a:t>運作參數（預設值）</a:t>
+            </a:r>
+          </a:p>
+        </p:txBody>
+      </p:sp>
+      <p:sp>
+        <p:nvSpPr>
+          <p:cNvPr id="36" name="Rectangle 35"/>
           <p:cNvSpPr/>
           <p:nvPr/>
         </p:nvSpPr>
         <p:spPr>
           <a:xfrm>
-            <a:off x="8211312" y="3968496"/>
-            <a:ext cx="146304" cy="146304"/>
-          </a:xfrm>
-          <a:prstGeom prst="ellipse">
+            <a:off x="566928" y="5175504"/>
+            <a:ext cx="5376672" cy="310896"/>
+          </a:xfrm>
+          <a:prstGeom prst="rect">
             <a:avLst/>
           </a:prstGeom>
           <a:solidFill>
-            <a:srgbClr val="B0BCC8"/>
+            <a:srgbClr val="F2F5F8"/>
           </a:solidFill>
           <a:ln>
             <a:noFill/>
@@ -8524,14 +7745,14 @@
       </p:sp>
       <p:sp>
         <p:nvSpPr>
-          <p:cNvPr id="24" name="TextBox 23"/>
-          <p:cNvSpPr txBox="1"/>
-          <p:nvPr/>
-        </p:nvSpPr>
-        <p:spPr>
-          <a:xfrm>
-            <a:off x="8522208" y="3877056"/>
-            <a:ext cx="1737360" cy="320040"/>
+          <p:cNvPr id="37" name="TextBox 36"/>
+          <p:cNvSpPr txBox="1"/>
+          <p:nvPr/>
+        </p:nvSpPr>
+        <p:spPr>
+          <a:xfrm>
+            <a:off x="694944" y="5239512"/>
+            <a:ext cx="1572768" cy="219456"/>
           </a:xfrm>
           <a:prstGeom prst="rect">
             <a:avLst/>
@@ -8553,75 +7774,243 @@
               </a:spcAft>
             </a:pPr>
             <a:r>
-              <a:rPr sz="1250" b="0">
+              <a:rPr sz="1150" b="0">
+                <a:solidFill>
+                  <a:srgbClr val="1B2633"/>
+                </a:solidFill>
+                <a:latin typeface="微軟正黑體"/>
+              </a:rPr>
+              <a:t>存檔去抖動</a:t>
+            </a:r>
+          </a:p>
+        </p:txBody>
+      </p:sp>
+      <p:sp>
+        <p:nvSpPr>
+          <p:cNvPr id="38" name="TextBox 37"/>
+          <p:cNvSpPr txBox="1"/>
+          <p:nvPr/>
+        </p:nvSpPr>
+        <p:spPr>
+          <a:xfrm>
+            <a:off x="2322576" y="5230368"/>
+            <a:ext cx="1901952" cy="219456"/>
+          </a:xfrm>
+          <a:prstGeom prst="rect">
+            <a:avLst/>
+          </a:prstGeom>
+          <a:noFill/>
+        </p:spPr>
+        <p:txBody>
+          <a:bodyPr wrap="square" lIns="0" rIns="0" tIns="0" bIns="0" anchor="t">
+            <a:spAutoFit/>
+          </a:bodyPr>
+          <a:lstStyle/>
+          <a:p>
+            <a:pPr algn="l">
+              <a:spcBef>
+                <a:spcPts val="0"/>
+              </a:spcBef>
+              <a:spcAft>
+                <a:spcPts val="0"/>
+              </a:spcAft>
+            </a:pPr>
+            <a:r>
+              <a:rPr sz="1200" b="1">
+                <a:solidFill>
+                  <a:srgbClr val="102A43"/>
+                </a:solidFill>
+                <a:latin typeface="微軟正黑體"/>
+              </a:rPr>
+              <a:t>1,000 ms</a:t>
+            </a:r>
+          </a:p>
+        </p:txBody>
+      </p:sp>
+      <p:sp>
+        <p:nvSpPr>
+          <p:cNvPr id="39" name="TextBox 38"/>
+          <p:cNvSpPr txBox="1"/>
+          <p:nvPr/>
+        </p:nvSpPr>
+        <p:spPr>
+          <a:xfrm>
+            <a:off x="4279391" y="5248656"/>
+            <a:ext cx="1572768" cy="219456"/>
+          </a:xfrm>
+          <a:prstGeom prst="rect">
+            <a:avLst/>
+          </a:prstGeom>
+          <a:noFill/>
+        </p:spPr>
+        <p:txBody>
+          <a:bodyPr wrap="square" lIns="0" rIns="0" tIns="0" bIns="0" anchor="t">
+            <a:spAutoFit/>
+          </a:bodyPr>
+          <a:lstStyle/>
+          <a:p>
+            <a:pPr algn="l">
+              <a:spcBef>
+                <a:spcPts val="0"/>
+              </a:spcBef>
+              <a:spcAft>
+                <a:spcPts val="0"/>
+              </a:spcAft>
+            </a:pPr>
+            <a:r>
+              <a:rPr sz="1000" b="0">
                 <a:solidFill>
                   <a:srgbClr val="5B6B7B"/>
                 </a:solidFill>
-                <a:latin typeface="微軟正黑體"/>
-              </a:rPr>
-              <a:t>試行專案全員</a:t>
-            </a:r>
-          </a:p>
-        </p:txBody>
-      </p:sp>
-      <p:sp>
-        <p:nvSpPr>
-          <p:cNvPr id="25" name="TextBox 24"/>
-          <p:cNvSpPr txBox="1"/>
-          <p:nvPr/>
-        </p:nvSpPr>
-        <p:spPr>
-          <a:xfrm>
-            <a:off x="10332720" y="3886200"/>
-            <a:ext cx="1051560" cy="320040"/>
-          </a:xfrm>
-          <a:prstGeom prst="rect">
-            <a:avLst/>
-          </a:prstGeom>
-          <a:noFill/>
-        </p:spPr>
-        <p:txBody>
-          <a:bodyPr wrap="square" lIns="0" rIns="0" tIns="0" bIns="0" anchor="t">
-            <a:spAutoFit/>
-          </a:bodyPr>
-          <a:lstStyle/>
-          <a:p>
-            <a:pPr algn="r">
-              <a:spcBef>
-                <a:spcPts val="0"/>
-              </a:spcBef>
-              <a:spcAft>
-                <a:spcPts val="0"/>
-              </a:spcAft>
-            </a:pPr>
-            <a:r>
-              <a:rPr sz="1250" b="0">
+                <a:latin typeface="Consolas"/>
+              </a:rPr>
+              <a:t>sensai.debounceMs</a:t>
+            </a:r>
+          </a:p>
+        </p:txBody>
+      </p:sp>
+      <p:sp>
+        <p:nvSpPr>
+          <p:cNvPr id="40" name="TextBox 39"/>
+          <p:cNvSpPr txBox="1"/>
+          <p:nvPr/>
+        </p:nvSpPr>
+        <p:spPr>
+          <a:xfrm>
+            <a:off x="694944" y="5550408"/>
+            <a:ext cx="1572768" cy="219456"/>
+          </a:xfrm>
+          <a:prstGeom prst="rect">
+            <a:avLst/>
+          </a:prstGeom>
+          <a:noFill/>
+        </p:spPr>
+        <p:txBody>
+          <a:bodyPr wrap="square" lIns="0" rIns="0" tIns="0" bIns="0" anchor="t">
+            <a:spAutoFit/>
+          </a:bodyPr>
+          <a:lstStyle/>
+          <a:p>
+            <a:pPr algn="l">
+              <a:spcBef>
+                <a:spcPts val="0"/>
+              </a:spcBef>
+              <a:spcAft>
+                <a:spcPts val="0"/>
+              </a:spcAft>
+            </a:pPr>
+            <a:r>
+              <a:rPr sz="1150" b="0">
+                <a:solidFill>
+                  <a:srgbClr val="1B2633"/>
+                </a:solidFill>
+                <a:latin typeface="微軟正黑體"/>
+              </a:rPr>
+              <a:t>上下文上限</a:t>
+            </a:r>
+          </a:p>
+        </p:txBody>
+      </p:sp>
+      <p:sp>
+        <p:nvSpPr>
+          <p:cNvPr id="41" name="TextBox 40"/>
+          <p:cNvSpPr txBox="1"/>
+          <p:nvPr/>
+        </p:nvSpPr>
+        <p:spPr>
+          <a:xfrm>
+            <a:off x="2322576" y="5541264"/>
+            <a:ext cx="1901952" cy="219456"/>
+          </a:xfrm>
+          <a:prstGeom prst="rect">
+            <a:avLst/>
+          </a:prstGeom>
+          <a:noFill/>
+        </p:spPr>
+        <p:txBody>
+          <a:bodyPr wrap="square" lIns="0" rIns="0" tIns="0" bIns="0" anchor="t">
+            <a:spAutoFit/>
+          </a:bodyPr>
+          <a:lstStyle/>
+          <a:p>
+            <a:pPr algn="l">
+              <a:spcBef>
+                <a:spcPts val="0"/>
+              </a:spcBef>
+              <a:spcAft>
+                <a:spcPts val="0"/>
+              </a:spcAft>
+            </a:pPr>
+            <a:r>
+              <a:rPr sz="1200" b="1">
+                <a:solidFill>
+                  <a:srgbClr val="102A43"/>
+                </a:solidFill>
+                <a:latin typeface="微軟正黑體"/>
+              </a:rPr>
+              <a:t>120 KB ／ include 深度 2</a:t>
+            </a:r>
+          </a:p>
+        </p:txBody>
+      </p:sp>
+      <p:sp>
+        <p:nvSpPr>
+          <p:cNvPr id="42" name="TextBox 41"/>
+          <p:cNvSpPr txBox="1"/>
+          <p:nvPr/>
+        </p:nvSpPr>
+        <p:spPr>
+          <a:xfrm>
+            <a:off x="4279391" y="5559552"/>
+            <a:ext cx="1572768" cy="219456"/>
+          </a:xfrm>
+          <a:prstGeom prst="rect">
+            <a:avLst/>
+          </a:prstGeom>
+          <a:noFill/>
+        </p:spPr>
+        <p:txBody>
+          <a:bodyPr wrap="square" lIns="0" rIns="0" tIns="0" bIns="0" anchor="t">
+            <a:spAutoFit/>
+          </a:bodyPr>
+          <a:lstStyle/>
+          <a:p>
+            <a:pPr algn="l">
+              <a:spcBef>
+                <a:spcPts val="0"/>
+              </a:spcBef>
+              <a:spcAft>
+                <a:spcPts val="0"/>
+              </a:spcAft>
+            </a:pPr>
+            <a:r>
+              <a:rPr sz="1000" b="0">
                 <a:solidFill>
                   <a:srgbClr val="5B6B7B"/>
                 </a:solidFill>
-                <a:latin typeface="微軟正黑體"/>
-              </a:rPr>
-              <a:t>待展開</a:t>
-            </a:r>
-          </a:p>
-        </p:txBody>
-      </p:sp>
-      <p:sp>
-        <p:nvSpPr>
-          <p:cNvPr id="26" name="Oval 25"/>
+                <a:latin typeface="Consolas"/>
+              </a:rPr>
+              <a:t>sensai.includeDepth</a:t>
+            </a:r>
+          </a:p>
+        </p:txBody>
+      </p:sp>
+      <p:sp>
+        <p:nvSpPr>
+          <p:cNvPr id="43" name="Rectangle 42"/>
           <p:cNvSpPr/>
           <p:nvPr/>
         </p:nvSpPr>
         <p:spPr>
           <a:xfrm>
-            <a:off x="8211312" y="4535424"/>
-            <a:ext cx="146304" cy="146304"/>
-          </a:xfrm>
-          <a:prstGeom prst="ellipse">
+            <a:off x="6254496" y="2121408"/>
+            <a:ext cx="34290" cy="237744"/>
+          </a:xfrm>
+          <a:prstGeom prst="rect">
             <a:avLst/>
           </a:prstGeom>
           <a:solidFill>
-            <a:srgbClr val="B0BCC8"/>
+            <a:srgbClr val="D18616"/>
           </a:solidFill>
           <a:ln>
             <a:noFill/>
@@ -8652,14 +8041,14 @@
       </p:sp>
       <p:sp>
         <p:nvSpPr>
-          <p:cNvPr id="27" name="TextBox 26"/>
-          <p:cNvSpPr txBox="1"/>
-          <p:nvPr/>
-        </p:nvSpPr>
-        <p:spPr>
-          <a:xfrm>
-            <a:off x="8522208" y="4443984"/>
-            <a:ext cx="1737360" cy="320040"/>
+          <p:cNvPr id="44" name="TextBox 43"/>
+          <p:cNvSpPr txBox="1"/>
+          <p:nvPr/>
+        </p:nvSpPr>
+        <p:spPr>
+          <a:xfrm>
+            <a:off x="6382512" y="2139696"/>
+            <a:ext cx="5376672" cy="219456"/>
           </a:xfrm>
           <a:prstGeom prst="rect">
             <a:avLst/>
@@ -8681,120 +8070,33 @@
               </a:spcAft>
             </a:pPr>
             <a:r>
-              <a:rPr sz="1250" b="0">
-                <a:solidFill>
-                  <a:srgbClr val="5B6B7B"/>
-                </a:solidFill>
-                <a:latin typeface="微軟正黑體"/>
-              </a:rPr>
-              <a:t>部門推廣</a:t>
-            </a:r>
-          </a:p>
-        </p:txBody>
-      </p:sp>
-      <p:sp>
-        <p:nvSpPr>
-          <p:cNvPr id="28" name="TextBox 27"/>
-          <p:cNvSpPr txBox="1"/>
-          <p:nvPr/>
-        </p:nvSpPr>
-        <p:spPr>
-          <a:xfrm>
-            <a:off x="10332720" y="4453128"/>
-            <a:ext cx="1051560" cy="320040"/>
-          </a:xfrm>
-          <a:prstGeom prst="rect">
-            <a:avLst/>
-          </a:prstGeom>
-          <a:noFill/>
-        </p:spPr>
-        <p:txBody>
-          <a:bodyPr wrap="square" lIns="0" rIns="0" tIns="0" bIns="0" anchor="t">
-            <a:spAutoFit/>
-          </a:bodyPr>
-          <a:lstStyle/>
-          <a:p>
-            <a:pPr algn="r">
-              <a:spcBef>
-                <a:spcPts val="0"/>
-              </a:spcBef>
-              <a:spcAft>
-                <a:spcPts val="0"/>
-              </a:spcAft>
-            </a:pPr>
-            <a:r>
-              <a:rPr sz="1250" b="0">
-                <a:solidFill>
-                  <a:srgbClr val="5B6B7B"/>
-                </a:solidFill>
-                <a:latin typeface="微軟正黑體"/>
-              </a:rPr>
-              <a:t>待評估</a:t>
-            </a:r>
-          </a:p>
-        </p:txBody>
-      </p:sp>
-      <p:sp>
-        <p:nvSpPr>
-          <p:cNvPr id="29" name="TextBox 28"/>
-          <p:cNvSpPr txBox="1"/>
-          <p:nvPr/>
-        </p:nvSpPr>
-        <p:spPr>
-          <a:xfrm>
-            <a:off x="8211312" y="5084064"/>
-            <a:ext cx="3145536" cy="365760"/>
-          </a:xfrm>
-          <a:prstGeom prst="rect">
-            <a:avLst/>
-          </a:prstGeom>
-          <a:noFill/>
-        </p:spPr>
-        <p:txBody>
-          <a:bodyPr wrap="square" lIns="0" rIns="0" tIns="0" bIns="0" anchor="t">
-            <a:spAutoFit/>
-          </a:bodyPr>
-          <a:lstStyle/>
-          <a:p>
-            <a:pPr algn="l">
-              <a:lnSpc>
-                <a:spcPct val="120000"/>
-              </a:lnSpc>
-              <a:spcBef>
-                <a:spcPts val="0"/>
-              </a:spcBef>
-              <a:spcAft>
-                <a:spcPts val="0"/>
-              </a:spcAft>
-            </a:pPr>
-            <a:r>
-              <a:rPr sz="1000" b="0">
-                <a:solidFill>
-                  <a:srgbClr val="5B6B7B"/>
-                </a:solidFill>
-                <a:latin typeface="微軟正黑體"/>
-              </a:rPr>
-              <a:t>安裝數不等於活躍台數。每週仍在產生審查記錄的台數，需收回稽核日誌後才算得出。</a:t>
-            </a:r>
-          </a:p>
-        </p:txBody>
-      </p:sp>
-      <p:sp>
-        <p:nvSpPr>
-          <p:cNvPr id="30" name="Rectangle 29"/>
+              <a:rPr sz="1150" b="1">
+                <a:solidFill>
+                  <a:srgbClr val="D18616"/>
+                </a:solidFill>
+                <a:latin typeface="微軟正黑體"/>
+              </a:rPr>
+              <a:t>實際執行觀測（樣本數 n＝1）</a:t>
+            </a:r>
+          </a:p>
+        </p:txBody>
+      </p:sp>
+      <p:sp>
+        <p:nvSpPr>
+          <p:cNvPr id="45" name="Rectangle 44"/>
           <p:cNvSpPr/>
           <p:nvPr/>
         </p:nvSpPr>
         <p:spPr>
           <a:xfrm>
-            <a:off x="566928" y="5559552"/>
-            <a:ext cx="11064240" cy="621792"/>
+            <a:off x="6254496" y="2432304"/>
+            <a:ext cx="5376672" cy="310896"/>
           </a:xfrm>
           <a:prstGeom prst="rect">
             <a:avLst/>
           </a:prstGeom>
           <a:solidFill>
-            <a:srgbClr val="102A43"/>
+            <a:srgbClr val="F2F5F8"/>
           </a:solidFill>
           <a:ln>
             <a:noFill/>
@@ -8825,14 +8127,14 @@
       </p:sp>
       <p:sp>
         <p:nvSpPr>
-          <p:cNvPr id="31" name="TextBox 30"/>
-          <p:cNvSpPr txBox="1"/>
-          <p:nvPr/>
-        </p:nvSpPr>
-        <p:spPr>
-          <a:xfrm>
-            <a:off x="868680" y="5669280"/>
-            <a:ext cx="10515600" cy="420624"/>
+          <p:cNvPr id="46" name="TextBox 45"/>
+          <p:cNvSpPr txBox="1"/>
+          <p:nvPr/>
+        </p:nvSpPr>
+        <p:spPr>
+          <a:xfrm>
+            <a:off x="6382512" y="2496312"/>
+            <a:ext cx="1572768" cy="219456"/>
           </a:xfrm>
           <a:prstGeom prst="rect">
             <a:avLst/>
@@ -8854,13 +8156,691 @@
               </a:spcAft>
             </a:pPr>
             <a:r>
+              <a:rPr sz="1150" b="0">
+                <a:solidFill>
+                  <a:srgbClr val="1B2633"/>
+                </a:solidFill>
+                <a:latin typeface="微軟正黑體"/>
+              </a:rPr>
+              <a:t>單檔審查耗時</a:t>
+            </a:r>
+          </a:p>
+        </p:txBody>
+      </p:sp>
+      <p:sp>
+        <p:nvSpPr>
+          <p:cNvPr id="47" name="TextBox 46"/>
+          <p:cNvSpPr txBox="1"/>
+          <p:nvPr/>
+        </p:nvSpPr>
+        <p:spPr>
+          <a:xfrm>
+            <a:off x="8010144" y="2487168"/>
+            <a:ext cx="1901952" cy="219456"/>
+          </a:xfrm>
+          <a:prstGeom prst="rect">
+            <a:avLst/>
+          </a:prstGeom>
+          <a:noFill/>
+        </p:spPr>
+        <p:txBody>
+          <a:bodyPr wrap="square" lIns="0" rIns="0" tIns="0" bIns="0" anchor="t">
+            <a:spAutoFit/>
+          </a:bodyPr>
+          <a:lstStyle/>
+          <a:p>
+            <a:pPr algn="l">
+              <a:spcBef>
+                <a:spcPts val="0"/>
+              </a:spcBef>
+              <a:spcAft>
+                <a:spcPts val="0"/>
+              </a:spcAft>
+            </a:pPr>
+            <a:r>
+              <a:rPr sz="1200" b="1">
+                <a:solidFill>
+                  <a:srgbClr val="102A43"/>
+                </a:solidFill>
+                <a:latin typeface="微軟正黑體"/>
+              </a:rPr>
+              <a:t>65.9 秒</a:t>
+            </a:r>
+          </a:p>
+        </p:txBody>
+      </p:sp>
+      <p:sp>
+        <p:nvSpPr>
+          <p:cNvPr id="48" name="TextBox 47"/>
+          <p:cNvSpPr txBox="1"/>
+          <p:nvPr/>
+        </p:nvSpPr>
+        <p:spPr>
+          <a:xfrm>
+            <a:off x="9966959" y="2505456"/>
+            <a:ext cx="1572768" cy="219456"/>
+          </a:xfrm>
+          <a:prstGeom prst="rect">
+            <a:avLst/>
+          </a:prstGeom>
+          <a:noFill/>
+        </p:spPr>
+        <p:txBody>
+          <a:bodyPr wrap="square" lIns="0" rIns="0" tIns="0" bIns="0" anchor="t">
+            <a:spAutoFit/>
+          </a:bodyPr>
+          <a:lstStyle/>
+          <a:p>
+            <a:pPr algn="l">
+              <a:spcBef>
+                <a:spcPts val="0"/>
+              </a:spcBef>
+              <a:spcAft>
+                <a:spcPts val="0"/>
+              </a:spcAft>
+            </a:pPr>
+            <a:r>
+              <a:rPr sz="1000" b="0">
+                <a:solidFill>
+                  <a:srgbClr val="5B6B7B"/>
+                </a:solidFill>
+                <a:latin typeface="Consolas"/>
+              </a:rPr>
+              <a:t>phal_sys.c 實機</a:t>
+            </a:r>
+          </a:p>
+        </p:txBody>
+      </p:sp>
+      <p:sp>
+        <p:nvSpPr>
+          <p:cNvPr id="49" name="TextBox 48"/>
+          <p:cNvSpPr txBox="1"/>
+          <p:nvPr/>
+        </p:nvSpPr>
+        <p:spPr>
+          <a:xfrm>
+            <a:off x="6382512" y="2807208"/>
+            <a:ext cx="1572768" cy="219456"/>
+          </a:xfrm>
+          <a:prstGeom prst="rect">
+            <a:avLst/>
+          </a:prstGeom>
+          <a:noFill/>
+        </p:spPr>
+        <p:txBody>
+          <a:bodyPr wrap="square" lIns="0" rIns="0" tIns="0" bIns="0" anchor="t">
+            <a:spAutoFit/>
+          </a:bodyPr>
+          <a:lstStyle/>
+          <a:p>
+            <a:pPr algn="l">
+              <a:spcBef>
+                <a:spcPts val="0"/>
+              </a:spcBef>
+              <a:spcAft>
+                <a:spcPts val="0"/>
+              </a:spcAft>
+            </a:pPr>
+            <a:r>
+              <a:rPr sz="1150" b="0">
+                <a:solidFill>
+                  <a:srgbClr val="1B2633"/>
+                </a:solidFill>
+                <a:latin typeface="微軟正黑體"/>
+              </a:rPr>
+              <a:t>附帶 header</a:t>
+            </a:r>
+          </a:p>
+        </p:txBody>
+      </p:sp>
+      <p:sp>
+        <p:nvSpPr>
+          <p:cNvPr id="50" name="TextBox 49"/>
+          <p:cNvSpPr txBox="1"/>
+          <p:nvPr/>
+        </p:nvSpPr>
+        <p:spPr>
+          <a:xfrm>
+            <a:off x="8010144" y="2798064"/>
+            <a:ext cx="1901952" cy="219456"/>
+          </a:xfrm>
+          <a:prstGeom prst="rect">
+            <a:avLst/>
+          </a:prstGeom>
+          <a:noFill/>
+        </p:spPr>
+        <p:txBody>
+          <a:bodyPr wrap="square" lIns="0" rIns="0" tIns="0" bIns="0" anchor="t">
+            <a:spAutoFit/>
+          </a:bodyPr>
+          <a:lstStyle/>
+          <a:p>
+            <a:pPr algn="l">
+              <a:spcBef>
+                <a:spcPts val="0"/>
+              </a:spcBef>
+              <a:spcAft>
+                <a:spcPts val="0"/>
+              </a:spcAft>
+            </a:pPr>
+            <a:r>
+              <a:rPr sz="1200" b="1">
+                <a:solidFill>
+                  <a:srgbClr val="102A43"/>
+                </a:solidFill>
+                <a:latin typeface="微軟正黑體"/>
+              </a:rPr>
+              <a:t>18 個（上下文已截斷）</a:t>
+            </a:r>
+          </a:p>
+        </p:txBody>
+      </p:sp>
+      <p:sp>
+        <p:nvSpPr>
+          <p:cNvPr id="51" name="TextBox 50"/>
+          <p:cNvSpPr txBox="1"/>
+          <p:nvPr/>
+        </p:nvSpPr>
+        <p:spPr>
+          <a:xfrm>
+            <a:off x="9966959" y="2816352"/>
+            <a:ext cx="1572768" cy="219456"/>
+          </a:xfrm>
+          <a:prstGeom prst="rect">
+            <a:avLst/>
+          </a:prstGeom>
+          <a:noFill/>
+        </p:spPr>
+        <p:txBody>
+          <a:bodyPr wrap="square" lIns="0" rIns="0" tIns="0" bIns="0" anchor="t">
+            <a:spAutoFit/>
+          </a:bodyPr>
+          <a:lstStyle/>
+          <a:p>
+            <a:pPr algn="l">
+              <a:spcBef>
+                <a:spcPts val="0"/>
+              </a:spcBef>
+              <a:spcAft>
+                <a:spcPts val="0"/>
+              </a:spcAft>
+            </a:pPr>
+            <a:r>
+              <a:rPr sz="1000" b="0">
+                <a:solidFill>
+                  <a:srgbClr val="5B6B7B"/>
+                </a:solidFill>
+                <a:latin typeface="Consolas"/>
+              </a:rPr>
+              <a:t>同上</a:t>
+            </a:r>
+          </a:p>
+        </p:txBody>
+      </p:sp>
+      <p:sp>
+        <p:nvSpPr>
+          <p:cNvPr id="52" name="Rectangle 51"/>
+          <p:cNvSpPr/>
+          <p:nvPr/>
+        </p:nvSpPr>
+        <p:spPr>
+          <a:xfrm>
+            <a:off x="6254496" y="3054096"/>
+            <a:ext cx="5376672" cy="310896"/>
+          </a:xfrm>
+          <a:prstGeom prst="rect">
+            <a:avLst/>
+          </a:prstGeom>
+          <a:solidFill>
+            <a:srgbClr val="F2F5F8"/>
+          </a:solidFill>
+          <a:ln>
+            <a:noFill/>
+          </a:ln>
+          <a:effectLst/>
+        </p:spPr>
+        <p:style>
+          <a:lnRef idx="1">
+            <a:schemeClr val="accent1"/>
+          </a:lnRef>
+          <a:fillRef idx="3">
+            <a:schemeClr val="accent1"/>
+          </a:fillRef>
+          <a:effectRef idx="2">
+            <a:schemeClr val="accent1"/>
+          </a:effectRef>
+          <a:fontRef idx="minor">
+            <a:schemeClr val="lt1"/>
+          </a:fontRef>
+        </p:style>
+        <p:txBody>
+          <a:bodyPr rtlCol="0" anchor="ctr"/>
+          <a:lstStyle/>
+          <a:p>
+            <a:pPr algn="ctr"/>
+          </a:p>
+        </p:txBody>
+      </p:sp>
+      <p:sp>
+        <p:nvSpPr>
+          <p:cNvPr id="53" name="TextBox 52"/>
+          <p:cNvSpPr txBox="1"/>
+          <p:nvPr/>
+        </p:nvSpPr>
+        <p:spPr>
+          <a:xfrm>
+            <a:off x="6382512" y="3118104"/>
+            <a:ext cx="1572768" cy="219456"/>
+          </a:xfrm>
+          <a:prstGeom prst="rect">
+            <a:avLst/>
+          </a:prstGeom>
+          <a:noFill/>
+        </p:spPr>
+        <p:txBody>
+          <a:bodyPr wrap="square" lIns="0" rIns="0" tIns="0" bIns="0" anchor="t">
+            <a:spAutoFit/>
+          </a:bodyPr>
+          <a:lstStyle/>
+          <a:p>
+            <a:pPr algn="l">
+              <a:spcBef>
+                <a:spcPts val="0"/>
+              </a:spcBef>
+              <a:spcAft>
+                <a:spcPts val="0"/>
+              </a:spcAft>
+            </a:pPr>
+            <a:r>
+              <a:rPr sz="1150" b="0">
+                <a:solidFill>
+                  <a:srgbClr val="1B2633"/>
+                </a:solidFill>
+                <a:latin typeface="微軟正黑體"/>
+              </a:rPr>
+              <a:t>產生意見</a:t>
+            </a:r>
+          </a:p>
+        </p:txBody>
+      </p:sp>
+      <p:sp>
+        <p:nvSpPr>
+          <p:cNvPr id="54" name="TextBox 53"/>
+          <p:cNvSpPr txBox="1"/>
+          <p:nvPr/>
+        </p:nvSpPr>
+        <p:spPr>
+          <a:xfrm>
+            <a:off x="8010144" y="3108960"/>
+            <a:ext cx="1901952" cy="219456"/>
+          </a:xfrm>
+          <a:prstGeom prst="rect">
+            <a:avLst/>
+          </a:prstGeom>
+          <a:noFill/>
+        </p:spPr>
+        <p:txBody>
+          <a:bodyPr wrap="square" lIns="0" rIns="0" tIns="0" bIns="0" anchor="t">
+            <a:spAutoFit/>
+          </a:bodyPr>
+          <a:lstStyle/>
+          <a:p>
+            <a:pPr algn="l">
+              <a:spcBef>
+                <a:spcPts val="0"/>
+              </a:spcBef>
+              <a:spcAft>
+                <a:spcPts val="0"/>
+              </a:spcAft>
+            </a:pPr>
+            <a:r>
+              <a:rPr sz="1200" b="1">
+                <a:solidFill>
+                  <a:srgbClr val="102A43"/>
+                </a:solidFill>
+                <a:latin typeface="微軟正黑體"/>
+              </a:rPr>
+              <a:t>1 則 error，無誤報</a:t>
+            </a:r>
+          </a:p>
+        </p:txBody>
+      </p:sp>
+      <p:sp>
+        <p:nvSpPr>
+          <p:cNvPr id="55" name="TextBox 54"/>
+          <p:cNvSpPr txBox="1"/>
+          <p:nvPr/>
+        </p:nvSpPr>
+        <p:spPr>
+          <a:xfrm>
+            <a:off x="9966959" y="3127248"/>
+            <a:ext cx="1572768" cy="219456"/>
+          </a:xfrm>
+          <a:prstGeom prst="rect">
+            <a:avLst/>
+          </a:prstGeom>
+          <a:noFill/>
+        </p:spPr>
+        <p:txBody>
+          <a:bodyPr wrap="square" lIns="0" rIns="0" tIns="0" bIns="0" anchor="t">
+            <a:spAutoFit/>
+          </a:bodyPr>
+          <a:lstStyle/>
+          <a:p>
+            <a:pPr algn="l">
+              <a:spcBef>
+                <a:spcPts val="0"/>
+              </a:spcBef>
+              <a:spcAft>
+                <a:spcPts val="0"/>
+              </a:spcAft>
+            </a:pPr>
+            <a:r>
+              <a:rPr sz="1000" b="0">
+                <a:solidFill>
+                  <a:srgbClr val="5B6B7B"/>
+                </a:solidFill>
+                <a:latin typeface="Consolas"/>
+              </a:rPr>
+              <a:t>同上</a:t>
+            </a:r>
+          </a:p>
+        </p:txBody>
+      </p:sp>
+      <p:sp>
+        <p:nvSpPr>
+          <p:cNvPr id="56" name="TextBox 55"/>
+          <p:cNvSpPr txBox="1"/>
+          <p:nvPr/>
+        </p:nvSpPr>
+        <p:spPr>
+          <a:xfrm>
+            <a:off x="6382512" y="3429000"/>
+            <a:ext cx="1572768" cy="219456"/>
+          </a:xfrm>
+          <a:prstGeom prst="rect">
+            <a:avLst/>
+          </a:prstGeom>
+          <a:noFill/>
+        </p:spPr>
+        <p:txBody>
+          <a:bodyPr wrap="square" lIns="0" rIns="0" tIns="0" bIns="0" anchor="t">
+            <a:spAutoFit/>
+          </a:bodyPr>
+          <a:lstStyle/>
+          <a:p>
+            <a:pPr algn="l">
+              <a:spcBef>
+                <a:spcPts val="0"/>
+              </a:spcBef>
+              <a:spcAft>
+                <a:spcPts val="0"/>
+              </a:spcAft>
+            </a:pPr>
+            <a:r>
+              <a:rPr sz="1150" b="0">
+                <a:solidFill>
+                  <a:srgbClr val="1B2633"/>
+                </a:solidFill>
+                <a:latin typeface="微軟正黑體"/>
+              </a:rPr>
+              <a:t>命中缺陷潛伏</a:t>
+            </a:r>
+          </a:p>
+        </p:txBody>
+      </p:sp>
+      <p:sp>
+        <p:nvSpPr>
+          <p:cNvPr id="57" name="TextBox 56"/>
+          <p:cNvSpPr txBox="1"/>
+          <p:nvPr/>
+        </p:nvSpPr>
+        <p:spPr>
+          <a:xfrm>
+            <a:off x="8010144" y="3419856"/>
+            <a:ext cx="1901952" cy="219456"/>
+          </a:xfrm>
+          <a:prstGeom prst="rect">
+            <a:avLst/>
+          </a:prstGeom>
+          <a:noFill/>
+        </p:spPr>
+        <p:txBody>
+          <a:bodyPr wrap="square" lIns="0" rIns="0" tIns="0" bIns="0" anchor="t">
+            <a:spAutoFit/>
+          </a:bodyPr>
+          <a:lstStyle/>
+          <a:p>
+            <a:pPr algn="l">
+              <a:spcBef>
+                <a:spcPts val="0"/>
+              </a:spcBef>
+              <a:spcAft>
+                <a:spcPts val="0"/>
+              </a:spcAft>
+            </a:pPr>
+            <a:r>
+              <a:rPr sz="1200" b="1">
+                <a:solidFill>
+                  <a:srgbClr val="102A43"/>
+                </a:solidFill>
+                <a:latin typeface="微軟正黑體"/>
+              </a:rPr>
+              <a:t>7 個月</a:t>
+            </a:r>
+          </a:p>
+        </p:txBody>
+      </p:sp>
+      <p:sp>
+        <p:nvSpPr>
+          <p:cNvPr id="58" name="TextBox 57"/>
+          <p:cNvSpPr txBox="1"/>
+          <p:nvPr/>
+        </p:nvSpPr>
+        <p:spPr>
+          <a:xfrm>
+            <a:off x="9966959" y="3438144"/>
+            <a:ext cx="1572768" cy="219456"/>
+          </a:xfrm>
+          <a:prstGeom prst="rect">
+            <a:avLst/>
+          </a:prstGeom>
+          <a:noFill/>
+        </p:spPr>
+        <p:txBody>
+          <a:bodyPr wrap="square" lIns="0" rIns="0" tIns="0" bIns="0" anchor="t">
+            <a:spAutoFit/>
+          </a:bodyPr>
+          <a:lstStyle/>
+          <a:p>
+            <a:pPr algn="l">
+              <a:spcBef>
+                <a:spcPts val="0"/>
+              </a:spcBef>
+              <a:spcAft>
+                <a:spcPts val="0"/>
+              </a:spcAft>
+            </a:pPr>
+            <a:r>
+              <a:rPr sz="1000" b="0">
+                <a:solidFill>
+                  <a:srgbClr val="5B6B7B"/>
+                </a:solidFill>
+                <a:latin typeface="Consolas"/>
+              </a:rPr>
+              <a:t>git blame</a:t>
+            </a:r>
+          </a:p>
+        </p:txBody>
+      </p:sp>
+      <p:sp>
+        <p:nvSpPr>
+          <p:cNvPr id="59" name="Rectangle 58"/>
+          <p:cNvSpPr/>
+          <p:nvPr/>
+        </p:nvSpPr>
+        <p:spPr>
+          <a:xfrm>
+            <a:off x="6254496" y="3858768"/>
+            <a:ext cx="5376672" cy="1828800"/>
+          </a:xfrm>
+          <a:prstGeom prst="rect">
+            <a:avLst/>
+          </a:prstGeom>
+          <a:solidFill>
+            <a:srgbClr val="F2F5F8"/>
+          </a:solidFill>
+          <a:ln>
+            <a:noFill/>
+          </a:ln>
+          <a:effectLst/>
+        </p:spPr>
+        <p:style>
+          <a:lnRef idx="1">
+            <a:schemeClr val="accent1"/>
+          </a:lnRef>
+          <a:fillRef idx="3">
+            <a:schemeClr val="accent1"/>
+          </a:fillRef>
+          <a:effectRef idx="2">
+            <a:schemeClr val="accent1"/>
+          </a:effectRef>
+          <a:fontRef idx="minor">
+            <a:schemeClr val="lt1"/>
+          </a:fontRef>
+        </p:style>
+        <p:txBody>
+          <a:bodyPr rtlCol="0" anchor="ctr"/>
+          <a:lstStyle/>
+          <a:p>
+            <a:pPr algn="ctr"/>
+          </a:p>
+        </p:txBody>
+      </p:sp>
+      <p:sp>
+        <p:nvSpPr>
+          <p:cNvPr id="60" name="TextBox 59"/>
+          <p:cNvSpPr txBox="1"/>
+          <p:nvPr/>
+        </p:nvSpPr>
+        <p:spPr>
+          <a:xfrm>
+            <a:off x="6528816" y="4041648"/>
+            <a:ext cx="4828032" cy="1554480"/>
+          </a:xfrm>
+          <a:prstGeom prst="rect">
+            <a:avLst/>
+          </a:prstGeom>
+          <a:noFill/>
+        </p:spPr>
+        <p:txBody>
+          <a:bodyPr wrap="square" lIns="0" rIns="0" tIns="0" bIns="0" anchor="t">
+            <a:spAutoFit/>
+          </a:bodyPr>
+          <a:lstStyle/>
+          <a:p>
+            <a:pPr algn="l">
+              <a:spcBef>
+                <a:spcPts val="0"/>
+              </a:spcBef>
+              <a:spcAft>
+                <a:spcPts val="700"/>
+              </a:spcAft>
+            </a:pPr>
+            <a:r>
               <a:rPr sz="1300" b="1">
                 <a:solidFill>
-                  <a:srgbClr val="FFFFFF"/>
-                </a:solidFill>
-                <a:latin typeface="微軟正黑體"/>
-              </a:rPr>
-              <a:t>下一個里程碑：試行專案全員部署 —— 目標是讓部署台數從「自己找到的人」變成「整個專案的標準配備」。</a:t>
+                  <a:srgbClr val="102A43"/>
+                </a:solidFill>
+                <a:latin typeface="微軟正黑體"/>
+              </a:rPr>
+              <a:t>為什麼右欄只有一筆</a:t>
+            </a:r>
+          </a:p>
+          <a:p>
+            <a:pPr>
+              <a:lnSpc>
+                <a:spcPct val="125000"/>
+              </a:lnSpc>
+              <a:spcBef>
+                <a:spcPts val="0"/>
+              </a:spcBef>
+              <a:spcAft>
+                <a:spcPts val="800"/>
+              </a:spcAft>
+            </a:pPr>
+            <a:r>
+              <a:rPr sz="1150" b="0">
+                <a:solidFill>
+                  <a:srgbClr val="1B2633"/>
+                </a:solidFill>
+                <a:latin typeface="微軟正黑體"/>
+              </a:rPr>
+              <a:t>稽核日誌（.sensai/sent.log）只在擴充於 VS Code 實際執行時才寫入，命令列工具不寫。目前僅有一次實機審查的觀測記錄。</a:t>
+            </a:r>
+          </a:p>
+          <a:p>
+            <a:pPr>
+              <a:lnSpc>
+                <a:spcPct val="125000"/>
+              </a:lnSpc>
+              <a:spcBef>
+                <a:spcPts val="0"/>
+              </a:spcBef>
+              <a:spcAft>
+                <a:spcPts val="0"/>
+              </a:spcAft>
+            </a:pPr>
+            <a:r>
+              <a:rPr sz="1150" b="0">
+                <a:solidFill>
+                  <a:srgbClr val="5B6B7B"/>
+                </a:solidFill>
+                <a:latin typeface="微軟正黑體"/>
+              </a:rPr>
+              <a:t>導入後每次請求會自動記一筆，含 ts、file、outcome、headers、bytes、findings、dropped、durationMs —— 屆時右欄可由單點改為分布，覆蓋率、意見密度、過濾效果與成本也一併算得出來。</a:t>
+            </a:r>
+          </a:p>
+        </p:txBody>
+      </p:sp>
+      <p:sp>
+        <p:nvSpPr>
+          <p:cNvPr id="61" name="TextBox 60"/>
+          <p:cNvSpPr txBox="1"/>
+          <p:nvPr/>
+        </p:nvSpPr>
+        <p:spPr>
+          <a:xfrm>
+            <a:off x="566928" y="5943600"/>
+            <a:ext cx="11064240" cy="274320"/>
+          </a:xfrm>
+          <a:prstGeom prst="rect">
+            <a:avLst/>
+          </a:prstGeom>
+          <a:noFill/>
+        </p:spPr>
+        <p:txBody>
+          <a:bodyPr wrap="square" lIns="0" rIns="0" tIns="0" bIns="0" anchor="t">
+            <a:spAutoFit/>
+          </a:bodyPr>
+          <a:lstStyle/>
+          <a:p>
+            <a:pPr algn="l">
+              <a:spcBef>
+                <a:spcPts val="0"/>
+              </a:spcBef>
+              <a:spcAft>
+                <a:spcPts val="0"/>
+              </a:spcAft>
+            </a:pPr>
+            <a:r>
+              <a:rPr sz="1100" b="0">
+                <a:solidFill>
+                  <a:srgbClr val="5B6B7B"/>
+                </a:solidFill>
+                <a:latin typeface="微軟正黑體"/>
+              </a:rPr>
+              <a:t>※ n＝1 的觀測不能拿來推論平均值。本頁左欄是可驗證的計數，右欄是單次觀測 —— 兩者的證據強度不同，報告時分開看。</a:t>
             </a:r>
           </a:p>
         </p:txBody>
@@ -8964,7 +8944,7 @@
                 </a:solidFill>
                 <a:latin typeface="微軟正黑體"/>
               </a:rPr>
-              <a:t>NEXT</a:t>
+              <a:t>DEPLOYMENT</a:t>
             </a:r>
           </a:p>
         </p:txBody>
@@ -9006,7 +8986,7 @@
                 </a:solidFill>
                 <a:latin typeface="微軟正黑體"/>
               </a:rPr>
-              <a:t>下一步與所需支援</a:t>
+              <a:t>部署狀況：已安裝 8 台開發機</a:t>
             </a:r>
           </a:p>
         </p:txBody>
@@ -9135,6 +9115,1458 @@
                 <a:latin typeface="微軟正黑體"/>
               </a:rPr>
               <a:t>13</a:t>
+            </a:r>
+          </a:p>
+        </p:txBody>
+      </p:sp>
+      <p:sp>
+        <p:nvSpPr>
+          <p:cNvPr id="8" name="TextBox 7"/>
+          <p:cNvSpPr txBox="1"/>
+          <p:nvPr/>
+        </p:nvSpPr>
+        <p:spPr>
+          <a:xfrm>
+            <a:off x="566928" y="1572768"/>
+            <a:ext cx="11064240" cy="365760"/>
+          </a:xfrm>
+          <a:prstGeom prst="rect">
+            <a:avLst/>
+          </a:prstGeom>
+          <a:noFill/>
+        </p:spPr>
+        <p:txBody>
+          <a:bodyPr wrap="square" lIns="0" rIns="0" tIns="0" bIns="0" anchor="t">
+            <a:spAutoFit/>
+          </a:bodyPr>
+          <a:lstStyle/>
+          <a:p>
+            <a:pPr algn="l">
+              <a:lnSpc>
+                <a:spcPct val="125000"/>
+              </a:lnSpc>
+              <a:spcBef>
+                <a:spcPts val="0"/>
+              </a:spcBef>
+              <a:spcAft>
+                <a:spcPts val="0"/>
+              </a:spcAft>
+            </a:pPr>
+            <a:r>
+              <a:rPr sz="1400" b="0">
+                <a:solidFill>
+                  <a:srgbClr val="1B2633"/>
+                </a:solidFill>
+                <a:latin typeface="微軟正黑體"/>
+              </a:rPr>
+              <a:t>sensAI 沒有透過任何統一派送機制推送。這 8 台，是 8 位工程師各自決定安裝的結果。</a:t>
+            </a:r>
+          </a:p>
+        </p:txBody>
+      </p:sp>
+      <p:sp>
+        <p:nvSpPr>
+          <p:cNvPr id="9" name="Rectangle 8"/>
+          <p:cNvSpPr/>
+          <p:nvPr/>
+        </p:nvSpPr>
+        <p:spPr>
+          <a:xfrm>
+            <a:off x="566928" y="2103120"/>
+            <a:ext cx="3310128" cy="3310128"/>
+          </a:xfrm>
+          <a:prstGeom prst="rect">
+            <a:avLst/>
+          </a:prstGeom>
+          <a:solidFill>
+            <a:srgbClr val="102A43"/>
+          </a:solidFill>
+          <a:ln>
+            <a:noFill/>
+          </a:ln>
+          <a:effectLst/>
+        </p:spPr>
+        <p:style>
+          <a:lnRef idx="1">
+            <a:schemeClr val="accent1"/>
+          </a:lnRef>
+          <a:fillRef idx="3">
+            <a:schemeClr val="accent1"/>
+          </a:fillRef>
+          <a:effectRef idx="2">
+            <a:schemeClr val="accent1"/>
+          </a:effectRef>
+          <a:fontRef idx="minor">
+            <a:schemeClr val="lt1"/>
+          </a:fontRef>
+        </p:style>
+        <p:txBody>
+          <a:bodyPr rtlCol="0" anchor="ctr"/>
+          <a:lstStyle/>
+          <a:p>
+            <a:pPr algn="ctr"/>
+          </a:p>
+        </p:txBody>
+      </p:sp>
+      <p:sp>
+        <p:nvSpPr>
+          <p:cNvPr id="10" name="TextBox 9"/>
+          <p:cNvSpPr txBox="1"/>
+          <p:nvPr/>
+        </p:nvSpPr>
+        <p:spPr>
+          <a:xfrm>
+            <a:off x="841248" y="2487168"/>
+            <a:ext cx="2743200" cy="1371600"/>
+          </a:xfrm>
+          <a:prstGeom prst="rect">
+            <a:avLst/>
+          </a:prstGeom>
+          <a:noFill/>
+        </p:spPr>
+        <p:txBody>
+          <a:bodyPr wrap="square" lIns="0" rIns="0" tIns="0" bIns="0" anchor="t">
+            <a:spAutoFit/>
+          </a:bodyPr>
+          <a:lstStyle/>
+          <a:p>
+            <a:pPr algn="ctr">
+              <a:spcBef>
+                <a:spcPts val="0"/>
+              </a:spcBef>
+              <a:spcAft>
+                <a:spcPts val="0"/>
+              </a:spcAft>
+            </a:pPr>
+            <a:r>
+              <a:rPr sz="9600" b="1">
+                <a:solidFill>
+                  <a:srgbClr val="FFFFFF"/>
+                </a:solidFill>
+                <a:latin typeface="微軟正黑體"/>
+              </a:rPr>
+              <a:t>8</a:t>
+            </a:r>
+          </a:p>
+        </p:txBody>
+      </p:sp>
+      <p:sp>
+        <p:nvSpPr>
+          <p:cNvPr id="11" name="Rectangle 10"/>
+          <p:cNvSpPr/>
+          <p:nvPr/>
+        </p:nvSpPr>
+        <p:spPr>
+          <a:xfrm>
+            <a:off x="1481328" y="3858768"/>
+            <a:ext cx="1463040" cy="22860"/>
+          </a:xfrm>
+          <a:prstGeom prst="rect">
+            <a:avLst/>
+          </a:prstGeom>
+          <a:solidFill>
+            <a:srgbClr val="119DA4"/>
+          </a:solidFill>
+          <a:ln>
+            <a:noFill/>
+          </a:ln>
+          <a:effectLst/>
+        </p:spPr>
+        <p:style>
+          <a:lnRef idx="1">
+            <a:schemeClr val="accent1"/>
+          </a:lnRef>
+          <a:fillRef idx="3">
+            <a:schemeClr val="accent1"/>
+          </a:fillRef>
+          <a:effectRef idx="2">
+            <a:schemeClr val="accent1"/>
+          </a:effectRef>
+          <a:fontRef idx="minor">
+            <a:schemeClr val="lt1"/>
+          </a:fontRef>
+        </p:style>
+        <p:txBody>
+          <a:bodyPr rtlCol="0" anchor="ctr"/>
+          <a:lstStyle/>
+          <a:p>
+            <a:pPr algn="ctr"/>
+          </a:p>
+        </p:txBody>
+      </p:sp>
+      <p:sp>
+        <p:nvSpPr>
+          <p:cNvPr id="12" name="TextBox 11"/>
+          <p:cNvSpPr txBox="1"/>
+          <p:nvPr/>
+        </p:nvSpPr>
+        <p:spPr>
+          <a:xfrm>
+            <a:off x="841248" y="4114800"/>
+            <a:ext cx="2743200" cy="1097280"/>
+          </a:xfrm>
+          <a:prstGeom prst="rect">
+            <a:avLst/>
+          </a:prstGeom>
+          <a:noFill/>
+        </p:spPr>
+        <p:txBody>
+          <a:bodyPr wrap="square" lIns="0" rIns="0" tIns="0" bIns="0" anchor="t">
+            <a:spAutoFit/>
+          </a:bodyPr>
+          <a:lstStyle/>
+          <a:p>
+            <a:pPr algn="ctr">
+              <a:spcBef>
+                <a:spcPts val="0"/>
+              </a:spcBef>
+              <a:spcAft>
+                <a:spcPts val="800"/>
+              </a:spcAft>
+            </a:pPr>
+            <a:r>
+              <a:rPr sz="1700" b="1">
+                <a:solidFill>
+                  <a:srgbClr val="FFFFFF"/>
+                </a:solidFill>
+                <a:latin typeface="微軟正黑體"/>
+              </a:rPr>
+              <a:t>台開發機已安裝</a:t>
+            </a:r>
+          </a:p>
+          <a:p>
+            <a:pPr algn="ctr">
+              <a:lnSpc>
+                <a:spcPct val="130000"/>
+              </a:lnSpc>
+              <a:spcBef>
+                <a:spcPts val="0"/>
+              </a:spcBef>
+              <a:spcAft>
+                <a:spcPts val="0"/>
+              </a:spcAft>
+            </a:pPr>
+            <a:r>
+              <a:rPr sz="1100" b="0">
+                <a:solidFill>
+                  <a:srgbClr val="A8C4D8"/>
+                </a:solidFill>
+                <a:latin typeface="微軟正黑體"/>
+              </a:rPr>
+              <a:t>來源：VS Code 擴充頁安裝數
+（可於擴充詳細頁當場複查）</a:t>
+            </a:r>
+          </a:p>
+        </p:txBody>
+      </p:sp>
+      <p:sp>
+        <p:nvSpPr>
+          <p:cNvPr id="13" name="Rectangle 12"/>
+          <p:cNvSpPr/>
+          <p:nvPr/>
+        </p:nvSpPr>
+        <p:spPr>
+          <a:xfrm>
+            <a:off x="4078224" y="2103120"/>
+            <a:ext cx="3657600" cy="3310128"/>
+          </a:xfrm>
+          <a:prstGeom prst="rect">
+            <a:avLst/>
+          </a:prstGeom>
+          <a:noFill/>
+          <a:ln w="12700">
+            <a:solidFill>
+              <a:srgbClr val="D8DFE6"/>
+            </a:solidFill>
+          </a:ln>
+          <a:effectLst/>
+        </p:spPr>
+        <p:style>
+          <a:lnRef idx="1">
+            <a:schemeClr val="accent1"/>
+          </a:lnRef>
+          <a:fillRef idx="3">
+            <a:schemeClr val="accent1"/>
+          </a:fillRef>
+          <a:effectRef idx="2">
+            <a:schemeClr val="accent1"/>
+          </a:effectRef>
+          <a:fontRef idx="minor">
+            <a:schemeClr val="lt1"/>
+          </a:fontRef>
+        </p:style>
+        <p:txBody>
+          <a:bodyPr rtlCol="0" anchor="ctr"/>
+          <a:lstStyle/>
+          <a:p>
+            <a:pPr algn="ctr"/>
+          </a:p>
+        </p:txBody>
+      </p:sp>
+      <p:sp>
+        <p:nvSpPr>
+          <p:cNvPr id="14" name="TextBox 13"/>
+          <p:cNvSpPr txBox="1"/>
+          <p:nvPr/>
+        </p:nvSpPr>
+        <p:spPr>
+          <a:xfrm>
+            <a:off x="4352544" y="2304288"/>
+            <a:ext cx="3108960" cy="3017520"/>
+          </a:xfrm>
+          <a:prstGeom prst="rect">
+            <a:avLst/>
+          </a:prstGeom>
+          <a:noFill/>
+        </p:spPr>
+        <p:txBody>
+          <a:bodyPr wrap="square" lIns="0" rIns="0" tIns="0" bIns="0" anchor="t">
+            <a:spAutoFit/>
+          </a:bodyPr>
+          <a:lstStyle/>
+          <a:p>
+            <a:pPr algn="l">
+              <a:spcBef>
+                <a:spcPts val="0"/>
+              </a:spcBef>
+              <a:spcAft>
+                <a:spcPts val="1000"/>
+              </a:spcAft>
+            </a:pPr>
+            <a:r>
+              <a:rPr sz="1300" b="1">
+                <a:solidFill>
+                  <a:srgbClr val="119DA4"/>
+                </a:solidFill>
+                <a:latin typeface="微軟正黑體"/>
+              </a:rPr>
+              <a:t>這個數字的意義</a:t>
+            </a:r>
+          </a:p>
+          <a:p>
+            <a:pPr>
+              <a:spcBef>
+                <a:spcPts val="0"/>
+              </a:spcBef>
+              <a:spcAft>
+                <a:spcPts val="300"/>
+              </a:spcAft>
+            </a:pPr>
+            <a:r>
+              <a:rPr sz="1250" b="1">
+                <a:solidFill>
+                  <a:srgbClr val="102A43"/>
+                </a:solidFill>
+                <a:latin typeface="微軟正黑體"/>
+              </a:rPr>
+              <a:t>全部為主動安裝</a:t>
+            </a:r>
+          </a:p>
+          <a:p>
+            <a:pPr>
+              <a:lnSpc>
+                <a:spcPct val="125000"/>
+              </a:lnSpc>
+              <a:spcBef>
+                <a:spcPts val="0"/>
+              </a:spcBef>
+              <a:spcAft>
+                <a:spcPts val="0"/>
+              </a:spcAft>
+            </a:pPr>
+            <a:r>
+              <a:rPr sz="1100" b="0">
+                <a:solidFill>
+                  <a:srgbClr val="5B6B7B"/>
+                </a:solidFill>
+                <a:latin typeface="微軟正黑體"/>
+              </a:rPr>
+              <a:t>未納入任何統一派送。每一台都要工程師自己從 Marketplace 裝上去。</a:t>
+            </a:r>
+          </a:p>
+          <a:p>
+            <a:pPr>
+              <a:spcBef>
+                <a:spcPts val="1200"/>
+              </a:spcBef>
+              <a:spcAft>
+                <a:spcPts val="300"/>
+              </a:spcAft>
+            </a:pPr>
+            <a:r>
+              <a:rPr sz="1250" b="1">
+                <a:solidFill>
+                  <a:srgbClr val="102A43"/>
+                </a:solidFill>
+                <a:latin typeface="微軟正黑體"/>
+              </a:rPr>
+              <a:t>零採購成本</a:t>
+            </a:r>
+          </a:p>
+          <a:p>
+            <a:pPr>
+              <a:lnSpc>
+                <a:spcPct val="125000"/>
+              </a:lnSpc>
+              <a:spcBef>
+                <a:spcPts val="0"/>
+              </a:spcBef>
+              <a:spcAft>
+                <a:spcPts val="0"/>
+              </a:spcAft>
+            </a:pPr>
+            <a:r>
+              <a:rPr sz="1100" b="0">
+                <a:solidFill>
+                  <a:srgbClr val="5B6B7B"/>
+                </a:solidFill>
+                <a:latin typeface="微軟正黑體"/>
+              </a:rPr>
+              <a:t>自行開發，無授權費，安裝不需要走採購流程。</a:t>
+            </a:r>
+          </a:p>
+          <a:p>
+            <a:pPr>
+              <a:spcBef>
+                <a:spcPts val="1200"/>
+              </a:spcBef>
+              <a:spcAft>
+                <a:spcPts val="300"/>
+              </a:spcAft>
+            </a:pPr>
+            <a:r>
+              <a:rPr sz="1250" b="1">
+                <a:solidFill>
+                  <a:srgbClr val="102A43"/>
+                </a:solidFill>
+                <a:latin typeface="微軟正黑體"/>
+              </a:rPr>
+              <a:t>零設定門檻</a:t>
+            </a:r>
+          </a:p>
+          <a:p>
+            <a:pPr>
+              <a:lnSpc>
+                <a:spcPct val="125000"/>
+              </a:lnSpc>
+              <a:spcBef>
+                <a:spcPts val="0"/>
+              </a:spcBef>
+              <a:spcAft>
+                <a:spcPts val="0"/>
+              </a:spcAft>
+            </a:pPr>
+            <a:r>
+              <a:rPr sz="1100" b="0">
+                <a:solidFill>
+                  <a:srgbClr val="5B6B7B"/>
+                </a:solidFill>
+                <a:latin typeface="微軟正黑體"/>
+              </a:rPr>
+              <a:t>一個 Initialize Project 指令即建立專案設定，不需要 build system 整合。</a:t>
+            </a:r>
+          </a:p>
+        </p:txBody>
+      </p:sp>
+      <p:sp>
+        <p:nvSpPr>
+          <p:cNvPr id="15" name="Rectangle 14"/>
+          <p:cNvSpPr/>
+          <p:nvPr/>
+        </p:nvSpPr>
+        <p:spPr>
+          <a:xfrm>
+            <a:off x="7936992" y="2103120"/>
+            <a:ext cx="3694176" cy="3310128"/>
+          </a:xfrm>
+          <a:prstGeom prst="rect">
+            <a:avLst/>
+          </a:prstGeom>
+          <a:solidFill>
+            <a:srgbClr val="F2F5F8"/>
+          </a:solidFill>
+          <a:ln>
+            <a:noFill/>
+          </a:ln>
+          <a:effectLst/>
+        </p:spPr>
+        <p:style>
+          <a:lnRef idx="1">
+            <a:schemeClr val="accent1"/>
+          </a:lnRef>
+          <a:fillRef idx="3">
+            <a:schemeClr val="accent1"/>
+          </a:fillRef>
+          <a:effectRef idx="2">
+            <a:schemeClr val="accent1"/>
+          </a:effectRef>
+          <a:fontRef idx="minor">
+            <a:schemeClr val="lt1"/>
+          </a:fontRef>
+        </p:style>
+        <p:txBody>
+          <a:bodyPr rtlCol="0" anchor="ctr"/>
+          <a:lstStyle/>
+          <a:p>
+            <a:pPr algn="ctr"/>
+          </a:p>
+        </p:txBody>
+      </p:sp>
+      <p:sp>
+        <p:nvSpPr>
+          <p:cNvPr id="16" name="TextBox 15"/>
+          <p:cNvSpPr txBox="1"/>
+          <p:nvPr/>
+        </p:nvSpPr>
+        <p:spPr>
+          <a:xfrm>
+            <a:off x="8211312" y="2304288"/>
+            <a:ext cx="3145536" cy="320040"/>
+          </a:xfrm>
+          <a:prstGeom prst="rect">
+            <a:avLst/>
+          </a:prstGeom>
+          <a:noFill/>
+        </p:spPr>
+        <p:txBody>
+          <a:bodyPr wrap="square" lIns="0" rIns="0" tIns="0" bIns="0" anchor="t">
+            <a:spAutoFit/>
+          </a:bodyPr>
+          <a:lstStyle/>
+          <a:p>
+            <a:pPr algn="l">
+              <a:spcBef>
+                <a:spcPts val="0"/>
+              </a:spcBef>
+              <a:spcAft>
+                <a:spcPts val="0"/>
+              </a:spcAft>
+            </a:pPr>
+            <a:r>
+              <a:rPr sz="1300" b="1">
+                <a:solidFill>
+                  <a:srgbClr val="119DA4"/>
+                </a:solidFill>
+                <a:latin typeface="微軟正黑體"/>
+              </a:rPr>
+              <a:t>部署進程</a:t>
+            </a:r>
+          </a:p>
+        </p:txBody>
+      </p:sp>
+      <p:sp>
+        <p:nvSpPr>
+          <p:cNvPr id="17" name="Oval 16"/>
+          <p:cNvSpPr/>
+          <p:nvPr/>
+        </p:nvSpPr>
+        <p:spPr>
+          <a:xfrm>
+            <a:off x="8211312" y="2834640"/>
+            <a:ext cx="146304" cy="146304"/>
+          </a:xfrm>
+          <a:prstGeom prst="ellipse">
+            <a:avLst/>
+          </a:prstGeom>
+          <a:solidFill>
+            <a:srgbClr val="119DA4"/>
+          </a:solidFill>
+          <a:ln>
+            <a:noFill/>
+          </a:ln>
+          <a:effectLst/>
+        </p:spPr>
+        <p:style>
+          <a:lnRef idx="1">
+            <a:schemeClr val="accent1"/>
+          </a:lnRef>
+          <a:fillRef idx="3">
+            <a:schemeClr val="accent1"/>
+          </a:fillRef>
+          <a:effectRef idx="2">
+            <a:schemeClr val="accent1"/>
+          </a:effectRef>
+          <a:fontRef idx="minor">
+            <a:schemeClr val="lt1"/>
+          </a:fontRef>
+        </p:style>
+        <p:txBody>
+          <a:bodyPr rtlCol="0" anchor="ctr"/>
+          <a:lstStyle/>
+          <a:p>
+            <a:pPr algn="ctr"/>
+          </a:p>
+        </p:txBody>
+      </p:sp>
+      <p:sp>
+        <p:nvSpPr>
+          <p:cNvPr id="18" name="TextBox 17"/>
+          <p:cNvSpPr txBox="1"/>
+          <p:nvPr/>
+        </p:nvSpPr>
+        <p:spPr>
+          <a:xfrm>
+            <a:off x="8522208" y="2743200"/>
+            <a:ext cx="1737360" cy="320040"/>
+          </a:xfrm>
+          <a:prstGeom prst="rect">
+            <a:avLst/>
+          </a:prstGeom>
+          <a:noFill/>
+        </p:spPr>
+        <p:txBody>
+          <a:bodyPr wrap="square" lIns="0" rIns="0" tIns="0" bIns="0" anchor="t">
+            <a:spAutoFit/>
+          </a:bodyPr>
+          <a:lstStyle/>
+          <a:p>
+            <a:pPr algn="l">
+              <a:spcBef>
+                <a:spcPts val="0"/>
+              </a:spcBef>
+              <a:spcAft>
+                <a:spcPts val="0"/>
+              </a:spcAft>
+            </a:pPr>
+            <a:r>
+              <a:rPr sz="1250" b="1">
+                <a:solidFill>
+                  <a:srgbClr val="102A43"/>
+                </a:solidFill>
+                <a:latin typeface="微軟正黑體"/>
+              </a:rPr>
+              <a:t>開發驗證</a:t>
+            </a:r>
+          </a:p>
+        </p:txBody>
+      </p:sp>
+      <p:sp>
+        <p:nvSpPr>
+          <p:cNvPr id="19" name="TextBox 18"/>
+          <p:cNvSpPr txBox="1"/>
+          <p:nvPr/>
+        </p:nvSpPr>
+        <p:spPr>
+          <a:xfrm>
+            <a:off x="10332720" y="2752344"/>
+            <a:ext cx="1051560" cy="320040"/>
+          </a:xfrm>
+          <a:prstGeom prst="rect">
+            <a:avLst/>
+          </a:prstGeom>
+          <a:noFill/>
+        </p:spPr>
+        <p:txBody>
+          <a:bodyPr wrap="square" lIns="0" rIns="0" tIns="0" bIns="0" anchor="t">
+            <a:spAutoFit/>
+          </a:bodyPr>
+          <a:lstStyle/>
+          <a:p>
+            <a:pPr algn="r">
+              <a:spcBef>
+                <a:spcPts val="0"/>
+              </a:spcBef>
+              <a:spcAft>
+                <a:spcPts val="0"/>
+              </a:spcAft>
+            </a:pPr>
+            <a:r>
+              <a:rPr sz="1250" b="1">
+                <a:solidFill>
+                  <a:srgbClr val="102A43"/>
+                </a:solidFill>
+                <a:latin typeface="微軟正黑體"/>
+              </a:rPr>
+              <a:t>1 台</a:t>
+            </a:r>
+          </a:p>
+        </p:txBody>
+      </p:sp>
+      <p:sp>
+        <p:nvSpPr>
+          <p:cNvPr id="20" name="Oval 19"/>
+          <p:cNvSpPr/>
+          <p:nvPr/>
+        </p:nvSpPr>
+        <p:spPr>
+          <a:xfrm>
+            <a:off x="8211312" y="3401568"/>
+            <a:ext cx="146304" cy="146304"/>
+          </a:xfrm>
+          <a:prstGeom prst="ellipse">
+            <a:avLst/>
+          </a:prstGeom>
+          <a:solidFill>
+            <a:srgbClr val="119DA4"/>
+          </a:solidFill>
+          <a:ln>
+            <a:noFill/>
+          </a:ln>
+          <a:effectLst/>
+        </p:spPr>
+        <p:style>
+          <a:lnRef idx="1">
+            <a:schemeClr val="accent1"/>
+          </a:lnRef>
+          <a:fillRef idx="3">
+            <a:schemeClr val="accent1"/>
+          </a:fillRef>
+          <a:effectRef idx="2">
+            <a:schemeClr val="accent1"/>
+          </a:effectRef>
+          <a:fontRef idx="minor">
+            <a:schemeClr val="lt1"/>
+          </a:fontRef>
+        </p:style>
+        <p:txBody>
+          <a:bodyPr rtlCol="0" anchor="ctr"/>
+          <a:lstStyle/>
+          <a:p>
+            <a:pPr algn="ctr"/>
+          </a:p>
+        </p:txBody>
+      </p:sp>
+      <p:sp>
+        <p:nvSpPr>
+          <p:cNvPr id="21" name="TextBox 20"/>
+          <p:cNvSpPr txBox="1"/>
+          <p:nvPr/>
+        </p:nvSpPr>
+        <p:spPr>
+          <a:xfrm>
+            <a:off x="8522208" y="3310128"/>
+            <a:ext cx="1737360" cy="320040"/>
+          </a:xfrm>
+          <a:prstGeom prst="rect">
+            <a:avLst/>
+          </a:prstGeom>
+          <a:noFill/>
+        </p:spPr>
+        <p:txBody>
+          <a:bodyPr wrap="square" lIns="0" rIns="0" tIns="0" bIns="0" anchor="t">
+            <a:spAutoFit/>
+          </a:bodyPr>
+          <a:lstStyle/>
+          <a:p>
+            <a:pPr algn="l">
+              <a:spcBef>
+                <a:spcPts val="0"/>
+              </a:spcBef>
+              <a:spcAft>
+                <a:spcPts val="0"/>
+              </a:spcAft>
+            </a:pPr>
+            <a:r>
+              <a:rPr sz="1250" b="1">
+                <a:solidFill>
+                  <a:srgbClr val="102A43"/>
+                </a:solidFill>
+                <a:latin typeface="微軟正黑體"/>
+              </a:rPr>
+              <a:t>目前</a:t>
+            </a:r>
+          </a:p>
+        </p:txBody>
+      </p:sp>
+      <p:sp>
+        <p:nvSpPr>
+          <p:cNvPr id="22" name="TextBox 21"/>
+          <p:cNvSpPr txBox="1"/>
+          <p:nvPr/>
+        </p:nvSpPr>
+        <p:spPr>
+          <a:xfrm>
+            <a:off x="10332720" y="3319272"/>
+            <a:ext cx="1051560" cy="320040"/>
+          </a:xfrm>
+          <a:prstGeom prst="rect">
+            <a:avLst/>
+          </a:prstGeom>
+          <a:noFill/>
+        </p:spPr>
+        <p:txBody>
+          <a:bodyPr wrap="square" lIns="0" rIns="0" tIns="0" bIns="0" anchor="t">
+            <a:spAutoFit/>
+          </a:bodyPr>
+          <a:lstStyle/>
+          <a:p>
+            <a:pPr algn="r">
+              <a:spcBef>
+                <a:spcPts val="0"/>
+              </a:spcBef>
+              <a:spcAft>
+                <a:spcPts val="0"/>
+              </a:spcAft>
+            </a:pPr>
+            <a:r>
+              <a:rPr sz="1250" b="1">
+                <a:solidFill>
+                  <a:srgbClr val="102A43"/>
+                </a:solidFill>
+                <a:latin typeface="微軟正黑體"/>
+              </a:rPr>
+              <a:t>8 台</a:t>
+            </a:r>
+          </a:p>
+        </p:txBody>
+      </p:sp>
+      <p:sp>
+        <p:nvSpPr>
+          <p:cNvPr id="23" name="Oval 22"/>
+          <p:cNvSpPr/>
+          <p:nvPr/>
+        </p:nvSpPr>
+        <p:spPr>
+          <a:xfrm>
+            <a:off x="8211312" y="3968496"/>
+            <a:ext cx="146304" cy="146304"/>
+          </a:xfrm>
+          <a:prstGeom prst="ellipse">
+            <a:avLst/>
+          </a:prstGeom>
+          <a:solidFill>
+            <a:srgbClr val="B0BCC8"/>
+          </a:solidFill>
+          <a:ln>
+            <a:noFill/>
+          </a:ln>
+          <a:effectLst/>
+        </p:spPr>
+        <p:style>
+          <a:lnRef idx="1">
+            <a:schemeClr val="accent1"/>
+          </a:lnRef>
+          <a:fillRef idx="3">
+            <a:schemeClr val="accent1"/>
+          </a:fillRef>
+          <a:effectRef idx="2">
+            <a:schemeClr val="accent1"/>
+          </a:effectRef>
+          <a:fontRef idx="minor">
+            <a:schemeClr val="lt1"/>
+          </a:fontRef>
+        </p:style>
+        <p:txBody>
+          <a:bodyPr rtlCol="0" anchor="ctr"/>
+          <a:lstStyle/>
+          <a:p>
+            <a:pPr algn="ctr"/>
+          </a:p>
+        </p:txBody>
+      </p:sp>
+      <p:sp>
+        <p:nvSpPr>
+          <p:cNvPr id="24" name="TextBox 23"/>
+          <p:cNvSpPr txBox="1"/>
+          <p:nvPr/>
+        </p:nvSpPr>
+        <p:spPr>
+          <a:xfrm>
+            <a:off x="8522208" y="3877056"/>
+            <a:ext cx="1737360" cy="320040"/>
+          </a:xfrm>
+          <a:prstGeom prst="rect">
+            <a:avLst/>
+          </a:prstGeom>
+          <a:noFill/>
+        </p:spPr>
+        <p:txBody>
+          <a:bodyPr wrap="square" lIns="0" rIns="0" tIns="0" bIns="0" anchor="t">
+            <a:spAutoFit/>
+          </a:bodyPr>
+          <a:lstStyle/>
+          <a:p>
+            <a:pPr algn="l">
+              <a:spcBef>
+                <a:spcPts val="0"/>
+              </a:spcBef>
+              <a:spcAft>
+                <a:spcPts val="0"/>
+              </a:spcAft>
+            </a:pPr>
+            <a:r>
+              <a:rPr sz="1250" b="0">
+                <a:solidFill>
+                  <a:srgbClr val="5B6B7B"/>
+                </a:solidFill>
+                <a:latin typeface="微軟正黑體"/>
+              </a:rPr>
+              <a:t>試行專案全員</a:t>
+            </a:r>
+          </a:p>
+        </p:txBody>
+      </p:sp>
+      <p:sp>
+        <p:nvSpPr>
+          <p:cNvPr id="25" name="TextBox 24"/>
+          <p:cNvSpPr txBox="1"/>
+          <p:nvPr/>
+        </p:nvSpPr>
+        <p:spPr>
+          <a:xfrm>
+            <a:off x="10332720" y="3886200"/>
+            <a:ext cx="1051560" cy="320040"/>
+          </a:xfrm>
+          <a:prstGeom prst="rect">
+            <a:avLst/>
+          </a:prstGeom>
+          <a:noFill/>
+        </p:spPr>
+        <p:txBody>
+          <a:bodyPr wrap="square" lIns="0" rIns="0" tIns="0" bIns="0" anchor="t">
+            <a:spAutoFit/>
+          </a:bodyPr>
+          <a:lstStyle/>
+          <a:p>
+            <a:pPr algn="r">
+              <a:spcBef>
+                <a:spcPts val="0"/>
+              </a:spcBef>
+              <a:spcAft>
+                <a:spcPts val="0"/>
+              </a:spcAft>
+            </a:pPr>
+            <a:r>
+              <a:rPr sz="1250" b="0">
+                <a:solidFill>
+                  <a:srgbClr val="5B6B7B"/>
+                </a:solidFill>
+                <a:latin typeface="微軟正黑體"/>
+              </a:rPr>
+              <a:t>待展開</a:t>
+            </a:r>
+          </a:p>
+        </p:txBody>
+      </p:sp>
+      <p:sp>
+        <p:nvSpPr>
+          <p:cNvPr id="26" name="Oval 25"/>
+          <p:cNvSpPr/>
+          <p:nvPr/>
+        </p:nvSpPr>
+        <p:spPr>
+          <a:xfrm>
+            <a:off x="8211312" y="4535424"/>
+            <a:ext cx="146304" cy="146304"/>
+          </a:xfrm>
+          <a:prstGeom prst="ellipse">
+            <a:avLst/>
+          </a:prstGeom>
+          <a:solidFill>
+            <a:srgbClr val="B0BCC8"/>
+          </a:solidFill>
+          <a:ln>
+            <a:noFill/>
+          </a:ln>
+          <a:effectLst/>
+        </p:spPr>
+        <p:style>
+          <a:lnRef idx="1">
+            <a:schemeClr val="accent1"/>
+          </a:lnRef>
+          <a:fillRef idx="3">
+            <a:schemeClr val="accent1"/>
+          </a:fillRef>
+          <a:effectRef idx="2">
+            <a:schemeClr val="accent1"/>
+          </a:effectRef>
+          <a:fontRef idx="minor">
+            <a:schemeClr val="lt1"/>
+          </a:fontRef>
+        </p:style>
+        <p:txBody>
+          <a:bodyPr rtlCol="0" anchor="ctr"/>
+          <a:lstStyle/>
+          <a:p>
+            <a:pPr algn="ctr"/>
+          </a:p>
+        </p:txBody>
+      </p:sp>
+      <p:sp>
+        <p:nvSpPr>
+          <p:cNvPr id="27" name="TextBox 26"/>
+          <p:cNvSpPr txBox="1"/>
+          <p:nvPr/>
+        </p:nvSpPr>
+        <p:spPr>
+          <a:xfrm>
+            <a:off x="8522208" y="4443984"/>
+            <a:ext cx="1737360" cy="320040"/>
+          </a:xfrm>
+          <a:prstGeom prst="rect">
+            <a:avLst/>
+          </a:prstGeom>
+          <a:noFill/>
+        </p:spPr>
+        <p:txBody>
+          <a:bodyPr wrap="square" lIns="0" rIns="0" tIns="0" bIns="0" anchor="t">
+            <a:spAutoFit/>
+          </a:bodyPr>
+          <a:lstStyle/>
+          <a:p>
+            <a:pPr algn="l">
+              <a:spcBef>
+                <a:spcPts val="0"/>
+              </a:spcBef>
+              <a:spcAft>
+                <a:spcPts val="0"/>
+              </a:spcAft>
+            </a:pPr>
+            <a:r>
+              <a:rPr sz="1250" b="0">
+                <a:solidFill>
+                  <a:srgbClr val="5B6B7B"/>
+                </a:solidFill>
+                <a:latin typeface="微軟正黑體"/>
+              </a:rPr>
+              <a:t>部門推廣</a:t>
+            </a:r>
+          </a:p>
+        </p:txBody>
+      </p:sp>
+      <p:sp>
+        <p:nvSpPr>
+          <p:cNvPr id="28" name="TextBox 27"/>
+          <p:cNvSpPr txBox="1"/>
+          <p:nvPr/>
+        </p:nvSpPr>
+        <p:spPr>
+          <a:xfrm>
+            <a:off x="10332720" y="4453128"/>
+            <a:ext cx="1051560" cy="320040"/>
+          </a:xfrm>
+          <a:prstGeom prst="rect">
+            <a:avLst/>
+          </a:prstGeom>
+          <a:noFill/>
+        </p:spPr>
+        <p:txBody>
+          <a:bodyPr wrap="square" lIns="0" rIns="0" tIns="0" bIns="0" anchor="t">
+            <a:spAutoFit/>
+          </a:bodyPr>
+          <a:lstStyle/>
+          <a:p>
+            <a:pPr algn="r">
+              <a:spcBef>
+                <a:spcPts val="0"/>
+              </a:spcBef>
+              <a:spcAft>
+                <a:spcPts val="0"/>
+              </a:spcAft>
+            </a:pPr>
+            <a:r>
+              <a:rPr sz="1250" b="0">
+                <a:solidFill>
+                  <a:srgbClr val="5B6B7B"/>
+                </a:solidFill>
+                <a:latin typeface="微軟正黑體"/>
+              </a:rPr>
+              <a:t>待評估</a:t>
+            </a:r>
+          </a:p>
+        </p:txBody>
+      </p:sp>
+      <p:sp>
+        <p:nvSpPr>
+          <p:cNvPr id="29" name="TextBox 28"/>
+          <p:cNvSpPr txBox="1"/>
+          <p:nvPr/>
+        </p:nvSpPr>
+        <p:spPr>
+          <a:xfrm>
+            <a:off x="8211312" y="5084064"/>
+            <a:ext cx="3145536" cy="365760"/>
+          </a:xfrm>
+          <a:prstGeom prst="rect">
+            <a:avLst/>
+          </a:prstGeom>
+          <a:noFill/>
+        </p:spPr>
+        <p:txBody>
+          <a:bodyPr wrap="square" lIns="0" rIns="0" tIns="0" bIns="0" anchor="t">
+            <a:spAutoFit/>
+          </a:bodyPr>
+          <a:lstStyle/>
+          <a:p>
+            <a:pPr algn="l">
+              <a:lnSpc>
+                <a:spcPct val="120000"/>
+              </a:lnSpc>
+              <a:spcBef>
+                <a:spcPts val="0"/>
+              </a:spcBef>
+              <a:spcAft>
+                <a:spcPts val="0"/>
+              </a:spcAft>
+            </a:pPr>
+            <a:r>
+              <a:rPr sz="1000" b="0">
+                <a:solidFill>
+                  <a:srgbClr val="5B6B7B"/>
+                </a:solidFill>
+                <a:latin typeface="微軟正黑體"/>
+              </a:rPr>
+              <a:t>安裝數不等於活躍台數。每週仍在產生審查記錄的台數，需收回稽核日誌後才算得出。</a:t>
+            </a:r>
+          </a:p>
+        </p:txBody>
+      </p:sp>
+      <p:sp>
+        <p:nvSpPr>
+          <p:cNvPr id="30" name="Rectangle 29"/>
+          <p:cNvSpPr/>
+          <p:nvPr/>
+        </p:nvSpPr>
+        <p:spPr>
+          <a:xfrm>
+            <a:off x="566928" y="5559552"/>
+            <a:ext cx="11064240" cy="621792"/>
+          </a:xfrm>
+          <a:prstGeom prst="rect">
+            <a:avLst/>
+          </a:prstGeom>
+          <a:solidFill>
+            <a:srgbClr val="102A43"/>
+          </a:solidFill>
+          <a:ln>
+            <a:noFill/>
+          </a:ln>
+          <a:effectLst/>
+        </p:spPr>
+        <p:style>
+          <a:lnRef idx="1">
+            <a:schemeClr val="accent1"/>
+          </a:lnRef>
+          <a:fillRef idx="3">
+            <a:schemeClr val="accent1"/>
+          </a:fillRef>
+          <a:effectRef idx="2">
+            <a:schemeClr val="accent1"/>
+          </a:effectRef>
+          <a:fontRef idx="minor">
+            <a:schemeClr val="lt1"/>
+          </a:fontRef>
+        </p:style>
+        <p:txBody>
+          <a:bodyPr rtlCol="0" anchor="ctr"/>
+          <a:lstStyle/>
+          <a:p>
+            <a:pPr algn="ctr"/>
+          </a:p>
+        </p:txBody>
+      </p:sp>
+      <p:sp>
+        <p:nvSpPr>
+          <p:cNvPr id="31" name="TextBox 30"/>
+          <p:cNvSpPr txBox="1"/>
+          <p:nvPr/>
+        </p:nvSpPr>
+        <p:spPr>
+          <a:xfrm>
+            <a:off x="868680" y="5669280"/>
+            <a:ext cx="10515600" cy="420624"/>
+          </a:xfrm>
+          <a:prstGeom prst="rect">
+            <a:avLst/>
+          </a:prstGeom>
+          <a:noFill/>
+        </p:spPr>
+        <p:txBody>
+          <a:bodyPr wrap="square" lIns="0" rIns="0" tIns="0" bIns="0" anchor="t">
+            <a:spAutoFit/>
+          </a:bodyPr>
+          <a:lstStyle/>
+          <a:p>
+            <a:pPr algn="l">
+              <a:spcBef>
+                <a:spcPts val="0"/>
+              </a:spcBef>
+              <a:spcAft>
+                <a:spcPts val="0"/>
+              </a:spcAft>
+            </a:pPr>
+            <a:r>
+              <a:rPr sz="1300" b="1">
+                <a:solidFill>
+                  <a:srgbClr val="FFFFFF"/>
+                </a:solidFill>
+                <a:latin typeface="微軟正黑體"/>
+              </a:rPr>
+              <a:t>下一個里程碑：試行專案全員部署 —— 目標是讓部署台數從「自己找到的人」變成「整個專案的標準配備」。</a:t>
+            </a:r>
+          </a:p>
+        </p:txBody>
+      </p:sp>
+    </p:spTree>
+  </p:cSld>
+  <p:clrMapOvr>
+    <a:masterClrMapping/>
+  </p:clrMapOvr>
+</p:sld>
+</file>
+
+<file path=ppt/slides/slide14.xml><?xml version="1.0" encoding="utf-8"?>
+<p:sld xmlns:a="http://schemas.openxmlformats.org/drawingml/2006/main" xmlns:p="http://schemas.openxmlformats.org/presentationml/2006/main" xmlns:r="http://schemas.openxmlformats.org/officeDocument/2006/relationships">
+  <p:cSld>
+    <p:spTree>
+      <p:nvGrpSpPr>
+        <p:cNvPr id="1" name=""/>
+        <p:cNvGrpSpPr/>
+        <p:nvPr/>
+      </p:nvGrpSpPr>
+      <p:grpSpPr/>
+      <p:sp>
+        <p:nvSpPr>
+          <p:cNvPr id="2" name="Rectangle 1"/>
+          <p:cNvSpPr/>
+          <p:nvPr/>
+        </p:nvSpPr>
+        <p:spPr>
+          <a:xfrm>
+            <a:off x="0" y="0"/>
+            <a:ext cx="118872" cy="6858000"/>
+          </a:xfrm>
+          <a:prstGeom prst="rect">
+            <a:avLst/>
+          </a:prstGeom>
+          <a:solidFill>
+            <a:srgbClr val="102A43"/>
+          </a:solidFill>
+          <a:ln>
+            <a:noFill/>
+          </a:ln>
+          <a:effectLst/>
+        </p:spPr>
+        <p:style>
+          <a:lnRef idx="1">
+            <a:schemeClr val="accent1"/>
+          </a:lnRef>
+          <a:fillRef idx="3">
+            <a:schemeClr val="accent1"/>
+          </a:fillRef>
+          <a:effectRef idx="2">
+            <a:schemeClr val="accent1"/>
+          </a:effectRef>
+          <a:fontRef idx="minor">
+            <a:schemeClr val="lt1"/>
+          </a:fontRef>
+        </p:style>
+        <p:txBody>
+          <a:bodyPr rtlCol="0" anchor="ctr"/>
+          <a:lstStyle/>
+          <a:p>
+            <a:pPr algn="ctr"/>
+          </a:p>
+        </p:txBody>
+      </p:sp>
+      <p:sp>
+        <p:nvSpPr>
+          <p:cNvPr id="3" name="TextBox 2"/>
+          <p:cNvSpPr txBox="1"/>
+          <p:nvPr/>
+        </p:nvSpPr>
+        <p:spPr>
+          <a:xfrm>
+            <a:off x="566928" y="384048"/>
+            <a:ext cx="10881360" cy="274320"/>
+          </a:xfrm>
+          <a:prstGeom prst="rect">
+            <a:avLst/>
+          </a:prstGeom>
+          <a:noFill/>
+        </p:spPr>
+        <p:txBody>
+          <a:bodyPr wrap="square" lIns="0" rIns="0" tIns="0" bIns="0" anchor="t">
+            <a:spAutoFit/>
+          </a:bodyPr>
+          <a:lstStyle/>
+          <a:p>
+            <a:pPr algn="l">
+              <a:spcBef>
+                <a:spcPts val="0"/>
+              </a:spcBef>
+              <a:spcAft>
+                <a:spcPts val="0"/>
+              </a:spcAft>
+            </a:pPr>
+            <a:r>
+              <a:rPr sz="1200" b="1">
+                <a:solidFill>
+                  <a:srgbClr val="119DA4"/>
+                </a:solidFill>
+                <a:latin typeface="微軟正黑體"/>
+              </a:rPr>
+              <a:t>NEXT</a:t>
+            </a:r>
+          </a:p>
+        </p:txBody>
+      </p:sp>
+      <p:sp>
+        <p:nvSpPr>
+          <p:cNvPr id="4" name="TextBox 3"/>
+          <p:cNvSpPr txBox="1"/>
+          <p:nvPr/>
+        </p:nvSpPr>
+        <p:spPr>
+          <a:xfrm>
+            <a:off x="566928" y="658368"/>
+            <a:ext cx="10881360" cy="502920"/>
+          </a:xfrm>
+          <a:prstGeom prst="rect">
+            <a:avLst/>
+          </a:prstGeom>
+          <a:noFill/>
+        </p:spPr>
+        <p:txBody>
+          <a:bodyPr wrap="square" lIns="0" rIns="0" tIns="0" bIns="0" anchor="t">
+            <a:spAutoFit/>
+          </a:bodyPr>
+          <a:lstStyle/>
+          <a:p>
+            <a:pPr algn="l">
+              <a:spcBef>
+                <a:spcPts val="0"/>
+              </a:spcBef>
+              <a:spcAft>
+                <a:spcPts val="0"/>
+              </a:spcAft>
+            </a:pPr>
+            <a:r>
+              <a:rPr sz="2800" b="1">
+                <a:solidFill>
+                  <a:srgbClr val="102A43"/>
+                </a:solidFill>
+                <a:latin typeface="微軟正黑體"/>
+              </a:rPr>
+              <a:t>下一步與所需支援</a:t>
+            </a:r>
+          </a:p>
+        </p:txBody>
+      </p:sp>
+      <p:sp>
+        <p:nvSpPr>
+          <p:cNvPr id="5" name="Rectangle 4"/>
+          <p:cNvSpPr/>
+          <p:nvPr/>
+        </p:nvSpPr>
+        <p:spPr>
+          <a:xfrm>
+            <a:off x="566928" y="1298448"/>
+            <a:ext cx="11064240" cy="11430"/>
+          </a:xfrm>
+          <a:prstGeom prst="rect">
+            <a:avLst/>
+          </a:prstGeom>
+          <a:solidFill>
+            <a:srgbClr val="D8DFE6"/>
+          </a:solidFill>
+          <a:ln>
+            <a:noFill/>
+          </a:ln>
+          <a:effectLst/>
+        </p:spPr>
+        <p:style>
+          <a:lnRef idx="1">
+            <a:schemeClr val="accent1"/>
+          </a:lnRef>
+          <a:fillRef idx="3">
+            <a:schemeClr val="accent1"/>
+          </a:fillRef>
+          <a:effectRef idx="2">
+            <a:schemeClr val="accent1"/>
+          </a:effectRef>
+          <a:fontRef idx="minor">
+            <a:schemeClr val="lt1"/>
+          </a:fontRef>
+        </p:style>
+        <p:txBody>
+          <a:bodyPr rtlCol="0" anchor="ctr"/>
+          <a:lstStyle/>
+          <a:p>
+            <a:pPr algn="ctr"/>
+          </a:p>
+        </p:txBody>
+      </p:sp>
+      <p:sp>
+        <p:nvSpPr>
+          <p:cNvPr id="6" name="TextBox 5"/>
+          <p:cNvSpPr txBox="1"/>
+          <p:nvPr/>
+        </p:nvSpPr>
+        <p:spPr>
+          <a:xfrm>
+            <a:off x="566928" y="6355080"/>
+            <a:ext cx="5486400" cy="256032"/>
+          </a:xfrm>
+          <a:prstGeom prst="rect">
+            <a:avLst/>
+          </a:prstGeom>
+          <a:noFill/>
+        </p:spPr>
+        <p:txBody>
+          <a:bodyPr wrap="square" lIns="0" rIns="0" tIns="0" bIns="0" anchor="t">
+            <a:spAutoFit/>
+          </a:bodyPr>
+          <a:lstStyle/>
+          <a:p>
+            <a:pPr algn="l">
+              <a:spcBef>
+                <a:spcPts val="0"/>
+              </a:spcBef>
+              <a:spcAft>
+                <a:spcPts val="0"/>
+              </a:spcAft>
+            </a:pPr>
+            <a:r>
+              <a:rPr sz="1000" b="0">
+                <a:solidFill>
+                  <a:srgbClr val="5B6B7B"/>
+                </a:solidFill>
+                <a:latin typeface="微軟正黑體"/>
+              </a:rPr>
+              <a:t>sensAI ｜ 韌體 AI Code Review ｜ v0.5.1</a:t>
+            </a:r>
+          </a:p>
+        </p:txBody>
+      </p:sp>
+      <p:sp>
+        <p:nvSpPr>
+          <p:cNvPr id="7" name="TextBox 6"/>
+          <p:cNvSpPr txBox="1"/>
+          <p:nvPr/>
+        </p:nvSpPr>
+        <p:spPr>
+          <a:xfrm>
+            <a:off x="10607040" y="6355080"/>
+            <a:ext cx="1005840" cy="256032"/>
+          </a:xfrm>
+          <a:prstGeom prst="rect">
+            <a:avLst/>
+          </a:prstGeom>
+          <a:noFill/>
+        </p:spPr>
+        <p:txBody>
+          <a:bodyPr wrap="square" lIns="0" rIns="0" tIns="0" bIns="0" anchor="t">
+            <a:spAutoFit/>
+          </a:bodyPr>
+          <a:lstStyle/>
+          <a:p>
+            <a:pPr algn="r">
+              <a:spcBef>
+                <a:spcPts val="0"/>
+              </a:spcBef>
+              <a:spcAft>
+                <a:spcPts val="0"/>
+              </a:spcAft>
+            </a:pPr>
+            <a:r>
+              <a:rPr sz="1000" b="0">
+                <a:solidFill>
+                  <a:srgbClr val="5B6B7B"/>
+                </a:solidFill>
+                <a:latin typeface="微軟正黑體"/>
+              </a:rPr>
+              <a:t>14</a:t>
             </a:r>
           </a:p>
         </p:txBody>
